--- a/protected-downloads/praesentation/M06.pptx
+++ b/protected-downloads/praesentation/M06.pptx
@@ -8,12 +8,12 @@
     <p:sldId id="256" r:id="rId7"/>
     <p:sldId id="257" r:id="rId8"/>
     <p:sldId id="258" r:id="rId9"/>
-    <p:sldId id="259" r:id="rId10"/>
-    <p:sldId id="260" r:id="rId11"/>
-    <p:sldId id="261" r:id="rId12"/>
-    <p:sldId id="262" r:id="rId13"/>
-    <p:sldId id="263" r:id="rId14"/>
-    <p:sldId id="264" r:id="rId15"/>
+    <p:sldId id="259" r:id="rId11"/>
+    <p:sldId id="260" r:id="rId12"/>
+    <p:sldId id="261" r:id="rId13"/>
+    <p:sldId id="262" r:id="rId14"/>
+    <p:sldId id="263" r:id="rId15"/>
+    <p:sldId id="264" r:id="rId16"/>
   </p:sldIdLst>
   <p:sldSz cx="12188952" cy="6858000" type="screen4x3"/>
   <p:notesSz cx="6858000" cy="9144000"/>
@@ -113,6 +113,801 @@
     </a:lvl9pPr>
   </p:defaultTextStyle>
 </p:presentation>
+</file>
+
+<file path=ppt/notesMasters/notesMaster1.xml><?xml version="1.0" encoding="utf-8"?>
+<p:notesMaster xmlns:a="http://schemas.openxmlformats.org/drawingml/2006/main" xmlns:p="http://schemas.openxmlformats.org/presentationml/2006/main" xmlns:r="http://schemas.openxmlformats.org/officeDocument/2006/relationships">
+  <p:cSld>
+    <p:bg>
+      <p:bgRef idx="1001">
+        <a:schemeClr val="bg1"/>
+      </p:bgRef>
+    </p:bg>
+    <p:spTree>
+      <p:nvGrpSpPr>
+        <p:cNvPr id="1" name=""/>
+        <p:cNvGrpSpPr/>
+        <p:nvPr/>
+      </p:nvGrpSpPr>
+      <p:grpSpPr>
+        <a:xfrm>
+          <a:off x="0" y="0"/>
+          <a:ext cx="0" cy="0"/>
+          <a:chOff x="0" y="0"/>
+          <a:chExt cx="0" cy="0"/>
+        </a:xfrm>
+      </p:grpSpPr>
+      <p:sp>
+        <p:nvSpPr>
+          <p:cNvPr id="2" name="Header Placeholder 1"/>
+          <p:cNvSpPr>
+            <a:spLocks noGrp="1"/>
+          </p:cNvSpPr>
+          <p:nvPr>
+            <p:ph type="hdr" sz="quarter"/>
+          </p:nvPr>
+        </p:nvSpPr>
+        <p:spPr>
+          <a:xfrm>
+            <a:off x="0" y="0"/>
+            <a:ext cx="2971800" cy="457200"/>
+          </a:xfrm>
+          <a:prstGeom prst="rect">
+            <a:avLst/>
+          </a:prstGeom>
+        </p:spPr>
+        <p:txBody>
+          <a:bodyPr vert="horz" lIns="91440" tIns="45720" rIns="91440" bIns="45720" rtlCol="0"/>
+          <a:lstStyle>
+            <a:lvl1pPr algn="l">
+              <a:defRPr sz="1200"/>
+            </a:lvl1pPr>
+          </a:lstStyle>
+          <a:p>
+            <a:endParaRPr lang="en-US"/>
+          </a:p>
+        </p:txBody>
+      </p:sp>
+      <p:sp>
+        <p:nvSpPr>
+          <p:cNvPr id="3" name="Date Placeholder 2"/>
+          <p:cNvSpPr>
+            <a:spLocks noGrp="1"/>
+          </p:cNvSpPr>
+          <p:nvPr>
+            <p:ph type="dt" idx="1"/>
+          </p:nvPr>
+        </p:nvSpPr>
+        <p:spPr>
+          <a:xfrm>
+            <a:off x="3884613" y="0"/>
+            <a:ext cx="2971800" cy="457200"/>
+          </a:xfrm>
+          <a:prstGeom prst="rect">
+            <a:avLst/>
+          </a:prstGeom>
+        </p:spPr>
+        <p:txBody>
+          <a:bodyPr vert="horz" lIns="91440" tIns="45720" rIns="91440" bIns="45720" rtlCol="0"/>
+          <a:lstStyle>
+            <a:lvl1pPr algn="r">
+              <a:defRPr sz="1200"/>
+            </a:lvl1pPr>
+          </a:lstStyle>
+          <a:p>
+            <a:fld id="{0F89C1C7-3DCD-1040-A9CF-14679D8B5DDD}" type="datetimeFigureOut">
+              <a:rPr lang="en-US" smtClean="0"/>
+              <a:t>10/17/16</a:t>
+            </a:fld>
+            <a:endParaRPr lang="en-US"/>
+          </a:p>
+        </p:txBody>
+      </p:sp>
+      <p:sp>
+        <p:nvSpPr>
+          <p:cNvPr id="4" name="Slide Image Placeholder 3"/>
+          <p:cNvSpPr>
+            <a:spLocks noGrp="1" noRot="1" noChangeAspect="1"/>
+          </p:cNvSpPr>
+          <p:nvPr>
+            <p:ph type="sldImg" idx="2"/>
+          </p:nvPr>
+        </p:nvSpPr>
+        <p:spPr>
+          <a:xfrm>
+            <a:off x="1143000" y="685800"/>
+            <a:ext cx="4572000" cy="3429000"/>
+          </a:xfrm>
+          <a:prstGeom prst="rect">
+            <a:avLst/>
+          </a:prstGeom>
+          <a:noFill/>
+          <a:ln w="12700">
+            <a:solidFill>
+              <a:prstClr val="black"/>
+            </a:solidFill>
+          </a:ln>
+        </p:spPr>
+        <p:txBody>
+          <a:bodyPr vert="horz" lIns="91440" tIns="45720" rIns="91440" bIns="45720" rtlCol="0" anchor="ctr"/>
+          <a:lstStyle/>
+          <a:p>
+            <a:endParaRPr lang="en-US"/>
+          </a:p>
+        </p:txBody>
+      </p:sp>
+      <p:sp>
+        <p:nvSpPr>
+          <p:cNvPr id="5" name="Notes Placeholder 4"/>
+          <p:cNvSpPr>
+            <a:spLocks noGrp="1"/>
+          </p:cNvSpPr>
+          <p:nvPr>
+            <p:ph type="body" sz="quarter" idx="3"/>
+          </p:nvPr>
+        </p:nvSpPr>
+        <p:spPr>
+          <a:xfrm>
+            <a:off x="685800" y="4343400"/>
+            <a:ext cx="5486400" cy="4114800"/>
+          </a:xfrm>
+          <a:prstGeom prst="rect">
+            <a:avLst/>
+          </a:prstGeom>
+        </p:spPr>
+        <p:txBody>
+          <a:bodyPr vert="horz" lIns="91440" tIns="45720" rIns="91440" bIns="45720" rtlCol="0"/>
+          <a:lstStyle/>
+          <a:p>
+            <a:pPr lvl="0"/>
+            <a:r>
+              <a:rPr lang="en-US" smtClean="0"/>
+              <a:t>Click to edit Master text styles</a:t>
+            </a:r>
+          </a:p>
+          <a:p>
+            <a:pPr lvl="1"/>
+            <a:r>
+              <a:rPr lang="en-US" smtClean="0"/>
+              <a:t>Second level</a:t>
+            </a:r>
+          </a:p>
+          <a:p>
+            <a:pPr lvl="2"/>
+            <a:r>
+              <a:rPr lang="en-US" smtClean="0"/>
+              <a:t>Third level</a:t>
+            </a:r>
+          </a:p>
+          <a:p>
+            <a:pPr lvl="3"/>
+            <a:r>
+              <a:rPr lang="en-US" smtClean="0"/>
+              <a:t>Fourth level</a:t>
+            </a:r>
+          </a:p>
+          <a:p>
+            <a:pPr lvl="4"/>
+            <a:r>
+              <a:rPr lang="en-US" smtClean="0"/>
+              <a:t>Fifth level</a:t>
+            </a:r>
+            <a:endParaRPr lang="en-US"/>
+          </a:p>
+        </p:txBody>
+      </p:sp>
+      <p:sp>
+        <p:nvSpPr>
+          <p:cNvPr id="6" name="Footer Placeholder 5"/>
+          <p:cNvSpPr>
+            <a:spLocks noGrp="1"/>
+          </p:cNvSpPr>
+          <p:nvPr>
+            <p:ph type="ftr" sz="quarter" idx="4"/>
+          </p:nvPr>
+        </p:nvSpPr>
+        <p:spPr>
+          <a:xfrm>
+            <a:off x="0" y="8685213"/>
+            <a:ext cx="2971800" cy="457200"/>
+          </a:xfrm>
+          <a:prstGeom prst="rect">
+            <a:avLst/>
+          </a:prstGeom>
+        </p:spPr>
+        <p:txBody>
+          <a:bodyPr vert="horz" lIns="91440" tIns="45720" rIns="91440" bIns="45720" rtlCol="0" anchor="b"/>
+          <a:lstStyle>
+            <a:lvl1pPr algn="l">
+              <a:defRPr sz="1200"/>
+            </a:lvl1pPr>
+          </a:lstStyle>
+          <a:p>
+            <a:endParaRPr lang="en-US"/>
+          </a:p>
+        </p:txBody>
+      </p:sp>
+      <p:sp>
+        <p:nvSpPr>
+          <p:cNvPr id="7" name="Slide Number Placeholder 6"/>
+          <p:cNvSpPr>
+            <a:spLocks noGrp="1"/>
+          </p:cNvSpPr>
+          <p:nvPr>
+            <p:ph type="sldNum" sz="quarter" idx="5"/>
+          </p:nvPr>
+        </p:nvSpPr>
+        <p:spPr>
+          <a:xfrm>
+            <a:off x="3884613" y="8685213"/>
+            <a:ext cx="2971800" cy="457200"/>
+          </a:xfrm>
+          <a:prstGeom prst="rect">
+            <a:avLst/>
+          </a:prstGeom>
+        </p:spPr>
+        <p:txBody>
+          <a:bodyPr vert="horz" lIns="91440" tIns="45720" rIns="91440" bIns="45720" rtlCol="0" anchor="b"/>
+          <a:lstStyle>
+            <a:lvl1pPr algn="r">
+              <a:defRPr sz="1200"/>
+            </a:lvl1pPr>
+          </a:lstStyle>
+          <a:p>
+            <a:fld id="{BB5E49A5-4136-284D-997B-48E1D791AD67}" type="slidenum">
+              <a:rPr lang="en-US" smtClean="0"/>
+              <a:t>‹#›</a:t>
+            </a:fld>
+            <a:endParaRPr lang="en-US"/>
+          </a:p>
+        </p:txBody>
+      </p:sp>
+    </p:spTree>
+    <p:extLst>
+      <p:ext uri="{BB962C8B-B14F-4D97-AF65-F5344CB8AC3E}">
+        <p14:creationId xmlns:p14="http://schemas.microsoft.com/office/powerpoint/2010/main" val="2623252185"/>
+      </p:ext>
+    </p:extLst>
+  </p:cSld>
+  <p:clrMap bg1="lt1" tx1="dk1" bg2="lt2" tx2="dk2" accent1="accent1" accent2="accent2" accent3="accent3" accent4="accent4" accent5="accent5" accent6="accent6" hlink="hlink" folHlink="folHlink"/>
+  <p:notesStyle>
+    <a:lvl1pPr marL="0" algn="l" defTabSz="457200" rtl="0" eaLnBrk="1" latinLnBrk="0" hangingPunct="1">
+      <a:defRPr sz="1200" kern="1200">
+        <a:solidFill>
+          <a:schemeClr val="tx1"/>
+        </a:solidFill>
+        <a:latin typeface="+mn-lt"/>
+        <a:ea typeface="+mn-ea"/>
+        <a:cs typeface="+mn-cs"/>
+      </a:defRPr>
+    </a:lvl1pPr>
+    <a:lvl2pPr marL="457200" algn="l" defTabSz="457200" rtl="0" eaLnBrk="1" latinLnBrk="0" hangingPunct="1">
+      <a:defRPr sz="1200" kern="1200">
+        <a:solidFill>
+          <a:schemeClr val="tx1"/>
+        </a:solidFill>
+        <a:latin typeface="+mn-lt"/>
+        <a:ea typeface="+mn-ea"/>
+        <a:cs typeface="+mn-cs"/>
+      </a:defRPr>
+    </a:lvl2pPr>
+    <a:lvl3pPr marL="914400" algn="l" defTabSz="457200" rtl="0" eaLnBrk="1" latinLnBrk="0" hangingPunct="1">
+      <a:defRPr sz="1200" kern="1200">
+        <a:solidFill>
+          <a:schemeClr val="tx1"/>
+        </a:solidFill>
+        <a:latin typeface="+mn-lt"/>
+        <a:ea typeface="+mn-ea"/>
+        <a:cs typeface="+mn-cs"/>
+      </a:defRPr>
+    </a:lvl3pPr>
+    <a:lvl4pPr marL="1371600" algn="l" defTabSz="457200" rtl="0" eaLnBrk="1" latinLnBrk="0" hangingPunct="1">
+      <a:defRPr sz="1200" kern="1200">
+        <a:solidFill>
+          <a:schemeClr val="tx1"/>
+        </a:solidFill>
+        <a:latin typeface="+mn-lt"/>
+        <a:ea typeface="+mn-ea"/>
+        <a:cs typeface="+mn-cs"/>
+      </a:defRPr>
+    </a:lvl4pPr>
+    <a:lvl5pPr marL="1828800" algn="l" defTabSz="457200" rtl="0" eaLnBrk="1" latinLnBrk="0" hangingPunct="1">
+      <a:defRPr sz="1200" kern="1200">
+        <a:solidFill>
+          <a:schemeClr val="tx1"/>
+        </a:solidFill>
+        <a:latin typeface="+mn-lt"/>
+        <a:ea typeface="+mn-ea"/>
+        <a:cs typeface="+mn-cs"/>
+      </a:defRPr>
+    </a:lvl5pPr>
+    <a:lvl6pPr marL="2286000" algn="l" defTabSz="457200" rtl="0" eaLnBrk="1" latinLnBrk="0" hangingPunct="1">
+      <a:defRPr sz="1200" kern="1200">
+        <a:solidFill>
+          <a:schemeClr val="tx1"/>
+        </a:solidFill>
+        <a:latin typeface="+mn-lt"/>
+        <a:ea typeface="+mn-ea"/>
+        <a:cs typeface="+mn-cs"/>
+      </a:defRPr>
+    </a:lvl6pPr>
+    <a:lvl7pPr marL="2743200" algn="l" defTabSz="457200" rtl="0" eaLnBrk="1" latinLnBrk="0" hangingPunct="1">
+      <a:defRPr sz="1200" kern="1200">
+        <a:solidFill>
+          <a:schemeClr val="tx1"/>
+        </a:solidFill>
+        <a:latin typeface="+mn-lt"/>
+        <a:ea typeface="+mn-ea"/>
+        <a:cs typeface="+mn-cs"/>
+      </a:defRPr>
+    </a:lvl7pPr>
+    <a:lvl8pPr marL="3200400" algn="l" defTabSz="457200" rtl="0" eaLnBrk="1" latinLnBrk="0" hangingPunct="1">
+      <a:defRPr sz="1200" kern="1200">
+        <a:solidFill>
+          <a:schemeClr val="tx1"/>
+        </a:solidFill>
+        <a:latin typeface="+mn-lt"/>
+        <a:ea typeface="+mn-ea"/>
+        <a:cs typeface="+mn-cs"/>
+      </a:defRPr>
+    </a:lvl8pPr>
+    <a:lvl9pPr marL="3657600" algn="l" defTabSz="457200" rtl="0" eaLnBrk="1" latinLnBrk="0" hangingPunct="1">
+      <a:defRPr sz="1200" kern="1200">
+        <a:solidFill>
+          <a:schemeClr val="tx1"/>
+        </a:solidFill>
+        <a:latin typeface="+mn-lt"/>
+        <a:ea typeface="+mn-ea"/>
+        <a:cs typeface="+mn-cs"/>
+      </a:defRPr>
+    </a:lvl9pPr>
+  </p:notesStyle>
+</p:notesMaster>
+</file>
+
+<file path=ppt/notesSlides/notesSlide1.xml><?xml version="1.0" encoding="utf-8"?>
+<p:notes xmlns:a="http://schemas.openxmlformats.org/drawingml/2006/main" xmlns:p="http://schemas.openxmlformats.org/presentationml/2006/main" xmlns:r="http://schemas.openxmlformats.org/officeDocument/2006/relationships">
+  <p:cSld>
+    <p:spTree>
+      <p:nvGrpSpPr>
+        <p:cNvPr id="1" name=""/>
+        <p:cNvGrpSpPr/>
+        <p:nvPr/>
+      </p:nvGrpSpPr>
+      <p:grpSpPr>
+        <a:xfrm>
+          <a:off x="0" y="0"/>
+          <a:ext cx="0" cy="0"/>
+          <a:chOff x="0" y="0"/>
+          <a:chExt cx="0" cy="0"/>
+        </a:xfrm>
+      </p:grpSpPr>
+      <p:sp>
+        <p:nvSpPr>
+          <p:cNvPr id="2" name="Slide Image Placeholder 1"/>
+          <p:cNvSpPr>
+            <a:spLocks noGrp="1"/>
+          </p:cNvSpPr>
+          <p:nvPr>
+            <p:ph type="sldImg" idx="2"/>
+          </p:nvPr>
+        </p:nvSpPr>
+        <p:spPr/>
+      </p:sp>
+      <p:sp>
+        <p:nvSpPr>
+          <p:cNvPr id="3" name="Notes Placeholder 2"/>
+          <p:cNvSpPr>
+            <a:spLocks noGrp="1"/>
+          </p:cNvSpPr>
+          <p:nvPr>
+            <p:ph type="body" idx="3" sz="quarter"/>
+          </p:nvPr>
+        </p:nvSpPr>
+        <p:spPr/>
+        <p:txBody>
+          <a:bodyPr/>
+          <a:lstStyle/>
+          <a:p>
+            <a:r>
+              <a:t>Siehe Trainerhandbuch (Sektion 3) für Moderationshinweise, Timing und erwartete Teilnehmerreaktionen.</a:t>
+            </a:r>
+          </a:p>
+        </p:txBody>
+      </p:sp>
+      <p:sp>
+        <p:nvSpPr>
+          <p:cNvPr id="4" name="Slide Number Placeholder 3"/>
+          <p:cNvSpPr>
+            <a:spLocks noGrp="1"/>
+          </p:cNvSpPr>
+          <p:nvPr>
+            <p:ph type="sldNum" idx="5" sz="quarter"/>
+          </p:nvPr>
+        </p:nvSpPr>
+        <p:spPr/>
+      </p:sp>
+    </p:spTree>
+  </p:cSld>
+  <p:clrMapOvr>
+    <a:masterClrMapping/>
+  </p:clrMapOvr>
+</p:notes>
+</file>
+
+<file path=ppt/notesSlides/notesSlide2.xml><?xml version="1.0" encoding="utf-8"?>
+<p:notes xmlns:a="http://schemas.openxmlformats.org/drawingml/2006/main" xmlns:p="http://schemas.openxmlformats.org/presentationml/2006/main" xmlns:r="http://schemas.openxmlformats.org/officeDocument/2006/relationships">
+  <p:cSld>
+    <p:spTree>
+      <p:nvGrpSpPr>
+        <p:cNvPr id="1" name=""/>
+        <p:cNvGrpSpPr/>
+        <p:nvPr/>
+      </p:nvGrpSpPr>
+      <p:grpSpPr>
+        <a:xfrm>
+          <a:off x="0" y="0"/>
+          <a:ext cx="0" cy="0"/>
+          <a:chOff x="0" y="0"/>
+          <a:chExt cx="0" cy="0"/>
+        </a:xfrm>
+      </p:grpSpPr>
+      <p:sp>
+        <p:nvSpPr>
+          <p:cNvPr id="2" name="Slide Image Placeholder 1"/>
+          <p:cNvSpPr>
+            <a:spLocks noGrp="1"/>
+          </p:cNvSpPr>
+          <p:nvPr>
+            <p:ph type="sldImg" idx="2"/>
+          </p:nvPr>
+        </p:nvSpPr>
+        <p:spPr/>
+      </p:sp>
+      <p:sp>
+        <p:nvSpPr>
+          <p:cNvPr id="3" name="Notes Placeholder 2"/>
+          <p:cNvSpPr>
+            <a:spLocks noGrp="1"/>
+          </p:cNvSpPr>
+          <p:nvPr>
+            <p:ph type="body" idx="3" sz="quarter"/>
+          </p:nvPr>
+        </p:nvSpPr>
+        <p:spPr/>
+        <p:txBody>
+          <a:bodyPr/>
+          <a:lstStyle/>
+          <a:p>
+            <a:r>
+              <a:t>Siehe Trainerhandbuch (Sektion 3) für Moderationshinweise, Timing und erwartete Teilnehmerreaktionen.</a:t>
+            </a:r>
+          </a:p>
+        </p:txBody>
+      </p:sp>
+      <p:sp>
+        <p:nvSpPr>
+          <p:cNvPr id="4" name="Slide Number Placeholder 3"/>
+          <p:cNvSpPr>
+            <a:spLocks noGrp="1"/>
+          </p:cNvSpPr>
+          <p:nvPr>
+            <p:ph type="sldNum" idx="5" sz="quarter"/>
+          </p:nvPr>
+        </p:nvSpPr>
+        <p:spPr/>
+      </p:sp>
+    </p:spTree>
+  </p:cSld>
+  <p:clrMapOvr>
+    <a:masterClrMapping/>
+  </p:clrMapOvr>
+</p:notes>
+</file>
+
+<file path=ppt/notesSlides/notesSlide3.xml><?xml version="1.0" encoding="utf-8"?>
+<p:notes xmlns:a="http://schemas.openxmlformats.org/drawingml/2006/main" xmlns:p="http://schemas.openxmlformats.org/presentationml/2006/main" xmlns:r="http://schemas.openxmlformats.org/officeDocument/2006/relationships">
+  <p:cSld>
+    <p:spTree>
+      <p:nvGrpSpPr>
+        <p:cNvPr id="1" name=""/>
+        <p:cNvGrpSpPr/>
+        <p:nvPr/>
+      </p:nvGrpSpPr>
+      <p:grpSpPr>
+        <a:xfrm>
+          <a:off x="0" y="0"/>
+          <a:ext cx="0" cy="0"/>
+          <a:chOff x="0" y="0"/>
+          <a:chExt cx="0" cy="0"/>
+        </a:xfrm>
+      </p:grpSpPr>
+      <p:sp>
+        <p:nvSpPr>
+          <p:cNvPr id="2" name="Slide Image Placeholder 1"/>
+          <p:cNvSpPr>
+            <a:spLocks noGrp="1"/>
+          </p:cNvSpPr>
+          <p:nvPr>
+            <p:ph type="sldImg" idx="2"/>
+          </p:nvPr>
+        </p:nvSpPr>
+        <p:spPr/>
+      </p:sp>
+      <p:sp>
+        <p:nvSpPr>
+          <p:cNvPr id="3" name="Notes Placeholder 2"/>
+          <p:cNvSpPr>
+            <a:spLocks noGrp="1"/>
+          </p:cNvSpPr>
+          <p:nvPr>
+            <p:ph type="body" idx="3" sz="quarter"/>
+          </p:nvPr>
+        </p:nvSpPr>
+        <p:spPr/>
+        <p:txBody>
+          <a:bodyPr/>
+          <a:lstStyle/>
+          <a:p>
+            <a:r>
+              <a:t>Siehe Trainerhandbuch (Sektion 3) für Moderationshinweise, Timing und erwartete Teilnehmerreaktionen.</a:t>
+            </a:r>
+          </a:p>
+        </p:txBody>
+      </p:sp>
+      <p:sp>
+        <p:nvSpPr>
+          <p:cNvPr id="4" name="Slide Number Placeholder 3"/>
+          <p:cNvSpPr>
+            <a:spLocks noGrp="1"/>
+          </p:cNvSpPr>
+          <p:nvPr>
+            <p:ph type="sldNum" idx="5" sz="quarter"/>
+          </p:nvPr>
+        </p:nvSpPr>
+        <p:spPr/>
+      </p:sp>
+    </p:spTree>
+  </p:cSld>
+  <p:clrMapOvr>
+    <a:masterClrMapping/>
+  </p:clrMapOvr>
+</p:notes>
+</file>
+
+<file path=ppt/notesSlides/notesSlide4.xml><?xml version="1.0" encoding="utf-8"?>
+<p:notes xmlns:a="http://schemas.openxmlformats.org/drawingml/2006/main" xmlns:p="http://schemas.openxmlformats.org/presentationml/2006/main" xmlns:r="http://schemas.openxmlformats.org/officeDocument/2006/relationships">
+  <p:cSld>
+    <p:spTree>
+      <p:nvGrpSpPr>
+        <p:cNvPr id="1" name=""/>
+        <p:cNvGrpSpPr/>
+        <p:nvPr/>
+      </p:nvGrpSpPr>
+      <p:grpSpPr>
+        <a:xfrm>
+          <a:off x="0" y="0"/>
+          <a:ext cx="0" cy="0"/>
+          <a:chOff x="0" y="0"/>
+          <a:chExt cx="0" cy="0"/>
+        </a:xfrm>
+      </p:grpSpPr>
+      <p:sp>
+        <p:nvSpPr>
+          <p:cNvPr id="2" name="Slide Image Placeholder 1"/>
+          <p:cNvSpPr>
+            <a:spLocks noGrp="1"/>
+          </p:cNvSpPr>
+          <p:nvPr>
+            <p:ph type="sldImg" idx="2"/>
+          </p:nvPr>
+        </p:nvSpPr>
+        <p:spPr/>
+      </p:sp>
+      <p:sp>
+        <p:nvSpPr>
+          <p:cNvPr id="3" name="Notes Placeholder 2"/>
+          <p:cNvSpPr>
+            <a:spLocks noGrp="1"/>
+          </p:cNvSpPr>
+          <p:nvPr>
+            <p:ph type="body" idx="3" sz="quarter"/>
+          </p:nvPr>
+        </p:nvSpPr>
+        <p:spPr/>
+        <p:txBody>
+          <a:bodyPr/>
+          <a:lstStyle/>
+          <a:p>
+            <a:r>
+              <a:t>Musterlösung (Trainer-Version – nicht für Teilnehmer sichtbar)</a:t>
+            </a:r>
+          </a:p>
+          <a:p>
+            <a:r>
+              <a:t>Zu Aufgabe 1:</a:t>
+            </a:r>
+          </a:p>
+          <a:p>
+            <a:r>
+              <a:t>IfM Bonn: ✓ KMU – 8 Beschäftigte &lt; 500, 1,8 Mio. EUR &lt; 50 Mio. EUR; inhabergeführt (Sabine Bergmann = Eigentümerin und Geschäftsführerin)</a:t>
+            </a:r>
+          </a:p>
+          <a:p>
+            <a:r>
+              <a:t>EU: Kleinunternehmen – &lt; 50 Beschäftigte, &lt; 10 Mio. EUR Umsatz; damit förderberechtigt für KfW-Kleinunternehmerkredite und EU-Strukturfonds</a:t>
+            </a:r>
+          </a:p>
+          <a:p>
+            <a:r>
+              <a:t>Zu Aufgabe 2:</a:t>
+            </a:r>
+          </a:p>
+          <a:p>
+            <a:r>
+              <a:t>Branchenprofil A (Handwerk), speziell Tischlerhandwerk / Holzgewerbe (WZ 16.29)</a:t>
+            </a:r>
+          </a:p>
+          <a:p>
+            <a:r>
+              <a:t>Risikofelder: (1) Inhaberabhängigkeit – Sabine Bergmann ist die einzige Führungskraft, kein Vertretungskonzept erkennbar; (2) Klumpenrisiko – bei 1,8 Mio. EUR Umsatz und 8 Mitarbeitern ist anzunehmen, dass wenige Großkunden dominieren; (3) Working-Capital-/Liquiditätsrisiko – Kontokorrentlinie bereits zu 71 % ausgeschöpft + laufender Investitionskredit; ein weiterer Kredit erhöht den Schuldendienst und engt den Liquiditätspuffer weiter ein; (4) Fachkräfterisiko – 3 von 8 Mitarbeitern sind Azubis, Abgang eines Gesellen = sofortige massive Kapazitätseinbuße; im Holzhandwerk 2025 das drängendste operative Risiko; (Nachfolgehinweis: Zwar 2020 vollzogen, aber Vater könnte noch informal eingebunden sein – dies als Gesprächspunkt vormerken, kein eigenständiges Hauptrisikofeld)</a:t>
+            </a:r>
+          </a:p>
+          <a:p>
+            <a:r>
+              <a:t>Zu Aufgabe 4:</a:t>
+            </a:r>
+          </a:p>
+          <a:p>
+            <a:r>
+              <a:t>Frage 1: Warum ist die KK-Linie so stark ausgeschöpft – strukturell (saisonale Spitze?) oder dauerhaft?</a:t>
+            </a:r>
+          </a:p>
+          <a:p>
+            <a:r>
+              <a:t>Frage 2: Reicht die Linie in ihrer aktuellen Höhe noch, wenn der neue Kredit läuft und die Jahresrate hinzukommt?</a:t>
+            </a:r>
+          </a:p>
+          <a:p>
+            <a:r>
+              <a:t>Frage 3: Müsste vor dem Investitionskredit erst die KK-Linie erhöht oder der KK-Saldo reduziert werden?</a:t>
+            </a:r>
+          </a:p>
+          <a:p>
+            <a:r>
+              <a:t>Reihenfolge: Erst KK-Situation klären (Gespräch über aktuelle Liquiditätslage), dann Tragfähigkeitsrechnung, dann Kreditgespräch. Wer zuerst den Investitionskredit bewilligt, riskiert eine Liquiditätsfalle.</a:t>
+            </a:r>
+          </a:p>
+          <a:p>
+            <a:r>
+              <a:t>Zu Aufgabe 3:</a:t>
+            </a:r>
+          </a:p>
+          <a:p>
+            <a:r>
+              <a:t>Beispiel-Formulierungen:</a:t>
+            </a:r>
+          </a:p>
+          <a:p>
+            <a:r>
+              <a:t>1. "Frau Bergmann, Sie bauen Möbel und Innenausbauten – haben Sie eher Privat- oder Gewerbekunden, und was macht bei Ihnen das bessere Geschäft?"</a:t>
+            </a:r>
+          </a:p>
+          <a:p>
+            <a:r>
+              <a:t>2. "Ihre größten Auftraggeber – gibt es da 2–3 Kunden, auf die ein großer Teil des Umsatzes entfällt?"</a:t>
+            </a:r>
+          </a:p>
+          <a:p>
+            <a:r>
+              <a:t>3. "Was ist gerade Ihr größtes Thema für die nächsten 12 Monate – ist es die Maschine, oder gibt es da noch mehr?"</a:t>
+            </a:r>
+          </a:p>
+          <a:p>
+            <a:r>
+              <a:t>4. "Wie haben Sie bisher größere Investitionen finanziert – eher aus eigener Kraft oder mit Bankunterstützung?"</a:t>
+            </a:r>
+          </a:p>
+          <a:p>
+            <a:r>
+              <a:t>5. "Frau Bergmann, ich frage Sie etwas, das viele selten durchdenken: Was würde passieren, wenn Sie 6 Monate krankheitsbedingt ausfallen würden – wer würde den Betrieb führen?"</a:t>
+            </a:r>
+          </a:p>
+          <a:p>
+            <a:r>
+              <a:t>Erwartete Antwort auf Frage 5: "Das wäre schwierig. Ich bin für alles zuständig – Kundenakquise, Auftragsplanung, die Maschinen kenne ich alle. Mein Mann könnte vielleicht einspringen, aber der hat einen anderen Job." → Beratungsopportunität: Schlüsselpersonenversicherung (R+V), ggf. Geschäftsführer-Krankengeldabsicherung.</a:t>
+            </a:r>
+          </a:p>
+        </p:txBody>
+      </p:sp>
+      <p:sp>
+        <p:nvSpPr>
+          <p:cNvPr id="4" name="Slide Number Placeholder 3"/>
+          <p:cNvSpPr>
+            <a:spLocks noGrp="1"/>
+          </p:cNvSpPr>
+          <p:nvPr>
+            <p:ph type="sldNum" idx="5" sz="quarter"/>
+          </p:nvPr>
+        </p:nvSpPr>
+        <p:spPr/>
+      </p:sp>
+    </p:spTree>
+  </p:cSld>
+  <p:clrMapOvr>
+    <a:masterClrMapping/>
+  </p:clrMapOvr>
+</p:notes>
+</file>
+
+<file path=ppt/notesSlides/notesSlide5.xml><?xml version="1.0" encoding="utf-8"?>
+<p:notes xmlns:a="http://schemas.openxmlformats.org/drawingml/2006/main" xmlns:p="http://schemas.openxmlformats.org/presentationml/2006/main" xmlns:r="http://schemas.openxmlformats.org/officeDocument/2006/relationships">
+  <p:cSld>
+    <p:spTree>
+      <p:nvGrpSpPr>
+        <p:cNvPr id="1" name=""/>
+        <p:cNvGrpSpPr/>
+        <p:nvPr/>
+      </p:nvGrpSpPr>
+      <p:grpSpPr>
+        <a:xfrm>
+          <a:off x="0" y="0"/>
+          <a:ext cx="0" cy="0"/>
+          <a:chOff x="0" y="0"/>
+          <a:chExt cx="0" cy="0"/>
+        </a:xfrm>
+      </p:grpSpPr>
+      <p:sp>
+        <p:nvSpPr>
+          <p:cNvPr id="2" name="Slide Image Placeholder 1"/>
+          <p:cNvSpPr>
+            <a:spLocks noGrp="1"/>
+          </p:cNvSpPr>
+          <p:nvPr>
+            <p:ph type="sldImg" idx="2"/>
+          </p:nvPr>
+        </p:nvSpPr>
+        <p:spPr/>
+      </p:sp>
+      <p:sp>
+        <p:nvSpPr>
+          <p:cNvPr id="3" name="Notes Placeholder 2"/>
+          <p:cNvSpPr>
+            <a:spLocks noGrp="1"/>
+          </p:cNvSpPr>
+          <p:nvPr>
+            <p:ph type="body" idx="3" sz="quarter"/>
+          </p:nvPr>
+        </p:nvSpPr>
+        <p:spPr/>
+        <p:txBody>
+          <a:bodyPr/>
+          <a:lstStyle/>
+          <a:p>
+            <a:r>
+              <a:t>Siehe Trainerhandbuch (Sektion 3) für Moderationshinweise, Timing und erwartete Teilnehmerreaktionen.</a:t>
+            </a:r>
+          </a:p>
+        </p:txBody>
+      </p:sp>
+      <p:sp>
+        <p:nvSpPr>
+          <p:cNvPr id="4" name="Slide Number Placeholder 3"/>
+          <p:cNvSpPr>
+            <a:spLocks noGrp="1"/>
+          </p:cNvSpPr>
+          <p:nvPr>
+            <p:ph type="sldNum" idx="5" sz="quarter"/>
+          </p:nvPr>
+        </p:nvSpPr>
+        <p:spPr/>
+      </p:sp>
+    </p:spTree>
+  </p:cSld>
+  <p:clrMapOvr>
+    <a:masterClrMapping/>
+  </p:clrMapOvr>
+</p:notes>
 </file>
 
 <file path=ppt/slideLayouts/slideLayout1.xml><?xml version="1.0" encoding="utf-8"?>
@@ -7779,4 +8574,324 @@
   </a:objectDefaults>
   <a:extraClrSchemeLst/>
 </a:theme>
+</file>
+
+<file path=ppt/theme/theme2.xml><?xml version="1.0" encoding="utf-8"?>
+<a:theme xmlns:a="http://schemas.openxmlformats.org/drawingml/2006/main" name="Office Theme">
+  <a:themeElements>
+    <a:clrScheme name="Office">
+      <a:dk1>
+        <a:sysClr val="windowText" lastClr="000000"/>
+      </a:dk1>
+      <a:lt1>
+        <a:sysClr val="window" lastClr="FFFFFF"/>
+      </a:lt1>
+      <a:dk2>
+        <a:srgbClr val="1F497D"/>
+      </a:dk2>
+      <a:lt2>
+        <a:srgbClr val="EEECE1"/>
+      </a:lt2>
+      <a:accent1>
+        <a:srgbClr val="4F81BD"/>
+      </a:accent1>
+      <a:accent2>
+        <a:srgbClr val="C0504D"/>
+      </a:accent2>
+      <a:accent3>
+        <a:srgbClr val="9BBB59"/>
+      </a:accent3>
+      <a:accent4>
+        <a:srgbClr val="8064A2"/>
+      </a:accent4>
+      <a:accent5>
+        <a:srgbClr val="4BACC6"/>
+      </a:accent5>
+      <a:accent6>
+        <a:srgbClr val="F79646"/>
+      </a:accent6>
+      <a:hlink>
+        <a:srgbClr val="0000FF"/>
+      </a:hlink>
+      <a:folHlink>
+        <a:srgbClr val="800080"/>
+      </a:folHlink>
+    </a:clrScheme>
+    <a:fontScheme name="Office">
+      <a:majorFont>
+        <a:latin typeface="Calibri"/>
+        <a:ea typeface=""/>
+        <a:cs typeface=""/>
+        <a:font script="Jpan" typeface="ＭＳ Ｐゴシック"/>
+        <a:font script="Hang" typeface="맑은 고딕"/>
+        <a:font script="Hans" typeface="宋体"/>
+        <a:font script="Hant" typeface="新細明體"/>
+        <a:font script="Arab" typeface="Times New Roman"/>
+        <a:font script="Hebr" typeface="Times New Roman"/>
+        <a:font script="Thai" typeface="Angsana New"/>
+        <a:font script="Ethi" typeface="Nyala"/>
+        <a:font script="Beng" typeface="Vrinda"/>
+        <a:font script="Gujr" typeface="Shruti"/>
+        <a:font script="Khmr" typeface="MoolBoran"/>
+        <a:font script="Knda" typeface="Tunga"/>
+        <a:font script="Guru" typeface="Raavi"/>
+        <a:font script="Cans" typeface="Euphemia"/>
+        <a:font script="Cher" typeface="Plantagenet Cherokee"/>
+        <a:font script="Yiii" typeface="Microsoft Yi Baiti"/>
+        <a:font script="Tibt" typeface="Microsoft Himalaya"/>
+        <a:font script="Thaa" typeface="MV Boli"/>
+        <a:font script="Deva" typeface="Mangal"/>
+        <a:font script="Telu" typeface="Gautami"/>
+        <a:font script="Taml" typeface="Latha"/>
+        <a:font script="Syrc" typeface="Estrangelo Edessa"/>
+        <a:font script="Orya" typeface="Kalinga"/>
+        <a:font script="Mlym" typeface="Kartika"/>
+        <a:font script="Laoo" typeface="DokChampa"/>
+        <a:font script="Sinh" typeface="Iskoola Pota"/>
+        <a:font script="Mong" typeface="Mongolian Baiti"/>
+        <a:font script="Viet" typeface="Times New Roman"/>
+        <a:font script="Uigh" typeface="Microsoft Uighur"/>
+        <a:font script="Geor" typeface="Sylfaen"/>
+      </a:majorFont>
+      <a:minorFont>
+        <a:latin typeface="Calibri"/>
+        <a:ea typeface=""/>
+        <a:cs typeface=""/>
+        <a:font script="Jpan" typeface="ＭＳ Ｐゴシック"/>
+        <a:font script="Hang" typeface="맑은 고딕"/>
+        <a:font script="Hans" typeface="宋体"/>
+        <a:font script="Hant" typeface="新細明體"/>
+        <a:font script="Arab" typeface="Arial"/>
+        <a:font script="Hebr" typeface="Arial"/>
+        <a:font script="Thai" typeface="Cordia New"/>
+        <a:font script="Ethi" typeface="Nyala"/>
+        <a:font script="Beng" typeface="Vrinda"/>
+        <a:font script="Gujr" typeface="Shruti"/>
+        <a:font script="Khmr" typeface="DaunPenh"/>
+        <a:font script="Knda" typeface="Tunga"/>
+        <a:font script="Guru" typeface="Raavi"/>
+        <a:font script="Cans" typeface="Euphemia"/>
+        <a:font script="Cher" typeface="Plantagenet Cherokee"/>
+        <a:font script="Yiii" typeface="Microsoft Yi Baiti"/>
+        <a:font script="Tibt" typeface="Microsoft Himalaya"/>
+        <a:font script="Thaa" typeface="MV Boli"/>
+        <a:font script="Deva" typeface="Mangal"/>
+        <a:font script="Telu" typeface="Gautami"/>
+        <a:font script="Taml" typeface="Latha"/>
+        <a:font script="Syrc" typeface="Estrangelo Edessa"/>
+        <a:font script="Orya" typeface="Kalinga"/>
+        <a:font script="Mlym" typeface="Kartika"/>
+        <a:font script="Laoo" typeface="DokChampa"/>
+        <a:font script="Sinh" typeface="Iskoola Pota"/>
+        <a:font script="Mong" typeface="Mongolian Baiti"/>
+        <a:font script="Viet" typeface="Arial"/>
+        <a:font script="Uigh" typeface="Microsoft Uighur"/>
+        <a:font script="Geor" typeface="Sylfaen"/>
+      </a:minorFont>
+    </a:fontScheme>
+    <a:fmtScheme name="Office">
+      <a:fillStyleLst>
+        <a:solidFill>
+          <a:schemeClr val="phClr"/>
+        </a:solidFill>
+        <a:gradFill rotWithShape="1">
+          <a:gsLst>
+            <a:gs pos="0">
+              <a:schemeClr val="phClr">
+                <a:tint val="50000"/>
+                <a:satMod val="300000"/>
+              </a:schemeClr>
+            </a:gs>
+            <a:gs pos="35000">
+              <a:schemeClr val="phClr">
+                <a:tint val="37000"/>
+                <a:satMod val="300000"/>
+              </a:schemeClr>
+            </a:gs>
+            <a:gs pos="100000">
+              <a:schemeClr val="phClr">
+                <a:tint val="15000"/>
+                <a:satMod val="350000"/>
+              </a:schemeClr>
+            </a:gs>
+          </a:gsLst>
+          <a:lin ang="16200000" scaled="1"/>
+        </a:gradFill>
+        <a:gradFill rotWithShape="1">
+          <a:gsLst>
+            <a:gs pos="0">
+              <a:schemeClr val="phClr">
+                <a:tint val="100000"/>
+                <a:shade val="100000"/>
+                <a:satMod val="130000"/>
+              </a:schemeClr>
+            </a:gs>
+            <a:gs pos="100000">
+              <a:schemeClr val="phClr">
+                <a:tint val="50000"/>
+                <a:shade val="100000"/>
+                <a:satMod val="350000"/>
+              </a:schemeClr>
+            </a:gs>
+          </a:gsLst>
+          <a:lin ang="16200000" scaled="0"/>
+        </a:gradFill>
+      </a:fillStyleLst>
+      <a:lnStyleLst>
+        <a:ln w="9525" cap="flat" cmpd="sng" algn="ctr">
+          <a:solidFill>
+            <a:schemeClr val="phClr">
+              <a:shade val="95000"/>
+              <a:satMod val="105000"/>
+            </a:schemeClr>
+          </a:solidFill>
+          <a:prstDash val="solid"/>
+        </a:ln>
+        <a:ln w="25400" cap="flat" cmpd="sng" algn="ctr">
+          <a:solidFill>
+            <a:schemeClr val="phClr"/>
+          </a:solidFill>
+          <a:prstDash val="solid"/>
+        </a:ln>
+        <a:ln w="38100" cap="flat" cmpd="sng" algn="ctr">
+          <a:solidFill>
+            <a:schemeClr val="phClr"/>
+          </a:solidFill>
+          <a:prstDash val="solid"/>
+        </a:ln>
+      </a:lnStyleLst>
+      <a:effectStyleLst>
+        <a:effectStyle>
+          <a:effectLst>
+            <a:outerShdw blurRad="40000" dist="20000" dir="5400000" rotWithShape="0">
+              <a:srgbClr val="000000">
+                <a:alpha val="38000"/>
+              </a:srgbClr>
+            </a:outerShdw>
+          </a:effectLst>
+        </a:effectStyle>
+        <a:effectStyle>
+          <a:effectLst>
+            <a:outerShdw blurRad="40000" dist="23000" dir="5400000" rotWithShape="0">
+              <a:srgbClr val="000000">
+                <a:alpha val="35000"/>
+              </a:srgbClr>
+            </a:outerShdw>
+          </a:effectLst>
+        </a:effectStyle>
+        <a:effectStyle>
+          <a:effectLst>
+            <a:outerShdw blurRad="40000" dist="23000" dir="5400000" rotWithShape="0">
+              <a:srgbClr val="000000">
+                <a:alpha val="35000"/>
+              </a:srgbClr>
+            </a:outerShdw>
+          </a:effectLst>
+          <a:scene3d>
+            <a:camera prst="orthographicFront">
+              <a:rot lat="0" lon="0" rev="0"/>
+            </a:camera>
+            <a:lightRig rig="threePt" dir="t">
+              <a:rot lat="0" lon="0" rev="1200000"/>
+            </a:lightRig>
+          </a:scene3d>
+          <a:sp3d>
+            <a:bevelT w="63500" h="25400"/>
+          </a:sp3d>
+        </a:effectStyle>
+      </a:effectStyleLst>
+      <a:bgFillStyleLst>
+        <a:solidFill>
+          <a:schemeClr val="phClr"/>
+        </a:solidFill>
+        <a:gradFill rotWithShape="1">
+          <a:gsLst>
+            <a:gs pos="0">
+              <a:schemeClr val="phClr">
+                <a:tint val="40000"/>
+                <a:satMod val="350000"/>
+              </a:schemeClr>
+            </a:gs>
+            <a:gs pos="40000">
+              <a:schemeClr val="phClr">
+                <a:tint val="45000"/>
+                <a:shade val="99000"/>
+                <a:satMod val="350000"/>
+              </a:schemeClr>
+            </a:gs>
+            <a:gs pos="100000">
+              <a:schemeClr val="phClr">
+                <a:shade val="20000"/>
+                <a:satMod val="255000"/>
+              </a:schemeClr>
+            </a:gs>
+          </a:gsLst>
+          <a:path path="circle">
+            <a:fillToRect l="50000" t="-80000" r="50000" b="180000"/>
+          </a:path>
+        </a:gradFill>
+        <a:gradFill rotWithShape="1">
+          <a:gsLst>
+            <a:gs pos="0">
+              <a:schemeClr val="phClr">
+                <a:tint val="80000"/>
+                <a:satMod val="300000"/>
+              </a:schemeClr>
+            </a:gs>
+            <a:gs pos="100000">
+              <a:schemeClr val="phClr">
+                <a:shade val="30000"/>
+                <a:satMod val="200000"/>
+              </a:schemeClr>
+            </a:gs>
+          </a:gsLst>
+          <a:path path="circle">
+            <a:fillToRect l="50000" t="50000" r="50000" b="50000"/>
+          </a:path>
+        </a:gradFill>
+      </a:bgFillStyleLst>
+    </a:fmtScheme>
+  </a:themeElements>
+  <a:objectDefaults>
+    <a:spDef>
+      <a:spPr/>
+      <a:bodyPr/>
+      <a:lstStyle/>
+      <a:style>
+        <a:lnRef idx="1">
+          <a:schemeClr val="accent1"/>
+        </a:lnRef>
+        <a:fillRef idx="3">
+          <a:schemeClr val="accent1"/>
+        </a:fillRef>
+        <a:effectRef idx="2">
+          <a:schemeClr val="accent1"/>
+        </a:effectRef>
+        <a:fontRef idx="minor">
+          <a:schemeClr val="lt1"/>
+        </a:fontRef>
+      </a:style>
+    </a:spDef>
+    <a:lnDef>
+      <a:spPr/>
+      <a:bodyPr/>
+      <a:lstStyle/>
+      <a:style>
+        <a:lnRef idx="2">
+          <a:schemeClr val="accent1"/>
+        </a:lnRef>
+        <a:fillRef idx="0">
+          <a:schemeClr val="accent1"/>
+        </a:fillRef>
+        <a:effectRef idx="1">
+          <a:schemeClr val="accent1"/>
+        </a:effectRef>
+        <a:fontRef idx="minor">
+          <a:schemeClr val="tx1"/>
+        </a:fontRef>
+      </a:style>
+    </a:lnDef>
+  </a:objectDefaults>
+  <a:extraClrSchemeLst/>
+</a:theme>
 </file>
--- a/protected-downloads/praesentation/M06.pptx
+++ b/protected-downloads/praesentation/M06.pptx
@@ -8,12 +8,13 @@
     <p:sldId id="256" r:id="rId7"/>
     <p:sldId id="257" r:id="rId8"/>
     <p:sldId id="258" r:id="rId9"/>
-    <p:sldId id="259" r:id="rId11"/>
+    <p:sldId id="259" r:id="rId10"/>
     <p:sldId id="260" r:id="rId12"/>
     <p:sldId id="261" r:id="rId13"/>
     <p:sldId id="262" r:id="rId14"/>
     <p:sldId id="263" r:id="rId15"/>
     <p:sldId id="264" r:id="rId16"/>
+    <p:sldId id="265" r:id="rId17"/>
   </p:sldIdLst>
   <p:sldSz cx="12188952" cy="6858000" type="screen4x3"/>
   <p:notesSz cx="6858000" cy="9144000"/>
@@ -4456,6 +4457,424 @@
 </p:sld>
 </file>
 
+<file path=ppt/slides/slide10.xml><?xml version="1.0" encoding="utf-8"?>
+<p:sld xmlns:a="http://schemas.openxmlformats.org/drawingml/2006/main" xmlns:p="http://schemas.openxmlformats.org/presentationml/2006/main" xmlns:r="http://schemas.openxmlformats.org/officeDocument/2006/relationships">
+  <p:cSld>
+    <p:spTree>
+      <p:nvGrpSpPr>
+        <p:cNvPr id="1" name=""/>
+        <p:cNvGrpSpPr/>
+        <p:nvPr/>
+      </p:nvGrpSpPr>
+      <p:grpSpPr/>
+      <p:sp>
+        <p:nvSpPr>
+          <p:cNvPr id="2" name="Rectangle 1"/>
+          <p:cNvSpPr/>
+          <p:nvPr/>
+        </p:nvSpPr>
+        <p:spPr>
+          <a:xfrm>
+            <a:off x="0" y="0"/>
+            <a:ext cx="12188952" cy="6858000"/>
+          </a:xfrm>
+          <a:prstGeom prst="rect">
+            <a:avLst/>
+          </a:prstGeom>
+          <a:solidFill>
+            <a:srgbClr val="EDEDF3"/>
+          </a:solidFill>
+          <a:ln>
+            <a:noFill/>
+          </a:ln>
+        </p:spPr>
+        <p:style>
+          <a:lnRef idx="1">
+            <a:schemeClr val="accent1"/>
+          </a:lnRef>
+          <a:fillRef idx="3">
+            <a:schemeClr val="accent1"/>
+          </a:fillRef>
+          <a:effectRef idx="2">
+            <a:schemeClr val="accent1"/>
+          </a:effectRef>
+          <a:fontRef idx="minor">
+            <a:schemeClr val="lt1"/>
+          </a:fontRef>
+        </p:style>
+        <p:txBody>
+          <a:bodyPr rtlCol="0" anchor="ctr"/>
+          <a:lstStyle/>
+          <a:p>
+            <a:pPr algn="ctr"/>
+          </a:p>
+        </p:txBody>
+      </p:sp>
+      <p:sp>
+        <p:nvSpPr>
+          <p:cNvPr id="3" name="Rectangle 2"/>
+          <p:cNvSpPr/>
+          <p:nvPr/>
+        </p:nvSpPr>
+        <p:spPr>
+          <a:xfrm>
+            <a:off x="0" y="0"/>
+            <a:ext cx="12188952" cy="50292"/>
+          </a:xfrm>
+          <a:prstGeom prst="rect">
+            <a:avLst/>
+          </a:prstGeom>
+          <a:solidFill>
+            <a:srgbClr val="1F2C56"/>
+          </a:solidFill>
+          <a:ln>
+            <a:noFill/>
+          </a:ln>
+        </p:spPr>
+        <p:style>
+          <a:lnRef idx="1">
+            <a:schemeClr val="accent1"/>
+          </a:lnRef>
+          <a:fillRef idx="3">
+            <a:schemeClr val="accent1"/>
+          </a:fillRef>
+          <a:effectRef idx="2">
+            <a:schemeClr val="accent1"/>
+          </a:effectRef>
+          <a:fontRef idx="minor">
+            <a:schemeClr val="lt1"/>
+          </a:fontRef>
+        </p:style>
+        <p:txBody>
+          <a:bodyPr rtlCol="0" anchor="ctr"/>
+          <a:lstStyle/>
+          <a:p>
+            <a:pPr algn="ctr"/>
+          </a:p>
+        </p:txBody>
+      </p:sp>
+      <p:sp>
+        <p:nvSpPr>
+          <p:cNvPr id="4" name="TextBox 3"/>
+          <p:cNvSpPr txBox="1"/>
+          <p:nvPr/>
+        </p:nvSpPr>
+        <p:spPr>
+          <a:xfrm>
+            <a:off x="685800" y="109728"/>
+            <a:ext cx="10817352" cy="228600"/>
+          </a:xfrm>
+          <a:prstGeom prst="rect">
+            <a:avLst/>
+          </a:prstGeom>
+          <a:noFill/>
+        </p:spPr>
+        <p:txBody>
+          <a:bodyPr wrap="none">
+            <a:spAutoFit/>
+          </a:bodyPr>
+          <a:lstStyle/>
+          <a:p>
+            <a:pPr algn="l"/>
+            <a:r>
+              <a:rPr sz="750">
+                <a:solidFill>
+                  <a:srgbClr val="78808C"/>
+                </a:solidFill>
+                <a:latin typeface="JetBrains Mono"/>
+              </a:rPr>
+              <a:t>M06  ·  INHALT</a:t>
+            </a:r>
+          </a:p>
+        </p:txBody>
+      </p:sp>
+      <p:sp>
+        <p:nvSpPr>
+          <p:cNvPr id="5" name="Rectangle 4"/>
+          <p:cNvSpPr/>
+          <p:nvPr/>
+        </p:nvSpPr>
+        <p:spPr>
+          <a:xfrm>
+            <a:off x="0" y="1234440"/>
+            <a:ext cx="12188952" cy="12700"/>
+          </a:xfrm>
+          <a:prstGeom prst="rect">
+            <a:avLst/>
+          </a:prstGeom>
+          <a:solidFill>
+            <a:srgbClr val="D8DFE4"/>
+          </a:solidFill>
+          <a:ln>
+            <a:noFill/>
+          </a:ln>
+        </p:spPr>
+        <p:style>
+          <a:lnRef idx="1">
+            <a:schemeClr val="accent1"/>
+          </a:lnRef>
+          <a:fillRef idx="3">
+            <a:schemeClr val="accent1"/>
+          </a:fillRef>
+          <a:effectRef idx="2">
+            <a:schemeClr val="accent1"/>
+          </a:effectRef>
+          <a:fontRef idx="minor">
+            <a:schemeClr val="lt1"/>
+          </a:fontRef>
+        </p:style>
+        <p:txBody>
+          <a:bodyPr rtlCol="0" anchor="ctr"/>
+          <a:lstStyle/>
+          <a:p>
+            <a:pPr algn="ctr"/>
+          </a:p>
+        </p:txBody>
+      </p:sp>
+      <p:sp>
+        <p:nvSpPr>
+          <p:cNvPr id="6" name="Rectangle 5"/>
+          <p:cNvSpPr/>
+          <p:nvPr/>
+        </p:nvSpPr>
+        <p:spPr>
+          <a:xfrm>
+            <a:off x="685800" y="502920"/>
+            <a:ext cx="36576" cy="658368"/>
+          </a:xfrm>
+          <a:prstGeom prst="rect">
+            <a:avLst/>
+          </a:prstGeom>
+          <a:solidFill>
+            <a:srgbClr val="D9C089"/>
+          </a:solidFill>
+          <a:ln>
+            <a:noFill/>
+          </a:ln>
+        </p:spPr>
+        <p:style>
+          <a:lnRef idx="1">
+            <a:schemeClr val="accent1"/>
+          </a:lnRef>
+          <a:fillRef idx="3">
+            <a:schemeClr val="accent1"/>
+          </a:fillRef>
+          <a:effectRef idx="2">
+            <a:schemeClr val="accent1"/>
+          </a:effectRef>
+          <a:fontRef idx="minor">
+            <a:schemeClr val="lt1"/>
+          </a:fontRef>
+        </p:style>
+        <p:txBody>
+          <a:bodyPr rtlCol="0" anchor="ctr"/>
+          <a:lstStyle/>
+          <a:p>
+            <a:pPr algn="ctr"/>
+          </a:p>
+        </p:txBody>
+      </p:sp>
+      <p:sp>
+        <p:nvSpPr>
+          <p:cNvPr id="7" name="TextBox 6"/>
+          <p:cNvSpPr txBox="1"/>
+          <p:nvPr/>
+        </p:nvSpPr>
+        <p:spPr>
+          <a:xfrm>
+            <a:off x="813816" y="502920"/>
+            <a:ext cx="10634472" cy="685800"/>
+          </a:xfrm>
+          <a:prstGeom prst="rect">
+            <a:avLst/>
+          </a:prstGeom>
+          <a:noFill/>
+        </p:spPr>
+        <p:txBody>
+          <a:bodyPr wrap="square">
+            <a:spAutoFit/>
+          </a:bodyPr>
+          <a:lstStyle/>
+          <a:p>
+            <a:pPr algn="l"/>
+            <a:r>
+              <a:rPr sz="2400" b="1" i="0">
+                <a:solidFill>
+                  <a:srgbClr val="1F2C56"/>
+                </a:solidFill>
+                <a:latin typeface="Source Serif 4"/>
+              </a:rPr>
+              <a:t>Reflexionsfragen</a:t>
+            </a:r>
+          </a:p>
+        </p:txBody>
+      </p:sp>
+      <p:sp>
+        <p:nvSpPr>
+          <p:cNvPr id="8" name="TextBox 7"/>
+          <p:cNvSpPr txBox="1"/>
+          <p:nvPr/>
+        </p:nvSpPr>
+        <p:spPr>
+          <a:xfrm>
+            <a:off x="685800" y="1417320"/>
+            <a:ext cx="10817352" cy="5029200"/>
+          </a:xfrm>
+          <a:prstGeom prst="rect">
+            <a:avLst/>
+          </a:prstGeom>
+          <a:noFill/>
+        </p:spPr>
+        <p:txBody>
+          <a:bodyPr wrap="square">
+            <a:spAutoFit/>
+          </a:bodyPr>
+          <a:lstStyle/>
+          <a:p>
+            <a:pPr>
+              <a:spcBef>
+                <a:spcPts val="400"/>
+              </a:spcBef>
+              <a:spcAft>
+                <a:spcPts val="200"/>
+              </a:spcAft>
+            </a:pPr>
+            <a:r>
+              <a:rPr sz="1300">
+                <a:solidFill>
+                  <a:srgbClr val="3D5466"/>
+                </a:solidFill>
+                <a:latin typeface="Arial"/>
+              </a:rPr>
+              <a:t>▸  Verstehen (Bloom 2): Warum ist die Inhaberabhängigkeit bei einem Handwerksbetrieb mit 8 Mitarbeitern ein strukturell höheres Risiko als bei einem Produktionsbetrieb mit 80 Mitarbeitern – was verändert sich mit zunehmender Betriebsgröße strukturell?</a:t>
+            </a:r>
+          </a:p>
+          <a:p>
+            <a:pPr>
+              <a:spcBef>
+                <a:spcPts val="400"/>
+              </a:spcBef>
+              <a:spcAft>
+                <a:spcPts val="200"/>
+              </a:spcAft>
+            </a:pPr>
+            <a:r>
+              <a:rPr sz="1300">
+                <a:solidFill>
+                  <a:srgbClr val="3D5466"/>
+                </a:solidFill>
+                <a:latin typeface="Arial"/>
+              </a:rPr>
+              <a:t>▸  Anwenden (Bloom 3): Ein Kunde sagt Ihnen: "Wir sind kein KMU, wir sind ein mittelständisches Unternehmen." Wie reagieren Sie – was ist der begriffliche Unterschied, und was sagt das über die Selbstwahrnehmung des Inhabers?</a:t>
+            </a:r>
+          </a:p>
+          <a:p>
+            <a:pPr>
+              <a:spcBef>
+                <a:spcPts val="400"/>
+              </a:spcBef>
+              <a:spcAft>
+                <a:spcPts val="200"/>
+              </a:spcAft>
+            </a:pPr>
+            <a:r>
+              <a:rPr sz="1300">
+                <a:solidFill>
+                  <a:srgbClr val="3D5466"/>
+                </a:solidFill>
+                <a:latin typeface="Arial"/>
+              </a:rPr>
+              <a:t>▸  Anwenden (Bloom 3): Bergmann Holzmanufaktur hat eine EK-Quote von 21 % – genau im Branchenmittel. Ein Kollege sagt: "Das ist unauffällig, kein Handlungsbedarf." Welche Informationen fehlen für eine vollständige Einschätzung? Was würden Sie als nächstes klären?</a:t>
+            </a:r>
+          </a:p>
+        </p:txBody>
+      </p:sp>
+      <p:sp>
+        <p:nvSpPr>
+          <p:cNvPr id="9" name="Rectangle 8"/>
+          <p:cNvSpPr/>
+          <p:nvPr/>
+        </p:nvSpPr>
+        <p:spPr>
+          <a:xfrm>
+            <a:off x="0" y="6510528"/>
+            <a:ext cx="12188952" cy="347472"/>
+          </a:xfrm>
+          <a:prstGeom prst="rect">
+            <a:avLst/>
+          </a:prstGeom>
+          <a:solidFill>
+            <a:srgbClr val="0A1937"/>
+          </a:solidFill>
+          <a:ln>
+            <a:noFill/>
+          </a:ln>
+        </p:spPr>
+        <p:style>
+          <a:lnRef idx="1">
+            <a:schemeClr val="accent1"/>
+          </a:lnRef>
+          <a:fillRef idx="3">
+            <a:schemeClr val="accent1"/>
+          </a:fillRef>
+          <a:effectRef idx="2">
+            <a:schemeClr val="accent1"/>
+          </a:effectRef>
+          <a:fontRef idx="minor">
+            <a:schemeClr val="lt1"/>
+          </a:fontRef>
+        </p:style>
+        <p:txBody>
+          <a:bodyPr rtlCol="0" anchor="ctr"/>
+          <a:lstStyle/>
+          <a:p>
+            <a:pPr algn="ctr"/>
+          </a:p>
+        </p:txBody>
+      </p:sp>
+      <p:sp>
+        <p:nvSpPr>
+          <p:cNvPr id="10" name="TextBox 9"/>
+          <p:cNvSpPr txBox="1"/>
+          <p:nvPr/>
+        </p:nvSpPr>
+        <p:spPr>
+          <a:xfrm>
+            <a:off x="685800" y="6583680"/>
+            <a:ext cx="6490411" cy="256032"/>
+          </a:xfrm>
+          <a:prstGeom prst="rect">
+            <a:avLst/>
+          </a:prstGeom>
+          <a:noFill/>
+        </p:spPr>
+        <p:txBody>
+          <a:bodyPr wrap="none">
+            <a:spAutoFit/>
+          </a:bodyPr>
+          <a:lstStyle/>
+          <a:p>
+            <a:pPr algn="l"/>
+            <a:r>
+              <a:rPr sz="700">
+                <a:solidFill>
+                  <a:srgbClr val="A0B4D2"/>
+                </a:solidFill>
+                <a:latin typeface="JetBrains Mono"/>
+              </a:rPr>
+              <a:t>Benedikt Zoller Coaching  ·  FKB Campus  ·  M06</a:t>
+            </a:r>
+          </a:p>
+        </p:txBody>
+      </p:sp>
+    </p:spTree>
+  </p:cSld>
+  <p:clrMapOvr>
+    <a:masterClrMapping/>
+  </p:clrMapOvr>
+</p:sld>
+</file>
+
 <file path=ppt/slides/slide2.xml><?xml version="1.0" encoding="utf-8"?>
 <p:sld xmlns:a="http://schemas.openxmlformats.org/drawingml/2006/main" xmlns:p="http://schemas.openxmlformats.org/presentationml/2006/main" xmlns:r="http://schemas.openxmlformats.org/officeDocument/2006/relationships">
   <p:cSld>
@@ -4582,7 +5001,7 @@
                 </a:solidFill>
                 <a:latin typeface="JetBrains Mono"/>
               </a:rPr>
-              <a:t>LERNZIELE  ·  M06</a:t>
+              <a:t>ÜBERBLICK  ·  M06</a:t>
             </a:r>
           </a:p>
         </p:txBody>
@@ -4660,7 +5079,7 @@
                 </a:solidFill>
                 <a:latin typeface="Source Serif 4"/>
               </a:rPr>
-              <a:t>Was Sie heute mitnehmen</a:t>
+              <a:t>Worum geht es heute</a:t>
             </a:r>
           </a:p>
         </p:txBody>
@@ -4673,8 +5092,8 @@
         </p:nvSpPr>
         <p:spPr>
           <a:xfrm>
-            <a:off x="685800" y="1371600"/>
-            <a:ext cx="10817352" cy="5120640"/>
+            <a:off x="685800" y="1737360"/>
+            <a:ext cx="9720072" cy="4206240"/>
           </a:xfrm>
           <a:prstGeom prst="rect">
             <a:avLst/>
@@ -4688,78 +5107,50 @@
           <a:lstStyle/>
           <a:p>
             <a:pPr>
-              <a:spcBef>
-                <a:spcPts val="800"/>
-              </a:spcBef>
               <a:spcAft>
-                <a:spcPts val="200"/>
+                <a:spcPts val="1200"/>
               </a:spcAft>
             </a:pPr>
             <a:r>
-              <a:rPr sz="1400">
+              <a:rPr sz="1700">
                 <a:solidFill>
                   <a:srgbClr val="3D5466"/>
                 </a:solidFill>
                 <a:latin typeface="Arial"/>
               </a:rPr>
-              <a:t>▸  Schwellenwerte der IfM-Bonn- und EU-KMU-Definition korrekt nennen und aufzählen</a:t>
+              <a:t>Der Mittelstand ist das Rückgrat des Firmenkundengeschäfts – und tickt anders als Konzern oder Privatkunde.</a:t>
             </a:r>
           </a:p>
           <a:p>
             <a:pPr>
-              <a:spcBef>
-                <a:spcPts val="800"/>
-              </a:spcBef>
               <a:spcAft>
-                <a:spcPts val="200"/>
+                <a:spcPts val="1200"/>
               </a:spcAft>
             </a:pPr>
             <a:r>
-              <a:rPr sz="1400">
+              <a:rPr sz="1700">
                 <a:solidFill>
                   <a:srgbClr val="3D5466"/>
                 </a:solidFill>
                 <a:latin typeface="Arial"/>
               </a:rPr>
-              <a:t>▸  Volkswirtschaftliche Bedeutung von KMU in Deutschland erläutern und Hausbank-Beziehung erklären</a:t>
+              <a:t>Sie lernen KMU-Definitionen, Finanzierungsmuster und typische Risikofelder kennen und wenden ein 5-Fragen-Schema zur schnellen Kundeneinordnung an.</a:t>
             </a:r>
           </a:p>
           <a:p>
             <a:pPr>
-              <a:spcBef>
-                <a:spcPts val="800"/>
-              </a:spcBef>
               <a:spcAft>
-                <a:spcPts val="200"/>
+                <a:spcPts val="1200"/>
               </a:spcAft>
             </a:pPr>
             <a:r>
-              <a:rPr sz="1400">
+              <a:rPr sz="1700">
                 <a:solidFill>
                   <a:srgbClr val="3D5466"/>
                 </a:solidFill>
                 <a:latin typeface="Arial"/>
               </a:rPr>
-              <a:t>▸  Typische Finanzierungsmuster, EK-Strukturen und Risikofelder von KMU beschreiben und abgrenzen</a:t>
-            </a:r>
-          </a:p>
-          <a:p>
-            <a:pPr>
-              <a:spcBef>
-                <a:spcPts val="800"/>
-              </a:spcBef>
-              <a:spcAft>
-                <a:spcPts val="200"/>
-              </a:spcAft>
-            </a:pPr>
-            <a:r>
-              <a:rPr sz="1400">
-                <a:solidFill>
-                  <a:srgbClr val="3D5466"/>
-                </a:solidFill>
-                <a:latin typeface="Arial"/>
-              </a:rPr>
-              <a:t>▸  Einen KMU-Kunden anhand des strukturierten 5-Fragen-Schemas einordnen und Branchencharakteristika zuordnen</a:t>
+              <a:t>Danach verstehen Sie die Logik Ihrer KMU-Kunden und stellen im Erstgespräch die richtigen Fragen.</a:t>
             </a:r>
           </a:p>
         </p:txBody>
@@ -4976,7 +5367,7 @@
                 </a:solidFill>
                 <a:latin typeface="JetBrains Mono"/>
               </a:rPr>
-              <a:t>M06  ·  INHALT</a:t>
+              <a:t>LERNZIELE  ·  M06</a:t>
             </a:r>
           </a:p>
         </p:txBody>
@@ -5026,57 +5417,14 @@
       </p:sp>
       <p:sp>
         <p:nvSpPr>
-          <p:cNvPr id="6" name="Rectangle 5"/>
-          <p:cNvSpPr/>
+          <p:cNvPr id="6" name="TextBox 5"/>
+          <p:cNvSpPr txBox="1"/>
           <p:nvPr/>
         </p:nvSpPr>
         <p:spPr>
           <a:xfrm>
             <a:off x="685800" y="502920"/>
-            <a:ext cx="36576" cy="658368"/>
-          </a:xfrm>
-          <a:prstGeom prst="rect">
-            <a:avLst/>
-          </a:prstGeom>
-          <a:solidFill>
-            <a:srgbClr val="D9C089"/>
-          </a:solidFill>
-          <a:ln>
-            <a:noFill/>
-          </a:ln>
-        </p:spPr>
-        <p:style>
-          <a:lnRef idx="1">
-            <a:schemeClr val="accent1"/>
-          </a:lnRef>
-          <a:fillRef idx="3">
-            <a:schemeClr val="accent1"/>
-          </a:fillRef>
-          <a:effectRef idx="2">
-            <a:schemeClr val="accent1"/>
-          </a:effectRef>
-          <a:fontRef idx="minor">
-            <a:schemeClr val="lt1"/>
-          </a:fontRef>
-        </p:style>
-        <p:txBody>
-          <a:bodyPr rtlCol="0" anchor="ctr"/>
-          <a:lstStyle/>
-          <a:p>
-            <a:pPr algn="ctr"/>
-          </a:p>
-        </p:txBody>
-      </p:sp>
-      <p:sp>
-        <p:nvSpPr>
-          <p:cNvPr id="7" name="TextBox 6"/>
-          <p:cNvSpPr txBox="1"/>
-          <p:nvPr/>
-        </p:nvSpPr>
-        <p:spPr>
-          <a:xfrm>
-            <a:off x="813816" y="502920"/>
-            <a:ext cx="10634472" cy="685800"/>
+            <a:ext cx="10817352" cy="658368"/>
           </a:xfrm>
           <a:prstGeom prst="rect">
             <a:avLst/>
@@ -5091,27 +5439,27 @@
           <a:p>
             <a:pPr algn="l"/>
             <a:r>
-              <a:rPr sz="2400" b="1" i="0">
+              <a:rPr sz="2600" b="1" i="0">
                 <a:solidFill>
                   <a:srgbClr val="1F2C56"/>
                 </a:solidFill>
                 <a:latin typeface="Source Serif 4"/>
               </a:rPr>
-              <a:t>Theorie-Input 1: Was ist ein KMU? Definitionen, Typologien und volkswirtschaftliche Bedeutung</a:t>
-            </a:r>
-          </a:p>
-        </p:txBody>
-      </p:sp>
-      <p:sp>
-        <p:nvSpPr>
-          <p:cNvPr id="8" name="TextBox 7"/>
+              <a:t>Was Sie heute mitnehmen</a:t>
+            </a:r>
+          </a:p>
+        </p:txBody>
+      </p:sp>
+      <p:sp>
+        <p:nvSpPr>
+          <p:cNvPr id="7" name="TextBox 6"/>
           <p:cNvSpPr txBox="1"/>
           <p:nvPr/>
         </p:nvSpPr>
         <p:spPr>
           <a:xfrm>
-            <a:off x="685800" y="1417320"/>
-            <a:ext cx="10817352" cy="5029200"/>
+            <a:off x="685800" y="1371600"/>
+            <a:ext cx="10817352" cy="5120640"/>
           </a:xfrm>
           <a:prstGeom prst="rect">
             <a:avLst/>
@@ -5126,236 +5474,84 @@
           <a:p>
             <a:pPr>
               <a:spcBef>
-                <a:spcPts val="1000"/>
+                <a:spcPts val="800"/>
               </a:spcBef>
               <a:spcAft>
                 <a:spcPts val="200"/>
               </a:spcAft>
             </a:pPr>
             <a:r>
-              <a:rPr sz="800" b="1">
-                <a:solidFill>
-                  <a:srgbClr val="78808C"/>
-                </a:solidFill>
-                <a:latin typeface="JetBrains Mono"/>
-              </a:rPr>
-              <a:t>DIE ZWEI ZENTRALEN KMU-DEFINITIONEN</a:t>
+              <a:rPr sz="1400">
+                <a:solidFill>
+                  <a:srgbClr val="3D5466"/>
+                </a:solidFill>
+                <a:latin typeface="Arial"/>
+              </a:rPr>
+              <a:t>▸  Schwellenwerte der IfM-Bonn- und EU-KMU-Definition korrekt nennen und aufzählen</a:t>
             </a:r>
           </a:p>
           <a:p>
             <a:pPr>
               <a:spcBef>
-                <a:spcPts val="400"/>
+                <a:spcPts val="800"/>
               </a:spcBef>
               <a:spcAft>
                 <a:spcPts val="200"/>
               </a:spcAft>
             </a:pPr>
             <a:r>
-              <a:rPr sz="1200">
+              <a:rPr sz="1400">
                 <a:solidFill>
                   <a:srgbClr val="3D5466"/>
                 </a:solidFill>
                 <a:latin typeface="Arial"/>
               </a:rPr>
-              <a:t>In der deutschen Bankpraxis begegnen Berater zwei unterschiedlichen KMU-Definitionen, die für unterschiedliche Zwecke relevant sind.</a:t>
+              <a:t>▸  Volkswirtschaftliche Bedeutung von KMU in Deutschland erläutern und Hausbank-Beziehung erklären</a:t>
             </a:r>
           </a:p>
           <a:p>
             <a:pPr>
               <a:spcBef>
-                <a:spcPts val="400"/>
+                <a:spcPts val="800"/>
               </a:spcBef>
               <a:spcAft>
                 <a:spcPts val="200"/>
               </a:spcAft>
             </a:pPr>
             <a:r>
-              <a:rPr sz="1200">
+              <a:rPr sz="1400">
                 <a:solidFill>
                   <a:srgbClr val="3D5466"/>
                 </a:solidFill>
                 <a:latin typeface="Arial"/>
               </a:rPr>
-              <a:t>Die IfM-Bonn-Definition</a:t>
+              <a:t>▸  Typische Finanzierungsmuster, EK-Strukturen und Risikofelder von KMU beschreiben und abgrenzen</a:t>
             </a:r>
           </a:p>
           <a:p>
             <a:pPr>
               <a:spcBef>
-                <a:spcPts val="400"/>
+                <a:spcPts val="800"/>
               </a:spcBef>
               <a:spcAft>
                 <a:spcPts val="200"/>
               </a:spcAft>
             </a:pPr>
             <a:r>
-              <a:rPr sz="1200">
+              <a:rPr sz="1400">
                 <a:solidFill>
                   <a:srgbClr val="3D5466"/>
                 </a:solidFill>
                 <a:latin typeface="Arial"/>
               </a:rPr>
-              <a:t>Das Institut für Mittelstandsforschung Bonn (IfM Bonn) definiert KMU quantitativ und qualitativ (IfM Bonn, 2024 ). Die Definition unterscheidet zwei Unternehmensgrößen:</a:t>
-            </a:r>
-          </a:p>
-          <a:p>
-            <a:pPr>
-              <a:spcBef>
-                <a:spcPts val="400"/>
-              </a:spcBef>
-              <a:spcAft>
-                <a:spcPts val="200"/>
-              </a:spcAft>
-            </a:pPr>
-            <a:r>
-              <a:rPr sz="1200">
-                <a:solidFill>
-                  <a:srgbClr val="3D5466"/>
-                </a:solidFill>
-                <a:latin typeface="Arial"/>
-              </a:rPr>
-              <a:t>(Es müssen Mitarbeiterzahl UND Umsatz die Schwellenwerte erfüllen; IfM Bonn, 2024 )</a:t>
-            </a:r>
-          </a:p>
-          <a:p>
-            <a:pPr>
-              <a:spcBef>
-                <a:spcPts val="400"/>
-              </a:spcBef>
-              <a:spcAft>
-                <a:spcPts val="200"/>
-              </a:spcAft>
-            </a:pPr>
-            <a:r>
-              <a:rPr sz="1200">
-                <a:solidFill>
-                  <a:srgbClr val="3D5466"/>
-                </a:solidFill>
-                <a:latin typeface="Arial"/>
-              </a:rPr>
-              <a:t>Die EU-Definition</a:t>
-            </a:r>
-          </a:p>
-          <a:p>
-            <a:pPr>
-              <a:spcBef>
-                <a:spcPts val="400"/>
-              </a:spcBef>
-              <a:spcAft>
-                <a:spcPts val="200"/>
-              </a:spcAft>
-            </a:pPr>
-            <a:r>
-              <a:rPr sz="1200">
-                <a:solidFill>
-                  <a:srgbClr val="3D5466"/>
-                </a:solidFill>
-                <a:latin typeface="Arial"/>
-              </a:rPr>
-              <a:t>Die Europäische Kommission (2020 ) unterscheidet drei Unternehmensgrößen, die für EU-Förderprogramme und KfW-Finanzierungsprodukte unmittelbar relevant sind:</a:t>
-            </a:r>
-          </a:p>
-          <a:p>
-            <a:pPr>
-              <a:spcBef>
-                <a:spcPts val="400"/>
-              </a:spcBef>
-              <a:spcAft>
-                <a:spcPts val="200"/>
-              </a:spcAft>
-            </a:pPr>
-            <a:r>
-              <a:rPr sz="1200">
-                <a:solidFill>
-                  <a:srgbClr val="3D5466"/>
-                </a:solidFill>
-                <a:latin typeface="Arial"/>
-              </a:rPr>
-              <a:t>Es müssen Mitarbeiterzahl UND (Umsatz ODER Bilanzsumme) die jeweiligen Schwellenwerte erfüllen (Europäische Kommission, 2020 ).</a:t>
-            </a:r>
-          </a:p>
-          <a:p>
-            <a:pPr>
-              <a:spcBef>
-                <a:spcPts val="400"/>
-              </a:spcBef>
-              <a:spcAft>
-                <a:spcPts val="200"/>
-              </a:spcAft>
-            </a:pPr>
-            <a:r>
-              <a:rPr sz="1200">
-                <a:solidFill>
-                  <a:srgbClr val="3D5466"/>
-                </a:solidFill>
-                <a:latin typeface="Arial"/>
-              </a:rPr>
-              <a:t>Praktische Relevanz der Unterscheidung</a:t>
-            </a:r>
-          </a:p>
-          <a:p>
-            <a:pPr>
-              <a:spcBef>
-                <a:spcPts val="600"/>
-              </a:spcBef>
-              <a:spcAft>
-                <a:spcPts val="200"/>
-              </a:spcAft>
-            </a:pPr>
-            <a:r>
-              <a:rPr sz="1200" i="1">
-                <a:solidFill>
-                  <a:srgbClr val="3D5466"/>
-                </a:solidFill>
-                <a:latin typeface="Arial"/>
-              </a:rPr>
-              <a:t>→  Praxishinweis: Unternehmensgruppen und verbundene Unternehmen</a:t>
-            </a:r>
-          </a:p>
-          <a:p>
-            <a:pPr>
-              <a:spcBef>
-                <a:spcPts val="1000"/>
-              </a:spcBef>
-              <a:spcAft>
-                <a:spcPts val="200"/>
-              </a:spcAft>
-            </a:pPr>
-            <a:r>
-              <a:rPr sz="800" b="1">
-                <a:solidFill>
-                  <a:srgbClr val="78808C"/>
-                </a:solidFill>
-                <a:latin typeface="JetBrains Mono"/>
-              </a:rPr>
-              <a:t>VOLKSWIRTSCHAFTLICHE BEDEUTUNG VON KMU</a:t>
-            </a:r>
-          </a:p>
-          <a:p>
-            <a:pPr>
-              <a:spcBef>
-                <a:spcPts val="400"/>
-              </a:spcBef>
-              <a:spcAft>
-                <a:spcPts val="200"/>
-              </a:spcAft>
-            </a:pPr>
-            <a:r>
-              <a:rPr sz="1200">
-                <a:solidFill>
-                  <a:srgbClr val="3D5466"/>
-                </a:solidFill>
-                <a:latin typeface="Arial"/>
-              </a:rPr>
-              <a:t>KMU sind kein Randphänomen, sondern das Fundament der deutschen Wirtschaftsstruktur:</a:t>
-            </a:r>
-          </a:p>
-        </p:txBody>
-      </p:sp>
-      <p:sp>
-        <p:nvSpPr>
-          <p:cNvPr id="9" name="Rectangle 8"/>
+              <a:t>▸  Einen KMU-Kunden anhand des strukturierten 5-Fragen-Schemas einordnen und Branchencharakteristika zuordnen</a:t>
+            </a:r>
+          </a:p>
+        </p:txBody>
+      </p:sp>
+      <p:sp>
+        <p:nvSpPr>
+          <p:cNvPr id="8" name="Rectangle 7"/>
           <p:cNvSpPr/>
           <p:nvPr/>
         </p:nvSpPr>
@@ -5398,7 +5594,7 @@
       </p:sp>
       <p:sp>
         <p:nvSpPr>
-          <p:cNvPr id="10" name="TextBox 9"/>
+          <p:cNvPr id="9" name="TextBox 8"/>
           <p:cNvSpPr txBox="1"/>
           <p:nvPr/>
         </p:nvSpPr>
@@ -5464,7 +5660,7 @@
             <a:avLst/>
           </a:prstGeom>
           <a:solidFill>
-            <a:srgbClr val="FFFFFF"/>
+            <a:srgbClr val="EDEDF3"/>
           </a:solidFill>
           <a:ln>
             <a:noFill/>
@@ -5565,43 +5761,51 @@
                 </a:solidFill>
                 <a:latin typeface="JetBrains Mono"/>
               </a:rPr>
-              <a:t>M06  ·  SCHAUBILD</a:t>
-            </a:r>
-          </a:p>
-        </p:txBody>
-      </p:sp>
-      <p:sp>
-        <p:nvSpPr>
-          <p:cNvPr id="5" name="TextBox 4"/>
-          <p:cNvSpPr txBox="1"/>
-          <p:nvPr/>
-        </p:nvSpPr>
-        <p:spPr>
-          <a:xfrm>
-            <a:off x="685800" y="502920"/>
-            <a:ext cx="10817352" cy="594360"/>
-          </a:xfrm>
-          <a:prstGeom prst="rect">
-            <a:avLst/>
-          </a:prstGeom>
-          <a:noFill/>
-        </p:spPr>
-        <p:txBody>
-          <a:bodyPr wrap="square">
-            <a:spAutoFit/>
-          </a:bodyPr>
-          <a:lstStyle/>
-          <a:p>
-            <a:pPr algn="l"/>
-            <a:r>
-              <a:rPr sz="2000" b="1" i="0">
-                <a:solidFill>
-                  <a:srgbClr val="1F2C56"/>
-                </a:solidFill>
-                <a:latin typeface="Source Serif 4"/>
-              </a:rPr>
-              <a:t>Zwei KMU-Definitionen im Vergleich</a:t>
-            </a:r>
+              <a:t>M06  ·  INHALT</a:t>
+            </a:r>
+          </a:p>
+        </p:txBody>
+      </p:sp>
+      <p:sp>
+        <p:nvSpPr>
+          <p:cNvPr id="5" name="Rectangle 4"/>
+          <p:cNvSpPr/>
+          <p:nvPr/>
+        </p:nvSpPr>
+        <p:spPr>
+          <a:xfrm>
+            <a:off x="0" y="1234440"/>
+            <a:ext cx="12188952" cy="12700"/>
+          </a:xfrm>
+          <a:prstGeom prst="rect">
+            <a:avLst/>
+          </a:prstGeom>
+          <a:solidFill>
+            <a:srgbClr val="D8DFE4"/>
+          </a:solidFill>
+          <a:ln>
+            <a:noFill/>
+          </a:ln>
+        </p:spPr>
+        <p:style>
+          <a:lnRef idx="1">
+            <a:schemeClr val="accent1"/>
+          </a:lnRef>
+          <a:fillRef idx="3">
+            <a:schemeClr val="accent1"/>
+          </a:fillRef>
+          <a:effectRef idx="2">
+            <a:schemeClr val="accent1"/>
+          </a:effectRef>
+          <a:fontRef idx="minor">
+            <a:schemeClr val="lt1"/>
+          </a:fontRef>
+        </p:style>
+        <p:txBody>
+          <a:bodyPr rtlCol="0" anchor="ctr"/>
+          <a:lstStyle/>
+          <a:p>
+            <a:pPr algn="ctr"/>
           </a:p>
         </p:txBody>
       </p:sp>
@@ -5613,8 +5817,8 @@
         </p:nvSpPr>
         <p:spPr>
           <a:xfrm>
-            <a:off x="685800" y="1143000"/>
-            <a:ext cx="10817352" cy="25400"/>
+            <a:off x="685800" y="502920"/>
+            <a:ext cx="36576" cy="658368"/>
           </a:xfrm>
           <a:prstGeom prst="rect">
             <a:avLst/>
@@ -5648,33 +5852,295 @@
           </a:p>
         </p:txBody>
       </p:sp>
-      <p:pic>
-        <p:nvPicPr>
-          <p:cNvPr id="7" name="Picture 6" descr="image.png"/>
-          <p:cNvPicPr>
-            <a:picLocks noChangeAspect="1"/>
-          </p:cNvPicPr>
-          <p:nvPr/>
-        </p:nvPicPr>
-        <p:blipFill>
-          <a:blip r:embed="rId2"/>
-          <a:stretch>
-            <a:fillRect/>
-          </a:stretch>
-        </p:blipFill>
-        <p:spPr>
-          <a:xfrm>
-            <a:off x="2303489" y="1325880"/>
-            <a:ext cx="7581973" cy="4937760"/>
-          </a:xfrm>
-          <a:prstGeom prst="rect">
-            <a:avLst/>
-          </a:prstGeom>
-        </p:spPr>
-      </p:pic>
-      <p:sp>
-        <p:nvSpPr>
-          <p:cNvPr id="8" name="Rectangle 7"/>
+      <p:sp>
+        <p:nvSpPr>
+          <p:cNvPr id="7" name="TextBox 6"/>
+          <p:cNvSpPr txBox="1"/>
+          <p:nvPr/>
+        </p:nvSpPr>
+        <p:spPr>
+          <a:xfrm>
+            <a:off x="813816" y="502920"/>
+            <a:ext cx="10634472" cy="685800"/>
+          </a:xfrm>
+          <a:prstGeom prst="rect">
+            <a:avLst/>
+          </a:prstGeom>
+          <a:noFill/>
+        </p:spPr>
+        <p:txBody>
+          <a:bodyPr wrap="square">
+            <a:spAutoFit/>
+          </a:bodyPr>
+          <a:lstStyle/>
+          <a:p>
+            <a:pPr algn="l"/>
+            <a:r>
+              <a:rPr sz="2400" b="1" i="0">
+                <a:solidFill>
+                  <a:srgbClr val="1F2C56"/>
+                </a:solidFill>
+                <a:latin typeface="Source Serif 4"/>
+              </a:rPr>
+              <a:t>Theorie-Input 1: Was ist ein KMU? Definitionen, Typologien und volkswirtschaftliche Bedeutung</a:t>
+            </a:r>
+          </a:p>
+        </p:txBody>
+      </p:sp>
+      <p:sp>
+        <p:nvSpPr>
+          <p:cNvPr id="8" name="TextBox 7"/>
+          <p:cNvSpPr txBox="1"/>
+          <p:nvPr/>
+        </p:nvSpPr>
+        <p:spPr>
+          <a:xfrm>
+            <a:off x="685800" y="1417320"/>
+            <a:ext cx="10817352" cy="5029200"/>
+          </a:xfrm>
+          <a:prstGeom prst="rect">
+            <a:avLst/>
+          </a:prstGeom>
+          <a:noFill/>
+        </p:spPr>
+        <p:txBody>
+          <a:bodyPr wrap="square">
+            <a:spAutoFit/>
+          </a:bodyPr>
+          <a:lstStyle/>
+          <a:p>
+            <a:pPr>
+              <a:spcBef>
+                <a:spcPts val="1000"/>
+              </a:spcBef>
+              <a:spcAft>
+                <a:spcPts val="200"/>
+              </a:spcAft>
+            </a:pPr>
+            <a:r>
+              <a:rPr sz="800" b="1">
+                <a:solidFill>
+                  <a:srgbClr val="78808C"/>
+                </a:solidFill>
+                <a:latin typeface="JetBrains Mono"/>
+              </a:rPr>
+              <a:t>DIE ZWEI ZENTRALEN KMU-DEFINITIONEN</a:t>
+            </a:r>
+          </a:p>
+          <a:p>
+            <a:pPr>
+              <a:spcBef>
+                <a:spcPts val="400"/>
+              </a:spcBef>
+              <a:spcAft>
+                <a:spcPts val="200"/>
+              </a:spcAft>
+            </a:pPr>
+            <a:r>
+              <a:rPr sz="1200">
+                <a:solidFill>
+                  <a:srgbClr val="3D5466"/>
+                </a:solidFill>
+                <a:latin typeface="Arial"/>
+              </a:rPr>
+              <a:t>In der deutschen Bankpraxis begegnen Berater zwei unterschiedlichen KMU-Definitionen, die für unterschiedliche Zwecke relevant sind.</a:t>
+            </a:r>
+          </a:p>
+          <a:p>
+            <a:pPr>
+              <a:spcBef>
+                <a:spcPts val="400"/>
+              </a:spcBef>
+              <a:spcAft>
+                <a:spcPts val="200"/>
+              </a:spcAft>
+            </a:pPr>
+            <a:r>
+              <a:rPr sz="1200">
+                <a:solidFill>
+                  <a:srgbClr val="3D5466"/>
+                </a:solidFill>
+                <a:latin typeface="Arial"/>
+              </a:rPr>
+              <a:t>Die IfM-Bonn-Definition</a:t>
+            </a:r>
+          </a:p>
+          <a:p>
+            <a:pPr>
+              <a:spcBef>
+                <a:spcPts val="400"/>
+              </a:spcBef>
+              <a:spcAft>
+                <a:spcPts val="200"/>
+              </a:spcAft>
+            </a:pPr>
+            <a:r>
+              <a:rPr sz="1200">
+                <a:solidFill>
+                  <a:srgbClr val="3D5466"/>
+                </a:solidFill>
+                <a:latin typeface="Arial"/>
+              </a:rPr>
+              <a:t>Das Institut für Mittelstandsforschung Bonn (IfM Bonn) definiert KMU quantitativ und qualitativ (IfM Bonn, 2024 ). Die Definition unterscheidet zwei Unternehmensgrößen:</a:t>
+            </a:r>
+          </a:p>
+          <a:p>
+            <a:pPr>
+              <a:spcBef>
+                <a:spcPts val="400"/>
+              </a:spcBef>
+              <a:spcAft>
+                <a:spcPts val="200"/>
+              </a:spcAft>
+            </a:pPr>
+            <a:r>
+              <a:rPr sz="1200">
+                <a:solidFill>
+                  <a:srgbClr val="3D5466"/>
+                </a:solidFill>
+                <a:latin typeface="Arial"/>
+              </a:rPr>
+              <a:t>(Es müssen Mitarbeiterzahl UND Umsatz die Schwellenwerte erfüllen; IfM Bonn, 2024 )</a:t>
+            </a:r>
+          </a:p>
+          <a:p>
+            <a:pPr>
+              <a:spcBef>
+                <a:spcPts val="400"/>
+              </a:spcBef>
+              <a:spcAft>
+                <a:spcPts val="200"/>
+              </a:spcAft>
+            </a:pPr>
+            <a:r>
+              <a:rPr sz="1200">
+                <a:solidFill>
+                  <a:srgbClr val="3D5466"/>
+                </a:solidFill>
+                <a:latin typeface="Arial"/>
+              </a:rPr>
+              <a:t>Die EU-Definition</a:t>
+            </a:r>
+          </a:p>
+          <a:p>
+            <a:pPr>
+              <a:spcBef>
+                <a:spcPts val="400"/>
+              </a:spcBef>
+              <a:spcAft>
+                <a:spcPts val="200"/>
+              </a:spcAft>
+            </a:pPr>
+            <a:r>
+              <a:rPr sz="1200">
+                <a:solidFill>
+                  <a:srgbClr val="3D5466"/>
+                </a:solidFill>
+                <a:latin typeface="Arial"/>
+              </a:rPr>
+              <a:t>Die Europäische Kommission (2020 ) unterscheidet drei Unternehmensgrößen, die für EU-Förderprogramme und KfW-Finanzierungsprodukte unmittelbar relevant sind:</a:t>
+            </a:r>
+          </a:p>
+          <a:p>
+            <a:pPr>
+              <a:spcBef>
+                <a:spcPts val="400"/>
+              </a:spcBef>
+              <a:spcAft>
+                <a:spcPts val="200"/>
+              </a:spcAft>
+            </a:pPr>
+            <a:r>
+              <a:rPr sz="1200">
+                <a:solidFill>
+                  <a:srgbClr val="3D5466"/>
+                </a:solidFill>
+                <a:latin typeface="Arial"/>
+              </a:rPr>
+              <a:t>Es müssen Mitarbeiterzahl UND (Umsatz ODER Bilanzsumme) die jeweiligen Schwellenwerte erfüllen (Europäische Kommission, 2020 ).</a:t>
+            </a:r>
+          </a:p>
+          <a:p>
+            <a:pPr>
+              <a:spcBef>
+                <a:spcPts val="400"/>
+              </a:spcBef>
+              <a:spcAft>
+                <a:spcPts val="200"/>
+              </a:spcAft>
+            </a:pPr>
+            <a:r>
+              <a:rPr sz="1200">
+                <a:solidFill>
+                  <a:srgbClr val="3D5466"/>
+                </a:solidFill>
+                <a:latin typeface="Arial"/>
+              </a:rPr>
+              <a:t>Praktische Relevanz der Unterscheidung</a:t>
+            </a:r>
+          </a:p>
+          <a:p>
+            <a:pPr>
+              <a:spcBef>
+                <a:spcPts val="600"/>
+              </a:spcBef>
+              <a:spcAft>
+                <a:spcPts val="200"/>
+              </a:spcAft>
+            </a:pPr>
+            <a:r>
+              <a:rPr sz="1200" i="1">
+                <a:solidFill>
+                  <a:srgbClr val="3D5466"/>
+                </a:solidFill>
+                <a:latin typeface="Arial"/>
+              </a:rPr>
+              <a:t>→  Praxishinweis: Unternehmensgruppen und verbundene Unternehmen</a:t>
+            </a:r>
+          </a:p>
+          <a:p>
+            <a:pPr>
+              <a:spcBef>
+                <a:spcPts val="1000"/>
+              </a:spcBef>
+              <a:spcAft>
+                <a:spcPts val="200"/>
+              </a:spcAft>
+            </a:pPr>
+            <a:r>
+              <a:rPr sz="800" b="1">
+                <a:solidFill>
+                  <a:srgbClr val="78808C"/>
+                </a:solidFill>
+                <a:latin typeface="JetBrains Mono"/>
+              </a:rPr>
+              <a:t>VOLKSWIRTSCHAFTLICHE BEDEUTUNG VON KMU</a:t>
+            </a:r>
+          </a:p>
+          <a:p>
+            <a:pPr>
+              <a:spcBef>
+                <a:spcPts val="400"/>
+              </a:spcBef>
+              <a:spcAft>
+                <a:spcPts val="200"/>
+              </a:spcAft>
+            </a:pPr>
+            <a:r>
+              <a:rPr sz="1200">
+                <a:solidFill>
+                  <a:srgbClr val="3D5466"/>
+                </a:solidFill>
+                <a:latin typeface="Arial"/>
+              </a:rPr>
+              <a:t>KMU sind kein Randphänomen, sondern das Fundament der deutschen Wirtschaftsstruktur:</a:t>
+            </a:r>
+          </a:p>
+        </p:txBody>
+      </p:sp>
+      <p:sp>
+        <p:nvSpPr>
+          <p:cNvPr id="9" name="Rectangle 8"/>
           <p:cNvSpPr/>
           <p:nvPr/>
         </p:nvSpPr>
@@ -5717,7 +6183,7 @@
       </p:sp>
       <p:sp>
         <p:nvSpPr>
-          <p:cNvPr id="9" name="TextBox 8"/>
+          <p:cNvPr id="10" name="TextBox 9"/>
           <p:cNvSpPr txBox="1"/>
           <p:nvPr/>
         </p:nvSpPr>
@@ -5746,41 +6212,6 @@
                 <a:latin typeface="JetBrains Mono"/>
               </a:rPr>
               <a:t>Benedikt Zoller Coaching  ·  FKB Campus  ·  M06</a:t>
-            </a:r>
-          </a:p>
-        </p:txBody>
-      </p:sp>
-      <p:sp>
-        <p:nvSpPr>
-          <p:cNvPr id="10" name="TextBox 9"/>
-          <p:cNvSpPr txBox="1"/>
-          <p:nvPr/>
-        </p:nvSpPr>
-        <p:spPr>
-          <a:xfrm>
-            <a:off x="7176211" y="6583680"/>
-            <a:ext cx="4326940" cy="256032"/>
-          </a:xfrm>
-          <a:prstGeom prst="rect">
-            <a:avLst/>
-          </a:prstGeom>
-          <a:noFill/>
-        </p:spPr>
-        <p:txBody>
-          <a:bodyPr wrap="none">
-            <a:spAutoFit/>
-          </a:bodyPr>
-          <a:lstStyle/>
-          <a:p>
-            <a:pPr algn="r"/>
-            <a:r>
-              <a:rPr sz="700">
-                <a:solidFill>
-                  <a:srgbClr val="A0B4D2"/>
-                </a:solidFill>
-                <a:latin typeface="JetBrains Mono"/>
-              </a:rPr>
-              <a:t>Schaubild</a:t>
             </a:r>
           </a:p>
         </p:txBody>
@@ -5818,7 +6249,7 @@
             <a:avLst/>
           </a:prstGeom>
           <a:solidFill>
-            <a:srgbClr val="EDEDF3"/>
+            <a:srgbClr val="FFFFFF"/>
           </a:solidFill>
           <a:ln>
             <a:noFill/>
@@ -5919,51 +6350,43 @@
                 </a:solidFill>
                 <a:latin typeface="JetBrains Mono"/>
               </a:rPr>
-              <a:t>M06  ·  INHALT</a:t>
-            </a:r>
-          </a:p>
-        </p:txBody>
-      </p:sp>
-      <p:sp>
-        <p:nvSpPr>
-          <p:cNvPr id="5" name="Rectangle 4"/>
-          <p:cNvSpPr/>
-          <p:nvPr/>
-        </p:nvSpPr>
-        <p:spPr>
-          <a:xfrm>
-            <a:off x="0" y="1234440"/>
-            <a:ext cx="12188952" cy="12700"/>
-          </a:xfrm>
-          <a:prstGeom prst="rect">
-            <a:avLst/>
-          </a:prstGeom>
-          <a:solidFill>
-            <a:srgbClr val="D8DFE4"/>
-          </a:solidFill>
-          <a:ln>
-            <a:noFill/>
-          </a:ln>
-        </p:spPr>
-        <p:style>
-          <a:lnRef idx="1">
-            <a:schemeClr val="accent1"/>
-          </a:lnRef>
-          <a:fillRef idx="3">
-            <a:schemeClr val="accent1"/>
-          </a:fillRef>
-          <a:effectRef idx="2">
-            <a:schemeClr val="accent1"/>
-          </a:effectRef>
-          <a:fontRef idx="minor">
-            <a:schemeClr val="lt1"/>
-          </a:fontRef>
-        </p:style>
-        <p:txBody>
-          <a:bodyPr rtlCol="0" anchor="ctr"/>
-          <a:lstStyle/>
-          <a:p>
-            <a:pPr algn="ctr"/>
+              <a:t>M06  ·  SCHAUBILD</a:t>
+            </a:r>
+          </a:p>
+        </p:txBody>
+      </p:sp>
+      <p:sp>
+        <p:nvSpPr>
+          <p:cNvPr id="5" name="TextBox 4"/>
+          <p:cNvSpPr txBox="1"/>
+          <p:nvPr/>
+        </p:nvSpPr>
+        <p:spPr>
+          <a:xfrm>
+            <a:off x="685800" y="502920"/>
+            <a:ext cx="10817352" cy="594360"/>
+          </a:xfrm>
+          <a:prstGeom prst="rect">
+            <a:avLst/>
+          </a:prstGeom>
+          <a:noFill/>
+        </p:spPr>
+        <p:txBody>
+          <a:bodyPr wrap="square">
+            <a:spAutoFit/>
+          </a:bodyPr>
+          <a:lstStyle/>
+          <a:p>
+            <a:pPr algn="l"/>
+            <a:r>
+              <a:rPr sz="2000" b="1" i="0">
+                <a:solidFill>
+                  <a:srgbClr val="1F2C56"/>
+                </a:solidFill>
+                <a:latin typeface="Source Serif 4"/>
+              </a:rPr>
+              <a:t>Zwei KMU-Definitionen im Vergleich</a:t>
+            </a:r>
           </a:p>
         </p:txBody>
       </p:sp>
@@ -5975,8 +6398,8 @@
         </p:nvSpPr>
         <p:spPr>
           <a:xfrm>
-            <a:off x="685800" y="502920"/>
-            <a:ext cx="36576" cy="658368"/>
+            <a:off x="685800" y="1143000"/>
+            <a:ext cx="10817352" cy="25400"/>
           </a:xfrm>
           <a:prstGeom prst="rect">
             <a:avLst/>
@@ -6010,295 +6433,33 @@
           </a:p>
         </p:txBody>
       </p:sp>
-      <p:sp>
-        <p:nvSpPr>
-          <p:cNvPr id="7" name="TextBox 6"/>
-          <p:cNvSpPr txBox="1"/>
-          <p:nvPr/>
-        </p:nvSpPr>
-        <p:spPr>
-          <a:xfrm>
-            <a:off x="813816" y="502920"/>
-            <a:ext cx="10634472" cy="685800"/>
-          </a:xfrm>
-          <a:prstGeom prst="rect">
-            <a:avLst/>
-          </a:prstGeom>
-          <a:noFill/>
-        </p:spPr>
-        <p:txBody>
-          <a:bodyPr wrap="square">
-            <a:spAutoFit/>
-          </a:bodyPr>
-          <a:lstStyle/>
-          <a:p>
-            <a:pPr algn="l"/>
-            <a:r>
-              <a:rPr sz="2400" b="1" i="0">
-                <a:solidFill>
-                  <a:srgbClr val="1F2C56"/>
-                </a:solidFill>
-                <a:latin typeface="Source Serif 4"/>
-              </a:rPr>
-              <a:t>Theorie-Input 2: Finanzierungsmuster und typische Risikofelder</a:t>
-            </a:r>
-          </a:p>
-        </p:txBody>
-      </p:sp>
-      <p:sp>
-        <p:nvSpPr>
-          <p:cNvPr id="8" name="TextBox 7"/>
-          <p:cNvSpPr txBox="1"/>
-          <p:nvPr/>
-        </p:nvSpPr>
-        <p:spPr>
-          <a:xfrm>
-            <a:off x="685800" y="1417320"/>
-            <a:ext cx="10817352" cy="5029200"/>
-          </a:xfrm>
-          <a:prstGeom prst="rect">
-            <a:avLst/>
-          </a:prstGeom>
-          <a:noFill/>
-        </p:spPr>
-        <p:txBody>
-          <a:bodyPr wrap="square">
-            <a:spAutoFit/>
-          </a:bodyPr>
-          <a:lstStyle/>
-          <a:p>
-            <a:pPr>
-              <a:spcBef>
-                <a:spcPts val="1000"/>
-              </a:spcBef>
-              <a:spcAft>
-                <a:spcPts val="200"/>
-              </a:spcAft>
-            </a:pPr>
-            <a:r>
-              <a:rPr sz="800" b="1">
-                <a:solidFill>
-                  <a:srgbClr val="78808C"/>
-                </a:solidFill>
-                <a:latin typeface="JetBrains Mono"/>
-              </a:rPr>
-              <a:t>FINANZIERUNGSSTRUKTUR: KMU VS. GROSSUNTERNEHMEN</a:t>
-            </a:r>
-          </a:p>
-          <a:p>
-            <a:pPr>
-              <a:spcBef>
-                <a:spcPts val="400"/>
-              </a:spcBef>
-              <a:spcAft>
-                <a:spcPts val="200"/>
-              </a:spcAft>
-            </a:pPr>
-            <a:r>
-              <a:rPr sz="1200">
-                <a:solidFill>
-                  <a:srgbClr val="3D5466"/>
-                </a:solidFill>
-                <a:latin typeface="Arial"/>
-              </a:rPr>
-              <a:t>Die Finanzierungsstruktur von KMU unterscheidet sich strukturell von der großer Unternehmen. Diese Unterschiede zu kennen, ist die Grundlage jeder fundierten Kreditanalyse.</a:t>
-            </a:r>
-          </a:p>
-          <a:p>
-            <a:pPr>
-              <a:spcBef>
-                <a:spcPts val="400"/>
-              </a:spcBef>
-              <a:spcAft>
-                <a:spcPts val="200"/>
-              </a:spcAft>
-            </a:pPr>
-            <a:r>
-              <a:rPr sz="1200">
-                <a:solidFill>
-                  <a:srgbClr val="3D5466"/>
-                </a:solidFill>
-                <a:latin typeface="Arial"/>
-              </a:rPr>
-              <a:t>Eigenkapitalquoten:</a:t>
-            </a:r>
-          </a:p>
-          <a:p>
-            <a:pPr>
-              <a:spcBef>
-                <a:spcPts val="400"/>
-              </a:spcBef>
-              <a:spcAft>
-                <a:spcPts val="200"/>
-              </a:spcAft>
-            </a:pPr>
-            <a:r>
-              <a:rPr sz="1300">
-                <a:solidFill>
-                  <a:srgbClr val="3D5466"/>
-                </a:solidFill>
-                <a:latin typeface="Arial"/>
-              </a:rPr>
-              <a:t>▸  Steuerliche Optimierung: KMU-Inhaber entnehmen Gewinne für den privaten Lebensunterhalt, statt sie im Betrieb zu thesaurieren</a:t>
-            </a:r>
-          </a:p>
-          <a:p>
-            <a:pPr>
-              <a:spcBef>
-                <a:spcPts val="400"/>
-              </a:spcBef>
-              <a:spcAft>
-                <a:spcPts val="200"/>
-              </a:spcAft>
-            </a:pPr>
-            <a:r>
-              <a:rPr sz="1300">
-                <a:solidFill>
-                  <a:srgbClr val="3D5466"/>
-                </a:solidFill>
-                <a:latin typeface="Arial"/>
-              </a:rPr>
-              <a:t>▸  Verflechtung Privat/Betrieb: Privatliegenschaften des Inhabers erscheinen nicht in der Bilanz, sind aber reale Sicherheiten</a:t>
-            </a:r>
-          </a:p>
-          <a:p>
-            <a:pPr>
-              <a:spcBef>
-                <a:spcPts val="400"/>
-              </a:spcBef>
-              <a:spcAft>
-                <a:spcPts val="200"/>
-              </a:spcAft>
-            </a:pPr>
-            <a:r>
-              <a:rPr sz="1300">
-                <a:solidFill>
-                  <a:srgbClr val="3D5466"/>
-                </a:solidFill>
-                <a:latin typeface="Arial"/>
-              </a:rPr>
-              <a:t>▸  Vorsichtige Bilanzpolitik: Viele KMU nutzen steuerliche Abschreibungsmöglichkeiten maximal – die Bilanz ist dadurch "schlechter" als die wirtschaftliche Realität</a:t>
-            </a:r>
-          </a:p>
-          <a:p>
-            <a:pPr>
-              <a:spcBef>
-                <a:spcPts val="400"/>
-              </a:spcBef>
-              <a:spcAft>
-                <a:spcPts val="200"/>
-              </a:spcAft>
-            </a:pPr>
-            <a:r>
-              <a:rPr sz="1200">
-                <a:solidFill>
-                  <a:srgbClr val="3D5466"/>
-                </a:solidFill>
-                <a:latin typeface="Arial"/>
-              </a:rPr>
-              <a:t>Finanzierungsquellen:</a:t>
-            </a:r>
-          </a:p>
-          <a:p>
-            <a:pPr>
-              <a:spcBef>
-                <a:spcPts val="400"/>
-              </a:spcBef>
-              <a:spcAft>
-                <a:spcPts val="200"/>
-              </a:spcAft>
-            </a:pPr>
-            <a:r>
-              <a:rPr sz="1200">
-                <a:solidFill>
-                  <a:srgbClr val="3D5466"/>
-                </a:solidFill>
-                <a:latin typeface="Arial"/>
-              </a:rPr>
-              <a:t>KMU finanzieren sich typischerweise durch drei Hauptquellen:</a:t>
-            </a:r>
-          </a:p>
-          <a:p>
-            <a:pPr>
-              <a:spcBef>
-                <a:spcPts val="400"/>
-              </a:spcBef>
-              <a:spcAft>
-                <a:spcPts val="200"/>
-              </a:spcAft>
-            </a:pPr>
-            <a:r>
-              <a:rPr sz="1300">
-                <a:solidFill>
-                  <a:srgbClr val="3D5466"/>
-                </a:solidFill>
-                <a:latin typeface="Arial"/>
-              </a:rPr>
-              <a:t>▸  Innenfinanzierung (Thesaurierung): Gewinne verbleiben im Unternehmen – bei inhabergeführten Betrieben stark limitiert durch private Entnahmen</a:t>
-            </a:r>
-          </a:p>
-          <a:p>
-            <a:pPr>
-              <a:spcBef>
-                <a:spcPts val="400"/>
-              </a:spcBef>
-              <a:spcAft>
-                <a:spcPts val="200"/>
-              </a:spcAft>
-            </a:pPr>
-            <a:r>
-              <a:rPr sz="1300">
-                <a:solidFill>
-                  <a:srgbClr val="3D5466"/>
-                </a:solidFill>
-                <a:latin typeface="Arial"/>
-              </a:rPr>
-              <a:t>▸  Bankkredite (Außenfinanzierung): Investitionskredite, Kontokorrentlinien, Avale – dominante Finanzierungsform</a:t>
-            </a:r>
-          </a:p>
-          <a:p>
-            <a:pPr>
-              <a:spcBef>
-                <a:spcPts val="400"/>
-              </a:spcBef>
-              <a:spcAft>
-                <a:spcPts val="200"/>
-              </a:spcAft>
-            </a:pPr>
-            <a:r>
-              <a:rPr sz="1300">
-                <a:solidFill>
-                  <a:srgbClr val="3D5466"/>
-                </a:solidFill>
-                <a:latin typeface="Arial"/>
-              </a:rPr>
-              <a:t>▸  Öffentliche Förderprogramme: KfW-Unternehmenskredit, ERP-Kapital für Gründung, Landesförderprogramme – häufig günstiger als Hausbankkonditionen, oft nicht ausgeschöpft</a:t>
-            </a:r>
-          </a:p>
-          <a:p>
-            <a:pPr>
-              <a:spcBef>
-                <a:spcPts val="400"/>
-              </a:spcBef>
-              <a:spcAft>
-                <a:spcPts val="200"/>
-              </a:spcAft>
-            </a:pPr>
-            <a:r>
-              <a:rPr sz="1200">
-                <a:solidFill>
-                  <a:srgbClr val="3D5466"/>
-                </a:solidFill>
-                <a:latin typeface="Arial"/>
-              </a:rPr>
-              <a:t>Die drei meistgenutzten Förderprogramme in der süddeutschen VR-Praxis:</a:t>
-            </a:r>
-          </a:p>
-        </p:txBody>
-      </p:sp>
-      <p:sp>
-        <p:nvSpPr>
-          <p:cNvPr id="9" name="Rectangle 8"/>
+      <p:pic>
+        <p:nvPicPr>
+          <p:cNvPr id="7" name="Picture 6" descr="image.png"/>
+          <p:cNvPicPr>
+            <a:picLocks noChangeAspect="1"/>
+          </p:cNvPicPr>
+          <p:nvPr/>
+        </p:nvPicPr>
+        <p:blipFill>
+          <a:blip r:embed="rId2"/>
+          <a:stretch>
+            <a:fillRect/>
+          </a:stretch>
+        </p:blipFill>
+        <p:spPr>
+          <a:xfrm>
+            <a:off x="2303489" y="1325880"/>
+            <a:ext cx="7581973" cy="4937760"/>
+          </a:xfrm>
+          <a:prstGeom prst="rect">
+            <a:avLst/>
+          </a:prstGeom>
+        </p:spPr>
+      </p:pic>
+      <p:sp>
+        <p:nvSpPr>
+          <p:cNvPr id="8" name="Rectangle 7"/>
           <p:cNvSpPr/>
           <p:nvPr/>
         </p:nvSpPr>
@@ -6341,7 +6502,7 @@
       </p:sp>
       <p:sp>
         <p:nvSpPr>
-          <p:cNvPr id="10" name="TextBox 9"/>
+          <p:cNvPr id="9" name="TextBox 8"/>
           <p:cNvSpPr txBox="1"/>
           <p:nvPr/>
         </p:nvSpPr>
@@ -6370,6 +6531,41 @@
                 <a:latin typeface="JetBrains Mono"/>
               </a:rPr>
               <a:t>Benedikt Zoller Coaching  ·  FKB Campus  ·  M06</a:t>
+            </a:r>
+          </a:p>
+        </p:txBody>
+      </p:sp>
+      <p:sp>
+        <p:nvSpPr>
+          <p:cNvPr id="10" name="TextBox 9"/>
+          <p:cNvSpPr txBox="1"/>
+          <p:nvPr/>
+        </p:nvSpPr>
+        <p:spPr>
+          <a:xfrm>
+            <a:off x="7176211" y="6583680"/>
+            <a:ext cx="4326940" cy="256032"/>
+          </a:xfrm>
+          <a:prstGeom prst="rect">
+            <a:avLst/>
+          </a:prstGeom>
+          <a:noFill/>
+        </p:spPr>
+        <p:txBody>
+          <a:bodyPr wrap="none">
+            <a:spAutoFit/>
+          </a:bodyPr>
+          <a:lstStyle/>
+          <a:p>
+            <a:pPr algn="r"/>
+            <a:r>
+              <a:rPr sz="700">
+                <a:solidFill>
+                  <a:srgbClr val="A0B4D2"/>
+                </a:solidFill>
+                <a:latin typeface="JetBrains Mono"/>
+              </a:rPr>
+              <a:t>Schaubild</a:t>
             </a:r>
           </a:p>
         </p:txBody>
@@ -6629,7 +6825,7 @@
                 </a:solidFill>
                 <a:latin typeface="Source Serif 4"/>
               </a:rPr>
-              <a:t>Theorie-Input 3: Einstieg in die Branchenanalyse</a:t>
+              <a:t>Theorie-Input 2: Finanzierungsmuster und typische Risikofelder</a:t>
             </a:r>
           </a:p>
         </p:txBody>
@@ -6671,26 +6867,7 @@
                 </a:solidFill>
                 <a:latin typeface="JetBrains Mono"/>
               </a:rPr>
-              <a:t>DAS GRUNDPRINZIP: ZAHLEN BRAUCHEN KONTEXT</a:t>
-            </a:r>
-          </a:p>
-          <a:p>
-            <a:pPr>
-              <a:spcBef>
-                <a:spcPts val="1000"/>
-              </a:spcBef>
-              <a:spcAft>
-                <a:spcPts val="200"/>
-              </a:spcAft>
-            </a:pPr>
-            <a:r>
-              <a:rPr sz="800" b="1">
-                <a:solidFill>
-                  <a:srgbClr val="78808C"/>
-                </a:solidFill>
-                <a:latin typeface="JetBrains Mono"/>
-              </a:rPr>
-              <a:t>VIER BRANCHENPROFILE FÜR DEN BERATUNGSALLTAG</a:t>
+              <a:t>FINANZIERUNGSSTRUKTUR: KMU VS. GROSSUNTERNEHMEN</a:t>
             </a:r>
           </a:p>
           <a:p>
@@ -6709,7 +6886,7 @@
                 </a:solidFill>
                 <a:latin typeface="Arial"/>
               </a:rPr>
-              <a:t>Branchenprofil A – Handwerk (z.B. Schreiner, Maler, Sanitär, Bäcker)</a:t>
+              <a:t>Die Finanzierungsstruktur von KMU unterscheidet sich strukturell von der großer Unternehmen. Diese Unterschiede zu kennen, ist die Grundlage jeder fundierten Kreditanalyse.</a:t>
             </a:r>
           </a:p>
           <a:p>
@@ -6728,7 +6905,7 @@
                 </a:solidFill>
                 <a:latin typeface="Arial"/>
               </a:rPr>
-              <a:t>Das Handwerk ist der typischste KMU-Sektor im süddeutschen VR-Kundenbestand. Charakteristisch:</a:t>
+              <a:t>Eigenkapitalquoten:</a:t>
             </a:r>
           </a:p>
           <a:p>
@@ -6747,7 +6924,7 @@
                 </a:solidFill>
                 <a:latin typeface="Arial"/>
               </a:rPr>
-              <a:t>▸  Eigenkapitalquote: Ø 18–24 % (niedriger als Industrie, weil arbeitsintensiv und wenig Anlageintensität)</a:t>
+              <a:t>▸  Steuerliche Optimierung: KMU-Inhaber entnehmen Gewinne für den privaten Lebensunterhalt, statt sie im Betrieb zu thesaurieren</a:t>
             </a:r>
           </a:p>
           <a:p>
@@ -6766,7 +6943,7 @@
                 </a:solidFill>
                 <a:latin typeface="Arial"/>
               </a:rPr>
-              <a:t>▸  Finanzierungsbedarf: Kontokorrentlinie für saisonale Spitzen und Materialvorfinanzierung, Investitionskredite für Fahrzeuge, Maschinen und Werkzeuge, gelegentlich Betriebsgebäude</a:t>
+              <a:t>▸  Verflechtung Privat/Betrieb: Privatliegenschaften des Inhabers erscheinen nicht in der Bilanz, sind aber reale Sicherheiten</a:t>
             </a:r>
           </a:p>
           <a:p>
@@ -6785,7 +6962,7 @@
                 </a:solidFill>
                 <a:latin typeface="Arial"/>
               </a:rPr>
-              <a:t>▸  Typische Risiken: Fachkräftemangel, Materialkostenvolatilität (Holz, Stahl, Kupfer), Auftragsschwankungen durch Baukonjunktur</a:t>
+              <a:t>▸  Vorsichtige Bilanzpolitik: Viele KMU nutzen steuerliche Abschreibungsmöglichkeiten maximal – die Bilanz ist dadurch "schlechter" als die wirtschaftliche Realität</a:t>
             </a:r>
           </a:p>
           <a:p>
@@ -6798,13 +6975,13 @@
               </a:spcAft>
             </a:pPr>
             <a:r>
-              <a:rPr sz="1300">
+              <a:rPr sz="1200">
                 <a:solidFill>
                   <a:srgbClr val="3D5466"/>
                 </a:solidFill>
                 <a:latin typeface="Arial"/>
               </a:rPr>
-              <a:t>▸  Was frage ich als Berater: "Wie gut sind Sie mit Aufträgen ausgelastet – haben Sie eine Warteliste?" / "Haben Sie genug qualifiziertes Personal, um Ihre Aufträge abzuarbeiten?"</a:t>
+              <a:t>Finanzierungsquellen:</a:t>
             </a:r>
           </a:p>
           <a:p>
@@ -6823,7 +7000,7 @@
                 </a:solidFill>
                 <a:latin typeface="Arial"/>
               </a:rPr>
-              <a:t>Branchenprofil B – Produzierendes Gewerbe / Maschinenbau</a:t>
+              <a:t>KMU finanzieren sich typischerweise durch drei Hauptquellen:</a:t>
             </a:r>
           </a:p>
           <a:p>
@@ -6842,7 +7019,7 @@
                 </a:solidFill>
                 <a:latin typeface="Arial"/>
               </a:rPr>
-              <a:t>▸  Eigenkapitalquote: Ø 28–35 % (höher, weil hoher Anlagevermögensanteil)</a:t>
+              <a:t>▸  Innenfinanzierung (Thesaurierung): Gewinne verbleiben im Unternehmen – bei inhabergeführten Betrieben stark limitiert durch private Entnahmen</a:t>
             </a:r>
           </a:p>
           <a:p>
@@ -6861,7 +7038,7 @@
                 </a:solidFill>
                 <a:latin typeface="Arial"/>
               </a:rPr>
-              <a:t>▸  Finanzierungsbedarf: Investitionskredite für Maschinen und Anlagen (oft langfristig, 7–15 Jahre), Exportfinanzierung, Anzahlungsfinanzierung bei Großaufträgen, Betriebsmittelkredite</a:t>
+              <a:t>▸  Bankkredite (Außenfinanzierung): Investitionskredite, Kontokorrentlinien, Avale – dominante Finanzierungsform</a:t>
             </a:r>
           </a:p>
           <a:p>
@@ -6880,7 +7057,26 @@
                 </a:solidFill>
                 <a:latin typeface="Arial"/>
               </a:rPr>
-              <a:t>▸  Typische Risiken: Exportabhängigkeit (Wechselkurs, geopolitische Risiken), Energiekostenentwicklung, Lieferkettenstörungen</a:t>
+              <a:t>▸  Öffentliche Förderprogramme: KfW-Unternehmenskredit, ERP-Kapital für Gründung, Landesförderprogramme – häufig günstiger als Hausbankkonditionen, oft nicht ausgeschöpft</a:t>
+            </a:r>
+          </a:p>
+          <a:p>
+            <a:pPr>
+              <a:spcBef>
+                <a:spcPts val="400"/>
+              </a:spcBef>
+              <a:spcAft>
+                <a:spcPts val="200"/>
+              </a:spcAft>
+            </a:pPr>
+            <a:r>
+              <a:rPr sz="1200">
+                <a:solidFill>
+                  <a:srgbClr val="3D5466"/>
+                </a:solidFill>
+                <a:latin typeface="Arial"/>
+              </a:rPr>
+              <a:t>Die drei meistgenutzten Förderprogramme in der süddeutschen VR-Praxis:</a:t>
             </a:r>
           </a:p>
         </p:txBody>
@@ -6996,7 +7192,7 @@
             <a:avLst/>
           </a:prstGeom>
           <a:solidFill>
-            <a:srgbClr val="FFFFFF"/>
+            <a:srgbClr val="EDEDF3"/>
           </a:solidFill>
           <a:ln>
             <a:noFill/>
@@ -7097,43 +7293,51 @@
                 </a:solidFill>
                 <a:latin typeface="JetBrains Mono"/>
               </a:rPr>
-              <a:t>M06  ·  SCHAUBILD</a:t>
-            </a:r>
-          </a:p>
-        </p:txBody>
-      </p:sp>
-      <p:sp>
-        <p:nvSpPr>
-          <p:cNvPr id="5" name="TextBox 4"/>
-          <p:cNvSpPr txBox="1"/>
-          <p:nvPr/>
-        </p:nvSpPr>
-        <p:spPr>
-          <a:xfrm>
-            <a:off x="685800" y="502920"/>
-            <a:ext cx="10817352" cy="594360"/>
-          </a:xfrm>
-          <a:prstGeom prst="rect">
-            <a:avLst/>
-          </a:prstGeom>
-          <a:noFill/>
-        </p:spPr>
-        <p:txBody>
-          <a:bodyPr wrap="square">
-            <a:spAutoFit/>
-          </a:bodyPr>
-          <a:lstStyle/>
-          <a:p>
-            <a:pPr algn="l"/>
-            <a:r>
-              <a:rPr sz="2000" b="1" i="0">
-                <a:solidFill>
-                  <a:srgbClr val="1F2C56"/>
-                </a:solidFill>
-                <a:latin typeface="Source Serif 4"/>
-              </a:rPr>
-              <a:t>Fünf-Fragen-Schema für den KMU-Beratungseinstieg</a:t>
-            </a:r>
+              <a:t>M06  ·  INHALT</a:t>
+            </a:r>
+          </a:p>
+        </p:txBody>
+      </p:sp>
+      <p:sp>
+        <p:nvSpPr>
+          <p:cNvPr id="5" name="Rectangle 4"/>
+          <p:cNvSpPr/>
+          <p:nvPr/>
+        </p:nvSpPr>
+        <p:spPr>
+          <a:xfrm>
+            <a:off x="0" y="1234440"/>
+            <a:ext cx="12188952" cy="12700"/>
+          </a:xfrm>
+          <a:prstGeom prst="rect">
+            <a:avLst/>
+          </a:prstGeom>
+          <a:solidFill>
+            <a:srgbClr val="D8DFE4"/>
+          </a:solidFill>
+          <a:ln>
+            <a:noFill/>
+          </a:ln>
+        </p:spPr>
+        <p:style>
+          <a:lnRef idx="1">
+            <a:schemeClr val="accent1"/>
+          </a:lnRef>
+          <a:fillRef idx="3">
+            <a:schemeClr val="accent1"/>
+          </a:fillRef>
+          <a:effectRef idx="2">
+            <a:schemeClr val="accent1"/>
+          </a:effectRef>
+          <a:fontRef idx="minor">
+            <a:schemeClr val="lt1"/>
+          </a:fontRef>
+        </p:style>
+        <p:txBody>
+          <a:bodyPr rtlCol="0" anchor="ctr"/>
+          <a:lstStyle/>
+          <a:p>
+            <a:pPr algn="ctr"/>
           </a:p>
         </p:txBody>
       </p:sp>
@@ -7145,8 +7349,8 @@
         </p:nvSpPr>
         <p:spPr>
           <a:xfrm>
-            <a:off x="685800" y="1143000"/>
-            <a:ext cx="10817352" cy="25400"/>
+            <a:off x="685800" y="502920"/>
+            <a:ext cx="36576" cy="658368"/>
           </a:xfrm>
           <a:prstGeom prst="rect">
             <a:avLst/>
@@ -7180,33 +7384,295 @@
           </a:p>
         </p:txBody>
       </p:sp>
-      <p:pic>
-        <p:nvPicPr>
-          <p:cNvPr id="7" name="Picture 6" descr="image.png"/>
-          <p:cNvPicPr>
-            <a:picLocks noChangeAspect="1"/>
-          </p:cNvPicPr>
-          <p:nvPr/>
-        </p:nvPicPr>
-        <p:blipFill>
-          <a:blip r:embed="rId2"/>
-          <a:stretch>
-            <a:fillRect/>
-          </a:stretch>
-        </p:blipFill>
-        <p:spPr>
-          <a:xfrm>
-            <a:off x="2303489" y="1325880"/>
-            <a:ext cx="7581973" cy="4937760"/>
-          </a:xfrm>
-          <a:prstGeom prst="rect">
-            <a:avLst/>
-          </a:prstGeom>
-        </p:spPr>
-      </p:pic>
-      <p:sp>
-        <p:nvSpPr>
-          <p:cNvPr id="8" name="Rectangle 7"/>
+      <p:sp>
+        <p:nvSpPr>
+          <p:cNvPr id="7" name="TextBox 6"/>
+          <p:cNvSpPr txBox="1"/>
+          <p:nvPr/>
+        </p:nvSpPr>
+        <p:spPr>
+          <a:xfrm>
+            <a:off x="813816" y="502920"/>
+            <a:ext cx="10634472" cy="685800"/>
+          </a:xfrm>
+          <a:prstGeom prst="rect">
+            <a:avLst/>
+          </a:prstGeom>
+          <a:noFill/>
+        </p:spPr>
+        <p:txBody>
+          <a:bodyPr wrap="square">
+            <a:spAutoFit/>
+          </a:bodyPr>
+          <a:lstStyle/>
+          <a:p>
+            <a:pPr algn="l"/>
+            <a:r>
+              <a:rPr sz="2400" b="1" i="0">
+                <a:solidFill>
+                  <a:srgbClr val="1F2C56"/>
+                </a:solidFill>
+                <a:latin typeface="Source Serif 4"/>
+              </a:rPr>
+              <a:t>Theorie-Input 3: Einstieg in die Branchenanalyse</a:t>
+            </a:r>
+          </a:p>
+        </p:txBody>
+      </p:sp>
+      <p:sp>
+        <p:nvSpPr>
+          <p:cNvPr id="8" name="TextBox 7"/>
+          <p:cNvSpPr txBox="1"/>
+          <p:nvPr/>
+        </p:nvSpPr>
+        <p:spPr>
+          <a:xfrm>
+            <a:off x="685800" y="1417320"/>
+            <a:ext cx="10817352" cy="5029200"/>
+          </a:xfrm>
+          <a:prstGeom prst="rect">
+            <a:avLst/>
+          </a:prstGeom>
+          <a:noFill/>
+        </p:spPr>
+        <p:txBody>
+          <a:bodyPr wrap="square">
+            <a:spAutoFit/>
+          </a:bodyPr>
+          <a:lstStyle/>
+          <a:p>
+            <a:pPr>
+              <a:spcBef>
+                <a:spcPts val="1000"/>
+              </a:spcBef>
+              <a:spcAft>
+                <a:spcPts val="200"/>
+              </a:spcAft>
+            </a:pPr>
+            <a:r>
+              <a:rPr sz="800" b="1">
+                <a:solidFill>
+                  <a:srgbClr val="78808C"/>
+                </a:solidFill>
+                <a:latin typeface="JetBrains Mono"/>
+              </a:rPr>
+              <a:t>DAS GRUNDPRINZIP: ZAHLEN BRAUCHEN KONTEXT</a:t>
+            </a:r>
+          </a:p>
+          <a:p>
+            <a:pPr>
+              <a:spcBef>
+                <a:spcPts val="1000"/>
+              </a:spcBef>
+              <a:spcAft>
+                <a:spcPts val="200"/>
+              </a:spcAft>
+            </a:pPr>
+            <a:r>
+              <a:rPr sz="800" b="1">
+                <a:solidFill>
+                  <a:srgbClr val="78808C"/>
+                </a:solidFill>
+                <a:latin typeface="JetBrains Mono"/>
+              </a:rPr>
+              <a:t>VIER BRANCHENPROFILE FÜR DEN BERATUNGSALLTAG</a:t>
+            </a:r>
+          </a:p>
+          <a:p>
+            <a:pPr>
+              <a:spcBef>
+                <a:spcPts val="400"/>
+              </a:spcBef>
+              <a:spcAft>
+                <a:spcPts val="200"/>
+              </a:spcAft>
+            </a:pPr>
+            <a:r>
+              <a:rPr sz="1200">
+                <a:solidFill>
+                  <a:srgbClr val="3D5466"/>
+                </a:solidFill>
+                <a:latin typeface="Arial"/>
+              </a:rPr>
+              <a:t>Branchenprofil A – Handwerk (z.B. Schreiner, Maler, Sanitär, Bäcker)</a:t>
+            </a:r>
+          </a:p>
+          <a:p>
+            <a:pPr>
+              <a:spcBef>
+                <a:spcPts val="400"/>
+              </a:spcBef>
+              <a:spcAft>
+                <a:spcPts val="200"/>
+              </a:spcAft>
+            </a:pPr>
+            <a:r>
+              <a:rPr sz="1200">
+                <a:solidFill>
+                  <a:srgbClr val="3D5466"/>
+                </a:solidFill>
+                <a:latin typeface="Arial"/>
+              </a:rPr>
+              <a:t>Das Handwerk ist der typischste KMU-Sektor im süddeutschen VR-Kundenbestand. Charakteristisch:</a:t>
+            </a:r>
+          </a:p>
+          <a:p>
+            <a:pPr>
+              <a:spcBef>
+                <a:spcPts val="400"/>
+              </a:spcBef>
+              <a:spcAft>
+                <a:spcPts val="200"/>
+              </a:spcAft>
+            </a:pPr>
+            <a:r>
+              <a:rPr sz="1300">
+                <a:solidFill>
+                  <a:srgbClr val="3D5466"/>
+                </a:solidFill>
+                <a:latin typeface="Arial"/>
+              </a:rPr>
+              <a:t>▸  Eigenkapitalquote: Ø 18–24 % (niedriger als Industrie, weil arbeitsintensiv und wenig Anlageintensität)</a:t>
+            </a:r>
+          </a:p>
+          <a:p>
+            <a:pPr>
+              <a:spcBef>
+                <a:spcPts val="400"/>
+              </a:spcBef>
+              <a:spcAft>
+                <a:spcPts val="200"/>
+              </a:spcAft>
+            </a:pPr>
+            <a:r>
+              <a:rPr sz="1300">
+                <a:solidFill>
+                  <a:srgbClr val="3D5466"/>
+                </a:solidFill>
+                <a:latin typeface="Arial"/>
+              </a:rPr>
+              <a:t>▸  Finanzierungsbedarf: Kontokorrentlinie für saisonale Spitzen und Materialvorfinanzierung, Investitionskredite für Fahrzeuge, Maschinen und Werkzeuge, gelegentlich Betriebsgebäude</a:t>
+            </a:r>
+          </a:p>
+          <a:p>
+            <a:pPr>
+              <a:spcBef>
+                <a:spcPts val="400"/>
+              </a:spcBef>
+              <a:spcAft>
+                <a:spcPts val="200"/>
+              </a:spcAft>
+            </a:pPr>
+            <a:r>
+              <a:rPr sz="1300">
+                <a:solidFill>
+                  <a:srgbClr val="3D5466"/>
+                </a:solidFill>
+                <a:latin typeface="Arial"/>
+              </a:rPr>
+              <a:t>▸  Typische Risiken: Fachkräftemangel, Materialkostenvolatilität (Holz, Stahl, Kupfer), Auftragsschwankungen durch Baukonjunktur</a:t>
+            </a:r>
+          </a:p>
+          <a:p>
+            <a:pPr>
+              <a:spcBef>
+                <a:spcPts val="400"/>
+              </a:spcBef>
+              <a:spcAft>
+                <a:spcPts val="200"/>
+              </a:spcAft>
+            </a:pPr>
+            <a:r>
+              <a:rPr sz="1300">
+                <a:solidFill>
+                  <a:srgbClr val="3D5466"/>
+                </a:solidFill>
+                <a:latin typeface="Arial"/>
+              </a:rPr>
+              <a:t>▸  Was frage ich als Berater: "Wie gut sind Sie mit Aufträgen ausgelastet – haben Sie eine Warteliste?" / "Haben Sie genug qualifiziertes Personal, um Ihre Aufträge abzuarbeiten?"</a:t>
+            </a:r>
+          </a:p>
+          <a:p>
+            <a:pPr>
+              <a:spcBef>
+                <a:spcPts val="400"/>
+              </a:spcBef>
+              <a:spcAft>
+                <a:spcPts val="200"/>
+              </a:spcAft>
+            </a:pPr>
+            <a:r>
+              <a:rPr sz="1200">
+                <a:solidFill>
+                  <a:srgbClr val="3D5466"/>
+                </a:solidFill>
+                <a:latin typeface="Arial"/>
+              </a:rPr>
+              <a:t>Branchenprofil B – Produzierendes Gewerbe / Maschinenbau</a:t>
+            </a:r>
+          </a:p>
+          <a:p>
+            <a:pPr>
+              <a:spcBef>
+                <a:spcPts val="400"/>
+              </a:spcBef>
+              <a:spcAft>
+                <a:spcPts val="200"/>
+              </a:spcAft>
+            </a:pPr>
+            <a:r>
+              <a:rPr sz="1300">
+                <a:solidFill>
+                  <a:srgbClr val="3D5466"/>
+                </a:solidFill>
+                <a:latin typeface="Arial"/>
+              </a:rPr>
+              <a:t>▸  Eigenkapitalquote: Ø 28–35 % (höher, weil hoher Anlagevermögensanteil)</a:t>
+            </a:r>
+          </a:p>
+          <a:p>
+            <a:pPr>
+              <a:spcBef>
+                <a:spcPts val="400"/>
+              </a:spcBef>
+              <a:spcAft>
+                <a:spcPts val="200"/>
+              </a:spcAft>
+            </a:pPr>
+            <a:r>
+              <a:rPr sz="1300">
+                <a:solidFill>
+                  <a:srgbClr val="3D5466"/>
+                </a:solidFill>
+                <a:latin typeface="Arial"/>
+              </a:rPr>
+              <a:t>▸  Finanzierungsbedarf: Investitionskredite für Maschinen und Anlagen (oft langfristig, 7–15 Jahre), Exportfinanzierung, Anzahlungsfinanzierung bei Großaufträgen, Betriebsmittelkredite</a:t>
+            </a:r>
+          </a:p>
+          <a:p>
+            <a:pPr>
+              <a:spcBef>
+                <a:spcPts val="400"/>
+              </a:spcBef>
+              <a:spcAft>
+                <a:spcPts val="200"/>
+              </a:spcAft>
+            </a:pPr>
+            <a:r>
+              <a:rPr sz="1300">
+                <a:solidFill>
+                  <a:srgbClr val="3D5466"/>
+                </a:solidFill>
+                <a:latin typeface="Arial"/>
+              </a:rPr>
+              <a:t>▸  Typische Risiken: Exportabhängigkeit (Wechselkurs, geopolitische Risiken), Energiekostenentwicklung, Lieferkettenstörungen</a:t>
+            </a:r>
+          </a:p>
+        </p:txBody>
+      </p:sp>
+      <p:sp>
+        <p:nvSpPr>
+          <p:cNvPr id="9" name="Rectangle 8"/>
           <p:cNvSpPr/>
           <p:nvPr/>
         </p:nvSpPr>
@@ -7249,7 +7715,7 @@
       </p:sp>
       <p:sp>
         <p:nvSpPr>
-          <p:cNvPr id="9" name="TextBox 8"/>
+          <p:cNvPr id="10" name="TextBox 9"/>
           <p:cNvSpPr txBox="1"/>
           <p:nvPr/>
         </p:nvSpPr>
@@ -7278,41 +7744,6 @@
                 <a:latin typeface="JetBrains Mono"/>
               </a:rPr>
               <a:t>Benedikt Zoller Coaching  ·  FKB Campus  ·  M06</a:t>
-            </a:r>
-          </a:p>
-        </p:txBody>
-      </p:sp>
-      <p:sp>
-        <p:nvSpPr>
-          <p:cNvPr id="10" name="TextBox 9"/>
-          <p:cNvSpPr txBox="1"/>
-          <p:nvPr/>
-        </p:nvSpPr>
-        <p:spPr>
-          <a:xfrm>
-            <a:off x="7176211" y="6583680"/>
-            <a:ext cx="4326940" cy="256032"/>
-          </a:xfrm>
-          <a:prstGeom prst="rect">
-            <a:avLst/>
-          </a:prstGeom>
-          <a:noFill/>
-        </p:spPr>
-        <p:txBody>
-          <a:bodyPr wrap="none">
-            <a:spAutoFit/>
-          </a:bodyPr>
-          <a:lstStyle/>
-          <a:p>
-            <a:pPr algn="r"/>
-            <a:r>
-              <a:rPr sz="700">
-                <a:solidFill>
-                  <a:srgbClr val="A0B4D2"/>
-                </a:solidFill>
-                <a:latin typeface="JetBrains Mono"/>
-              </a:rPr>
-              <a:t>Schaubild</a:t>
             </a:r>
           </a:p>
         </p:txBody>
@@ -7350,7 +7781,7 @@
             <a:avLst/>
           </a:prstGeom>
           <a:solidFill>
-            <a:srgbClr val="EDEDF3"/>
+            <a:srgbClr val="FFFFFF"/>
           </a:solidFill>
           <a:ln>
             <a:noFill/>
@@ -7451,51 +7882,43 @@
                 </a:solidFill>
                 <a:latin typeface="JetBrains Mono"/>
               </a:rPr>
-              <a:t>M06  ·  INHALT</a:t>
-            </a:r>
-          </a:p>
-        </p:txBody>
-      </p:sp>
-      <p:sp>
-        <p:nvSpPr>
-          <p:cNvPr id="5" name="Rectangle 4"/>
-          <p:cNvSpPr/>
-          <p:nvPr/>
-        </p:nvSpPr>
-        <p:spPr>
-          <a:xfrm>
-            <a:off x="0" y="1234440"/>
-            <a:ext cx="12188952" cy="12700"/>
-          </a:xfrm>
-          <a:prstGeom prst="rect">
-            <a:avLst/>
-          </a:prstGeom>
-          <a:solidFill>
-            <a:srgbClr val="D8DFE4"/>
-          </a:solidFill>
-          <a:ln>
-            <a:noFill/>
-          </a:ln>
-        </p:spPr>
-        <p:style>
-          <a:lnRef idx="1">
-            <a:schemeClr val="accent1"/>
-          </a:lnRef>
-          <a:fillRef idx="3">
-            <a:schemeClr val="accent1"/>
-          </a:fillRef>
-          <a:effectRef idx="2">
-            <a:schemeClr val="accent1"/>
-          </a:effectRef>
-          <a:fontRef idx="minor">
-            <a:schemeClr val="lt1"/>
-          </a:fontRef>
-        </p:style>
-        <p:txBody>
-          <a:bodyPr rtlCol="0" anchor="ctr"/>
-          <a:lstStyle/>
-          <a:p>
-            <a:pPr algn="ctr"/>
+              <a:t>M06  ·  SCHAUBILD</a:t>
+            </a:r>
+          </a:p>
+        </p:txBody>
+      </p:sp>
+      <p:sp>
+        <p:nvSpPr>
+          <p:cNvPr id="5" name="TextBox 4"/>
+          <p:cNvSpPr txBox="1"/>
+          <p:nvPr/>
+        </p:nvSpPr>
+        <p:spPr>
+          <a:xfrm>
+            <a:off x="685800" y="502920"/>
+            <a:ext cx="10817352" cy="594360"/>
+          </a:xfrm>
+          <a:prstGeom prst="rect">
+            <a:avLst/>
+          </a:prstGeom>
+          <a:noFill/>
+        </p:spPr>
+        <p:txBody>
+          <a:bodyPr wrap="square">
+            <a:spAutoFit/>
+          </a:bodyPr>
+          <a:lstStyle/>
+          <a:p>
+            <a:pPr algn="l"/>
+            <a:r>
+              <a:rPr sz="2000" b="1" i="0">
+                <a:solidFill>
+                  <a:srgbClr val="1F2C56"/>
+                </a:solidFill>
+                <a:latin typeface="Source Serif 4"/>
+              </a:rPr>
+              <a:t>Fünf-Fragen-Schema für den KMU-Beratungseinstieg</a:t>
+            </a:r>
           </a:p>
         </p:txBody>
       </p:sp>
@@ -7507,8 +7930,8 @@
         </p:nvSpPr>
         <p:spPr>
           <a:xfrm>
-            <a:off x="685800" y="502920"/>
-            <a:ext cx="36576" cy="658368"/>
+            <a:off x="685800" y="1143000"/>
+            <a:ext cx="10817352" cy="25400"/>
           </a:xfrm>
           <a:prstGeom prst="rect">
             <a:avLst/>
@@ -7542,219 +7965,33 @@
           </a:p>
         </p:txBody>
       </p:sp>
-      <p:sp>
-        <p:nvSpPr>
-          <p:cNvPr id="7" name="TextBox 6"/>
-          <p:cNvSpPr txBox="1"/>
-          <p:nvPr/>
-        </p:nvSpPr>
-        <p:spPr>
-          <a:xfrm>
-            <a:off x="813816" y="502920"/>
-            <a:ext cx="10634472" cy="685800"/>
-          </a:xfrm>
-          <a:prstGeom prst="rect">
-            <a:avLst/>
-          </a:prstGeom>
-          <a:noFill/>
-        </p:spPr>
-        <p:txBody>
-          <a:bodyPr wrap="square">
-            <a:spAutoFit/>
-          </a:bodyPr>
-          <a:lstStyle/>
-          <a:p>
-            <a:pPr algn="l"/>
-            <a:r>
-              <a:rPr sz="2400" b="1" i="0">
-                <a:solidFill>
-                  <a:srgbClr val="1F2C56"/>
-                </a:solidFill>
-                <a:latin typeface="Source Serif 4"/>
-              </a:rPr>
-              <a:t>Praxiscase: Bergmann Holzmanufaktur GmbH &amp; Co. KG</a:t>
-            </a:r>
-          </a:p>
-        </p:txBody>
-      </p:sp>
-      <p:sp>
-        <p:nvSpPr>
-          <p:cNvPr id="8" name="TextBox 7"/>
-          <p:cNvSpPr txBox="1"/>
-          <p:nvPr/>
-        </p:nvSpPr>
-        <p:spPr>
-          <a:xfrm>
-            <a:off x="685800" y="1417320"/>
-            <a:ext cx="10817352" cy="5029200"/>
-          </a:xfrm>
-          <a:prstGeom prst="rect">
-            <a:avLst/>
-          </a:prstGeom>
-          <a:noFill/>
-        </p:spPr>
-        <p:txBody>
-          <a:bodyPr wrap="square">
-            <a:spAutoFit/>
-          </a:bodyPr>
-          <a:lstStyle/>
-          <a:p>
-            <a:pPr>
-              <a:spcBef>
-                <a:spcPts val="1000"/>
-              </a:spcBef>
-              <a:spcAft>
-                <a:spcPts val="200"/>
-              </a:spcAft>
-            </a:pPr>
-            <a:r>
-              <a:rPr sz="800" b="1">
-                <a:solidFill>
-                  <a:srgbClr val="78808C"/>
-                </a:solidFill>
-                <a:latin typeface="JetBrains Mono"/>
-              </a:rPr>
-              <a:t>UNTERNEHMENSPORTRÄT</a:t>
-            </a:r>
-          </a:p>
-          <a:p>
-            <a:pPr>
-              <a:spcBef>
-                <a:spcPts val="1000"/>
-              </a:spcBef>
-              <a:spcAft>
-                <a:spcPts val="200"/>
-              </a:spcAft>
-            </a:pPr>
-            <a:r>
-              <a:rPr sz="800" b="1">
-                <a:solidFill>
-                  <a:srgbClr val="78808C"/>
-                </a:solidFill>
-                <a:latin typeface="JetBrains Mono"/>
-              </a:rPr>
-              <a:t>FINANZDATEN (FIKTIV, PLAUSIBEL FÜR HOLZHANDWERK)</a:t>
-            </a:r>
-          </a:p>
-          <a:p>
-            <a:pPr>
-              <a:spcBef>
-                <a:spcPts val="400"/>
-              </a:spcBef>
-              <a:spcAft>
-                <a:spcPts val="200"/>
-              </a:spcAft>
-            </a:pPr>
-            <a:r>
-              <a:rPr sz="1200">
-                <a:solidFill>
-                  <a:srgbClr val="3D5466"/>
-                </a:solidFill>
-                <a:latin typeface="Arial"/>
-              </a:rPr>
-              <a:t>*Branchenwerte Holzgewerbe / Tischlerhandwerk, Quelle: Deutsche Bundesbank, Unternehmensabschlussstatistik (Bundesbank, laufend )</a:t>
-            </a:r>
-          </a:p>
-          <a:p>
-            <a:pPr>
-              <a:spcBef>
-                <a:spcPts val="1000"/>
-              </a:spcBef>
-              <a:spcAft>
-                <a:spcPts val="200"/>
-              </a:spcAft>
-            </a:pPr>
-            <a:r>
-              <a:rPr sz="800" b="1">
-                <a:solidFill>
-                  <a:srgbClr val="78808C"/>
-                </a:solidFill>
-                <a:latin typeface="JetBrains Mono"/>
-              </a:rPr>
-              <a:t>AUFGABEN</a:t>
-            </a:r>
-          </a:p>
-          <a:p>
-            <a:pPr>
-              <a:spcBef>
-                <a:spcPts val="400"/>
-              </a:spcBef>
-              <a:spcAft>
-                <a:spcPts val="200"/>
-              </a:spcAft>
-            </a:pPr>
-            <a:r>
-              <a:rPr sz="1200">
-                <a:solidFill>
-                  <a:srgbClr val="3D5466"/>
-                </a:solidFill>
-                <a:latin typeface="Arial"/>
-              </a:rPr>
-              <a:t>Aufgabe 1 – Klassifizierung (LZ-1):</a:t>
-            </a:r>
-          </a:p>
-          <a:p>
-            <a:pPr>
-              <a:spcBef>
-                <a:spcPts val="400"/>
-              </a:spcBef>
-              <a:spcAft>
-                <a:spcPts val="200"/>
-              </a:spcAft>
-            </a:pPr>
-            <a:r>
-              <a:rPr sz="1200">
-                <a:solidFill>
-                  <a:srgbClr val="3D5466"/>
-                </a:solidFill>
-                <a:latin typeface="Arial"/>
-              </a:rPr>
-              <a:t>Aufgabe 2 – Typologisierung und Risikofelder (LZ-2/LZ-3):</a:t>
-            </a:r>
-          </a:p>
-          <a:p>
-            <a:pPr>
-              <a:spcBef>
-                <a:spcPts val="400"/>
-              </a:spcBef>
-              <a:spcAft>
-                <a:spcPts val="200"/>
-              </a:spcAft>
-            </a:pPr>
-            <a:r>
-              <a:rPr sz="1200">
-                <a:solidFill>
-                  <a:srgbClr val="3D5466"/>
-                </a:solidFill>
-                <a:latin typeface="Arial"/>
-              </a:rPr>
-              <a:t>Aufgabe 3 – 5-Fragen-Schema anwenden (LZ-4):</a:t>
-            </a:r>
-          </a:p>
-          <a:p>
-            <a:pPr>
-              <a:spcBef>
-                <a:spcPts val="400"/>
-              </a:spcBef>
-              <a:spcAft>
-                <a:spcPts val="200"/>
-              </a:spcAft>
-            </a:pPr>
-            <a:r>
-              <a:rPr sz="1200">
-                <a:solidFill>
-                  <a:srgbClr val="3D5466"/>
-                </a:solidFill>
-                <a:latin typeface="Arial"/>
-              </a:rPr>
-              <a:t>Aufgabe 4 – Kreditvorbereitung: KK-Analyse (LZ-3):</a:t>
-            </a:r>
-          </a:p>
-        </p:txBody>
-      </p:sp>
-      <p:sp>
-        <p:nvSpPr>
-          <p:cNvPr id="9" name="Rectangle 8"/>
+      <p:pic>
+        <p:nvPicPr>
+          <p:cNvPr id="7" name="Picture 6" descr="image.png"/>
+          <p:cNvPicPr>
+            <a:picLocks noChangeAspect="1"/>
+          </p:cNvPicPr>
+          <p:nvPr/>
+        </p:nvPicPr>
+        <p:blipFill>
+          <a:blip r:embed="rId2"/>
+          <a:stretch>
+            <a:fillRect/>
+          </a:stretch>
+        </p:blipFill>
+        <p:spPr>
+          <a:xfrm>
+            <a:off x="2303489" y="1325880"/>
+            <a:ext cx="7581973" cy="4937760"/>
+          </a:xfrm>
+          <a:prstGeom prst="rect">
+            <a:avLst/>
+          </a:prstGeom>
+        </p:spPr>
+      </p:pic>
+      <p:sp>
+        <p:nvSpPr>
+          <p:cNvPr id="8" name="Rectangle 7"/>
           <p:cNvSpPr/>
           <p:nvPr/>
         </p:nvSpPr>
@@ -7797,7 +8034,7 @@
       </p:sp>
       <p:sp>
         <p:nvSpPr>
-          <p:cNvPr id="10" name="TextBox 9"/>
+          <p:cNvPr id="9" name="TextBox 8"/>
           <p:cNvSpPr txBox="1"/>
           <p:nvPr/>
         </p:nvSpPr>
@@ -7826,6 +8063,41 @@
                 <a:latin typeface="JetBrains Mono"/>
               </a:rPr>
               <a:t>Benedikt Zoller Coaching  ·  FKB Campus  ·  M06</a:t>
+            </a:r>
+          </a:p>
+        </p:txBody>
+      </p:sp>
+      <p:sp>
+        <p:nvSpPr>
+          <p:cNvPr id="10" name="TextBox 9"/>
+          <p:cNvSpPr txBox="1"/>
+          <p:nvPr/>
+        </p:nvSpPr>
+        <p:spPr>
+          <a:xfrm>
+            <a:off x="7176211" y="6583680"/>
+            <a:ext cx="4326940" cy="256032"/>
+          </a:xfrm>
+          <a:prstGeom prst="rect">
+            <a:avLst/>
+          </a:prstGeom>
+          <a:noFill/>
+        </p:spPr>
+        <p:txBody>
+          <a:bodyPr wrap="none">
+            <a:spAutoFit/>
+          </a:bodyPr>
+          <a:lstStyle/>
+          <a:p>
+            <a:pPr algn="r"/>
+            <a:r>
+              <a:rPr sz="700">
+                <a:solidFill>
+                  <a:srgbClr val="A0B4D2"/>
+                </a:solidFill>
+                <a:latin typeface="JetBrains Mono"/>
+              </a:rPr>
+              <a:t>Schaubild</a:t>
             </a:r>
           </a:p>
         </p:txBody>
@@ -8085,7 +8357,7 @@
                 </a:solidFill>
                 <a:latin typeface="Source Serif 4"/>
               </a:rPr>
-              <a:t>Reflexionsfragen</a:t>
+              <a:t>Praxiscase: Bergmann Holzmanufaktur GmbH &amp; Co. KG</a:t>
             </a:r>
           </a:p>
         </p:txBody>
@@ -8111,6 +8383,44 @@
             <a:spAutoFit/>
           </a:bodyPr>
           <a:lstStyle/>
+          <a:p>
+            <a:pPr>
+              <a:spcBef>
+                <a:spcPts val="1000"/>
+              </a:spcBef>
+              <a:spcAft>
+                <a:spcPts val="200"/>
+              </a:spcAft>
+            </a:pPr>
+            <a:r>
+              <a:rPr sz="800" b="1">
+                <a:solidFill>
+                  <a:srgbClr val="78808C"/>
+                </a:solidFill>
+                <a:latin typeface="JetBrains Mono"/>
+              </a:rPr>
+              <a:t>UNTERNEHMENSPORTRÄT</a:t>
+            </a:r>
+          </a:p>
+          <a:p>
+            <a:pPr>
+              <a:spcBef>
+                <a:spcPts val="1000"/>
+              </a:spcBef>
+              <a:spcAft>
+                <a:spcPts val="200"/>
+              </a:spcAft>
+            </a:pPr>
+            <a:r>
+              <a:rPr sz="800" b="1">
+                <a:solidFill>
+                  <a:srgbClr val="78808C"/>
+                </a:solidFill>
+                <a:latin typeface="JetBrains Mono"/>
+              </a:rPr>
+              <a:t>FINANZDATEN (FIKTIV, PLAUSIBEL FÜR HOLZHANDWERK)</a:t>
+            </a:r>
+          </a:p>
           <a:p>
             <a:pPr>
               <a:spcBef>
@@ -8121,13 +8431,32 @@
               </a:spcAft>
             </a:pPr>
             <a:r>
-              <a:rPr sz="1300">
+              <a:rPr sz="1200">
                 <a:solidFill>
                   <a:srgbClr val="3D5466"/>
                 </a:solidFill>
                 <a:latin typeface="Arial"/>
               </a:rPr>
-              <a:t>▸  Verstehen (Bloom 2): Warum ist die Inhaberabhängigkeit bei einem Handwerksbetrieb mit 8 Mitarbeitern ein strukturell höheres Risiko als bei einem Produktionsbetrieb mit 80 Mitarbeitern – was verändert sich mit zunehmender Betriebsgröße strukturell?</a:t>
+              <a:t>*Branchenwerte Holzgewerbe / Tischlerhandwerk, Quelle: Deutsche Bundesbank, Unternehmensabschlussstatistik (Bundesbank, laufend )</a:t>
+            </a:r>
+          </a:p>
+          <a:p>
+            <a:pPr>
+              <a:spcBef>
+                <a:spcPts val="1000"/>
+              </a:spcBef>
+              <a:spcAft>
+                <a:spcPts val="200"/>
+              </a:spcAft>
+            </a:pPr>
+            <a:r>
+              <a:rPr sz="800" b="1">
+                <a:solidFill>
+                  <a:srgbClr val="78808C"/>
+                </a:solidFill>
+                <a:latin typeface="JetBrains Mono"/>
+              </a:rPr>
+              <a:t>AUFGABEN</a:t>
             </a:r>
           </a:p>
           <a:p>
@@ -8140,13 +8469,13 @@
               </a:spcAft>
             </a:pPr>
             <a:r>
-              <a:rPr sz="1300">
+              <a:rPr sz="1200">
                 <a:solidFill>
                   <a:srgbClr val="3D5466"/>
                 </a:solidFill>
                 <a:latin typeface="Arial"/>
               </a:rPr>
-              <a:t>▸  Anwenden (Bloom 3): Ein Kunde sagt Ihnen: "Wir sind kein KMU, wir sind ein mittelständisches Unternehmen." Wie reagieren Sie – was ist der begriffliche Unterschied, und was sagt das über die Selbstwahrnehmung des Inhabers?</a:t>
+              <a:t>Aufgabe 1 – Klassifizierung (LZ-1):</a:t>
             </a:r>
           </a:p>
           <a:p>
@@ -8159,13 +8488,51 @@
               </a:spcAft>
             </a:pPr>
             <a:r>
-              <a:rPr sz="1300">
+              <a:rPr sz="1200">
                 <a:solidFill>
                   <a:srgbClr val="3D5466"/>
                 </a:solidFill>
                 <a:latin typeface="Arial"/>
               </a:rPr>
-              <a:t>▸  Anwenden (Bloom 3): Bergmann Holzmanufaktur hat eine EK-Quote von 21 % – genau im Branchenmittel. Ein Kollege sagt: "Das ist unauffällig, kein Handlungsbedarf." Welche Informationen fehlen für eine vollständige Einschätzung? Was würden Sie als nächstes klären?</a:t>
+              <a:t>Aufgabe 2 – Typologisierung und Risikofelder (LZ-2/LZ-3):</a:t>
+            </a:r>
+          </a:p>
+          <a:p>
+            <a:pPr>
+              <a:spcBef>
+                <a:spcPts val="400"/>
+              </a:spcBef>
+              <a:spcAft>
+                <a:spcPts val="200"/>
+              </a:spcAft>
+            </a:pPr>
+            <a:r>
+              <a:rPr sz="1200">
+                <a:solidFill>
+                  <a:srgbClr val="3D5466"/>
+                </a:solidFill>
+                <a:latin typeface="Arial"/>
+              </a:rPr>
+              <a:t>Aufgabe 3 – 5-Fragen-Schema anwenden (LZ-4):</a:t>
+            </a:r>
+          </a:p>
+          <a:p>
+            <a:pPr>
+              <a:spcBef>
+                <a:spcPts val="400"/>
+              </a:spcBef>
+              <a:spcAft>
+                <a:spcPts val="200"/>
+              </a:spcAft>
+            </a:pPr>
+            <a:r>
+              <a:rPr sz="1200">
+                <a:solidFill>
+                  <a:srgbClr val="3D5466"/>
+                </a:solidFill>
+                <a:latin typeface="Arial"/>
+              </a:rPr>
+              <a:t>Aufgabe 4 – Kreditvorbereitung: KK-Analyse (LZ-3):</a:t>
             </a:r>
           </a:p>
         </p:txBody>

--- a/protected-downloads/praesentation/M06.pptx
+++ b/protected-downloads/praesentation/M06.pptx
@@ -15,6 +15,10 @@
     <p:sldId id="263" r:id="rId15"/>
     <p:sldId id="264" r:id="rId16"/>
     <p:sldId id="265" r:id="rId17"/>
+    <p:sldId id="266" r:id="rId18"/>
+    <p:sldId id="267" r:id="rId19"/>
+    <p:sldId id="268" r:id="rId20"/>
+    <p:sldId id="269" r:id="rId21"/>
   </p:sldIdLst>
   <p:sldSz cx="12188952" cy="6858000" type="screen4x3"/>
   <p:notesSz cx="6858000" cy="9144000"/>
@@ -511,7 +515,7 @@
           <a:lstStyle/>
           <a:p>
             <a:r>
-              <a:t>Siehe Trainerhandbuch (Sektion 3) für Moderationshinweise, Timing und erwartete Teilnehmerreaktionen.</a:t>
+              <a:t>Agenda aus dem Ablaufplan (Sektion 3.1). Timing und Pausen siehe Trainerhandbuch.</a:t>
             </a:r>
           </a:p>
         </p:txBody>
@@ -721,102 +725,7 @@
           <a:lstStyle/>
           <a:p>
             <a:r>
-              <a:t>Musterlösung (Trainer-Version – nicht für Teilnehmer sichtbar)</a:t>
-            </a:r>
-          </a:p>
-          <a:p>
-            <a:r>
-              <a:t>Zu Aufgabe 1:</a:t>
-            </a:r>
-          </a:p>
-          <a:p>
-            <a:r>
-              <a:t>IfM Bonn: ✓ KMU – 8 Beschäftigte &lt; 500, 1,8 Mio. EUR &lt; 50 Mio. EUR; inhabergeführt (Sabine Bergmann = Eigentümerin und Geschäftsführerin)</a:t>
-            </a:r>
-          </a:p>
-          <a:p>
-            <a:r>
-              <a:t>EU: Kleinunternehmen – &lt; 50 Beschäftigte, &lt; 10 Mio. EUR Umsatz; damit förderberechtigt für KfW-Kleinunternehmerkredite und EU-Strukturfonds</a:t>
-            </a:r>
-          </a:p>
-          <a:p>
-            <a:r>
-              <a:t>Zu Aufgabe 2:</a:t>
-            </a:r>
-          </a:p>
-          <a:p>
-            <a:r>
-              <a:t>Branchenprofil A (Handwerk), speziell Tischlerhandwerk / Holzgewerbe (WZ 16.29)</a:t>
-            </a:r>
-          </a:p>
-          <a:p>
-            <a:r>
-              <a:t>Risikofelder: (1) Inhaberabhängigkeit – Sabine Bergmann ist die einzige Führungskraft, kein Vertretungskonzept erkennbar; (2) Klumpenrisiko – bei 1,8 Mio. EUR Umsatz und 8 Mitarbeitern ist anzunehmen, dass wenige Großkunden dominieren; (3) Working-Capital-/Liquiditätsrisiko – Kontokorrentlinie bereits zu 71 % ausgeschöpft + laufender Investitionskredit; ein weiterer Kredit erhöht den Schuldendienst und engt den Liquiditätspuffer weiter ein; (4) Fachkräfterisiko – 3 von 8 Mitarbeitern sind Azubis, Abgang eines Gesellen = sofortige massive Kapazitätseinbuße; im Holzhandwerk 2025 das drängendste operative Risiko; (Nachfolgehinweis: Zwar 2020 vollzogen, aber Vater könnte noch informal eingebunden sein – dies als Gesprächspunkt vormerken, kein eigenständiges Hauptrisikofeld)</a:t>
-            </a:r>
-          </a:p>
-          <a:p>
-            <a:r>
-              <a:t>Zu Aufgabe 4:</a:t>
-            </a:r>
-          </a:p>
-          <a:p>
-            <a:r>
-              <a:t>Frage 1: Warum ist die KK-Linie so stark ausgeschöpft – strukturell (saisonale Spitze?) oder dauerhaft?</a:t>
-            </a:r>
-          </a:p>
-          <a:p>
-            <a:r>
-              <a:t>Frage 2: Reicht die Linie in ihrer aktuellen Höhe noch, wenn der neue Kredit läuft und die Jahresrate hinzukommt?</a:t>
-            </a:r>
-          </a:p>
-          <a:p>
-            <a:r>
-              <a:t>Frage 3: Müsste vor dem Investitionskredit erst die KK-Linie erhöht oder der KK-Saldo reduziert werden?</a:t>
-            </a:r>
-          </a:p>
-          <a:p>
-            <a:r>
-              <a:t>Reihenfolge: Erst KK-Situation klären (Gespräch über aktuelle Liquiditätslage), dann Tragfähigkeitsrechnung, dann Kreditgespräch. Wer zuerst den Investitionskredit bewilligt, riskiert eine Liquiditätsfalle.</a:t>
-            </a:r>
-          </a:p>
-          <a:p>
-            <a:r>
-              <a:t>Zu Aufgabe 3:</a:t>
-            </a:r>
-          </a:p>
-          <a:p>
-            <a:r>
-              <a:t>Beispiel-Formulierungen:</a:t>
-            </a:r>
-          </a:p>
-          <a:p>
-            <a:r>
-              <a:t>1. "Frau Bergmann, Sie bauen Möbel und Innenausbauten – haben Sie eher Privat- oder Gewerbekunden, und was macht bei Ihnen das bessere Geschäft?"</a:t>
-            </a:r>
-          </a:p>
-          <a:p>
-            <a:r>
-              <a:t>2. "Ihre größten Auftraggeber – gibt es da 2–3 Kunden, auf die ein großer Teil des Umsatzes entfällt?"</a:t>
-            </a:r>
-          </a:p>
-          <a:p>
-            <a:r>
-              <a:t>3. "Was ist gerade Ihr größtes Thema für die nächsten 12 Monate – ist es die Maschine, oder gibt es da noch mehr?"</a:t>
-            </a:r>
-          </a:p>
-          <a:p>
-            <a:r>
-              <a:t>4. "Wie haben Sie bisher größere Investitionen finanziert – eher aus eigener Kraft oder mit Bankunterstützung?"</a:t>
-            </a:r>
-          </a:p>
-          <a:p>
-            <a:r>
-              <a:t>5. "Frau Bergmann, ich frage Sie etwas, das viele selten durchdenken: Was würde passieren, wenn Sie 6 Monate krankheitsbedingt ausfallen würden – wer würde den Betrieb führen?"</a:t>
-            </a:r>
-          </a:p>
-          <a:p>
-            <a:r>
-              <a:t>Erwartete Antwort auf Frage 5: "Das wäre schwierig. Ich bin für alles zuständig – Kundenakquise, Auftragsplanung, die Maschinen kenne ich alle. Mein Mann könnte vielleicht einspringen, aber der hat einen anderen Job." → Beratungsopportunität: Schlüsselpersonenversicherung (R+V), ggf. Geschäftsführer-Krankengeldabsicherung.</a:t>
+              <a:t>Siehe Trainerhandbuch (Sektion 3) für Moderationshinweise, Timing und erwartete Teilnehmerreaktionen.</a:t>
             </a:r>
           </a:p>
         </p:txBody>
@@ -842,6 +751,171 @@
 </file>
 
 <file path=ppt/notesSlides/notesSlide5.xml><?xml version="1.0" encoding="utf-8"?>
+<p:notes xmlns:a="http://schemas.openxmlformats.org/drawingml/2006/main" xmlns:p="http://schemas.openxmlformats.org/presentationml/2006/main" xmlns:r="http://schemas.openxmlformats.org/officeDocument/2006/relationships">
+  <p:cSld>
+    <p:spTree>
+      <p:nvGrpSpPr>
+        <p:cNvPr id="1" name=""/>
+        <p:cNvGrpSpPr/>
+        <p:nvPr/>
+      </p:nvGrpSpPr>
+      <p:grpSpPr>
+        <a:xfrm>
+          <a:off x="0" y="0"/>
+          <a:ext cx="0" cy="0"/>
+          <a:chOff x="0" y="0"/>
+          <a:chExt cx="0" cy="0"/>
+        </a:xfrm>
+      </p:grpSpPr>
+      <p:sp>
+        <p:nvSpPr>
+          <p:cNvPr id="2" name="Slide Image Placeholder 1"/>
+          <p:cNvSpPr>
+            <a:spLocks noGrp="1"/>
+          </p:cNvSpPr>
+          <p:nvPr>
+            <p:ph type="sldImg" idx="2"/>
+          </p:nvPr>
+        </p:nvSpPr>
+        <p:spPr/>
+      </p:sp>
+      <p:sp>
+        <p:nvSpPr>
+          <p:cNvPr id="3" name="Notes Placeholder 2"/>
+          <p:cNvSpPr>
+            <a:spLocks noGrp="1"/>
+          </p:cNvSpPr>
+          <p:nvPr>
+            <p:ph type="body" idx="3" sz="quarter"/>
+          </p:nvPr>
+        </p:nvSpPr>
+        <p:spPr/>
+        <p:txBody>
+          <a:bodyPr/>
+          <a:lstStyle/>
+          <a:p>
+            <a:r>
+              <a:t>Musterlösung (Trainer-Version – nicht für Teilnehmer sichtbar)</a:t>
+            </a:r>
+          </a:p>
+          <a:p>
+            <a:r>
+              <a:t>Zu Aufgabe 1:</a:t>
+            </a:r>
+          </a:p>
+          <a:p>
+            <a:r>
+              <a:t>IfM Bonn: ✓ KMU – 8 Beschäftigte &lt; 500, 1,8 Mio. EUR &lt; 50 Mio. EUR; inhabergeführt (Sabine Bergmann = Eigentümerin und Geschäftsführerin)</a:t>
+            </a:r>
+          </a:p>
+          <a:p>
+            <a:r>
+              <a:t>EU: Kleinunternehmen – &lt; 50 Beschäftigte, &lt; 10 Mio. EUR Umsatz; damit förderberechtigt für KfW-Kleinunternehmerkredite und EU-Strukturfonds</a:t>
+            </a:r>
+          </a:p>
+          <a:p>
+            <a:r>
+              <a:t>Zu Aufgabe 2:</a:t>
+            </a:r>
+          </a:p>
+          <a:p>
+            <a:r>
+              <a:t>Branchenprofil A (Handwerk), speziell Tischlerhandwerk / Holzgewerbe (WZ 16.29)</a:t>
+            </a:r>
+          </a:p>
+          <a:p>
+            <a:r>
+              <a:t>Risikofelder: (1) Inhaberabhängigkeit – Sabine Bergmann ist die einzige Führungskraft, kein Vertretungskonzept erkennbar; (2) Klumpenrisiko – bei 1,8 Mio. EUR Umsatz und 8 Mitarbeitern ist anzunehmen, dass wenige Großkunden dominieren; (3) Working-Capital-/Liquiditätsrisiko – Kontokorrentlinie bereits zu 71 % ausgeschöpft + laufender Investitionskredit; ein weiterer Kredit erhöht den Schuldendienst und engt den Liquiditätspuffer weiter ein; (4) Fachkräfterisiko – 3 von 8 Mitarbeitern sind Azubis, Abgang eines Gesellen = sofortige massive Kapazitätseinbuße; im Holzhandwerk 2025 das drängendste operative Risiko; (Nachfolgehinweis: Zwar 2020 vollzogen, aber Vater könnte noch informal eingebunden sein – dies als Gesprächspunkt vormerken, kein eigenständiges Hauptrisikofeld)</a:t>
+            </a:r>
+          </a:p>
+          <a:p>
+            <a:r>
+              <a:t>Zu Aufgabe 4:</a:t>
+            </a:r>
+          </a:p>
+          <a:p>
+            <a:r>
+              <a:t>Frage 1: Warum ist die KK-Linie so stark ausgeschöpft – strukturell (saisonale Spitze?) oder dauerhaft?</a:t>
+            </a:r>
+          </a:p>
+          <a:p>
+            <a:r>
+              <a:t>Frage 2: Reicht die Linie in ihrer aktuellen Höhe noch, wenn der neue Kredit läuft und die Jahresrate hinzukommt?</a:t>
+            </a:r>
+          </a:p>
+          <a:p>
+            <a:r>
+              <a:t>Frage 3: Müsste vor dem Investitionskredit erst die KK-Linie erhöht oder der KK-Saldo reduziert werden?</a:t>
+            </a:r>
+          </a:p>
+          <a:p>
+            <a:r>
+              <a:t>Reihenfolge: Erst KK-Situation klären (Gespräch über aktuelle Liquiditätslage), dann Tragfähigkeitsrechnung, dann Kreditgespräch. Wer zuerst den Investitionskredit bewilligt, riskiert eine Liquiditätsfalle.</a:t>
+            </a:r>
+          </a:p>
+          <a:p>
+            <a:r>
+              <a:t>Zu Aufgabe 3:</a:t>
+            </a:r>
+          </a:p>
+          <a:p>
+            <a:r>
+              <a:t>Beispiel-Formulierungen:</a:t>
+            </a:r>
+          </a:p>
+          <a:p>
+            <a:r>
+              <a:t>1. "Frau Bergmann, Sie bauen Möbel und Innenausbauten – haben Sie eher Privat- oder Gewerbekunden, und was macht bei Ihnen das bessere Geschäft?"</a:t>
+            </a:r>
+          </a:p>
+          <a:p>
+            <a:r>
+              <a:t>2. "Ihre größten Auftraggeber – gibt es da 2–3 Kunden, auf die ein großer Teil des Umsatzes entfällt?"</a:t>
+            </a:r>
+          </a:p>
+          <a:p>
+            <a:r>
+              <a:t>3. "Was ist gerade Ihr größtes Thema für die nächsten 12 Monate – ist es die Maschine, oder gibt es da noch mehr?"</a:t>
+            </a:r>
+          </a:p>
+          <a:p>
+            <a:r>
+              <a:t>4. "Wie haben Sie bisher größere Investitionen finanziert – eher aus eigener Kraft oder mit Bankunterstützung?"</a:t>
+            </a:r>
+          </a:p>
+          <a:p>
+            <a:r>
+              <a:t>5. "Frau Bergmann, ich frage Sie etwas, das viele selten durchdenken: Was würde passieren, wenn Sie 6 Monate krankheitsbedingt ausfallen würden – wer würde den Betrieb führen?"</a:t>
+            </a:r>
+          </a:p>
+          <a:p>
+            <a:r>
+              <a:t>Erwartete Antwort auf Frage 5: "Das wäre schwierig. Ich bin für alles zuständig – Kundenakquise, Auftragsplanung, die Maschinen kenne ich alle. Mein Mann könnte vielleicht einspringen, aber der hat einen anderen Job." → Beratungsopportunität: Schlüsselpersonenversicherung (R+V), ggf. Geschäftsführer-Krankengeldabsicherung.</a:t>
+            </a:r>
+          </a:p>
+        </p:txBody>
+      </p:sp>
+      <p:sp>
+        <p:nvSpPr>
+          <p:cNvPr id="4" name="Slide Number Placeholder 3"/>
+          <p:cNvSpPr>
+            <a:spLocks noGrp="1"/>
+          </p:cNvSpPr>
+          <p:nvPr>
+            <p:ph type="sldNum" idx="5" sz="quarter"/>
+          </p:nvPr>
+        </p:nvSpPr>
+        <p:spPr/>
+      </p:sp>
+    </p:spTree>
+  </p:cSld>
+  <p:clrMapOvr>
+    <a:masterClrMapping/>
+  </p:clrMapOvr>
+</p:notes>
+</file>
+
+<file path=ppt/notesSlides/notesSlide6.xml><?xml version="1.0" encoding="utf-8"?>
 <p:notes xmlns:a="http://schemas.openxmlformats.org/drawingml/2006/main" xmlns:p="http://schemas.openxmlformats.org/presentationml/2006/main" xmlns:r="http://schemas.openxmlformats.org/officeDocument/2006/relationships">
   <p:cSld>
     <p:spTree>
@@ -4704,6 +4778,2167 @@
                 </a:solidFill>
                 <a:latin typeface="Source Serif 4"/>
               </a:rPr>
+              <a:t>Theorie-Input 3: Einstieg in die Branchenanalyse</a:t>
+            </a:r>
+          </a:p>
+        </p:txBody>
+      </p:sp>
+      <p:sp>
+        <p:nvSpPr>
+          <p:cNvPr id="8" name="TextBox 7"/>
+          <p:cNvSpPr txBox="1"/>
+          <p:nvPr/>
+        </p:nvSpPr>
+        <p:spPr>
+          <a:xfrm>
+            <a:off x="685800" y="1417320"/>
+            <a:ext cx="10817352" cy="5029200"/>
+          </a:xfrm>
+          <a:prstGeom prst="rect">
+            <a:avLst/>
+          </a:prstGeom>
+          <a:noFill/>
+        </p:spPr>
+        <p:txBody>
+          <a:bodyPr wrap="square">
+            <a:spAutoFit/>
+          </a:bodyPr>
+          <a:lstStyle/>
+          <a:p>
+            <a:pPr>
+              <a:spcBef>
+                <a:spcPts val="1000"/>
+              </a:spcBef>
+              <a:spcAft>
+                <a:spcPts val="200"/>
+              </a:spcAft>
+            </a:pPr>
+            <a:r>
+              <a:rPr sz="800" b="1">
+                <a:solidFill>
+                  <a:srgbClr val="78808C"/>
+                </a:solidFill>
+                <a:latin typeface="JetBrains Mono"/>
+              </a:rPr>
+              <a:t>DAS GRUNDPRINZIP: ZAHLEN BRAUCHEN KONTEXT</a:t>
+            </a:r>
+          </a:p>
+          <a:p>
+            <a:pPr>
+              <a:spcBef>
+                <a:spcPts val="1000"/>
+              </a:spcBef>
+              <a:spcAft>
+                <a:spcPts val="200"/>
+              </a:spcAft>
+            </a:pPr>
+            <a:r>
+              <a:rPr sz="800" b="1">
+                <a:solidFill>
+                  <a:srgbClr val="78808C"/>
+                </a:solidFill>
+                <a:latin typeface="JetBrains Mono"/>
+              </a:rPr>
+              <a:t>VIER BRANCHENPROFILE FÜR DEN BERATUNGSALLTAG</a:t>
+            </a:r>
+          </a:p>
+          <a:p>
+            <a:pPr>
+              <a:spcBef>
+                <a:spcPts val="400"/>
+              </a:spcBef>
+              <a:spcAft>
+                <a:spcPts val="200"/>
+              </a:spcAft>
+            </a:pPr>
+            <a:r>
+              <a:rPr sz="1300">
+                <a:solidFill>
+                  <a:srgbClr val="3D5466"/>
+                </a:solidFill>
+                <a:latin typeface="Arial"/>
+              </a:rPr>
+              <a:t>▸  Branchenprofil A – Handwerk (z.B. Schreiner, Maler, Sanitär, Bäcker)</a:t>
+            </a:r>
+          </a:p>
+          <a:p>
+            <a:pPr>
+              <a:spcBef>
+                <a:spcPts val="400"/>
+              </a:spcBef>
+              <a:spcAft>
+                <a:spcPts val="200"/>
+              </a:spcAft>
+            </a:pPr>
+            <a:r>
+              <a:rPr sz="1300">
+                <a:solidFill>
+                  <a:srgbClr val="3D5466"/>
+                </a:solidFill>
+                <a:latin typeface="Arial"/>
+              </a:rPr>
+              <a:t>▸  Das Handwerk ist der typischste KMU-Sektor im süddeutschen VR-Kundenbestand. Charakteristisch:</a:t>
+            </a:r>
+          </a:p>
+          <a:p>
+            <a:pPr>
+              <a:spcBef>
+                <a:spcPts val="400"/>
+              </a:spcBef>
+              <a:spcAft>
+                <a:spcPts val="200"/>
+              </a:spcAft>
+            </a:pPr>
+            <a:r>
+              <a:rPr sz="1300">
+                <a:solidFill>
+                  <a:srgbClr val="3D5466"/>
+                </a:solidFill>
+                <a:latin typeface="Arial"/>
+              </a:rPr>
+              <a:t>▸  Eigenkapitalquote: Ø 18–24 % (niedriger als Industrie, weil arbeitsintensiv und wenig Anlageintensität)</a:t>
+            </a:r>
+          </a:p>
+          <a:p>
+            <a:pPr>
+              <a:spcBef>
+                <a:spcPts val="400"/>
+              </a:spcBef>
+              <a:spcAft>
+                <a:spcPts val="200"/>
+              </a:spcAft>
+            </a:pPr>
+            <a:r>
+              <a:rPr sz="1300">
+                <a:solidFill>
+                  <a:srgbClr val="3D5466"/>
+                </a:solidFill>
+                <a:latin typeface="Arial"/>
+              </a:rPr>
+              <a:t>▸  Finanzierungsbedarf: Kontokorrentlinie für saisonale Spitzen und Materialvorfinanzierung, Investitionskredite für Fahrzeuge, Maschinen und Werkzeuge, gelegentlich Betriebsgebäude</a:t>
+            </a:r>
+          </a:p>
+          <a:p>
+            <a:pPr>
+              <a:spcBef>
+                <a:spcPts val="400"/>
+              </a:spcBef>
+              <a:spcAft>
+                <a:spcPts val="200"/>
+              </a:spcAft>
+            </a:pPr>
+            <a:r>
+              <a:rPr sz="1300">
+                <a:solidFill>
+                  <a:srgbClr val="3D5466"/>
+                </a:solidFill>
+                <a:latin typeface="Arial"/>
+              </a:rPr>
+              <a:t>▸  Typische Risiken: Fachkräftemangel, Materialkostenvolatilität (Holz, Stahl, Kupfer), Auftragsschwankungen durch Baukonjunktur</a:t>
+            </a:r>
+          </a:p>
+          <a:p>
+            <a:pPr>
+              <a:spcBef>
+                <a:spcPts val="400"/>
+              </a:spcBef>
+              <a:spcAft>
+                <a:spcPts val="200"/>
+              </a:spcAft>
+            </a:pPr>
+            <a:r>
+              <a:rPr sz="1300">
+                <a:solidFill>
+                  <a:srgbClr val="3D5466"/>
+                </a:solidFill>
+                <a:latin typeface="Arial"/>
+              </a:rPr>
+              <a:t>▸  Was frage ich als Berater: "Wie gut sind Sie mit Aufträgen ausgelastet – haben Sie eine Warteliste?" / "Haben Sie genug qualifiziertes Personal, um Ihre Aufträge abzuarbeiten?"</a:t>
+            </a:r>
+          </a:p>
+          <a:p>
+            <a:pPr>
+              <a:spcBef>
+                <a:spcPts val="400"/>
+              </a:spcBef>
+              <a:spcAft>
+                <a:spcPts val="200"/>
+              </a:spcAft>
+            </a:pPr>
+            <a:r>
+              <a:rPr sz="1300">
+                <a:solidFill>
+                  <a:srgbClr val="3D5466"/>
+                </a:solidFill>
+                <a:latin typeface="Arial"/>
+              </a:rPr>
+              <a:t>▸  Branchenprofil B – Produzierendes Gewerbe / Maschinenbau</a:t>
+            </a:r>
+          </a:p>
+          <a:p>
+            <a:pPr>
+              <a:spcBef>
+                <a:spcPts val="400"/>
+              </a:spcBef>
+              <a:spcAft>
+                <a:spcPts val="200"/>
+              </a:spcAft>
+            </a:pPr>
+            <a:r>
+              <a:rPr sz="1300">
+                <a:solidFill>
+                  <a:srgbClr val="3D5466"/>
+                </a:solidFill>
+                <a:latin typeface="Arial"/>
+              </a:rPr>
+              <a:t>▸  Eigenkapitalquote: Ø 28–35 % (höher, weil hoher Anlagevermögensanteil)</a:t>
+            </a:r>
+          </a:p>
+          <a:p>
+            <a:pPr>
+              <a:spcBef>
+                <a:spcPts val="400"/>
+              </a:spcBef>
+              <a:spcAft>
+                <a:spcPts val="200"/>
+              </a:spcAft>
+            </a:pPr>
+            <a:r>
+              <a:rPr sz="1300">
+                <a:solidFill>
+                  <a:srgbClr val="3D5466"/>
+                </a:solidFill>
+                <a:latin typeface="Arial"/>
+              </a:rPr>
+              <a:t>▸  Finanzierungsbedarf: Investitionskredite für Maschinen und Anlagen (oft langfristig, 7–15 Jahre), Exportfinanzierung, Anzahlungsfinanzierung bei Großaufträgen, Betriebsmittelkredite</a:t>
+            </a:r>
+          </a:p>
+          <a:p>
+            <a:pPr>
+              <a:spcBef>
+                <a:spcPts val="400"/>
+              </a:spcBef>
+              <a:spcAft>
+                <a:spcPts val="200"/>
+              </a:spcAft>
+            </a:pPr>
+            <a:r>
+              <a:rPr sz="1300">
+                <a:solidFill>
+                  <a:srgbClr val="3D5466"/>
+                </a:solidFill>
+                <a:latin typeface="Arial"/>
+              </a:rPr>
+              <a:t>▸  Typische Risiken: Exportabhängigkeit (Wechselkurs, geopolitische Risiken), Energiekostenentwicklung, Lieferkettenstörungen</a:t>
+            </a:r>
+          </a:p>
+        </p:txBody>
+      </p:sp>
+      <p:sp>
+        <p:nvSpPr>
+          <p:cNvPr id="9" name="Rectangle 8"/>
+          <p:cNvSpPr/>
+          <p:nvPr/>
+        </p:nvSpPr>
+        <p:spPr>
+          <a:xfrm>
+            <a:off x="0" y="6510528"/>
+            <a:ext cx="12188952" cy="347472"/>
+          </a:xfrm>
+          <a:prstGeom prst="rect">
+            <a:avLst/>
+          </a:prstGeom>
+          <a:solidFill>
+            <a:srgbClr val="0A1937"/>
+          </a:solidFill>
+          <a:ln>
+            <a:noFill/>
+          </a:ln>
+        </p:spPr>
+        <p:style>
+          <a:lnRef idx="1">
+            <a:schemeClr val="accent1"/>
+          </a:lnRef>
+          <a:fillRef idx="3">
+            <a:schemeClr val="accent1"/>
+          </a:fillRef>
+          <a:effectRef idx="2">
+            <a:schemeClr val="accent1"/>
+          </a:effectRef>
+          <a:fontRef idx="minor">
+            <a:schemeClr val="lt1"/>
+          </a:fontRef>
+        </p:style>
+        <p:txBody>
+          <a:bodyPr rtlCol="0" anchor="ctr"/>
+          <a:lstStyle/>
+          <a:p>
+            <a:pPr algn="ctr"/>
+          </a:p>
+        </p:txBody>
+      </p:sp>
+      <p:sp>
+        <p:nvSpPr>
+          <p:cNvPr id="10" name="TextBox 9"/>
+          <p:cNvSpPr txBox="1"/>
+          <p:nvPr/>
+        </p:nvSpPr>
+        <p:spPr>
+          <a:xfrm>
+            <a:off x="685800" y="6583680"/>
+            <a:ext cx="6490411" cy="256032"/>
+          </a:xfrm>
+          <a:prstGeom prst="rect">
+            <a:avLst/>
+          </a:prstGeom>
+          <a:noFill/>
+        </p:spPr>
+        <p:txBody>
+          <a:bodyPr wrap="none">
+            <a:spAutoFit/>
+          </a:bodyPr>
+          <a:lstStyle/>
+          <a:p>
+            <a:pPr algn="l"/>
+            <a:r>
+              <a:rPr sz="700">
+                <a:solidFill>
+                  <a:srgbClr val="A0B4D2"/>
+                </a:solidFill>
+                <a:latin typeface="JetBrains Mono"/>
+              </a:rPr>
+              <a:t>Benedikt Zoller Coaching  ·  FKB Campus  ·  M06</a:t>
+            </a:r>
+          </a:p>
+        </p:txBody>
+      </p:sp>
+    </p:spTree>
+  </p:cSld>
+  <p:clrMapOvr>
+    <a:masterClrMapping/>
+  </p:clrMapOvr>
+</p:sld>
+</file>
+
+<file path=ppt/slides/slide11.xml><?xml version="1.0" encoding="utf-8"?>
+<p:sld xmlns:a="http://schemas.openxmlformats.org/drawingml/2006/main" xmlns:p="http://schemas.openxmlformats.org/presentationml/2006/main" xmlns:r="http://schemas.openxmlformats.org/officeDocument/2006/relationships">
+  <p:cSld>
+    <p:spTree>
+      <p:nvGrpSpPr>
+        <p:cNvPr id="1" name=""/>
+        <p:cNvGrpSpPr/>
+        <p:nvPr/>
+      </p:nvGrpSpPr>
+      <p:grpSpPr/>
+      <p:sp>
+        <p:nvSpPr>
+          <p:cNvPr id="2" name="Rectangle 1"/>
+          <p:cNvSpPr/>
+          <p:nvPr/>
+        </p:nvSpPr>
+        <p:spPr>
+          <a:xfrm>
+            <a:off x="0" y="0"/>
+            <a:ext cx="12188952" cy="6858000"/>
+          </a:xfrm>
+          <a:prstGeom prst="rect">
+            <a:avLst/>
+          </a:prstGeom>
+          <a:solidFill>
+            <a:srgbClr val="FFFFFF"/>
+          </a:solidFill>
+          <a:ln>
+            <a:noFill/>
+          </a:ln>
+        </p:spPr>
+        <p:style>
+          <a:lnRef idx="1">
+            <a:schemeClr val="accent1"/>
+          </a:lnRef>
+          <a:fillRef idx="3">
+            <a:schemeClr val="accent1"/>
+          </a:fillRef>
+          <a:effectRef idx="2">
+            <a:schemeClr val="accent1"/>
+          </a:effectRef>
+          <a:fontRef idx="minor">
+            <a:schemeClr val="lt1"/>
+          </a:fontRef>
+        </p:style>
+        <p:txBody>
+          <a:bodyPr rtlCol="0" anchor="ctr"/>
+          <a:lstStyle/>
+          <a:p>
+            <a:pPr algn="ctr"/>
+          </a:p>
+        </p:txBody>
+      </p:sp>
+      <p:sp>
+        <p:nvSpPr>
+          <p:cNvPr id="3" name="Rectangle 2"/>
+          <p:cNvSpPr/>
+          <p:nvPr/>
+        </p:nvSpPr>
+        <p:spPr>
+          <a:xfrm>
+            <a:off x="0" y="0"/>
+            <a:ext cx="12188952" cy="50292"/>
+          </a:xfrm>
+          <a:prstGeom prst="rect">
+            <a:avLst/>
+          </a:prstGeom>
+          <a:solidFill>
+            <a:srgbClr val="1F2C56"/>
+          </a:solidFill>
+          <a:ln>
+            <a:noFill/>
+          </a:ln>
+        </p:spPr>
+        <p:style>
+          <a:lnRef idx="1">
+            <a:schemeClr val="accent1"/>
+          </a:lnRef>
+          <a:fillRef idx="3">
+            <a:schemeClr val="accent1"/>
+          </a:fillRef>
+          <a:effectRef idx="2">
+            <a:schemeClr val="accent1"/>
+          </a:effectRef>
+          <a:fontRef idx="minor">
+            <a:schemeClr val="lt1"/>
+          </a:fontRef>
+        </p:style>
+        <p:txBody>
+          <a:bodyPr rtlCol="0" anchor="ctr"/>
+          <a:lstStyle/>
+          <a:p>
+            <a:pPr algn="ctr"/>
+          </a:p>
+        </p:txBody>
+      </p:sp>
+      <p:sp>
+        <p:nvSpPr>
+          <p:cNvPr id="4" name="TextBox 3"/>
+          <p:cNvSpPr txBox="1"/>
+          <p:nvPr/>
+        </p:nvSpPr>
+        <p:spPr>
+          <a:xfrm>
+            <a:off x="685800" y="109728"/>
+            <a:ext cx="10817352" cy="228600"/>
+          </a:xfrm>
+          <a:prstGeom prst="rect">
+            <a:avLst/>
+          </a:prstGeom>
+          <a:noFill/>
+        </p:spPr>
+        <p:txBody>
+          <a:bodyPr wrap="none">
+            <a:spAutoFit/>
+          </a:bodyPr>
+          <a:lstStyle/>
+          <a:p>
+            <a:pPr algn="l"/>
+            <a:r>
+              <a:rPr sz="750">
+                <a:solidFill>
+                  <a:srgbClr val="78808C"/>
+                </a:solidFill>
+                <a:latin typeface="JetBrains Mono"/>
+              </a:rPr>
+              <a:t>M06  ·  SCHAUBILD</a:t>
+            </a:r>
+          </a:p>
+        </p:txBody>
+      </p:sp>
+      <p:sp>
+        <p:nvSpPr>
+          <p:cNvPr id="5" name="TextBox 4"/>
+          <p:cNvSpPr txBox="1"/>
+          <p:nvPr/>
+        </p:nvSpPr>
+        <p:spPr>
+          <a:xfrm>
+            <a:off x="685800" y="502920"/>
+            <a:ext cx="10817352" cy="594360"/>
+          </a:xfrm>
+          <a:prstGeom prst="rect">
+            <a:avLst/>
+          </a:prstGeom>
+          <a:noFill/>
+        </p:spPr>
+        <p:txBody>
+          <a:bodyPr wrap="square">
+            <a:spAutoFit/>
+          </a:bodyPr>
+          <a:lstStyle/>
+          <a:p>
+            <a:pPr algn="l"/>
+            <a:r>
+              <a:rPr sz="2000" b="1" i="0">
+                <a:solidFill>
+                  <a:srgbClr val="1F2C56"/>
+                </a:solidFill>
+                <a:latin typeface="Source Serif 4"/>
+              </a:rPr>
+              <a:t>Fünf-Fragen-Schema für den KMU-Beratungseinstieg</a:t>
+            </a:r>
+          </a:p>
+        </p:txBody>
+      </p:sp>
+      <p:sp>
+        <p:nvSpPr>
+          <p:cNvPr id="6" name="Rectangle 5"/>
+          <p:cNvSpPr/>
+          <p:nvPr/>
+        </p:nvSpPr>
+        <p:spPr>
+          <a:xfrm>
+            <a:off x="685800" y="1143000"/>
+            <a:ext cx="10817352" cy="25400"/>
+          </a:xfrm>
+          <a:prstGeom prst="rect">
+            <a:avLst/>
+          </a:prstGeom>
+          <a:solidFill>
+            <a:srgbClr val="D9C089"/>
+          </a:solidFill>
+          <a:ln>
+            <a:noFill/>
+          </a:ln>
+        </p:spPr>
+        <p:style>
+          <a:lnRef idx="1">
+            <a:schemeClr val="accent1"/>
+          </a:lnRef>
+          <a:fillRef idx="3">
+            <a:schemeClr val="accent1"/>
+          </a:fillRef>
+          <a:effectRef idx="2">
+            <a:schemeClr val="accent1"/>
+          </a:effectRef>
+          <a:fontRef idx="minor">
+            <a:schemeClr val="lt1"/>
+          </a:fontRef>
+        </p:style>
+        <p:txBody>
+          <a:bodyPr rtlCol="0" anchor="ctr"/>
+          <a:lstStyle/>
+          <a:p>
+            <a:pPr algn="ctr"/>
+          </a:p>
+        </p:txBody>
+      </p:sp>
+      <p:pic>
+        <p:nvPicPr>
+          <p:cNvPr id="7" name="Picture 6" descr="image.png"/>
+          <p:cNvPicPr>
+            <a:picLocks noChangeAspect="1"/>
+          </p:cNvPicPr>
+          <p:nvPr/>
+        </p:nvPicPr>
+        <p:blipFill>
+          <a:blip r:embed="rId2"/>
+          <a:stretch>
+            <a:fillRect/>
+          </a:stretch>
+        </p:blipFill>
+        <p:spPr>
+          <a:xfrm>
+            <a:off x="2303489" y="1325880"/>
+            <a:ext cx="7581973" cy="4937760"/>
+          </a:xfrm>
+          <a:prstGeom prst="rect">
+            <a:avLst/>
+          </a:prstGeom>
+        </p:spPr>
+      </p:pic>
+      <p:sp>
+        <p:nvSpPr>
+          <p:cNvPr id="8" name="Rectangle 7"/>
+          <p:cNvSpPr/>
+          <p:nvPr/>
+        </p:nvSpPr>
+        <p:spPr>
+          <a:xfrm>
+            <a:off x="0" y="6510528"/>
+            <a:ext cx="12188952" cy="347472"/>
+          </a:xfrm>
+          <a:prstGeom prst="rect">
+            <a:avLst/>
+          </a:prstGeom>
+          <a:solidFill>
+            <a:srgbClr val="0A1937"/>
+          </a:solidFill>
+          <a:ln>
+            <a:noFill/>
+          </a:ln>
+        </p:spPr>
+        <p:style>
+          <a:lnRef idx="1">
+            <a:schemeClr val="accent1"/>
+          </a:lnRef>
+          <a:fillRef idx="3">
+            <a:schemeClr val="accent1"/>
+          </a:fillRef>
+          <a:effectRef idx="2">
+            <a:schemeClr val="accent1"/>
+          </a:effectRef>
+          <a:fontRef idx="minor">
+            <a:schemeClr val="lt1"/>
+          </a:fontRef>
+        </p:style>
+        <p:txBody>
+          <a:bodyPr rtlCol="0" anchor="ctr"/>
+          <a:lstStyle/>
+          <a:p>
+            <a:pPr algn="ctr"/>
+          </a:p>
+        </p:txBody>
+      </p:sp>
+      <p:sp>
+        <p:nvSpPr>
+          <p:cNvPr id="9" name="TextBox 8"/>
+          <p:cNvSpPr txBox="1"/>
+          <p:nvPr/>
+        </p:nvSpPr>
+        <p:spPr>
+          <a:xfrm>
+            <a:off x="685800" y="6583680"/>
+            <a:ext cx="6490411" cy="256032"/>
+          </a:xfrm>
+          <a:prstGeom prst="rect">
+            <a:avLst/>
+          </a:prstGeom>
+          <a:noFill/>
+        </p:spPr>
+        <p:txBody>
+          <a:bodyPr wrap="none">
+            <a:spAutoFit/>
+          </a:bodyPr>
+          <a:lstStyle/>
+          <a:p>
+            <a:pPr algn="l"/>
+            <a:r>
+              <a:rPr sz="700">
+                <a:solidFill>
+                  <a:srgbClr val="A0B4D2"/>
+                </a:solidFill>
+                <a:latin typeface="JetBrains Mono"/>
+              </a:rPr>
+              <a:t>Benedikt Zoller Coaching  ·  FKB Campus  ·  M06</a:t>
+            </a:r>
+          </a:p>
+        </p:txBody>
+      </p:sp>
+      <p:sp>
+        <p:nvSpPr>
+          <p:cNvPr id="10" name="TextBox 9"/>
+          <p:cNvSpPr txBox="1"/>
+          <p:nvPr/>
+        </p:nvSpPr>
+        <p:spPr>
+          <a:xfrm>
+            <a:off x="7176211" y="6583680"/>
+            <a:ext cx="4326940" cy="256032"/>
+          </a:xfrm>
+          <a:prstGeom prst="rect">
+            <a:avLst/>
+          </a:prstGeom>
+          <a:noFill/>
+        </p:spPr>
+        <p:txBody>
+          <a:bodyPr wrap="none">
+            <a:spAutoFit/>
+          </a:bodyPr>
+          <a:lstStyle/>
+          <a:p>
+            <a:pPr algn="r"/>
+            <a:r>
+              <a:rPr sz="700">
+                <a:solidFill>
+                  <a:srgbClr val="A0B4D2"/>
+                </a:solidFill>
+                <a:latin typeface="JetBrains Mono"/>
+              </a:rPr>
+              <a:t>Schaubild</a:t>
+            </a:r>
+          </a:p>
+        </p:txBody>
+      </p:sp>
+    </p:spTree>
+  </p:cSld>
+  <p:clrMapOvr>
+    <a:masterClrMapping/>
+  </p:clrMapOvr>
+</p:sld>
+</file>
+
+<file path=ppt/slides/slide12.xml><?xml version="1.0" encoding="utf-8"?>
+<p:sld xmlns:a="http://schemas.openxmlformats.org/drawingml/2006/main" xmlns:p="http://schemas.openxmlformats.org/presentationml/2006/main" xmlns:r="http://schemas.openxmlformats.org/officeDocument/2006/relationships">
+  <p:cSld>
+    <p:spTree>
+      <p:nvGrpSpPr>
+        <p:cNvPr id="1" name=""/>
+        <p:cNvGrpSpPr/>
+        <p:nvPr/>
+      </p:nvGrpSpPr>
+      <p:grpSpPr/>
+      <p:sp>
+        <p:nvSpPr>
+          <p:cNvPr id="2" name="Rectangle 1"/>
+          <p:cNvSpPr/>
+          <p:nvPr/>
+        </p:nvSpPr>
+        <p:spPr>
+          <a:xfrm>
+            <a:off x="0" y="0"/>
+            <a:ext cx="12188952" cy="6858000"/>
+          </a:xfrm>
+          <a:prstGeom prst="rect">
+            <a:avLst/>
+          </a:prstGeom>
+          <a:solidFill>
+            <a:srgbClr val="EDEDF3"/>
+          </a:solidFill>
+          <a:ln>
+            <a:noFill/>
+          </a:ln>
+        </p:spPr>
+        <p:style>
+          <a:lnRef idx="1">
+            <a:schemeClr val="accent1"/>
+          </a:lnRef>
+          <a:fillRef idx="3">
+            <a:schemeClr val="accent1"/>
+          </a:fillRef>
+          <a:effectRef idx="2">
+            <a:schemeClr val="accent1"/>
+          </a:effectRef>
+          <a:fontRef idx="minor">
+            <a:schemeClr val="lt1"/>
+          </a:fontRef>
+        </p:style>
+        <p:txBody>
+          <a:bodyPr rtlCol="0" anchor="ctr"/>
+          <a:lstStyle/>
+          <a:p>
+            <a:pPr algn="ctr"/>
+          </a:p>
+        </p:txBody>
+      </p:sp>
+      <p:sp>
+        <p:nvSpPr>
+          <p:cNvPr id="3" name="Rectangle 2"/>
+          <p:cNvSpPr/>
+          <p:nvPr/>
+        </p:nvSpPr>
+        <p:spPr>
+          <a:xfrm>
+            <a:off x="0" y="0"/>
+            <a:ext cx="12188952" cy="50292"/>
+          </a:xfrm>
+          <a:prstGeom prst="rect">
+            <a:avLst/>
+          </a:prstGeom>
+          <a:solidFill>
+            <a:srgbClr val="1F2C56"/>
+          </a:solidFill>
+          <a:ln>
+            <a:noFill/>
+          </a:ln>
+        </p:spPr>
+        <p:style>
+          <a:lnRef idx="1">
+            <a:schemeClr val="accent1"/>
+          </a:lnRef>
+          <a:fillRef idx="3">
+            <a:schemeClr val="accent1"/>
+          </a:fillRef>
+          <a:effectRef idx="2">
+            <a:schemeClr val="accent1"/>
+          </a:effectRef>
+          <a:fontRef idx="minor">
+            <a:schemeClr val="lt1"/>
+          </a:fontRef>
+        </p:style>
+        <p:txBody>
+          <a:bodyPr rtlCol="0" anchor="ctr"/>
+          <a:lstStyle/>
+          <a:p>
+            <a:pPr algn="ctr"/>
+          </a:p>
+        </p:txBody>
+      </p:sp>
+      <p:sp>
+        <p:nvSpPr>
+          <p:cNvPr id="4" name="TextBox 3"/>
+          <p:cNvSpPr txBox="1"/>
+          <p:nvPr/>
+        </p:nvSpPr>
+        <p:spPr>
+          <a:xfrm>
+            <a:off x="685800" y="109728"/>
+            <a:ext cx="10817352" cy="228600"/>
+          </a:xfrm>
+          <a:prstGeom prst="rect">
+            <a:avLst/>
+          </a:prstGeom>
+          <a:noFill/>
+        </p:spPr>
+        <p:txBody>
+          <a:bodyPr wrap="none">
+            <a:spAutoFit/>
+          </a:bodyPr>
+          <a:lstStyle/>
+          <a:p>
+            <a:pPr algn="l"/>
+            <a:r>
+              <a:rPr sz="750">
+                <a:solidFill>
+                  <a:srgbClr val="78808C"/>
+                </a:solidFill>
+                <a:latin typeface="JetBrains Mono"/>
+              </a:rPr>
+              <a:t>M06  ·  INHALT</a:t>
+            </a:r>
+          </a:p>
+        </p:txBody>
+      </p:sp>
+      <p:sp>
+        <p:nvSpPr>
+          <p:cNvPr id="5" name="Rectangle 4"/>
+          <p:cNvSpPr/>
+          <p:nvPr/>
+        </p:nvSpPr>
+        <p:spPr>
+          <a:xfrm>
+            <a:off x="0" y="1234440"/>
+            <a:ext cx="12188952" cy="12700"/>
+          </a:xfrm>
+          <a:prstGeom prst="rect">
+            <a:avLst/>
+          </a:prstGeom>
+          <a:solidFill>
+            <a:srgbClr val="D8DFE4"/>
+          </a:solidFill>
+          <a:ln>
+            <a:noFill/>
+          </a:ln>
+        </p:spPr>
+        <p:style>
+          <a:lnRef idx="1">
+            <a:schemeClr val="accent1"/>
+          </a:lnRef>
+          <a:fillRef idx="3">
+            <a:schemeClr val="accent1"/>
+          </a:fillRef>
+          <a:effectRef idx="2">
+            <a:schemeClr val="accent1"/>
+          </a:effectRef>
+          <a:fontRef idx="minor">
+            <a:schemeClr val="lt1"/>
+          </a:fontRef>
+        </p:style>
+        <p:txBody>
+          <a:bodyPr rtlCol="0" anchor="ctr"/>
+          <a:lstStyle/>
+          <a:p>
+            <a:pPr algn="ctr"/>
+          </a:p>
+        </p:txBody>
+      </p:sp>
+      <p:sp>
+        <p:nvSpPr>
+          <p:cNvPr id="6" name="Rectangle 5"/>
+          <p:cNvSpPr/>
+          <p:nvPr/>
+        </p:nvSpPr>
+        <p:spPr>
+          <a:xfrm>
+            <a:off x="685800" y="502920"/>
+            <a:ext cx="36576" cy="658368"/>
+          </a:xfrm>
+          <a:prstGeom prst="rect">
+            <a:avLst/>
+          </a:prstGeom>
+          <a:solidFill>
+            <a:srgbClr val="D9C089"/>
+          </a:solidFill>
+          <a:ln>
+            <a:noFill/>
+          </a:ln>
+        </p:spPr>
+        <p:style>
+          <a:lnRef idx="1">
+            <a:schemeClr val="accent1"/>
+          </a:lnRef>
+          <a:fillRef idx="3">
+            <a:schemeClr val="accent1"/>
+          </a:fillRef>
+          <a:effectRef idx="2">
+            <a:schemeClr val="accent1"/>
+          </a:effectRef>
+          <a:fontRef idx="minor">
+            <a:schemeClr val="lt1"/>
+          </a:fontRef>
+        </p:style>
+        <p:txBody>
+          <a:bodyPr rtlCol="0" anchor="ctr"/>
+          <a:lstStyle/>
+          <a:p>
+            <a:pPr algn="ctr"/>
+          </a:p>
+        </p:txBody>
+      </p:sp>
+      <p:sp>
+        <p:nvSpPr>
+          <p:cNvPr id="7" name="TextBox 6"/>
+          <p:cNvSpPr txBox="1"/>
+          <p:nvPr/>
+        </p:nvSpPr>
+        <p:spPr>
+          <a:xfrm>
+            <a:off x="813816" y="502920"/>
+            <a:ext cx="10634472" cy="685800"/>
+          </a:xfrm>
+          <a:prstGeom prst="rect">
+            <a:avLst/>
+          </a:prstGeom>
+          <a:noFill/>
+        </p:spPr>
+        <p:txBody>
+          <a:bodyPr wrap="square">
+            <a:spAutoFit/>
+          </a:bodyPr>
+          <a:lstStyle/>
+          <a:p>
+            <a:pPr algn="l"/>
+            <a:r>
+              <a:rPr sz="2400" b="1" i="0">
+                <a:solidFill>
+                  <a:srgbClr val="1F2C56"/>
+                </a:solidFill>
+                <a:latin typeface="Source Serif 4"/>
+              </a:rPr>
+              <a:t>Praxiscase: Bergmann Holzmanufaktur GmbH &amp; Co. KG</a:t>
+            </a:r>
+          </a:p>
+        </p:txBody>
+      </p:sp>
+      <p:sp>
+        <p:nvSpPr>
+          <p:cNvPr id="8" name="TextBox 7"/>
+          <p:cNvSpPr txBox="1"/>
+          <p:nvPr/>
+        </p:nvSpPr>
+        <p:spPr>
+          <a:xfrm>
+            <a:off x="685800" y="1417320"/>
+            <a:ext cx="10817352" cy="5029200"/>
+          </a:xfrm>
+          <a:prstGeom prst="rect">
+            <a:avLst/>
+          </a:prstGeom>
+          <a:noFill/>
+        </p:spPr>
+        <p:txBody>
+          <a:bodyPr wrap="square">
+            <a:spAutoFit/>
+          </a:bodyPr>
+          <a:lstStyle/>
+          <a:p>
+            <a:pPr>
+              <a:spcBef>
+                <a:spcPts val="1000"/>
+              </a:spcBef>
+              <a:spcAft>
+                <a:spcPts val="200"/>
+              </a:spcAft>
+            </a:pPr>
+            <a:r>
+              <a:rPr sz="800" b="1">
+                <a:solidFill>
+                  <a:srgbClr val="78808C"/>
+                </a:solidFill>
+                <a:latin typeface="JetBrains Mono"/>
+              </a:rPr>
+              <a:t>UNTERNEHMENSPORTRÄT</a:t>
+            </a:r>
+          </a:p>
+          <a:p>
+            <a:pPr>
+              <a:spcBef>
+                <a:spcPts val="1000"/>
+              </a:spcBef>
+              <a:spcAft>
+                <a:spcPts val="200"/>
+              </a:spcAft>
+            </a:pPr>
+            <a:r>
+              <a:rPr sz="800" b="1">
+                <a:solidFill>
+                  <a:srgbClr val="78808C"/>
+                </a:solidFill>
+                <a:latin typeface="JetBrains Mono"/>
+              </a:rPr>
+              <a:t>FINANZDATEN (FIKTIV, PLAUSIBEL FÜR HOLZHANDWERK)</a:t>
+            </a:r>
+          </a:p>
+          <a:p>
+            <a:pPr>
+              <a:spcBef>
+                <a:spcPts val="400"/>
+              </a:spcBef>
+              <a:spcAft>
+                <a:spcPts val="200"/>
+              </a:spcAft>
+            </a:pPr>
+            <a:r>
+              <a:rPr sz="1300">
+                <a:solidFill>
+                  <a:srgbClr val="3D5466"/>
+                </a:solidFill>
+                <a:latin typeface="Arial"/>
+              </a:rPr>
+              <a:t>▸  *Branchenwerte Holzgewerbe / Tischlerhandwerk, Quelle: Deutsche Bundesbank, Unternehmensabschlussstatistik (Bundesbank, laufend )</a:t>
+            </a:r>
+          </a:p>
+          <a:p>
+            <a:pPr>
+              <a:spcBef>
+                <a:spcPts val="1000"/>
+              </a:spcBef>
+              <a:spcAft>
+                <a:spcPts val="200"/>
+              </a:spcAft>
+            </a:pPr>
+            <a:r>
+              <a:rPr sz="800" b="1">
+                <a:solidFill>
+                  <a:srgbClr val="78808C"/>
+                </a:solidFill>
+                <a:latin typeface="JetBrains Mono"/>
+              </a:rPr>
+              <a:t>AUFGABEN</a:t>
+            </a:r>
+          </a:p>
+          <a:p>
+            <a:pPr>
+              <a:spcBef>
+                <a:spcPts val="400"/>
+              </a:spcBef>
+              <a:spcAft>
+                <a:spcPts val="200"/>
+              </a:spcAft>
+            </a:pPr>
+            <a:r>
+              <a:rPr sz="1300">
+                <a:solidFill>
+                  <a:srgbClr val="3D5466"/>
+                </a:solidFill>
+                <a:latin typeface="Arial"/>
+              </a:rPr>
+              <a:t>▸  Aufgabe 1 – Klassifizierung (LZ-1):</a:t>
+            </a:r>
+          </a:p>
+          <a:p>
+            <a:pPr>
+              <a:spcBef>
+                <a:spcPts val="400"/>
+              </a:spcBef>
+              <a:spcAft>
+                <a:spcPts val="200"/>
+              </a:spcAft>
+            </a:pPr>
+            <a:r>
+              <a:rPr sz="1300">
+                <a:solidFill>
+                  <a:srgbClr val="3D5466"/>
+                </a:solidFill>
+                <a:latin typeface="Arial"/>
+              </a:rPr>
+              <a:t>▸  Aufgabe 2 – Typologisierung und Risikofelder (LZ-2/LZ-3):</a:t>
+            </a:r>
+          </a:p>
+          <a:p>
+            <a:pPr>
+              <a:spcBef>
+                <a:spcPts val="400"/>
+              </a:spcBef>
+              <a:spcAft>
+                <a:spcPts val="200"/>
+              </a:spcAft>
+            </a:pPr>
+            <a:r>
+              <a:rPr sz="1300">
+                <a:solidFill>
+                  <a:srgbClr val="3D5466"/>
+                </a:solidFill>
+                <a:latin typeface="Arial"/>
+              </a:rPr>
+              <a:t>▸  Aufgabe 3 – 5-Fragen-Schema anwenden (LZ-4):</a:t>
+            </a:r>
+          </a:p>
+          <a:p>
+            <a:pPr>
+              <a:spcBef>
+                <a:spcPts val="400"/>
+              </a:spcBef>
+              <a:spcAft>
+                <a:spcPts val="200"/>
+              </a:spcAft>
+            </a:pPr>
+            <a:r>
+              <a:rPr sz="1300">
+                <a:solidFill>
+                  <a:srgbClr val="3D5466"/>
+                </a:solidFill>
+                <a:latin typeface="Arial"/>
+              </a:rPr>
+              <a:t>▸  Aufgabe 4 – Kreditvorbereitung: KK-Analyse (LZ-3):</a:t>
+            </a:r>
+          </a:p>
+        </p:txBody>
+      </p:sp>
+      <p:sp>
+        <p:nvSpPr>
+          <p:cNvPr id="9" name="Rectangle 8"/>
+          <p:cNvSpPr/>
+          <p:nvPr/>
+        </p:nvSpPr>
+        <p:spPr>
+          <a:xfrm>
+            <a:off x="0" y="6510528"/>
+            <a:ext cx="12188952" cy="347472"/>
+          </a:xfrm>
+          <a:prstGeom prst="rect">
+            <a:avLst/>
+          </a:prstGeom>
+          <a:solidFill>
+            <a:srgbClr val="0A1937"/>
+          </a:solidFill>
+          <a:ln>
+            <a:noFill/>
+          </a:ln>
+        </p:spPr>
+        <p:style>
+          <a:lnRef idx="1">
+            <a:schemeClr val="accent1"/>
+          </a:lnRef>
+          <a:fillRef idx="3">
+            <a:schemeClr val="accent1"/>
+          </a:fillRef>
+          <a:effectRef idx="2">
+            <a:schemeClr val="accent1"/>
+          </a:effectRef>
+          <a:fontRef idx="minor">
+            <a:schemeClr val="lt1"/>
+          </a:fontRef>
+        </p:style>
+        <p:txBody>
+          <a:bodyPr rtlCol="0" anchor="ctr"/>
+          <a:lstStyle/>
+          <a:p>
+            <a:pPr algn="ctr"/>
+          </a:p>
+        </p:txBody>
+      </p:sp>
+      <p:sp>
+        <p:nvSpPr>
+          <p:cNvPr id="10" name="TextBox 9"/>
+          <p:cNvSpPr txBox="1"/>
+          <p:nvPr/>
+        </p:nvSpPr>
+        <p:spPr>
+          <a:xfrm>
+            <a:off x="685800" y="6583680"/>
+            <a:ext cx="6490411" cy="256032"/>
+          </a:xfrm>
+          <a:prstGeom prst="rect">
+            <a:avLst/>
+          </a:prstGeom>
+          <a:noFill/>
+        </p:spPr>
+        <p:txBody>
+          <a:bodyPr wrap="none">
+            <a:spAutoFit/>
+          </a:bodyPr>
+          <a:lstStyle/>
+          <a:p>
+            <a:pPr algn="l"/>
+            <a:r>
+              <a:rPr sz="700">
+                <a:solidFill>
+                  <a:srgbClr val="A0B4D2"/>
+                </a:solidFill>
+                <a:latin typeface="JetBrains Mono"/>
+              </a:rPr>
+              <a:t>Benedikt Zoller Coaching  ·  FKB Campus  ·  M06</a:t>
+            </a:r>
+          </a:p>
+        </p:txBody>
+      </p:sp>
+    </p:spTree>
+  </p:cSld>
+  <p:clrMapOvr>
+    <a:masterClrMapping/>
+  </p:clrMapOvr>
+</p:sld>
+</file>
+
+<file path=ppt/slides/slide13.xml><?xml version="1.0" encoding="utf-8"?>
+<p:sld xmlns:a="http://schemas.openxmlformats.org/drawingml/2006/main" xmlns:p="http://schemas.openxmlformats.org/presentationml/2006/main" xmlns:r="http://schemas.openxmlformats.org/officeDocument/2006/relationships">
+  <p:cSld>
+    <p:spTree>
+      <p:nvGrpSpPr>
+        <p:cNvPr id="1" name=""/>
+        <p:cNvGrpSpPr/>
+        <p:nvPr/>
+      </p:nvGrpSpPr>
+      <p:grpSpPr/>
+      <p:sp>
+        <p:nvSpPr>
+          <p:cNvPr id="2" name="Rectangle 1"/>
+          <p:cNvSpPr/>
+          <p:nvPr/>
+        </p:nvSpPr>
+        <p:spPr>
+          <a:xfrm>
+            <a:off x="0" y="0"/>
+            <a:ext cx="12188952" cy="6858000"/>
+          </a:xfrm>
+          <a:prstGeom prst="rect">
+            <a:avLst/>
+          </a:prstGeom>
+          <a:solidFill>
+            <a:srgbClr val="FFFFFF"/>
+          </a:solidFill>
+          <a:ln>
+            <a:noFill/>
+          </a:ln>
+        </p:spPr>
+        <p:style>
+          <a:lnRef idx="1">
+            <a:schemeClr val="accent1"/>
+          </a:lnRef>
+          <a:fillRef idx="3">
+            <a:schemeClr val="accent1"/>
+          </a:fillRef>
+          <a:effectRef idx="2">
+            <a:schemeClr val="accent1"/>
+          </a:effectRef>
+          <a:fontRef idx="minor">
+            <a:schemeClr val="lt1"/>
+          </a:fontRef>
+        </p:style>
+        <p:txBody>
+          <a:bodyPr rtlCol="0" anchor="ctr"/>
+          <a:lstStyle/>
+          <a:p>
+            <a:pPr algn="ctr"/>
+          </a:p>
+        </p:txBody>
+      </p:sp>
+      <p:sp>
+        <p:nvSpPr>
+          <p:cNvPr id="3" name="Rectangle 2"/>
+          <p:cNvSpPr/>
+          <p:nvPr/>
+        </p:nvSpPr>
+        <p:spPr>
+          <a:xfrm>
+            <a:off x="0" y="0"/>
+            <a:ext cx="12188952" cy="50292"/>
+          </a:xfrm>
+          <a:prstGeom prst="rect">
+            <a:avLst/>
+          </a:prstGeom>
+          <a:solidFill>
+            <a:srgbClr val="1F2C56"/>
+          </a:solidFill>
+          <a:ln>
+            <a:noFill/>
+          </a:ln>
+        </p:spPr>
+        <p:style>
+          <a:lnRef idx="1">
+            <a:schemeClr val="accent1"/>
+          </a:lnRef>
+          <a:fillRef idx="3">
+            <a:schemeClr val="accent1"/>
+          </a:fillRef>
+          <a:effectRef idx="2">
+            <a:schemeClr val="accent1"/>
+          </a:effectRef>
+          <a:fontRef idx="minor">
+            <a:schemeClr val="lt1"/>
+          </a:fontRef>
+        </p:style>
+        <p:txBody>
+          <a:bodyPr rtlCol="0" anchor="ctr"/>
+          <a:lstStyle/>
+          <a:p>
+            <a:pPr algn="ctr"/>
+          </a:p>
+        </p:txBody>
+      </p:sp>
+      <p:sp>
+        <p:nvSpPr>
+          <p:cNvPr id="4" name="TextBox 3"/>
+          <p:cNvSpPr txBox="1"/>
+          <p:nvPr/>
+        </p:nvSpPr>
+        <p:spPr>
+          <a:xfrm>
+            <a:off x="685800" y="109728"/>
+            <a:ext cx="10817352" cy="228600"/>
+          </a:xfrm>
+          <a:prstGeom prst="rect">
+            <a:avLst/>
+          </a:prstGeom>
+          <a:noFill/>
+        </p:spPr>
+        <p:txBody>
+          <a:bodyPr wrap="none">
+            <a:spAutoFit/>
+          </a:bodyPr>
+          <a:lstStyle/>
+          <a:p>
+            <a:pPr algn="l"/>
+            <a:r>
+              <a:rPr sz="750">
+                <a:solidFill>
+                  <a:srgbClr val="78808C"/>
+                </a:solidFill>
+                <a:latin typeface="JetBrains Mono"/>
+              </a:rPr>
+              <a:t>M06  ·  ÜBERSICHT</a:t>
+            </a:r>
+          </a:p>
+        </p:txBody>
+      </p:sp>
+      <p:sp>
+        <p:nvSpPr>
+          <p:cNvPr id="5" name="TextBox 4"/>
+          <p:cNvSpPr txBox="1"/>
+          <p:nvPr/>
+        </p:nvSpPr>
+        <p:spPr>
+          <a:xfrm>
+            <a:off x="685800" y="502920"/>
+            <a:ext cx="10817352" cy="594360"/>
+          </a:xfrm>
+          <a:prstGeom prst="rect">
+            <a:avLst/>
+          </a:prstGeom>
+          <a:noFill/>
+        </p:spPr>
+        <p:txBody>
+          <a:bodyPr wrap="square">
+            <a:spAutoFit/>
+          </a:bodyPr>
+          <a:lstStyle/>
+          <a:p>
+            <a:pPr algn="l"/>
+            <a:r>
+              <a:rPr sz="2000" b="1" i="0">
+                <a:solidFill>
+                  <a:srgbClr val="1F2C56"/>
+                </a:solidFill>
+                <a:latin typeface="Source Serif 4"/>
+              </a:rPr>
+              <a:t>Praxiscase: Bergmann Holzmanufaktur GmbH &amp; Co. KG</a:t>
+            </a:r>
+          </a:p>
+        </p:txBody>
+      </p:sp>
+      <p:sp>
+        <p:nvSpPr>
+          <p:cNvPr id="6" name="Rectangle 5"/>
+          <p:cNvSpPr/>
+          <p:nvPr/>
+        </p:nvSpPr>
+        <p:spPr>
+          <a:xfrm>
+            <a:off x="685800" y="1143000"/>
+            <a:ext cx="10817352" cy="25400"/>
+          </a:xfrm>
+          <a:prstGeom prst="rect">
+            <a:avLst/>
+          </a:prstGeom>
+          <a:solidFill>
+            <a:srgbClr val="D9C089"/>
+          </a:solidFill>
+          <a:ln>
+            <a:noFill/>
+          </a:ln>
+        </p:spPr>
+        <p:style>
+          <a:lnRef idx="1">
+            <a:schemeClr val="accent1"/>
+          </a:lnRef>
+          <a:fillRef idx="3">
+            <a:schemeClr val="accent1"/>
+          </a:fillRef>
+          <a:effectRef idx="2">
+            <a:schemeClr val="accent1"/>
+          </a:effectRef>
+          <a:fontRef idx="minor">
+            <a:schemeClr val="lt1"/>
+          </a:fontRef>
+        </p:style>
+        <p:txBody>
+          <a:bodyPr rtlCol="0" anchor="ctr"/>
+          <a:lstStyle/>
+          <a:p>
+            <a:pPr algn="ctr"/>
+          </a:p>
+        </p:txBody>
+      </p:sp>
+      <p:graphicFrame>
+        <p:nvGraphicFramePr>
+          <p:cNvPr id="7" name="Table 6"/>
+          <p:cNvGraphicFramePr>
+            <a:graphicFrameLocks noGrp="1"/>
+          </p:cNvGraphicFramePr>
+          <p:nvPr/>
+        </p:nvGraphicFramePr>
+        <p:xfrm>
+          <a:off x="685800" y="1417320"/>
+          <a:ext cx="10817352" cy="2304288"/>
+        </p:xfrm>
+        <a:graphic>
+          <a:graphicData uri="http://schemas.openxmlformats.org/drawingml/2006/table">
+            <a:tbl>
+              <a:tblPr firstRow="1" bandRow="1">
+                <a:tableStyleId>{5C22544A-7EE6-4342-B048-85BDC9FD1C3A}</a:tableStyleId>
+              </a:tblPr>
+              <a:tblGrid>
+                <a:gridCol w="3605784"/>
+                <a:gridCol w="3605784"/>
+                <a:gridCol w="3605784"/>
+              </a:tblGrid>
+              <a:tr h="384048">
+                <a:tc>
+                  <a:txBody>
+                    <a:bodyPr/>
+                    <a:lstStyle/>
+                    <a:p>
+                      <a:r>
+                        <a:rPr sz="1100" b="1">
+                          <a:solidFill>
+                            <a:srgbClr val="FFFFFF"/>
+                          </a:solidFill>
+                          <a:latin typeface="Arial"/>
+                        </a:rPr>
+                        <a:t>Kennzahl</a:t>
+                      </a:r>
+                    </a:p>
+                  </a:txBody>
+                  <a:tcPr>
+                    <a:solidFill>
+                      <a:srgbClr val="1F2C56"/>
+                    </a:solidFill>
+                  </a:tcPr>
+                </a:tc>
+                <a:tc>
+                  <a:txBody>
+                    <a:bodyPr/>
+                    <a:lstStyle/>
+                    <a:p>
+                      <a:r>
+                        <a:rPr sz="1100" b="1">
+                          <a:solidFill>
+                            <a:srgbClr val="FFFFFF"/>
+                          </a:solidFill>
+                          <a:latin typeface="Arial"/>
+                        </a:rPr>
+                        <a:t>Wert 2025</a:t>
+                      </a:r>
+                    </a:p>
+                  </a:txBody>
+                  <a:tcPr>
+                    <a:solidFill>
+                      <a:srgbClr val="1F2C56"/>
+                    </a:solidFill>
+                  </a:tcPr>
+                </a:tc>
+                <a:tc>
+                  <a:txBody>
+                    <a:bodyPr/>
+                    <a:lstStyle/>
+                    <a:p>
+                      <a:r>
+                        <a:rPr sz="1100" b="1">
+                          <a:solidFill>
+                            <a:srgbClr val="FFFFFF"/>
+                          </a:solidFill>
+                          <a:latin typeface="Arial"/>
+                        </a:rPr>
+                        <a:t>Branchenwert*</a:t>
+                      </a:r>
+                    </a:p>
+                  </a:txBody>
+                  <a:tcPr>
+                    <a:solidFill>
+                      <a:srgbClr val="1F2C56"/>
+                    </a:solidFill>
+                  </a:tcPr>
+                </a:tc>
+              </a:tr>
+              <a:tr h="384048">
+                <a:tc>
+                  <a:txBody>
+                    <a:bodyPr/>
+                    <a:lstStyle/>
+                    <a:p>
+                      <a:r>
+                        <a:rPr sz="1050">
+                          <a:solidFill>
+                            <a:srgbClr val="3D5466"/>
+                          </a:solidFill>
+                          <a:latin typeface="Arial"/>
+                        </a:rPr>
+                        <a:t>Eigenkapitalquote</a:t>
+                      </a:r>
+                    </a:p>
+                  </a:txBody>
+                  <a:tcPr/>
+                </a:tc>
+                <a:tc>
+                  <a:txBody>
+                    <a:bodyPr/>
+                    <a:lstStyle/>
+                    <a:p>
+                      <a:r>
+                        <a:rPr sz="1050">
+                          <a:solidFill>
+                            <a:srgbClr val="3D5466"/>
+                          </a:solidFill>
+                          <a:latin typeface="Arial"/>
+                        </a:rPr>
+                        <a:t>21 %</a:t>
+                      </a:r>
+                    </a:p>
+                  </a:txBody>
+                  <a:tcPr/>
+                </a:tc>
+                <a:tc>
+                  <a:txBody>
+                    <a:bodyPr/>
+                    <a:lstStyle/>
+                    <a:p>
+                      <a:r>
+                        <a:rPr sz="1050">
+                          <a:solidFill>
+                            <a:srgbClr val="3D5466"/>
+                          </a:solidFill>
+                          <a:latin typeface="Arial"/>
+                        </a:rPr>
+                        <a:t>Ø 18–24 %</a:t>
+                      </a:r>
+                    </a:p>
+                  </a:txBody>
+                  <a:tcPr/>
+                </a:tc>
+              </a:tr>
+              <a:tr h="384048">
+                <a:tc>
+                  <a:txBody>
+                    <a:bodyPr/>
+                    <a:lstStyle/>
+                    <a:p>
+                      <a:r>
+                        <a:rPr sz="1050">
+                          <a:solidFill>
+                            <a:srgbClr val="3D5466"/>
+                          </a:solidFill>
+                          <a:latin typeface="Arial"/>
+                        </a:rPr>
+                        <a:t>Jahresumsatz</a:t>
+                      </a:r>
+                    </a:p>
+                  </a:txBody>
+                  <a:tcPr/>
+                </a:tc>
+                <a:tc>
+                  <a:txBody>
+                    <a:bodyPr/>
+                    <a:lstStyle/>
+                    <a:p>
+                      <a:r>
+                        <a:rPr sz="1050">
+                          <a:solidFill>
+                            <a:srgbClr val="3D5466"/>
+                          </a:solidFill>
+                          <a:latin typeface="Arial"/>
+                        </a:rPr>
+                        <a:t>1,8 Mio. EUR</a:t>
+                      </a:r>
+                    </a:p>
+                  </a:txBody>
+                  <a:tcPr/>
+                </a:tc>
+                <a:tc>
+                  <a:txBody>
+                    <a:bodyPr/>
+                    <a:lstStyle/>
+                    <a:p>
+                      <a:r>
+                        <a:rPr sz="1050">
+                          <a:solidFill>
+                            <a:srgbClr val="3D5466"/>
+                          </a:solidFill>
+                          <a:latin typeface="Arial"/>
+                        </a:rPr>
+                        <a:t>–</a:t>
+                      </a:r>
+                    </a:p>
+                  </a:txBody>
+                  <a:tcPr/>
+                </a:tc>
+              </a:tr>
+              <a:tr h="384048">
+                <a:tc>
+                  <a:txBody>
+                    <a:bodyPr/>
+                    <a:lstStyle/>
+                    <a:p>
+                      <a:r>
+                        <a:rPr sz="1050">
+                          <a:solidFill>
+                            <a:srgbClr val="3D5466"/>
+                          </a:solidFill>
+                          <a:latin typeface="Arial"/>
+                        </a:rPr>
+                        <a:t>Beschäftigte</a:t>
+                      </a:r>
+                    </a:p>
+                  </a:txBody>
+                  <a:tcPr/>
+                </a:tc>
+                <a:tc>
+                  <a:txBody>
+                    <a:bodyPr/>
+                    <a:lstStyle/>
+                    <a:p>
+                      <a:r>
+                        <a:rPr sz="1050">
+                          <a:solidFill>
+                            <a:srgbClr val="3D5466"/>
+                          </a:solidFill>
+                          <a:latin typeface="Arial"/>
+                        </a:rPr>
+                        <a:t>8</a:t>
+                      </a:r>
+                    </a:p>
+                  </a:txBody>
+                  <a:tcPr/>
+                </a:tc>
+                <a:tc>
+                  <a:txBody>
+                    <a:bodyPr/>
+                    <a:lstStyle/>
+                    <a:p>
+                      <a:r>
+                        <a:rPr sz="1050">
+                          <a:solidFill>
+                            <a:srgbClr val="3D5466"/>
+                          </a:solidFill>
+                          <a:latin typeface="Arial"/>
+                        </a:rPr>
+                        <a:t>–</a:t>
+                      </a:r>
+                    </a:p>
+                  </a:txBody>
+                  <a:tcPr/>
+                </a:tc>
+              </a:tr>
+              <a:tr h="384048">
+                <a:tc>
+                  <a:txBody>
+                    <a:bodyPr/>
+                    <a:lstStyle/>
+                    <a:p>
+                      <a:r>
+                        <a:rPr sz="1050">
+                          <a:solidFill>
+                            <a:srgbClr val="3D5466"/>
+                          </a:solidFill>
+                          <a:latin typeface="Arial"/>
+                        </a:rPr>
+                        <a:t>Umsatzrendite (vor Steuern)</a:t>
+                      </a:r>
+                    </a:p>
+                  </a:txBody>
+                  <a:tcPr/>
+                </a:tc>
+                <a:tc>
+                  <a:txBody>
+                    <a:bodyPr/>
+                    <a:lstStyle/>
+                    <a:p>
+                      <a:r>
+                        <a:rPr sz="1050">
+                          <a:solidFill>
+                            <a:srgbClr val="3D5466"/>
+                          </a:solidFill>
+                          <a:latin typeface="Arial"/>
+                        </a:rPr>
+                        <a:t>5,2 %</a:t>
+                      </a:r>
+                    </a:p>
+                  </a:txBody>
+                  <a:tcPr/>
+                </a:tc>
+                <a:tc>
+                  <a:txBody>
+                    <a:bodyPr/>
+                    <a:lstStyle/>
+                    <a:p>
+                      <a:r>
+                        <a:rPr sz="1050">
+                          <a:solidFill>
+                            <a:srgbClr val="3D5466"/>
+                          </a:solidFill>
+                          <a:latin typeface="Arial"/>
+                        </a:rPr>
+                        <a:t>Ø 4–7 %</a:t>
+                      </a:r>
+                    </a:p>
+                  </a:txBody>
+                  <a:tcPr/>
+                </a:tc>
+              </a:tr>
+              <a:tr h="384048">
+                <a:tc>
+                  <a:txBody>
+                    <a:bodyPr/>
+                    <a:lstStyle/>
+                    <a:p>
+                      <a:r>
+                        <a:rPr sz="1050">
+                          <a:solidFill>
+                            <a:srgbClr val="3D5466"/>
+                          </a:solidFill>
+                          <a:latin typeface="Arial"/>
+                        </a:rPr>
+                        <a:t>Fremdkapitalquote</a:t>
+                      </a:r>
+                    </a:p>
+                  </a:txBody>
+                  <a:tcPr/>
+                </a:tc>
+                <a:tc>
+                  <a:txBody>
+                    <a:bodyPr/>
+                    <a:lstStyle/>
+                    <a:p>
+                      <a:r>
+                        <a:rPr sz="1050">
+                          <a:solidFill>
+                            <a:srgbClr val="3D5466"/>
+                          </a:solidFill>
+                          <a:latin typeface="Arial"/>
+                        </a:rPr>
+                        <a:t>79 %</a:t>
+                      </a:r>
+                    </a:p>
+                  </a:txBody>
+                  <a:tcPr/>
+                </a:tc>
+                <a:tc>
+                  <a:txBody>
+                    <a:bodyPr/>
+                    <a:lstStyle/>
+                    <a:p>
+                      <a:r>
+                        <a:rPr sz="1050">
+                          <a:solidFill>
+                            <a:srgbClr val="3D5466"/>
+                          </a:solidFill>
+                          <a:latin typeface="Arial"/>
+                        </a:rPr>
+                        <a:t>Ø 76–82 %</a:t>
+                      </a:r>
+                    </a:p>
+                  </a:txBody>
+                  <a:tcPr/>
+                </a:tc>
+              </a:tr>
+            </a:tbl>
+          </a:graphicData>
+        </a:graphic>
+      </p:graphicFrame>
+      <p:sp>
+        <p:nvSpPr>
+          <p:cNvPr id="8" name="Rectangle 7"/>
+          <p:cNvSpPr/>
+          <p:nvPr/>
+        </p:nvSpPr>
+        <p:spPr>
+          <a:xfrm>
+            <a:off x="0" y="6510528"/>
+            <a:ext cx="12188952" cy="347472"/>
+          </a:xfrm>
+          <a:prstGeom prst="rect">
+            <a:avLst/>
+          </a:prstGeom>
+          <a:solidFill>
+            <a:srgbClr val="0A1937"/>
+          </a:solidFill>
+          <a:ln>
+            <a:noFill/>
+          </a:ln>
+        </p:spPr>
+        <p:style>
+          <a:lnRef idx="1">
+            <a:schemeClr val="accent1"/>
+          </a:lnRef>
+          <a:fillRef idx="3">
+            <a:schemeClr val="accent1"/>
+          </a:fillRef>
+          <a:effectRef idx="2">
+            <a:schemeClr val="accent1"/>
+          </a:effectRef>
+          <a:fontRef idx="minor">
+            <a:schemeClr val="lt1"/>
+          </a:fontRef>
+        </p:style>
+        <p:txBody>
+          <a:bodyPr rtlCol="0" anchor="ctr"/>
+          <a:lstStyle/>
+          <a:p>
+            <a:pPr algn="ctr"/>
+          </a:p>
+        </p:txBody>
+      </p:sp>
+      <p:sp>
+        <p:nvSpPr>
+          <p:cNvPr id="9" name="TextBox 8"/>
+          <p:cNvSpPr txBox="1"/>
+          <p:nvPr/>
+        </p:nvSpPr>
+        <p:spPr>
+          <a:xfrm>
+            <a:off x="685800" y="6583680"/>
+            <a:ext cx="6490411" cy="256032"/>
+          </a:xfrm>
+          <a:prstGeom prst="rect">
+            <a:avLst/>
+          </a:prstGeom>
+          <a:noFill/>
+        </p:spPr>
+        <p:txBody>
+          <a:bodyPr wrap="none">
+            <a:spAutoFit/>
+          </a:bodyPr>
+          <a:lstStyle/>
+          <a:p>
+            <a:pPr algn="l"/>
+            <a:r>
+              <a:rPr sz="700">
+                <a:solidFill>
+                  <a:srgbClr val="A0B4D2"/>
+                </a:solidFill>
+                <a:latin typeface="JetBrains Mono"/>
+              </a:rPr>
+              <a:t>Benedikt Zoller Coaching  ·  FKB Campus  ·  M06</a:t>
+            </a:r>
+          </a:p>
+        </p:txBody>
+      </p:sp>
+      <p:sp>
+        <p:nvSpPr>
+          <p:cNvPr id="10" name="TextBox 9"/>
+          <p:cNvSpPr txBox="1"/>
+          <p:nvPr/>
+        </p:nvSpPr>
+        <p:spPr>
+          <a:xfrm>
+            <a:off x="7176211" y="6583680"/>
+            <a:ext cx="4326940" cy="256032"/>
+          </a:xfrm>
+          <a:prstGeom prst="rect">
+            <a:avLst/>
+          </a:prstGeom>
+          <a:noFill/>
+        </p:spPr>
+        <p:txBody>
+          <a:bodyPr wrap="none">
+            <a:spAutoFit/>
+          </a:bodyPr>
+          <a:lstStyle/>
+          <a:p>
+            <a:pPr algn="r"/>
+            <a:r>
+              <a:rPr sz="700">
+                <a:solidFill>
+                  <a:srgbClr val="A0B4D2"/>
+                </a:solidFill>
+                <a:latin typeface="JetBrains Mono"/>
+              </a:rPr>
+              <a:t>Übersicht</a:t>
+            </a:r>
+          </a:p>
+        </p:txBody>
+      </p:sp>
+    </p:spTree>
+  </p:cSld>
+  <p:clrMapOvr>
+    <a:masterClrMapping/>
+  </p:clrMapOvr>
+</p:sld>
+</file>
+
+<file path=ppt/slides/slide14.xml><?xml version="1.0" encoding="utf-8"?>
+<p:sld xmlns:a="http://schemas.openxmlformats.org/drawingml/2006/main" xmlns:p="http://schemas.openxmlformats.org/presentationml/2006/main" xmlns:r="http://schemas.openxmlformats.org/officeDocument/2006/relationships">
+  <p:cSld>
+    <p:spTree>
+      <p:nvGrpSpPr>
+        <p:cNvPr id="1" name=""/>
+        <p:cNvGrpSpPr/>
+        <p:nvPr/>
+      </p:nvGrpSpPr>
+      <p:grpSpPr/>
+      <p:sp>
+        <p:nvSpPr>
+          <p:cNvPr id="2" name="Rectangle 1"/>
+          <p:cNvSpPr/>
+          <p:nvPr/>
+        </p:nvSpPr>
+        <p:spPr>
+          <a:xfrm>
+            <a:off x="0" y="0"/>
+            <a:ext cx="12188952" cy="6858000"/>
+          </a:xfrm>
+          <a:prstGeom prst="rect">
+            <a:avLst/>
+          </a:prstGeom>
+          <a:solidFill>
+            <a:srgbClr val="EDEDF3"/>
+          </a:solidFill>
+          <a:ln>
+            <a:noFill/>
+          </a:ln>
+        </p:spPr>
+        <p:style>
+          <a:lnRef idx="1">
+            <a:schemeClr val="accent1"/>
+          </a:lnRef>
+          <a:fillRef idx="3">
+            <a:schemeClr val="accent1"/>
+          </a:fillRef>
+          <a:effectRef idx="2">
+            <a:schemeClr val="accent1"/>
+          </a:effectRef>
+          <a:fontRef idx="minor">
+            <a:schemeClr val="lt1"/>
+          </a:fontRef>
+        </p:style>
+        <p:txBody>
+          <a:bodyPr rtlCol="0" anchor="ctr"/>
+          <a:lstStyle/>
+          <a:p>
+            <a:pPr algn="ctr"/>
+          </a:p>
+        </p:txBody>
+      </p:sp>
+      <p:sp>
+        <p:nvSpPr>
+          <p:cNvPr id="3" name="Rectangle 2"/>
+          <p:cNvSpPr/>
+          <p:nvPr/>
+        </p:nvSpPr>
+        <p:spPr>
+          <a:xfrm>
+            <a:off x="0" y="0"/>
+            <a:ext cx="12188952" cy="50292"/>
+          </a:xfrm>
+          <a:prstGeom prst="rect">
+            <a:avLst/>
+          </a:prstGeom>
+          <a:solidFill>
+            <a:srgbClr val="1F2C56"/>
+          </a:solidFill>
+          <a:ln>
+            <a:noFill/>
+          </a:ln>
+        </p:spPr>
+        <p:style>
+          <a:lnRef idx="1">
+            <a:schemeClr val="accent1"/>
+          </a:lnRef>
+          <a:fillRef idx="3">
+            <a:schemeClr val="accent1"/>
+          </a:fillRef>
+          <a:effectRef idx="2">
+            <a:schemeClr val="accent1"/>
+          </a:effectRef>
+          <a:fontRef idx="minor">
+            <a:schemeClr val="lt1"/>
+          </a:fontRef>
+        </p:style>
+        <p:txBody>
+          <a:bodyPr rtlCol="0" anchor="ctr"/>
+          <a:lstStyle/>
+          <a:p>
+            <a:pPr algn="ctr"/>
+          </a:p>
+        </p:txBody>
+      </p:sp>
+      <p:sp>
+        <p:nvSpPr>
+          <p:cNvPr id="4" name="TextBox 3"/>
+          <p:cNvSpPr txBox="1"/>
+          <p:nvPr/>
+        </p:nvSpPr>
+        <p:spPr>
+          <a:xfrm>
+            <a:off x="685800" y="109728"/>
+            <a:ext cx="10817352" cy="228600"/>
+          </a:xfrm>
+          <a:prstGeom prst="rect">
+            <a:avLst/>
+          </a:prstGeom>
+          <a:noFill/>
+        </p:spPr>
+        <p:txBody>
+          <a:bodyPr wrap="none">
+            <a:spAutoFit/>
+          </a:bodyPr>
+          <a:lstStyle/>
+          <a:p>
+            <a:pPr algn="l"/>
+            <a:r>
+              <a:rPr sz="750">
+                <a:solidFill>
+                  <a:srgbClr val="78808C"/>
+                </a:solidFill>
+                <a:latin typeface="JetBrains Mono"/>
+              </a:rPr>
+              <a:t>M06  ·  INHALT</a:t>
+            </a:r>
+          </a:p>
+        </p:txBody>
+      </p:sp>
+      <p:sp>
+        <p:nvSpPr>
+          <p:cNvPr id="5" name="Rectangle 4"/>
+          <p:cNvSpPr/>
+          <p:nvPr/>
+        </p:nvSpPr>
+        <p:spPr>
+          <a:xfrm>
+            <a:off x="0" y="1234440"/>
+            <a:ext cx="12188952" cy="12700"/>
+          </a:xfrm>
+          <a:prstGeom prst="rect">
+            <a:avLst/>
+          </a:prstGeom>
+          <a:solidFill>
+            <a:srgbClr val="D8DFE4"/>
+          </a:solidFill>
+          <a:ln>
+            <a:noFill/>
+          </a:ln>
+        </p:spPr>
+        <p:style>
+          <a:lnRef idx="1">
+            <a:schemeClr val="accent1"/>
+          </a:lnRef>
+          <a:fillRef idx="3">
+            <a:schemeClr val="accent1"/>
+          </a:fillRef>
+          <a:effectRef idx="2">
+            <a:schemeClr val="accent1"/>
+          </a:effectRef>
+          <a:fontRef idx="minor">
+            <a:schemeClr val="lt1"/>
+          </a:fontRef>
+        </p:style>
+        <p:txBody>
+          <a:bodyPr rtlCol="0" anchor="ctr"/>
+          <a:lstStyle/>
+          <a:p>
+            <a:pPr algn="ctr"/>
+          </a:p>
+        </p:txBody>
+      </p:sp>
+      <p:sp>
+        <p:nvSpPr>
+          <p:cNvPr id="6" name="Rectangle 5"/>
+          <p:cNvSpPr/>
+          <p:nvPr/>
+        </p:nvSpPr>
+        <p:spPr>
+          <a:xfrm>
+            <a:off x="685800" y="502920"/>
+            <a:ext cx="36576" cy="658368"/>
+          </a:xfrm>
+          <a:prstGeom prst="rect">
+            <a:avLst/>
+          </a:prstGeom>
+          <a:solidFill>
+            <a:srgbClr val="D9C089"/>
+          </a:solidFill>
+          <a:ln>
+            <a:noFill/>
+          </a:ln>
+        </p:spPr>
+        <p:style>
+          <a:lnRef idx="1">
+            <a:schemeClr val="accent1"/>
+          </a:lnRef>
+          <a:fillRef idx="3">
+            <a:schemeClr val="accent1"/>
+          </a:fillRef>
+          <a:effectRef idx="2">
+            <a:schemeClr val="accent1"/>
+          </a:effectRef>
+          <a:fontRef idx="minor">
+            <a:schemeClr val="lt1"/>
+          </a:fontRef>
+        </p:style>
+        <p:txBody>
+          <a:bodyPr rtlCol="0" anchor="ctr"/>
+          <a:lstStyle/>
+          <a:p>
+            <a:pPr algn="ctr"/>
+          </a:p>
+        </p:txBody>
+      </p:sp>
+      <p:sp>
+        <p:nvSpPr>
+          <p:cNvPr id="7" name="TextBox 6"/>
+          <p:cNvSpPr txBox="1"/>
+          <p:nvPr/>
+        </p:nvSpPr>
+        <p:spPr>
+          <a:xfrm>
+            <a:off x="813816" y="502920"/>
+            <a:ext cx="10634472" cy="685800"/>
+          </a:xfrm>
+          <a:prstGeom prst="rect">
+            <a:avLst/>
+          </a:prstGeom>
+          <a:noFill/>
+        </p:spPr>
+        <p:txBody>
+          <a:bodyPr wrap="square">
+            <a:spAutoFit/>
+          </a:bodyPr>
+          <a:lstStyle/>
+          <a:p>
+            <a:pPr algn="l"/>
+            <a:r>
+              <a:rPr sz="2400" b="1" i="0">
+                <a:solidFill>
+                  <a:srgbClr val="1F2C56"/>
+                </a:solidFill>
+                <a:latin typeface="Source Serif 4"/>
+              </a:rPr>
               <a:t>Reflexionsfragen</a:t>
             </a:r>
           </a:p>
@@ -5761,7 +7996,7 @@
                 </a:solidFill>
                 <a:latin typeface="JetBrains Mono"/>
               </a:rPr>
-              <a:t>M06  ·  INHALT</a:t>
+              <a:t>AGENDA  ·  M06</a:t>
             </a:r>
           </a:p>
         </p:txBody>
@@ -5811,57 +8046,14 @@
       </p:sp>
       <p:sp>
         <p:nvSpPr>
-          <p:cNvPr id="6" name="Rectangle 5"/>
-          <p:cNvSpPr/>
+          <p:cNvPr id="6" name="TextBox 5"/>
+          <p:cNvSpPr txBox="1"/>
           <p:nvPr/>
         </p:nvSpPr>
         <p:spPr>
           <a:xfrm>
             <a:off x="685800" y="502920"/>
-            <a:ext cx="36576" cy="658368"/>
-          </a:xfrm>
-          <a:prstGeom prst="rect">
-            <a:avLst/>
-          </a:prstGeom>
-          <a:solidFill>
-            <a:srgbClr val="D9C089"/>
-          </a:solidFill>
-          <a:ln>
-            <a:noFill/>
-          </a:ln>
-        </p:spPr>
-        <p:style>
-          <a:lnRef idx="1">
-            <a:schemeClr val="accent1"/>
-          </a:lnRef>
-          <a:fillRef idx="3">
-            <a:schemeClr val="accent1"/>
-          </a:fillRef>
-          <a:effectRef idx="2">
-            <a:schemeClr val="accent1"/>
-          </a:effectRef>
-          <a:fontRef idx="minor">
-            <a:schemeClr val="lt1"/>
-          </a:fontRef>
-        </p:style>
-        <p:txBody>
-          <a:bodyPr rtlCol="0" anchor="ctr"/>
-          <a:lstStyle/>
-          <a:p>
-            <a:pPr algn="ctr"/>
-          </a:p>
-        </p:txBody>
-      </p:sp>
-      <p:sp>
-        <p:nvSpPr>
-          <p:cNvPr id="7" name="TextBox 6"/>
-          <p:cNvSpPr txBox="1"/>
-          <p:nvPr/>
-        </p:nvSpPr>
-        <p:spPr>
-          <a:xfrm>
-            <a:off x="813816" y="502920"/>
-            <a:ext cx="10634472" cy="685800"/>
+            <a:ext cx="10817352" cy="658368"/>
           </a:xfrm>
           <a:prstGeom prst="rect">
             <a:avLst/>
@@ -5876,27 +8068,27 @@
           <a:p>
             <a:pPr algn="l"/>
             <a:r>
-              <a:rPr sz="2400" b="1" i="0">
+              <a:rPr sz="2600" b="1" i="0">
                 <a:solidFill>
                   <a:srgbClr val="1F2C56"/>
                 </a:solidFill>
                 <a:latin typeface="Source Serif 4"/>
               </a:rPr>
-              <a:t>Theorie-Input 1: Was ist ein KMU? Definitionen, Typologien und volkswirtschaftliche Bedeutung</a:t>
-            </a:r>
-          </a:p>
-        </p:txBody>
-      </p:sp>
-      <p:sp>
-        <p:nvSpPr>
-          <p:cNvPr id="8" name="TextBox 7"/>
+              <a:t>So läuft das Modul</a:t>
+            </a:r>
+          </a:p>
+        </p:txBody>
+      </p:sp>
+      <p:sp>
+        <p:nvSpPr>
+          <p:cNvPr id="7" name="TextBox 6"/>
           <p:cNvSpPr txBox="1"/>
           <p:nvPr/>
         </p:nvSpPr>
         <p:spPr>
           <a:xfrm>
-            <a:off x="685800" y="1417320"/>
-            <a:ext cx="10817352" cy="5029200"/>
+            <a:off x="685800" y="1463040"/>
+            <a:ext cx="10817352" cy="4937760"/>
           </a:xfrm>
           <a:prstGeom prst="rect">
             <a:avLst/>
@@ -5911,236 +8103,267 @@
           <a:p>
             <a:pPr>
               <a:spcBef>
-                <a:spcPts val="1000"/>
+                <a:spcPts val="700"/>
               </a:spcBef>
               <a:spcAft>
-                <a:spcPts val="200"/>
+                <a:spcPts val="100"/>
               </a:spcAft>
             </a:pPr>
             <a:r>
-              <a:rPr sz="800" b="1">
+              <a:rPr sz="1200">
                 <a:solidFill>
                   <a:srgbClr val="78808C"/>
                 </a:solidFill>
-                <a:latin typeface="JetBrains Mono"/>
-              </a:rPr>
-              <a:t>DIE ZWEI ZENTRALEN KMU-DEFINITIONEN</a:t>
+                <a:latin typeface="Consolas"/>
+              </a:rPr>
+              <a:t>00:00–00:05 </a:t>
+            </a:r>
+            <a:r>
+              <a:rPr sz="1500" b="1">
+                <a:solidFill>
+                  <a:srgbClr val="3D5466"/>
+                </a:solidFill>
+                <a:latin typeface="Arial"/>
+              </a:rPr>
+              <a:t>  Begrüßung</a:t>
+            </a:r>
+            <a:r>
+              <a:rPr sz="1200">
+                <a:solidFill>
+                  <a:srgbClr val="78808C"/>
+                </a:solidFill>
+                <a:latin typeface="Arial"/>
+              </a:rPr>
+              <a:t>  ·  Plenum</a:t>
             </a:r>
           </a:p>
           <a:p>
             <a:pPr>
               <a:spcBef>
-                <a:spcPts val="400"/>
+                <a:spcPts val="700"/>
               </a:spcBef>
               <a:spcAft>
-                <a:spcPts val="200"/>
+                <a:spcPts val="100"/>
               </a:spcAft>
             </a:pPr>
             <a:r>
               <a:rPr sz="1200">
                 <a:solidFill>
+                  <a:srgbClr val="78808C"/>
+                </a:solidFill>
+                <a:latin typeface="Consolas"/>
+              </a:rPr>
+              <a:t>00:05–00:15 </a:t>
+            </a:r>
+            <a:r>
+              <a:rPr sz="1500" b="1">
+                <a:solidFill>
                   <a:srgbClr val="3D5466"/>
                 </a:solidFill>
                 <a:latin typeface="Arial"/>
               </a:rPr>
-              <a:t>In der deutschen Bankpraxis begegnen Berater zwei unterschiedlichen KMU-Definitionen, die für unterschiedliche Zwecke relevant sind.</a:t>
+              <a:t>  Wissensaktivierung</a:t>
+            </a:r>
+            <a:r>
+              <a:rPr sz="1200">
+                <a:solidFill>
+                  <a:srgbClr val="78808C"/>
+                </a:solidFill>
+                <a:latin typeface="Arial"/>
+              </a:rPr>
+              <a:t>  ·  Reihum-Abfrage</a:t>
             </a:r>
           </a:p>
           <a:p>
             <a:pPr>
               <a:spcBef>
-                <a:spcPts val="400"/>
+                <a:spcPts val="700"/>
               </a:spcBef>
               <a:spcAft>
-                <a:spcPts val="200"/>
+                <a:spcPts val="100"/>
               </a:spcAft>
             </a:pPr>
             <a:r>
               <a:rPr sz="1200">
                 <a:solidFill>
+                  <a:srgbClr val="78808C"/>
+                </a:solidFill>
+                <a:latin typeface="Consolas"/>
+              </a:rPr>
+              <a:t>00:15–00:30 </a:t>
+            </a:r>
+            <a:r>
+              <a:rPr sz="1500" b="1">
+                <a:solidFill>
                   <a:srgbClr val="3D5466"/>
                 </a:solidFill>
                 <a:latin typeface="Arial"/>
               </a:rPr>
-              <a:t>Die IfM-Bonn-Definition</a:t>
+              <a:t>  Input KMU-Definitionen</a:t>
+            </a:r>
+            <a:r>
+              <a:rPr sz="1200">
+                <a:solidFill>
+                  <a:srgbClr val="78808C"/>
+                </a:solidFill>
+                <a:latin typeface="Arial"/>
+              </a:rPr>
+              <a:t>  ·  Vortrag + Diskussion</a:t>
             </a:r>
           </a:p>
           <a:p>
             <a:pPr>
               <a:spcBef>
-                <a:spcPts val="400"/>
+                <a:spcPts val="700"/>
               </a:spcBef>
               <a:spcAft>
-                <a:spcPts val="200"/>
+                <a:spcPts val="100"/>
               </a:spcAft>
             </a:pPr>
             <a:r>
               <a:rPr sz="1200">
                 <a:solidFill>
+                  <a:srgbClr val="78808C"/>
+                </a:solidFill>
+                <a:latin typeface="Consolas"/>
+              </a:rPr>
+              <a:t>00:30–00:45 </a:t>
+            </a:r>
+            <a:r>
+              <a:rPr sz="1500" b="1">
+                <a:solidFill>
                   <a:srgbClr val="3D5466"/>
                 </a:solidFill>
                 <a:latin typeface="Arial"/>
               </a:rPr>
-              <a:t>Das Institut für Mittelstandsforschung Bonn (IfM Bonn) definiert KMU quantitativ und qualitativ (IfM Bonn, 2024 ). Die Definition unterscheidet zwei Unternehmensgrößen:</a:t>
+              <a:t>  Input Hausbank-Prinzip</a:t>
+            </a:r>
+            <a:r>
+              <a:rPr sz="1200">
+                <a:solidFill>
+                  <a:srgbClr val="78808C"/>
+                </a:solidFill>
+                <a:latin typeface="Arial"/>
+              </a:rPr>
+              <a:t>  ·  Vortrag + Fragen</a:t>
             </a:r>
           </a:p>
           <a:p>
             <a:pPr>
               <a:spcBef>
-                <a:spcPts val="400"/>
+                <a:spcPts val="700"/>
               </a:spcBef>
               <a:spcAft>
-                <a:spcPts val="200"/>
+                <a:spcPts val="100"/>
               </a:spcAft>
             </a:pPr>
             <a:r>
               <a:rPr sz="1200">
                 <a:solidFill>
+                  <a:srgbClr val="78808C"/>
+                </a:solidFill>
+                <a:latin typeface="Consolas"/>
+              </a:rPr>
+              <a:t>00:45–01:15 </a:t>
+            </a:r>
+            <a:r>
+              <a:rPr sz="1500" b="1">
+                <a:solidFill>
                   <a:srgbClr val="3D5466"/>
                 </a:solidFill>
                 <a:latin typeface="Arial"/>
               </a:rPr>
-              <a:t>(Es müssen Mitarbeiterzahl UND Umsatz die Schwellenwerte erfüllen; IfM Bonn, 2024 )</a:t>
+              <a:t>  Fallarbeit Bergmann Holzmanufaktur</a:t>
+            </a:r>
+            <a:r>
+              <a:rPr sz="1200">
+                <a:solidFill>
+                  <a:srgbClr val="78808C"/>
+                </a:solidFill>
+                <a:latin typeface="Arial"/>
+              </a:rPr>
+              <a:t>  ·  Einzel- + Gruppenarbeit</a:t>
             </a:r>
           </a:p>
           <a:p>
             <a:pPr>
               <a:spcBef>
-                <a:spcPts val="400"/>
+                <a:spcPts val="700"/>
               </a:spcBef>
               <a:spcAft>
-                <a:spcPts val="200"/>
+                <a:spcPts val="100"/>
               </a:spcAft>
             </a:pPr>
             <a:r>
               <a:rPr sz="1200">
                 <a:solidFill>
+                  <a:srgbClr val="78808C"/>
+                </a:solidFill>
+                <a:latin typeface="Consolas"/>
+              </a:rPr>
+              <a:t>01:15–01:30 </a:t>
+            </a:r>
+            <a:r>
+              <a:rPr sz="1500" b="1">
+                <a:solidFill>
                   <a:srgbClr val="3D5466"/>
                 </a:solidFill>
                 <a:latin typeface="Arial"/>
               </a:rPr>
-              <a:t>Die EU-Definition</a:t>
+              <a:t>  Plenumsdiskussion</a:t>
+            </a:r>
+            <a:r>
+              <a:rPr sz="1200">
+                <a:solidFill>
+                  <a:srgbClr val="78808C"/>
+                </a:solidFill>
+                <a:latin typeface="Arial"/>
+              </a:rPr>
+              <a:t>  ·  Moderierte Diskussion</a:t>
             </a:r>
           </a:p>
           <a:p>
             <a:pPr>
               <a:spcBef>
-                <a:spcPts val="400"/>
+                <a:spcPts val="700"/>
               </a:spcBef>
               <a:spcAft>
-                <a:spcPts val="200"/>
+                <a:spcPts val="100"/>
               </a:spcAft>
             </a:pPr>
             <a:r>
               <a:rPr sz="1200">
                 <a:solidFill>
+                  <a:srgbClr val="78808C"/>
+                </a:solidFill>
+                <a:latin typeface="Consolas"/>
+              </a:rPr>
+              <a:t>01:30–01:40 </a:t>
+            </a:r>
+            <a:r>
+              <a:rPr sz="1500" b="1">
+                <a:solidFill>
                   <a:srgbClr val="3D5466"/>
                 </a:solidFill>
                 <a:latin typeface="Arial"/>
               </a:rPr>
-              <a:t>Die Europäische Kommission (2020 ) unterscheidet drei Unternehmensgrößen, die für EU-Förderprogramme und KfW-Finanzierungsprodukte unmittelbar relevant sind:</a:t>
-            </a:r>
-          </a:p>
-          <a:p>
-            <a:pPr>
-              <a:spcBef>
-                <a:spcPts val="400"/>
-              </a:spcBef>
-              <a:spcAft>
-                <a:spcPts val="200"/>
-              </a:spcAft>
-            </a:pPr>
+              <a:t>  Transfer &amp; Abschluss</a:t>
+            </a:r>
             <a:r>
               <a:rPr sz="1200">
                 <a:solidFill>
-                  <a:srgbClr val="3D5466"/>
+                  <a:srgbClr val="78808C"/>
                 </a:solidFill>
                 <a:latin typeface="Arial"/>
               </a:rPr>
-              <a:t>Es müssen Mitarbeiterzahl UND (Umsatz ODER Bilanzsumme) die jeweiligen Schwellenwerte erfüllen (Europäische Kommission, 2020 ).</a:t>
-            </a:r>
-          </a:p>
-          <a:p>
-            <a:pPr>
-              <a:spcBef>
-                <a:spcPts val="400"/>
-              </a:spcBef>
-              <a:spcAft>
-                <a:spcPts val="200"/>
-              </a:spcAft>
-            </a:pPr>
-            <a:r>
-              <a:rPr sz="1200">
-                <a:solidFill>
-                  <a:srgbClr val="3D5466"/>
-                </a:solidFill>
-                <a:latin typeface="Arial"/>
-              </a:rPr>
-              <a:t>Praktische Relevanz der Unterscheidung</a:t>
-            </a:r>
-          </a:p>
-          <a:p>
-            <a:pPr>
-              <a:spcBef>
-                <a:spcPts val="600"/>
-              </a:spcBef>
-              <a:spcAft>
-                <a:spcPts val="200"/>
-              </a:spcAft>
-            </a:pPr>
-            <a:r>
-              <a:rPr sz="1200" i="1">
-                <a:solidFill>
-                  <a:srgbClr val="3D5466"/>
-                </a:solidFill>
-                <a:latin typeface="Arial"/>
-              </a:rPr>
-              <a:t>→  Praxishinweis: Unternehmensgruppen und verbundene Unternehmen</a:t>
-            </a:r>
-          </a:p>
-          <a:p>
-            <a:pPr>
-              <a:spcBef>
-                <a:spcPts val="1000"/>
-              </a:spcBef>
-              <a:spcAft>
-                <a:spcPts val="200"/>
-              </a:spcAft>
-            </a:pPr>
-            <a:r>
-              <a:rPr sz="800" b="1">
-                <a:solidFill>
-                  <a:srgbClr val="78808C"/>
-                </a:solidFill>
-                <a:latin typeface="JetBrains Mono"/>
-              </a:rPr>
-              <a:t>VOLKSWIRTSCHAFTLICHE BEDEUTUNG VON KMU</a:t>
-            </a:r>
-          </a:p>
-          <a:p>
-            <a:pPr>
-              <a:spcBef>
-                <a:spcPts val="400"/>
-              </a:spcBef>
-              <a:spcAft>
-                <a:spcPts val="200"/>
-              </a:spcAft>
-            </a:pPr>
-            <a:r>
-              <a:rPr sz="1200">
-                <a:solidFill>
-                  <a:srgbClr val="3D5466"/>
-                </a:solidFill>
-                <a:latin typeface="Arial"/>
-              </a:rPr>
-              <a:t>KMU sind kein Randphänomen, sondern das Fundament der deutschen Wirtschaftsstruktur:</a:t>
-            </a:r>
-          </a:p>
-        </p:txBody>
-      </p:sp>
-      <p:sp>
-        <p:nvSpPr>
-          <p:cNvPr id="9" name="Rectangle 8"/>
+              <a:t>  ·  Plenum</a:t>
+            </a:r>
+          </a:p>
+        </p:txBody>
+      </p:sp>
+      <p:sp>
+        <p:nvSpPr>
+          <p:cNvPr id="8" name="Rectangle 7"/>
           <p:cNvSpPr/>
           <p:nvPr/>
         </p:nvSpPr>
@@ -6183,7 +8406,7 @@
       </p:sp>
       <p:sp>
         <p:nvSpPr>
-          <p:cNvPr id="10" name="TextBox 9"/>
+          <p:cNvPr id="9" name="TextBox 8"/>
           <p:cNvSpPr txBox="1"/>
           <p:nvPr/>
         </p:nvSpPr>
@@ -6249,7 +8472,7 @@
             <a:avLst/>
           </a:prstGeom>
           <a:solidFill>
-            <a:srgbClr val="FFFFFF"/>
+            <a:srgbClr val="EDEDF3"/>
           </a:solidFill>
           <a:ln>
             <a:noFill/>
@@ -6350,43 +8573,51 @@
                 </a:solidFill>
                 <a:latin typeface="JetBrains Mono"/>
               </a:rPr>
-              <a:t>M06  ·  SCHAUBILD</a:t>
-            </a:r>
-          </a:p>
-        </p:txBody>
-      </p:sp>
-      <p:sp>
-        <p:nvSpPr>
-          <p:cNvPr id="5" name="TextBox 4"/>
-          <p:cNvSpPr txBox="1"/>
-          <p:nvPr/>
-        </p:nvSpPr>
-        <p:spPr>
-          <a:xfrm>
-            <a:off x="685800" y="502920"/>
-            <a:ext cx="10817352" cy="594360"/>
-          </a:xfrm>
-          <a:prstGeom prst="rect">
-            <a:avLst/>
-          </a:prstGeom>
-          <a:noFill/>
-        </p:spPr>
-        <p:txBody>
-          <a:bodyPr wrap="square">
-            <a:spAutoFit/>
-          </a:bodyPr>
-          <a:lstStyle/>
-          <a:p>
-            <a:pPr algn="l"/>
-            <a:r>
-              <a:rPr sz="2000" b="1" i="0">
-                <a:solidFill>
-                  <a:srgbClr val="1F2C56"/>
-                </a:solidFill>
-                <a:latin typeface="Source Serif 4"/>
-              </a:rPr>
-              <a:t>Zwei KMU-Definitionen im Vergleich</a:t>
-            </a:r>
+              <a:t>M06  ·  INHALT</a:t>
+            </a:r>
+          </a:p>
+        </p:txBody>
+      </p:sp>
+      <p:sp>
+        <p:nvSpPr>
+          <p:cNvPr id="5" name="Rectangle 4"/>
+          <p:cNvSpPr/>
+          <p:nvPr/>
+        </p:nvSpPr>
+        <p:spPr>
+          <a:xfrm>
+            <a:off x="0" y="1234440"/>
+            <a:ext cx="12188952" cy="12700"/>
+          </a:xfrm>
+          <a:prstGeom prst="rect">
+            <a:avLst/>
+          </a:prstGeom>
+          <a:solidFill>
+            <a:srgbClr val="D8DFE4"/>
+          </a:solidFill>
+          <a:ln>
+            <a:noFill/>
+          </a:ln>
+        </p:spPr>
+        <p:style>
+          <a:lnRef idx="1">
+            <a:schemeClr val="accent1"/>
+          </a:lnRef>
+          <a:fillRef idx="3">
+            <a:schemeClr val="accent1"/>
+          </a:fillRef>
+          <a:effectRef idx="2">
+            <a:schemeClr val="accent1"/>
+          </a:effectRef>
+          <a:fontRef idx="minor">
+            <a:schemeClr val="lt1"/>
+          </a:fontRef>
+        </p:style>
+        <p:txBody>
+          <a:bodyPr rtlCol="0" anchor="ctr"/>
+          <a:lstStyle/>
+          <a:p>
+            <a:pPr algn="ctr"/>
           </a:p>
         </p:txBody>
       </p:sp>
@@ -6398,8 +8629,8 @@
         </p:nvSpPr>
         <p:spPr>
           <a:xfrm>
-            <a:off x="685800" y="1143000"/>
-            <a:ext cx="10817352" cy="25400"/>
+            <a:off x="685800" y="502920"/>
+            <a:ext cx="36576" cy="658368"/>
           </a:xfrm>
           <a:prstGeom prst="rect">
             <a:avLst/>
@@ -6433,33 +8664,295 @@
           </a:p>
         </p:txBody>
       </p:sp>
-      <p:pic>
-        <p:nvPicPr>
-          <p:cNvPr id="7" name="Picture 6" descr="image.png"/>
-          <p:cNvPicPr>
-            <a:picLocks noChangeAspect="1"/>
-          </p:cNvPicPr>
-          <p:nvPr/>
-        </p:nvPicPr>
-        <p:blipFill>
-          <a:blip r:embed="rId2"/>
-          <a:stretch>
-            <a:fillRect/>
-          </a:stretch>
-        </p:blipFill>
-        <p:spPr>
-          <a:xfrm>
-            <a:off x="2303489" y="1325880"/>
-            <a:ext cx="7581973" cy="4937760"/>
-          </a:xfrm>
-          <a:prstGeom prst="rect">
-            <a:avLst/>
-          </a:prstGeom>
-        </p:spPr>
-      </p:pic>
-      <p:sp>
-        <p:nvSpPr>
-          <p:cNvPr id="8" name="Rectangle 7"/>
+      <p:sp>
+        <p:nvSpPr>
+          <p:cNvPr id="7" name="TextBox 6"/>
+          <p:cNvSpPr txBox="1"/>
+          <p:nvPr/>
+        </p:nvSpPr>
+        <p:spPr>
+          <a:xfrm>
+            <a:off x="813816" y="502920"/>
+            <a:ext cx="10634472" cy="685800"/>
+          </a:xfrm>
+          <a:prstGeom prst="rect">
+            <a:avLst/>
+          </a:prstGeom>
+          <a:noFill/>
+        </p:spPr>
+        <p:txBody>
+          <a:bodyPr wrap="square">
+            <a:spAutoFit/>
+          </a:bodyPr>
+          <a:lstStyle/>
+          <a:p>
+            <a:pPr algn="l"/>
+            <a:r>
+              <a:rPr sz="2400" b="1" i="0">
+                <a:solidFill>
+                  <a:srgbClr val="1F2C56"/>
+                </a:solidFill>
+                <a:latin typeface="Source Serif 4"/>
+              </a:rPr>
+              <a:t>Theorie-Input 1: Was ist ein KMU? Definitionen, Typologien und volkswirtschaftliche Bedeutung</a:t>
+            </a:r>
+          </a:p>
+        </p:txBody>
+      </p:sp>
+      <p:sp>
+        <p:nvSpPr>
+          <p:cNvPr id="8" name="TextBox 7"/>
+          <p:cNvSpPr txBox="1"/>
+          <p:nvPr/>
+        </p:nvSpPr>
+        <p:spPr>
+          <a:xfrm>
+            <a:off x="685800" y="1417320"/>
+            <a:ext cx="10817352" cy="5029200"/>
+          </a:xfrm>
+          <a:prstGeom prst="rect">
+            <a:avLst/>
+          </a:prstGeom>
+          <a:noFill/>
+        </p:spPr>
+        <p:txBody>
+          <a:bodyPr wrap="square">
+            <a:spAutoFit/>
+          </a:bodyPr>
+          <a:lstStyle/>
+          <a:p>
+            <a:pPr>
+              <a:spcBef>
+                <a:spcPts val="1000"/>
+              </a:spcBef>
+              <a:spcAft>
+                <a:spcPts val="200"/>
+              </a:spcAft>
+            </a:pPr>
+            <a:r>
+              <a:rPr sz="800" b="1">
+                <a:solidFill>
+                  <a:srgbClr val="78808C"/>
+                </a:solidFill>
+                <a:latin typeface="JetBrains Mono"/>
+              </a:rPr>
+              <a:t>DIE ZWEI ZENTRALEN KMU-DEFINITIONEN</a:t>
+            </a:r>
+          </a:p>
+          <a:p>
+            <a:pPr>
+              <a:spcBef>
+                <a:spcPts val="400"/>
+              </a:spcBef>
+              <a:spcAft>
+                <a:spcPts val="200"/>
+              </a:spcAft>
+            </a:pPr>
+            <a:r>
+              <a:rPr sz="1300">
+                <a:solidFill>
+                  <a:srgbClr val="3D5466"/>
+                </a:solidFill>
+                <a:latin typeface="Arial"/>
+              </a:rPr>
+              <a:t>▸  In der deutschen Bankpraxis begegnen Berater zwei unterschiedlichen KMU-Definitionen, die für unterschiedliche Zwecke relevant sind.</a:t>
+            </a:r>
+          </a:p>
+          <a:p>
+            <a:pPr>
+              <a:spcBef>
+                <a:spcPts val="400"/>
+              </a:spcBef>
+              <a:spcAft>
+                <a:spcPts val="200"/>
+              </a:spcAft>
+            </a:pPr>
+            <a:r>
+              <a:rPr sz="1300">
+                <a:solidFill>
+                  <a:srgbClr val="3D5466"/>
+                </a:solidFill>
+                <a:latin typeface="Arial"/>
+              </a:rPr>
+              <a:t>▸  Die IfM-Bonn-Definition</a:t>
+            </a:r>
+          </a:p>
+          <a:p>
+            <a:pPr>
+              <a:spcBef>
+                <a:spcPts val="400"/>
+              </a:spcBef>
+              <a:spcAft>
+                <a:spcPts val="200"/>
+              </a:spcAft>
+            </a:pPr>
+            <a:r>
+              <a:rPr sz="1300">
+                <a:solidFill>
+                  <a:srgbClr val="3D5466"/>
+                </a:solidFill>
+                <a:latin typeface="Arial"/>
+              </a:rPr>
+              <a:t>▸  Das Institut für Mittelstandsforschung Bonn (IfM Bonn) definiert KMU quantitativ und qualitativ (IfM Bonn, 2024 ). Die Definition unterscheidet zwei Unternehmensgrößen:</a:t>
+            </a:r>
+          </a:p>
+          <a:p>
+            <a:pPr>
+              <a:spcBef>
+                <a:spcPts val="400"/>
+              </a:spcBef>
+              <a:spcAft>
+                <a:spcPts val="200"/>
+              </a:spcAft>
+            </a:pPr>
+            <a:r>
+              <a:rPr sz="1300">
+                <a:solidFill>
+                  <a:srgbClr val="3D5466"/>
+                </a:solidFill>
+                <a:latin typeface="Arial"/>
+              </a:rPr>
+              <a:t>▸  (Es müssen Mitarbeiterzahl UND Umsatz die Schwellenwerte erfüllen; IfM Bonn, 2024 )</a:t>
+            </a:r>
+          </a:p>
+          <a:p>
+            <a:pPr>
+              <a:spcBef>
+                <a:spcPts val="400"/>
+              </a:spcBef>
+              <a:spcAft>
+                <a:spcPts val="200"/>
+              </a:spcAft>
+            </a:pPr>
+            <a:r>
+              <a:rPr sz="1300">
+                <a:solidFill>
+                  <a:srgbClr val="3D5466"/>
+                </a:solidFill>
+                <a:latin typeface="Arial"/>
+              </a:rPr>
+              <a:t>▸  Die EU-Definition</a:t>
+            </a:r>
+          </a:p>
+          <a:p>
+            <a:pPr>
+              <a:spcBef>
+                <a:spcPts val="400"/>
+              </a:spcBef>
+              <a:spcAft>
+                <a:spcPts val="200"/>
+              </a:spcAft>
+            </a:pPr>
+            <a:r>
+              <a:rPr sz="1300">
+                <a:solidFill>
+                  <a:srgbClr val="3D5466"/>
+                </a:solidFill>
+                <a:latin typeface="Arial"/>
+              </a:rPr>
+              <a:t>▸  Die Europäische Kommission (2020 ) unterscheidet drei Unternehmensgrößen, die für EU-Förderprogramme und KfW-Finanzierungsprodukte unmittelbar relevant sind:</a:t>
+            </a:r>
+          </a:p>
+          <a:p>
+            <a:pPr>
+              <a:spcBef>
+                <a:spcPts val="400"/>
+              </a:spcBef>
+              <a:spcAft>
+                <a:spcPts val="200"/>
+              </a:spcAft>
+            </a:pPr>
+            <a:r>
+              <a:rPr sz="1300">
+                <a:solidFill>
+                  <a:srgbClr val="3D5466"/>
+                </a:solidFill>
+                <a:latin typeface="Arial"/>
+              </a:rPr>
+              <a:t>▸  Es müssen Mitarbeiterzahl UND (Umsatz ODER Bilanzsumme) die jeweiligen Schwellenwerte erfüllen (Europäische Kommission, 2020 ).</a:t>
+            </a:r>
+          </a:p>
+          <a:p>
+            <a:pPr>
+              <a:spcBef>
+                <a:spcPts val="400"/>
+              </a:spcBef>
+              <a:spcAft>
+                <a:spcPts val="200"/>
+              </a:spcAft>
+            </a:pPr>
+            <a:r>
+              <a:rPr sz="1300">
+                <a:solidFill>
+                  <a:srgbClr val="3D5466"/>
+                </a:solidFill>
+                <a:latin typeface="Arial"/>
+              </a:rPr>
+              <a:t>▸  Praktische Relevanz der Unterscheidung</a:t>
+            </a:r>
+          </a:p>
+          <a:p>
+            <a:pPr>
+              <a:spcBef>
+                <a:spcPts val="600"/>
+              </a:spcBef>
+              <a:spcAft>
+                <a:spcPts val="200"/>
+              </a:spcAft>
+            </a:pPr>
+            <a:r>
+              <a:rPr sz="1200" i="1">
+                <a:solidFill>
+                  <a:srgbClr val="3D5466"/>
+                </a:solidFill>
+                <a:latin typeface="Arial"/>
+              </a:rPr>
+              <a:t>→  Praxishinweis: Unternehmensgruppen und verbundene Unternehmen</a:t>
+            </a:r>
+          </a:p>
+          <a:p>
+            <a:pPr>
+              <a:spcBef>
+                <a:spcPts val="1000"/>
+              </a:spcBef>
+              <a:spcAft>
+                <a:spcPts val="200"/>
+              </a:spcAft>
+            </a:pPr>
+            <a:r>
+              <a:rPr sz="800" b="1">
+                <a:solidFill>
+                  <a:srgbClr val="78808C"/>
+                </a:solidFill>
+                <a:latin typeface="JetBrains Mono"/>
+              </a:rPr>
+              <a:t>VOLKSWIRTSCHAFTLICHE BEDEUTUNG VON KMU</a:t>
+            </a:r>
+          </a:p>
+          <a:p>
+            <a:pPr>
+              <a:spcBef>
+                <a:spcPts val="400"/>
+              </a:spcBef>
+              <a:spcAft>
+                <a:spcPts val="200"/>
+              </a:spcAft>
+            </a:pPr>
+            <a:r>
+              <a:rPr sz="1300">
+                <a:solidFill>
+                  <a:srgbClr val="3D5466"/>
+                </a:solidFill>
+                <a:latin typeface="Arial"/>
+              </a:rPr>
+              <a:t>▸  KMU sind kein Randphänomen, sondern das Fundament der deutschen Wirtschaftsstruktur:</a:t>
+            </a:r>
+          </a:p>
+        </p:txBody>
+      </p:sp>
+      <p:sp>
+        <p:nvSpPr>
+          <p:cNvPr id="9" name="Rectangle 8"/>
           <p:cNvSpPr/>
           <p:nvPr/>
         </p:nvSpPr>
@@ -6502,7 +8995,7 @@
       </p:sp>
       <p:sp>
         <p:nvSpPr>
-          <p:cNvPr id="9" name="TextBox 8"/>
+          <p:cNvPr id="10" name="TextBox 9"/>
           <p:cNvSpPr txBox="1"/>
           <p:nvPr/>
         </p:nvSpPr>
@@ -6531,41 +9024,6 @@
                 <a:latin typeface="JetBrains Mono"/>
               </a:rPr>
               <a:t>Benedikt Zoller Coaching  ·  FKB Campus  ·  M06</a:t>
-            </a:r>
-          </a:p>
-        </p:txBody>
-      </p:sp>
-      <p:sp>
-        <p:nvSpPr>
-          <p:cNvPr id="10" name="TextBox 9"/>
-          <p:cNvSpPr txBox="1"/>
-          <p:nvPr/>
-        </p:nvSpPr>
-        <p:spPr>
-          <a:xfrm>
-            <a:off x="7176211" y="6583680"/>
-            <a:ext cx="4326940" cy="256032"/>
-          </a:xfrm>
-          <a:prstGeom prst="rect">
-            <a:avLst/>
-          </a:prstGeom>
-          <a:noFill/>
-        </p:spPr>
-        <p:txBody>
-          <a:bodyPr wrap="none">
-            <a:spAutoFit/>
-          </a:bodyPr>
-          <a:lstStyle/>
-          <a:p>
-            <a:pPr algn="r"/>
-            <a:r>
-              <a:rPr sz="700">
-                <a:solidFill>
-                  <a:srgbClr val="A0B4D2"/>
-                </a:solidFill>
-                <a:latin typeface="JetBrains Mono"/>
-              </a:rPr>
-              <a:t>Schaubild</a:t>
             </a:r>
           </a:p>
         </p:txBody>
@@ -6603,7 +9061,7 @@
             <a:avLst/>
           </a:prstGeom>
           <a:solidFill>
-            <a:srgbClr val="EDEDF3"/>
+            <a:srgbClr val="FFFFFF"/>
           </a:solidFill>
           <a:ln>
             <a:noFill/>
@@ -6704,51 +9162,43 @@
                 </a:solidFill>
                 <a:latin typeface="JetBrains Mono"/>
               </a:rPr>
-              <a:t>M06  ·  INHALT</a:t>
-            </a:r>
-          </a:p>
-        </p:txBody>
-      </p:sp>
-      <p:sp>
-        <p:nvSpPr>
-          <p:cNvPr id="5" name="Rectangle 4"/>
-          <p:cNvSpPr/>
-          <p:nvPr/>
-        </p:nvSpPr>
-        <p:spPr>
-          <a:xfrm>
-            <a:off x="0" y="1234440"/>
-            <a:ext cx="12188952" cy="12700"/>
-          </a:xfrm>
-          <a:prstGeom prst="rect">
-            <a:avLst/>
-          </a:prstGeom>
-          <a:solidFill>
-            <a:srgbClr val="D8DFE4"/>
-          </a:solidFill>
-          <a:ln>
-            <a:noFill/>
-          </a:ln>
-        </p:spPr>
-        <p:style>
-          <a:lnRef idx="1">
-            <a:schemeClr val="accent1"/>
-          </a:lnRef>
-          <a:fillRef idx="3">
-            <a:schemeClr val="accent1"/>
-          </a:fillRef>
-          <a:effectRef idx="2">
-            <a:schemeClr val="accent1"/>
-          </a:effectRef>
-          <a:fontRef idx="minor">
-            <a:schemeClr val="lt1"/>
-          </a:fontRef>
-        </p:style>
-        <p:txBody>
-          <a:bodyPr rtlCol="0" anchor="ctr"/>
-          <a:lstStyle/>
-          <a:p>
-            <a:pPr algn="ctr"/>
+              <a:t>M06  ·  SCHAUBILD</a:t>
+            </a:r>
+          </a:p>
+        </p:txBody>
+      </p:sp>
+      <p:sp>
+        <p:nvSpPr>
+          <p:cNvPr id="5" name="TextBox 4"/>
+          <p:cNvSpPr txBox="1"/>
+          <p:nvPr/>
+        </p:nvSpPr>
+        <p:spPr>
+          <a:xfrm>
+            <a:off x="685800" y="502920"/>
+            <a:ext cx="10817352" cy="594360"/>
+          </a:xfrm>
+          <a:prstGeom prst="rect">
+            <a:avLst/>
+          </a:prstGeom>
+          <a:noFill/>
+        </p:spPr>
+        <p:txBody>
+          <a:bodyPr wrap="square">
+            <a:spAutoFit/>
+          </a:bodyPr>
+          <a:lstStyle/>
+          <a:p>
+            <a:pPr algn="l"/>
+            <a:r>
+              <a:rPr sz="2000" b="1" i="0">
+                <a:solidFill>
+                  <a:srgbClr val="1F2C56"/>
+                </a:solidFill>
+                <a:latin typeface="Source Serif 4"/>
+              </a:rPr>
+              <a:t>Zwei KMU-Definitionen im Vergleich</a:t>
+            </a:r>
           </a:p>
         </p:txBody>
       </p:sp>
@@ -6760,8 +9210,8 @@
         </p:nvSpPr>
         <p:spPr>
           <a:xfrm>
-            <a:off x="685800" y="502920"/>
-            <a:ext cx="36576" cy="658368"/>
+            <a:off x="685800" y="1143000"/>
+            <a:ext cx="10817352" cy="25400"/>
           </a:xfrm>
           <a:prstGeom prst="rect">
             <a:avLst/>
@@ -6795,295 +9245,33 @@
           </a:p>
         </p:txBody>
       </p:sp>
-      <p:sp>
-        <p:nvSpPr>
-          <p:cNvPr id="7" name="TextBox 6"/>
-          <p:cNvSpPr txBox="1"/>
-          <p:nvPr/>
-        </p:nvSpPr>
-        <p:spPr>
-          <a:xfrm>
-            <a:off x="813816" y="502920"/>
-            <a:ext cx="10634472" cy="685800"/>
-          </a:xfrm>
-          <a:prstGeom prst="rect">
-            <a:avLst/>
-          </a:prstGeom>
-          <a:noFill/>
-        </p:spPr>
-        <p:txBody>
-          <a:bodyPr wrap="square">
-            <a:spAutoFit/>
-          </a:bodyPr>
-          <a:lstStyle/>
-          <a:p>
-            <a:pPr algn="l"/>
-            <a:r>
-              <a:rPr sz="2400" b="1" i="0">
-                <a:solidFill>
-                  <a:srgbClr val="1F2C56"/>
-                </a:solidFill>
-                <a:latin typeface="Source Serif 4"/>
-              </a:rPr>
-              <a:t>Theorie-Input 2: Finanzierungsmuster und typische Risikofelder</a:t>
-            </a:r>
-          </a:p>
-        </p:txBody>
-      </p:sp>
-      <p:sp>
-        <p:nvSpPr>
-          <p:cNvPr id="8" name="TextBox 7"/>
-          <p:cNvSpPr txBox="1"/>
-          <p:nvPr/>
-        </p:nvSpPr>
-        <p:spPr>
-          <a:xfrm>
-            <a:off x="685800" y="1417320"/>
-            <a:ext cx="10817352" cy="5029200"/>
-          </a:xfrm>
-          <a:prstGeom prst="rect">
-            <a:avLst/>
-          </a:prstGeom>
-          <a:noFill/>
-        </p:spPr>
-        <p:txBody>
-          <a:bodyPr wrap="square">
-            <a:spAutoFit/>
-          </a:bodyPr>
-          <a:lstStyle/>
-          <a:p>
-            <a:pPr>
-              <a:spcBef>
-                <a:spcPts val="1000"/>
-              </a:spcBef>
-              <a:spcAft>
-                <a:spcPts val="200"/>
-              </a:spcAft>
-            </a:pPr>
-            <a:r>
-              <a:rPr sz="800" b="1">
-                <a:solidFill>
-                  <a:srgbClr val="78808C"/>
-                </a:solidFill>
-                <a:latin typeface="JetBrains Mono"/>
-              </a:rPr>
-              <a:t>FINANZIERUNGSSTRUKTUR: KMU VS. GROSSUNTERNEHMEN</a:t>
-            </a:r>
-          </a:p>
-          <a:p>
-            <a:pPr>
-              <a:spcBef>
-                <a:spcPts val="400"/>
-              </a:spcBef>
-              <a:spcAft>
-                <a:spcPts val="200"/>
-              </a:spcAft>
-            </a:pPr>
-            <a:r>
-              <a:rPr sz="1200">
-                <a:solidFill>
-                  <a:srgbClr val="3D5466"/>
-                </a:solidFill>
-                <a:latin typeface="Arial"/>
-              </a:rPr>
-              <a:t>Die Finanzierungsstruktur von KMU unterscheidet sich strukturell von der großer Unternehmen. Diese Unterschiede zu kennen, ist die Grundlage jeder fundierten Kreditanalyse.</a:t>
-            </a:r>
-          </a:p>
-          <a:p>
-            <a:pPr>
-              <a:spcBef>
-                <a:spcPts val="400"/>
-              </a:spcBef>
-              <a:spcAft>
-                <a:spcPts val="200"/>
-              </a:spcAft>
-            </a:pPr>
-            <a:r>
-              <a:rPr sz="1200">
-                <a:solidFill>
-                  <a:srgbClr val="3D5466"/>
-                </a:solidFill>
-                <a:latin typeface="Arial"/>
-              </a:rPr>
-              <a:t>Eigenkapitalquoten:</a:t>
-            </a:r>
-          </a:p>
-          <a:p>
-            <a:pPr>
-              <a:spcBef>
-                <a:spcPts val="400"/>
-              </a:spcBef>
-              <a:spcAft>
-                <a:spcPts val="200"/>
-              </a:spcAft>
-            </a:pPr>
-            <a:r>
-              <a:rPr sz="1300">
-                <a:solidFill>
-                  <a:srgbClr val="3D5466"/>
-                </a:solidFill>
-                <a:latin typeface="Arial"/>
-              </a:rPr>
-              <a:t>▸  Steuerliche Optimierung: KMU-Inhaber entnehmen Gewinne für den privaten Lebensunterhalt, statt sie im Betrieb zu thesaurieren</a:t>
-            </a:r>
-          </a:p>
-          <a:p>
-            <a:pPr>
-              <a:spcBef>
-                <a:spcPts val="400"/>
-              </a:spcBef>
-              <a:spcAft>
-                <a:spcPts val="200"/>
-              </a:spcAft>
-            </a:pPr>
-            <a:r>
-              <a:rPr sz="1300">
-                <a:solidFill>
-                  <a:srgbClr val="3D5466"/>
-                </a:solidFill>
-                <a:latin typeface="Arial"/>
-              </a:rPr>
-              <a:t>▸  Verflechtung Privat/Betrieb: Privatliegenschaften des Inhabers erscheinen nicht in der Bilanz, sind aber reale Sicherheiten</a:t>
-            </a:r>
-          </a:p>
-          <a:p>
-            <a:pPr>
-              <a:spcBef>
-                <a:spcPts val="400"/>
-              </a:spcBef>
-              <a:spcAft>
-                <a:spcPts val="200"/>
-              </a:spcAft>
-            </a:pPr>
-            <a:r>
-              <a:rPr sz="1300">
-                <a:solidFill>
-                  <a:srgbClr val="3D5466"/>
-                </a:solidFill>
-                <a:latin typeface="Arial"/>
-              </a:rPr>
-              <a:t>▸  Vorsichtige Bilanzpolitik: Viele KMU nutzen steuerliche Abschreibungsmöglichkeiten maximal – die Bilanz ist dadurch "schlechter" als die wirtschaftliche Realität</a:t>
-            </a:r>
-          </a:p>
-          <a:p>
-            <a:pPr>
-              <a:spcBef>
-                <a:spcPts val="400"/>
-              </a:spcBef>
-              <a:spcAft>
-                <a:spcPts val="200"/>
-              </a:spcAft>
-            </a:pPr>
-            <a:r>
-              <a:rPr sz="1200">
-                <a:solidFill>
-                  <a:srgbClr val="3D5466"/>
-                </a:solidFill>
-                <a:latin typeface="Arial"/>
-              </a:rPr>
-              <a:t>Finanzierungsquellen:</a:t>
-            </a:r>
-          </a:p>
-          <a:p>
-            <a:pPr>
-              <a:spcBef>
-                <a:spcPts val="400"/>
-              </a:spcBef>
-              <a:spcAft>
-                <a:spcPts val="200"/>
-              </a:spcAft>
-            </a:pPr>
-            <a:r>
-              <a:rPr sz="1200">
-                <a:solidFill>
-                  <a:srgbClr val="3D5466"/>
-                </a:solidFill>
-                <a:latin typeface="Arial"/>
-              </a:rPr>
-              <a:t>KMU finanzieren sich typischerweise durch drei Hauptquellen:</a:t>
-            </a:r>
-          </a:p>
-          <a:p>
-            <a:pPr>
-              <a:spcBef>
-                <a:spcPts val="400"/>
-              </a:spcBef>
-              <a:spcAft>
-                <a:spcPts val="200"/>
-              </a:spcAft>
-            </a:pPr>
-            <a:r>
-              <a:rPr sz="1300">
-                <a:solidFill>
-                  <a:srgbClr val="3D5466"/>
-                </a:solidFill>
-                <a:latin typeface="Arial"/>
-              </a:rPr>
-              <a:t>▸  Innenfinanzierung (Thesaurierung): Gewinne verbleiben im Unternehmen – bei inhabergeführten Betrieben stark limitiert durch private Entnahmen</a:t>
-            </a:r>
-          </a:p>
-          <a:p>
-            <a:pPr>
-              <a:spcBef>
-                <a:spcPts val="400"/>
-              </a:spcBef>
-              <a:spcAft>
-                <a:spcPts val="200"/>
-              </a:spcAft>
-            </a:pPr>
-            <a:r>
-              <a:rPr sz="1300">
-                <a:solidFill>
-                  <a:srgbClr val="3D5466"/>
-                </a:solidFill>
-                <a:latin typeface="Arial"/>
-              </a:rPr>
-              <a:t>▸  Bankkredite (Außenfinanzierung): Investitionskredite, Kontokorrentlinien, Avale – dominante Finanzierungsform</a:t>
-            </a:r>
-          </a:p>
-          <a:p>
-            <a:pPr>
-              <a:spcBef>
-                <a:spcPts val="400"/>
-              </a:spcBef>
-              <a:spcAft>
-                <a:spcPts val="200"/>
-              </a:spcAft>
-            </a:pPr>
-            <a:r>
-              <a:rPr sz="1300">
-                <a:solidFill>
-                  <a:srgbClr val="3D5466"/>
-                </a:solidFill>
-                <a:latin typeface="Arial"/>
-              </a:rPr>
-              <a:t>▸  Öffentliche Förderprogramme: KfW-Unternehmenskredit, ERP-Kapital für Gründung, Landesförderprogramme – häufig günstiger als Hausbankkonditionen, oft nicht ausgeschöpft</a:t>
-            </a:r>
-          </a:p>
-          <a:p>
-            <a:pPr>
-              <a:spcBef>
-                <a:spcPts val="400"/>
-              </a:spcBef>
-              <a:spcAft>
-                <a:spcPts val="200"/>
-              </a:spcAft>
-            </a:pPr>
-            <a:r>
-              <a:rPr sz="1200">
-                <a:solidFill>
-                  <a:srgbClr val="3D5466"/>
-                </a:solidFill>
-                <a:latin typeface="Arial"/>
-              </a:rPr>
-              <a:t>Die drei meistgenutzten Förderprogramme in der süddeutschen VR-Praxis:</a:t>
-            </a:r>
-          </a:p>
-        </p:txBody>
-      </p:sp>
-      <p:sp>
-        <p:nvSpPr>
-          <p:cNvPr id="9" name="Rectangle 8"/>
+      <p:pic>
+        <p:nvPicPr>
+          <p:cNvPr id="7" name="Picture 6" descr="image.png"/>
+          <p:cNvPicPr>
+            <a:picLocks noChangeAspect="1"/>
+          </p:cNvPicPr>
+          <p:nvPr/>
+        </p:nvPicPr>
+        <p:blipFill>
+          <a:blip r:embed="rId2"/>
+          <a:stretch>
+            <a:fillRect/>
+          </a:stretch>
+        </p:blipFill>
+        <p:spPr>
+          <a:xfrm>
+            <a:off x="2303489" y="1325880"/>
+            <a:ext cx="7581973" cy="4937760"/>
+          </a:xfrm>
+          <a:prstGeom prst="rect">
+            <a:avLst/>
+          </a:prstGeom>
+        </p:spPr>
+      </p:pic>
+      <p:sp>
+        <p:nvSpPr>
+          <p:cNvPr id="8" name="Rectangle 7"/>
           <p:cNvSpPr/>
           <p:nvPr/>
         </p:nvSpPr>
@@ -7126,7 +9314,7 @@
       </p:sp>
       <p:sp>
         <p:nvSpPr>
-          <p:cNvPr id="10" name="TextBox 9"/>
+          <p:cNvPr id="9" name="TextBox 8"/>
           <p:cNvSpPr txBox="1"/>
           <p:nvPr/>
         </p:nvSpPr>
@@ -7155,6 +9343,41 @@
                 <a:latin typeface="JetBrains Mono"/>
               </a:rPr>
               <a:t>Benedikt Zoller Coaching  ·  FKB Campus  ·  M06</a:t>
+            </a:r>
+          </a:p>
+        </p:txBody>
+      </p:sp>
+      <p:sp>
+        <p:nvSpPr>
+          <p:cNvPr id="10" name="TextBox 9"/>
+          <p:cNvSpPr txBox="1"/>
+          <p:nvPr/>
+        </p:nvSpPr>
+        <p:spPr>
+          <a:xfrm>
+            <a:off x="7176211" y="6583680"/>
+            <a:ext cx="4326940" cy="256032"/>
+          </a:xfrm>
+          <a:prstGeom prst="rect">
+            <a:avLst/>
+          </a:prstGeom>
+          <a:noFill/>
+        </p:spPr>
+        <p:txBody>
+          <a:bodyPr wrap="none">
+            <a:spAutoFit/>
+          </a:bodyPr>
+          <a:lstStyle/>
+          <a:p>
+            <a:pPr algn="r"/>
+            <a:r>
+              <a:rPr sz="700">
+                <a:solidFill>
+                  <a:srgbClr val="A0B4D2"/>
+                </a:solidFill>
+                <a:latin typeface="JetBrains Mono"/>
+              </a:rPr>
+              <a:t>Schaubild</a:t>
             </a:r>
           </a:p>
         </p:txBody>
@@ -7192,7 +9415,7 @@
             <a:avLst/>
           </a:prstGeom>
           <a:solidFill>
-            <a:srgbClr val="EDEDF3"/>
+            <a:srgbClr val="FFFFFF"/>
           </a:solidFill>
           <a:ln>
             <a:noFill/>
@@ -7293,51 +9516,43 @@
                 </a:solidFill>
                 <a:latin typeface="JetBrains Mono"/>
               </a:rPr>
-              <a:t>M06  ·  INHALT</a:t>
-            </a:r>
-          </a:p>
-        </p:txBody>
-      </p:sp>
-      <p:sp>
-        <p:nvSpPr>
-          <p:cNvPr id="5" name="Rectangle 4"/>
-          <p:cNvSpPr/>
-          <p:nvPr/>
-        </p:nvSpPr>
-        <p:spPr>
-          <a:xfrm>
-            <a:off x="0" y="1234440"/>
-            <a:ext cx="12188952" cy="12700"/>
-          </a:xfrm>
-          <a:prstGeom prst="rect">
-            <a:avLst/>
-          </a:prstGeom>
-          <a:solidFill>
-            <a:srgbClr val="D8DFE4"/>
-          </a:solidFill>
-          <a:ln>
-            <a:noFill/>
-          </a:ln>
-        </p:spPr>
-        <p:style>
-          <a:lnRef idx="1">
-            <a:schemeClr val="accent1"/>
-          </a:lnRef>
-          <a:fillRef idx="3">
-            <a:schemeClr val="accent1"/>
-          </a:fillRef>
-          <a:effectRef idx="2">
-            <a:schemeClr val="accent1"/>
-          </a:effectRef>
-          <a:fontRef idx="minor">
-            <a:schemeClr val="lt1"/>
-          </a:fontRef>
-        </p:style>
-        <p:txBody>
-          <a:bodyPr rtlCol="0" anchor="ctr"/>
-          <a:lstStyle/>
-          <a:p>
-            <a:pPr algn="ctr"/>
+              <a:t>M06  ·  ÜBERSICHT</a:t>
+            </a:r>
+          </a:p>
+        </p:txBody>
+      </p:sp>
+      <p:sp>
+        <p:nvSpPr>
+          <p:cNvPr id="5" name="TextBox 4"/>
+          <p:cNvSpPr txBox="1"/>
+          <p:nvPr/>
+        </p:nvSpPr>
+        <p:spPr>
+          <a:xfrm>
+            <a:off x="685800" y="502920"/>
+            <a:ext cx="10817352" cy="594360"/>
+          </a:xfrm>
+          <a:prstGeom prst="rect">
+            <a:avLst/>
+          </a:prstGeom>
+          <a:noFill/>
+        </p:spPr>
+        <p:txBody>
+          <a:bodyPr wrap="square">
+            <a:spAutoFit/>
+          </a:bodyPr>
+          <a:lstStyle/>
+          <a:p>
+            <a:pPr algn="l"/>
+            <a:r>
+              <a:rPr sz="2000" b="1" i="0">
+                <a:solidFill>
+                  <a:srgbClr val="1F2C56"/>
+                </a:solidFill>
+                <a:latin typeface="Source Serif 4"/>
+              </a:rPr>
+              <a:t>Theorie-Input 1: Was ist ein KMU? Definitionen, Typologien und volkswirtschaftliche Bedeutung</a:t>
+            </a:r>
           </a:p>
         </p:txBody>
       </p:sp>
@@ -7349,8 +9564,8 @@
         </p:nvSpPr>
         <p:spPr>
           <a:xfrm>
-            <a:off x="685800" y="502920"/>
-            <a:ext cx="36576" cy="658368"/>
+            <a:off x="685800" y="1143000"/>
+            <a:ext cx="10817352" cy="25400"/>
           </a:xfrm>
           <a:prstGeom prst="rect">
             <a:avLst/>
@@ -7384,295 +9599,272 @@
           </a:p>
         </p:txBody>
       </p:sp>
-      <p:sp>
-        <p:nvSpPr>
-          <p:cNvPr id="7" name="TextBox 6"/>
-          <p:cNvSpPr txBox="1"/>
-          <p:nvPr/>
-        </p:nvSpPr>
-        <p:spPr>
-          <a:xfrm>
-            <a:off x="813816" y="502920"/>
-            <a:ext cx="10634472" cy="685800"/>
-          </a:xfrm>
-          <a:prstGeom prst="rect">
-            <a:avLst/>
-          </a:prstGeom>
-          <a:noFill/>
-        </p:spPr>
-        <p:txBody>
-          <a:bodyPr wrap="square">
-            <a:spAutoFit/>
-          </a:bodyPr>
-          <a:lstStyle/>
-          <a:p>
-            <a:pPr algn="l"/>
-            <a:r>
-              <a:rPr sz="2400" b="1" i="0">
-                <a:solidFill>
-                  <a:srgbClr val="1F2C56"/>
-                </a:solidFill>
-                <a:latin typeface="Source Serif 4"/>
-              </a:rPr>
-              <a:t>Theorie-Input 3: Einstieg in die Branchenanalyse</a:t>
-            </a:r>
-          </a:p>
-        </p:txBody>
-      </p:sp>
-      <p:sp>
-        <p:nvSpPr>
-          <p:cNvPr id="8" name="TextBox 7"/>
-          <p:cNvSpPr txBox="1"/>
-          <p:nvPr/>
-        </p:nvSpPr>
-        <p:spPr>
-          <a:xfrm>
-            <a:off x="685800" y="1417320"/>
-            <a:ext cx="10817352" cy="5029200"/>
-          </a:xfrm>
-          <a:prstGeom prst="rect">
-            <a:avLst/>
-          </a:prstGeom>
-          <a:noFill/>
-        </p:spPr>
-        <p:txBody>
-          <a:bodyPr wrap="square">
-            <a:spAutoFit/>
-          </a:bodyPr>
-          <a:lstStyle/>
-          <a:p>
-            <a:pPr>
-              <a:spcBef>
-                <a:spcPts val="1000"/>
-              </a:spcBef>
-              <a:spcAft>
-                <a:spcPts val="200"/>
-              </a:spcAft>
-            </a:pPr>
-            <a:r>
-              <a:rPr sz="800" b="1">
-                <a:solidFill>
-                  <a:srgbClr val="78808C"/>
-                </a:solidFill>
-                <a:latin typeface="JetBrains Mono"/>
-              </a:rPr>
-              <a:t>DAS GRUNDPRINZIP: ZAHLEN BRAUCHEN KONTEXT</a:t>
-            </a:r>
-          </a:p>
-          <a:p>
-            <a:pPr>
-              <a:spcBef>
-                <a:spcPts val="1000"/>
-              </a:spcBef>
-              <a:spcAft>
-                <a:spcPts val="200"/>
-              </a:spcAft>
-            </a:pPr>
-            <a:r>
-              <a:rPr sz="800" b="1">
-                <a:solidFill>
-                  <a:srgbClr val="78808C"/>
-                </a:solidFill>
-                <a:latin typeface="JetBrains Mono"/>
-              </a:rPr>
-              <a:t>VIER BRANCHENPROFILE FÜR DEN BERATUNGSALLTAG</a:t>
-            </a:r>
-          </a:p>
-          <a:p>
-            <a:pPr>
-              <a:spcBef>
-                <a:spcPts val="400"/>
-              </a:spcBef>
-              <a:spcAft>
-                <a:spcPts val="200"/>
-              </a:spcAft>
-            </a:pPr>
-            <a:r>
-              <a:rPr sz="1200">
-                <a:solidFill>
-                  <a:srgbClr val="3D5466"/>
-                </a:solidFill>
-                <a:latin typeface="Arial"/>
-              </a:rPr>
-              <a:t>Branchenprofil A – Handwerk (z.B. Schreiner, Maler, Sanitär, Bäcker)</a:t>
-            </a:r>
-          </a:p>
-          <a:p>
-            <a:pPr>
-              <a:spcBef>
-                <a:spcPts val="400"/>
-              </a:spcBef>
-              <a:spcAft>
-                <a:spcPts val="200"/>
-              </a:spcAft>
-            </a:pPr>
-            <a:r>
-              <a:rPr sz="1200">
-                <a:solidFill>
-                  <a:srgbClr val="3D5466"/>
-                </a:solidFill>
-                <a:latin typeface="Arial"/>
-              </a:rPr>
-              <a:t>Das Handwerk ist der typischste KMU-Sektor im süddeutschen VR-Kundenbestand. Charakteristisch:</a:t>
-            </a:r>
-          </a:p>
-          <a:p>
-            <a:pPr>
-              <a:spcBef>
-                <a:spcPts val="400"/>
-              </a:spcBef>
-              <a:spcAft>
-                <a:spcPts val="200"/>
-              </a:spcAft>
-            </a:pPr>
-            <a:r>
-              <a:rPr sz="1300">
-                <a:solidFill>
-                  <a:srgbClr val="3D5466"/>
-                </a:solidFill>
-                <a:latin typeface="Arial"/>
-              </a:rPr>
-              <a:t>▸  Eigenkapitalquote: Ø 18–24 % (niedriger als Industrie, weil arbeitsintensiv und wenig Anlageintensität)</a:t>
-            </a:r>
-          </a:p>
-          <a:p>
-            <a:pPr>
-              <a:spcBef>
-                <a:spcPts val="400"/>
-              </a:spcBef>
-              <a:spcAft>
-                <a:spcPts val="200"/>
-              </a:spcAft>
-            </a:pPr>
-            <a:r>
-              <a:rPr sz="1300">
-                <a:solidFill>
-                  <a:srgbClr val="3D5466"/>
-                </a:solidFill>
-                <a:latin typeface="Arial"/>
-              </a:rPr>
-              <a:t>▸  Finanzierungsbedarf: Kontokorrentlinie für saisonale Spitzen und Materialvorfinanzierung, Investitionskredite für Fahrzeuge, Maschinen und Werkzeuge, gelegentlich Betriebsgebäude</a:t>
-            </a:r>
-          </a:p>
-          <a:p>
-            <a:pPr>
-              <a:spcBef>
-                <a:spcPts val="400"/>
-              </a:spcBef>
-              <a:spcAft>
-                <a:spcPts val="200"/>
-              </a:spcAft>
-            </a:pPr>
-            <a:r>
-              <a:rPr sz="1300">
-                <a:solidFill>
-                  <a:srgbClr val="3D5466"/>
-                </a:solidFill>
-                <a:latin typeface="Arial"/>
-              </a:rPr>
-              <a:t>▸  Typische Risiken: Fachkräftemangel, Materialkostenvolatilität (Holz, Stahl, Kupfer), Auftragsschwankungen durch Baukonjunktur</a:t>
-            </a:r>
-          </a:p>
-          <a:p>
-            <a:pPr>
-              <a:spcBef>
-                <a:spcPts val="400"/>
-              </a:spcBef>
-              <a:spcAft>
-                <a:spcPts val="200"/>
-              </a:spcAft>
-            </a:pPr>
-            <a:r>
-              <a:rPr sz="1300">
-                <a:solidFill>
-                  <a:srgbClr val="3D5466"/>
-                </a:solidFill>
-                <a:latin typeface="Arial"/>
-              </a:rPr>
-              <a:t>▸  Was frage ich als Berater: "Wie gut sind Sie mit Aufträgen ausgelastet – haben Sie eine Warteliste?" / "Haben Sie genug qualifiziertes Personal, um Ihre Aufträge abzuarbeiten?"</a:t>
-            </a:r>
-          </a:p>
-          <a:p>
-            <a:pPr>
-              <a:spcBef>
-                <a:spcPts val="400"/>
-              </a:spcBef>
-              <a:spcAft>
-                <a:spcPts val="200"/>
-              </a:spcAft>
-            </a:pPr>
-            <a:r>
-              <a:rPr sz="1200">
-                <a:solidFill>
-                  <a:srgbClr val="3D5466"/>
-                </a:solidFill>
-                <a:latin typeface="Arial"/>
-              </a:rPr>
-              <a:t>Branchenprofil B – Produzierendes Gewerbe / Maschinenbau</a:t>
-            </a:r>
-          </a:p>
-          <a:p>
-            <a:pPr>
-              <a:spcBef>
-                <a:spcPts val="400"/>
-              </a:spcBef>
-              <a:spcAft>
-                <a:spcPts val="200"/>
-              </a:spcAft>
-            </a:pPr>
-            <a:r>
-              <a:rPr sz="1300">
-                <a:solidFill>
-                  <a:srgbClr val="3D5466"/>
-                </a:solidFill>
-                <a:latin typeface="Arial"/>
-              </a:rPr>
-              <a:t>▸  Eigenkapitalquote: Ø 28–35 % (höher, weil hoher Anlagevermögensanteil)</a:t>
-            </a:r>
-          </a:p>
-          <a:p>
-            <a:pPr>
-              <a:spcBef>
-                <a:spcPts val="400"/>
-              </a:spcBef>
-              <a:spcAft>
-                <a:spcPts val="200"/>
-              </a:spcAft>
-            </a:pPr>
-            <a:r>
-              <a:rPr sz="1300">
-                <a:solidFill>
-                  <a:srgbClr val="3D5466"/>
-                </a:solidFill>
-                <a:latin typeface="Arial"/>
-              </a:rPr>
-              <a:t>▸  Finanzierungsbedarf: Investitionskredite für Maschinen und Anlagen (oft langfristig, 7–15 Jahre), Exportfinanzierung, Anzahlungsfinanzierung bei Großaufträgen, Betriebsmittelkredite</a:t>
-            </a:r>
-          </a:p>
-          <a:p>
-            <a:pPr>
-              <a:spcBef>
-                <a:spcPts val="400"/>
-              </a:spcBef>
-              <a:spcAft>
-                <a:spcPts val="200"/>
-              </a:spcAft>
-            </a:pPr>
-            <a:r>
-              <a:rPr sz="1300">
-                <a:solidFill>
-                  <a:srgbClr val="3D5466"/>
-                </a:solidFill>
-                <a:latin typeface="Arial"/>
-              </a:rPr>
-              <a:t>▸  Typische Risiken: Exportabhängigkeit (Wechselkurs, geopolitische Risiken), Energiekostenentwicklung, Lieferkettenstörungen</a:t>
-            </a:r>
-          </a:p>
-        </p:txBody>
-      </p:sp>
-      <p:sp>
-        <p:nvSpPr>
-          <p:cNvPr id="9" name="Rectangle 8"/>
+      <p:graphicFrame>
+        <p:nvGraphicFramePr>
+          <p:cNvPr id="7" name="Table 6"/>
+          <p:cNvGraphicFramePr>
+            <a:graphicFrameLocks noGrp="1"/>
+          </p:cNvGraphicFramePr>
+          <p:nvPr/>
+        </p:nvGraphicFramePr>
+        <p:xfrm>
+          <a:off x="685800" y="1417320"/>
+          <a:ext cx="10817352" cy="1536192"/>
+        </p:xfrm>
+        <a:graphic>
+          <a:graphicData uri="http://schemas.openxmlformats.org/drawingml/2006/table">
+            <a:tbl>
+              <a:tblPr firstRow="1" bandRow="1">
+                <a:tableStyleId>{5C22544A-7EE6-4342-B048-85BDC9FD1C3A}</a:tableStyleId>
+              </a:tblPr>
+              <a:tblGrid>
+                <a:gridCol w="3605784"/>
+                <a:gridCol w="3605784"/>
+                <a:gridCol w="3605784"/>
+              </a:tblGrid>
+              <a:tr h="384048">
+                <a:tc>
+                  <a:txBody>
+                    <a:bodyPr/>
+                    <a:lstStyle/>
+                    <a:p>
+                      <a:r>
+                        <a:rPr sz="1100" b="1">
+                          <a:solidFill>
+                            <a:srgbClr val="FFFFFF"/>
+                          </a:solidFill>
+                          <a:latin typeface="Arial"/>
+                        </a:rPr>
+                        <a:t>Kategorie</a:t>
+                      </a:r>
+                    </a:p>
+                  </a:txBody>
+                  <a:tcPr>
+                    <a:solidFill>
+                      <a:srgbClr val="1F2C56"/>
+                    </a:solidFill>
+                  </a:tcPr>
+                </a:tc>
+                <a:tc>
+                  <a:txBody>
+                    <a:bodyPr/>
+                    <a:lstStyle/>
+                    <a:p>
+                      <a:r>
+                        <a:rPr sz="1100" b="1">
+                          <a:solidFill>
+                            <a:srgbClr val="FFFFFF"/>
+                          </a:solidFill>
+                          <a:latin typeface="Arial"/>
+                        </a:rPr>
+                        <a:t>Beschäftigte</a:t>
+                      </a:r>
+                    </a:p>
+                  </a:txBody>
+                  <a:tcPr>
+                    <a:solidFill>
+                      <a:srgbClr val="1F2C56"/>
+                    </a:solidFill>
+                  </a:tcPr>
+                </a:tc>
+                <a:tc>
+                  <a:txBody>
+                    <a:bodyPr/>
+                    <a:lstStyle/>
+                    <a:p>
+                      <a:r>
+                        <a:rPr sz="1100" b="1">
+                          <a:solidFill>
+                            <a:srgbClr val="FFFFFF"/>
+                          </a:solidFill>
+                          <a:latin typeface="Arial"/>
+                        </a:rPr>
+                        <a:t>Jahresumsatz</a:t>
+                      </a:r>
+                    </a:p>
+                  </a:txBody>
+                  <a:tcPr>
+                    <a:solidFill>
+                      <a:srgbClr val="1F2C56"/>
+                    </a:solidFill>
+                  </a:tcPr>
+                </a:tc>
+              </a:tr>
+              <a:tr h="384048">
+                <a:tc>
+                  <a:txBody>
+                    <a:bodyPr/>
+                    <a:lstStyle/>
+                    <a:p>
+                      <a:r>
+                        <a:rPr sz="1050">
+                          <a:solidFill>
+                            <a:srgbClr val="3D5466"/>
+                          </a:solidFill>
+                          <a:latin typeface="Arial"/>
+                        </a:rPr>
+                        <a:t>Kleine Unternehmen</a:t>
+                      </a:r>
+                    </a:p>
+                  </a:txBody>
+                  <a:tcPr/>
+                </a:tc>
+                <a:tc>
+                  <a:txBody>
+                    <a:bodyPr/>
+                    <a:lstStyle/>
+                    <a:p>
+                      <a:r>
+                        <a:rPr sz="1050">
+                          <a:solidFill>
+                            <a:srgbClr val="3D5466"/>
+                          </a:solidFill>
+                          <a:latin typeface="Arial"/>
+                        </a:rPr>
+                        <a:t>&lt; 10</a:t>
+                      </a:r>
+                    </a:p>
+                  </a:txBody>
+                  <a:tcPr/>
+                </a:tc>
+                <a:tc>
+                  <a:txBody>
+                    <a:bodyPr/>
+                    <a:lstStyle/>
+                    <a:p>
+                      <a:r>
+                        <a:rPr sz="1050">
+                          <a:solidFill>
+                            <a:srgbClr val="3D5466"/>
+                          </a:solidFill>
+                          <a:latin typeface="Arial"/>
+                        </a:rPr>
+                        <a:t>&lt; 2 Mio. EUR</a:t>
+                      </a:r>
+                    </a:p>
+                  </a:txBody>
+                  <a:tcPr/>
+                </a:tc>
+              </a:tr>
+              <a:tr h="384048">
+                <a:tc>
+                  <a:txBody>
+                    <a:bodyPr/>
+                    <a:lstStyle/>
+                    <a:p>
+                      <a:r>
+                        <a:rPr sz="1050">
+                          <a:solidFill>
+                            <a:srgbClr val="3D5466"/>
+                          </a:solidFill>
+                          <a:latin typeface="Arial"/>
+                        </a:rPr>
+                        <a:t>Mittlere Unternehmen</a:t>
+                      </a:r>
+                    </a:p>
+                  </a:txBody>
+                  <a:tcPr/>
+                </a:tc>
+                <a:tc>
+                  <a:txBody>
+                    <a:bodyPr/>
+                    <a:lstStyle/>
+                    <a:p>
+                      <a:r>
+                        <a:rPr sz="1050">
+                          <a:solidFill>
+                            <a:srgbClr val="3D5466"/>
+                          </a:solidFill>
+                          <a:latin typeface="Arial"/>
+                        </a:rPr>
+                        <a:t>10–499</a:t>
+                      </a:r>
+                    </a:p>
+                  </a:txBody>
+                  <a:tcPr/>
+                </a:tc>
+                <a:tc>
+                  <a:txBody>
+                    <a:bodyPr/>
+                    <a:lstStyle/>
+                    <a:p>
+                      <a:r>
+                        <a:rPr sz="1050">
+                          <a:solidFill>
+                            <a:srgbClr val="3D5466"/>
+                          </a:solidFill>
+                          <a:latin typeface="Arial"/>
+                        </a:rPr>
+                        <a:t>2–49,9 Mio. EUR</a:t>
+                      </a:r>
+                    </a:p>
+                  </a:txBody>
+                  <a:tcPr/>
+                </a:tc>
+              </a:tr>
+              <a:tr h="384048">
+                <a:tc>
+                  <a:txBody>
+                    <a:bodyPr/>
+                    <a:lstStyle/>
+                    <a:p>
+                      <a:r>
+                        <a:rPr sz="1050">
+                          <a:solidFill>
+                            <a:srgbClr val="3D5466"/>
+                          </a:solidFill>
+                          <a:latin typeface="Arial"/>
+                        </a:rPr>
+                        <a:t>KMU gesamt</a:t>
+                      </a:r>
+                    </a:p>
+                  </a:txBody>
+                  <a:tcPr/>
+                </a:tc>
+                <a:tc>
+                  <a:txBody>
+                    <a:bodyPr/>
+                    <a:lstStyle/>
+                    <a:p>
+                      <a:r>
+                        <a:rPr sz="1050">
+                          <a:solidFill>
+                            <a:srgbClr val="3D5466"/>
+                          </a:solidFill>
+                          <a:latin typeface="Arial"/>
+                        </a:rPr>
+                        <a:t>&lt; 500</a:t>
+                      </a:r>
+                    </a:p>
+                  </a:txBody>
+                  <a:tcPr/>
+                </a:tc>
+                <a:tc>
+                  <a:txBody>
+                    <a:bodyPr/>
+                    <a:lstStyle/>
+                    <a:p>
+                      <a:r>
+                        <a:rPr sz="1050">
+                          <a:solidFill>
+                            <a:srgbClr val="3D5466"/>
+                          </a:solidFill>
+                          <a:latin typeface="Arial"/>
+                        </a:rPr>
+                        <a:t>&lt; 50 Mio. EUR</a:t>
+                      </a:r>
+                    </a:p>
+                  </a:txBody>
+                  <a:tcPr/>
+                </a:tc>
+              </a:tr>
+            </a:tbl>
+          </a:graphicData>
+        </a:graphic>
+      </p:graphicFrame>
+      <p:sp>
+        <p:nvSpPr>
+          <p:cNvPr id="8" name="Rectangle 7"/>
           <p:cNvSpPr/>
           <p:nvPr/>
         </p:nvSpPr>
@@ -7715,7 +9907,7 @@
       </p:sp>
       <p:sp>
         <p:nvSpPr>
-          <p:cNvPr id="10" name="TextBox 9"/>
+          <p:cNvPr id="9" name="TextBox 8"/>
           <p:cNvSpPr txBox="1"/>
           <p:nvPr/>
         </p:nvSpPr>
@@ -7744,6 +9936,41 @@
                 <a:latin typeface="JetBrains Mono"/>
               </a:rPr>
               <a:t>Benedikt Zoller Coaching  ·  FKB Campus  ·  M06</a:t>
+            </a:r>
+          </a:p>
+        </p:txBody>
+      </p:sp>
+      <p:sp>
+        <p:nvSpPr>
+          <p:cNvPr id="10" name="TextBox 9"/>
+          <p:cNvSpPr txBox="1"/>
+          <p:nvPr/>
+        </p:nvSpPr>
+        <p:spPr>
+          <a:xfrm>
+            <a:off x="7176211" y="6583680"/>
+            <a:ext cx="4326940" cy="256032"/>
+          </a:xfrm>
+          <a:prstGeom prst="rect">
+            <a:avLst/>
+          </a:prstGeom>
+          <a:noFill/>
+        </p:spPr>
+        <p:txBody>
+          <a:bodyPr wrap="none">
+            <a:spAutoFit/>
+          </a:bodyPr>
+          <a:lstStyle/>
+          <a:p>
+            <a:pPr algn="r"/>
+            <a:r>
+              <a:rPr sz="700">
+                <a:solidFill>
+                  <a:srgbClr val="A0B4D2"/>
+                </a:solidFill>
+                <a:latin typeface="JetBrains Mono"/>
+              </a:rPr>
+              <a:t>Übersicht</a:t>
             </a:r>
           </a:p>
         </p:txBody>
@@ -7882,7 +10109,7 @@
                 </a:solidFill>
                 <a:latin typeface="JetBrains Mono"/>
               </a:rPr>
-              <a:t>M06  ·  SCHAUBILD</a:t>
+              <a:t>M06  ·  ÜBERSICHT</a:t>
             </a:r>
           </a:p>
         </p:txBody>
@@ -7917,7 +10144,7 @@
                 </a:solidFill>
                 <a:latin typeface="Source Serif 4"/>
               </a:rPr>
-              <a:t>Fünf-Fragen-Schema für den KMU-Beratungseinstieg</a:t>
+              <a:t>Theorie-Input 1: Was ist ein KMU? Definitionen, Typologien und volkswirtschaftliche Bedeutung</a:t>
             </a:r>
           </a:p>
         </p:txBody>
@@ -7965,30 +10192,346 @@
           </a:p>
         </p:txBody>
       </p:sp>
-      <p:pic>
-        <p:nvPicPr>
-          <p:cNvPr id="7" name="Picture 6" descr="image.png"/>
-          <p:cNvPicPr>
-            <a:picLocks noChangeAspect="1"/>
-          </p:cNvPicPr>
-          <p:nvPr/>
-        </p:nvPicPr>
-        <p:blipFill>
-          <a:blip r:embed="rId2"/>
-          <a:stretch>
-            <a:fillRect/>
-          </a:stretch>
-        </p:blipFill>
-        <p:spPr>
-          <a:xfrm>
-            <a:off x="2303489" y="1325880"/>
-            <a:ext cx="7581973" cy="4937760"/>
-          </a:xfrm>
-          <a:prstGeom prst="rect">
-            <a:avLst/>
-          </a:prstGeom>
-        </p:spPr>
-      </p:pic>
+      <p:graphicFrame>
+        <p:nvGraphicFramePr>
+          <p:cNvPr id="7" name="Table 6"/>
+          <p:cNvGraphicFramePr>
+            <a:graphicFrameLocks noGrp="1"/>
+          </p:cNvGraphicFramePr>
+          <p:nvPr/>
+        </p:nvGraphicFramePr>
+        <p:xfrm>
+          <a:off x="685800" y="1417320"/>
+          <a:ext cx="10817352" cy="1536192"/>
+        </p:xfrm>
+        <a:graphic>
+          <a:graphicData uri="http://schemas.openxmlformats.org/drawingml/2006/table">
+            <a:tbl>
+              <a:tblPr firstRow="1" bandRow="1">
+                <a:tableStyleId>{5C22544A-7EE6-4342-B048-85BDC9FD1C3A}</a:tableStyleId>
+              </a:tblPr>
+              <a:tblGrid>
+                <a:gridCol w="2704338"/>
+                <a:gridCol w="2704338"/>
+                <a:gridCol w="2704338"/>
+                <a:gridCol w="2704338"/>
+              </a:tblGrid>
+              <a:tr h="384048">
+                <a:tc>
+                  <a:txBody>
+                    <a:bodyPr/>
+                    <a:lstStyle/>
+                    <a:p>
+                      <a:r>
+                        <a:rPr sz="1100" b="1">
+                          <a:solidFill>
+                            <a:srgbClr val="FFFFFF"/>
+                          </a:solidFill>
+                          <a:latin typeface="Arial"/>
+                        </a:rPr>
+                        <a:t>Kategorie</a:t>
+                      </a:r>
+                    </a:p>
+                  </a:txBody>
+                  <a:tcPr>
+                    <a:solidFill>
+                      <a:srgbClr val="1F2C56"/>
+                    </a:solidFill>
+                  </a:tcPr>
+                </a:tc>
+                <a:tc>
+                  <a:txBody>
+                    <a:bodyPr/>
+                    <a:lstStyle/>
+                    <a:p>
+                      <a:r>
+                        <a:rPr sz="1100" b="1">
+                          <a:solidFill>
+                            <a:srgbClr val="FFFFFF"/>
+                          </a:solidFill>
+                          <a:latin typeface="Arial"/>
+                        </a:rPr>
+                        <a:t>Beschäftigte</a:t>
+                      </a:r>
+                    </a:p>
+                  </a:txBody>
+                  <a:tcPr>
+                    <a:solidFill>
+                      <a:srgbClr val="1F2C56"/>
+                    </a:solidFill>
+                  </a:tcPr>
+                </a:tc>
+                <a:tc>
+                  <a:txBody>
+                    <a:bodyPr/>
+                    <a:lstStyle/>
+                    <a:p>
+                      <a:r>
+                        <a:rPr sz="1100" b="1">
+                          <a:solidFill>
+                            <a:srgbClr val="FFFFFF"/>
+                          </a:solidFill>
+                          <a:latin typeface="Arial"/>
+                        </a:rPr>
+                        <a:t>Jahresumsatz</a:t>
+                      </a:r>
+                    </a:p>
+                  </a:txBody>
+                  <a:tcPr>
+                    <a:solidFill>
+                      <a:srgbClr val="1F2C56"/>
+                    </a:solidFill>
+                  </a:tcPr>
+                </a:tc>
+                <a:tc>
+                  <a:txBody>
+                    <a:bodyPr/>
+                    <a:lstStyle/>
+                    <a:p>
+                      <a:r>
+                        <a:rPr sz="1100" b="1">
+                          <a:solidFill>
+                            <a:srgbClr val="FFFFFF"/>
+                          </a:solidFill>
+                          <a:latin typeface="Arial"/>
+                        </a:rPr>
+                        <a:t>Bilanzsumme</a:t>
+                      </a:r>
+                    </a:p>
+                  </a:txBody>
+                  <a:tcPr>
+                    <a:solidFill>
+                      <a:srgbClr val="1F2C56"/>
+                    </a:solidFill>
+                  </a:tcPr>
+                </a:tc>
+              </a:tr>
+              <a:tr h="384048">
+                <a:tc>
+                  <a:txBody>
+                    <a:bodyPr/>
+                    <a:lstStyle/>
+                    <a:p>
+                      <a:r>
+                        <a:rPr sz="1050">
+                          <a:solidFill>
+                            <a:srgbClr val="3D5466"/>
+                          </a:solidFill>
+                          <a:latin typeface="Arial"/>
+                        </a:rPr>
+                        <a:t>Kleinstunternehmen</a:t>
+                      </a:r>
+                    </a:p>
+                  </a:txBody>
+                  <a:tcPr/>
+                </a:tc>
+                <a:tc>
+                  <a:txBody>
+                    <a:bodyPr/>
+                    <a:lstStyle/>
+                    <a:p>
+                      <a:r>
+                        <a:rPr sz="1050">
+                          <a:solidFill>
+                            <a:srgbClr val="3D5466"/>
+                          </a:solidFill>
+                          <a:latin typeface="Arial"/>
+                        </a:rPr>
+                        <a:t>&lt; 10</a:t>
+                      </a:r>
+                    </a:p>
+                  </a:txBody>
+                  <a:tcPr/>
+                </a:tc>
+                <a:tc>
+                  <a:txBody>
+                    <a:bodyPr/>
+                    <a:lstStyle/>
+                    <a:p>
+                      <a:r>
+                        <a:rPr sz="1050">
+                          <a:solidFill>
+                            <a:srgbClr val="3D5466"/>
+                          </a:solidFill>
+                          <a:latin typeface="Arial"/>
+                        </a:rPr>
+                        <a:t>≤ 2 Mio. EUR</a:t>
+                      </a:r>
+                    </a:p>
+                  </a:txBody>
+                  <a:tcPr/>
+                </a:tc>
+                <a:tc>
+                  <a:txBody>
+                    <a:bodyPr/>
+                    <a:lstStyle/>
+                    <a:p>
+                      <a:r>
+                        <a:rPr sz="1050">
+                          <a:solidFill>
+                            <a:srgbClr val="3D5466"/>
+                          </a:solidFill>
+                          <a:latin typeface="Arial"/>
+                        </a:rPr>
+                        <a:t>≤ 2 Mio. EUR</a:t>
+                      </a:r>
+                    </a:p>
+                  </a:txBody>
+                  <a:tcPr/>
+                </a:tc>
+              </a:tr>
+              <a:tr h="384048">
+                <a:tc>
+                  <a:txBody>
+                    <a:bodyPr/>
+                    <a:lstStyle/>
+                    <a:p>
+                      <a:r>
+                        <a:rPr sz="1050">
+                          <a:solidFill>
+                            <a:srgbClr val="3D5466"/>
+                          </a:solidFill>
+                          <a:latin typeface="Arial"/>
+                        </a:rPr>
+                        <a:t>Kleinunternehmen</a:t>
+                      </a:r>
+                    </a:p>
+                  </a:txBody>
+                  <a:tcPr/>
+                </a:tc>
+                <a:tc>
+                  <a:txBody>
+                    <a:bodyPr/>
+                    <a:lstStyle/>
+                    <a:p>
+                      <a:r>
+                        <a:rPr sz="1050">
+                          <a:solidFill>
+                            <a:srgbClr val="3D5466"/>
+                          </a:solidFill>
+                          <a:latin typeface="Arial"/>
+                        </a:rPr>
+                        <a:t>&lt; 50</a:t>
+                      </a:r>
+                    </a:p>
+                  </a:txBody>
+                  <a:tcPr/>
+                </a:tc>
+                <a:tc>
+                  <a:txBody>
+                    <a:bodyPr/>
+                    <a:lstStyle/>
+                    <a:p>
+                      <a:r>
+                        <a:rPr sz="1050">
+                          <a:solidFill>
+                            <a:srgbClr val="3D5466"/>
+                          </a:solidFill>
+                          <a:latin typeface="Arial"/>
+                        </a:rPr>
+                        <a:t>≤ 10 Mio. EUR</a:t>
+                      </a:r>
+                    </a:p>
+                  </a:txBody>
+                  <a:tcPr/>
+                </a:tc>
+                <a:tc>
+                  <a:txBody>
+                    <a:bodyPr/>
+                    <a:lstStyle/>
+                    <a:p>
+                      <a:r>
+                        <a:rPr sz="1050">
+                          <a:solidFill>
+                            <a:srgbClr val="3D5466"/>
+                          </a:solidFill>
+                          <a:latin typeface="Arial"/>
+                        </a:rPr>
+                        <a:t>≤ 10 Mio. EUR</a:t>
+                      </a:r>
+                    </a:p>
+                  </a:txBody>
+                  <a:tcPr/>
+                </a:tc>
+              </a:tr>
+              <a:tr h="384048">
+                <a:tc>
+                  <a:txBody>
+                    <a:bodyPr/>
+                    <a:lstStyle/>
+                    <a:p>
+                      <a:r>
+                        <a:rPr sz="1050">
+                          <a:solidFill>
+                            <a:srgbClr val="3D5466"/>
+                          </a:solidFill>
+                          <a:latin typeface="Arial"/>
+                        </a:rPr>
+                        <a:t>Mittleres Unternehmen</a:t>
+                      </a:r>
+                    </a:p>
+                  </a:txBody>
+                  <a:tcPr/>
+                </a:tc>
+                <a:tc>
+                  <a:txBody>
+                    <a:bodyPr/>
+                    <a:lstStyle/>
+                    <a:p>
+                      <a:r>
+                        <a:rPr sz="1050">
+                          <a:solidFill>
+                            <a:srgbClr val="3D5466"/>
+                          </a:solidFill>
+                          <a:latin typeface="Arial"/>
+                        </a:rPr>
+                        <a:t>&lt; 250</a:t>
+                      </a:r>
+                    </a:p>
+                  </a:txBody>
+                  <a:tcPr/>
+                </a:tc>
+                <a:tc>
+                  <a:txBody>
+                    <a:bodyPr/>
+                    <a:lstStyle/>
+                    <a:p>
+                      <a:r>
+                        <a:rPr sz="1050">
+                          <a:solidFill>
+                            <a:srgbClr val="3D5466"/>
+                          </a:solidFill>
+                          <a:latin typeface="Arial"/>
+                        </a:rPr>
+                        <a:t>≤ 50 Mio. EUR</a:t>
+                      </a:r>
+                    </a:p>
+                  </a:txBody>
+                  <a:tcPr/>
+                </a:tc>
+                <a:tc>
+                  <a:txBody>
+                    <a:bodyPr/>
+                    <a:lstStyle/>
+                    <a:p>
+                      <a:r>
+                        <a:rPr sz="1050">
+                          <a:solidFill>
+                            <a:srgbClr val="3D5466"/>
+                          </a:solidFill>
+                          <a:latin typeface="Arial"/>
+                        </a:rPr>
+                        <a:t>≤ 43 Mio. EUR</a:t>
+                      </a:r>
+                    </a:p>
+                  </a:txBody>
+                  <a:tcPr/>
+                </a:tc>
+              </a:tr>
+            </a:tbl>
+          </a:graphicData>
+        </a:graphic>
+      </p:graphicFrame>
       <p:sp>
         <p:nvSpPr>
           <p:cNvPr id="8" name="Rectangle 7"/>
@@ -8097,7 +10640,7 @@
                 </a:solidFill>
                 <a:latin typeface="JetBrains Mono"/>
               </a:rPr>
-              <a:t>Schaubild</a:t>
+              <a:t>Übersicht</a:t>
             </a:r>
           </a:p>
         </p:txBody>
@@ -8357,7 +10900,7 @@
                 </a:solidFill>
                 <a:latin typeface="Source Serif 4"/>
               </a:rPr>
-              <a:t>Praxiscase: Bergmann Holzmanufaktur GmbH &amp; Co. KG</a:t>
+              <a:t>Theorie-Input 2: Finanzierungsmuster und typische Risikofelder</a:t>
             </a:r>
           </a:p>
         </p:txBody>
@@ -8399,26 +10942,7 @@
                 </a:solidFill>
                 <a:latin typeface="JetBrains Mono"/>
               </a:rPr>
-              <a:t>UNTERNEHMENSPORTRÄT</a:t>
-            </a:r>
-          </a:p>
-          <a:p>
-            <a:pPr>
-              <a:spcBef>
-                <a:spcPts val="1000"/>
-              </a:spcBef>
-              <a:spcAft>
-                <a:spcPts val="200"/>
-              </a:spcAft>
-            </a:pPr>
-            <a:r>
-              <a:rPr sz="800" b="1">
-                <a:solidFill>
-                  <a:srgbClr val="78808C"/>
-                </a:solidFill>
-                <a:latin typeface="JetBrains Mono"/>
-              </a:rPr>
-              <a:t>FINANZDATEN (FIKTIV, PLAUSIBEL FÜR HOLZHANDWERK)</a:t>
+              <a:t>FINANZIERUNGSSTRUKTUR: KMU VS. GROSSUNTERNEHMEN</a:t>
             </a:r>
           </a:p>
           <a:p>
@@ -8431,32 +10955,13 @@
               </a:spcAft>
             </a:pPr>
             <a:r>
-              <a:rPr sz="1200">
+              <a:rPr sz="1300">
                 <a:solidFill>
                   <a:srgbClr val="3D5466"/>
                 </a:solidFill>
                 <a:latin typeface="Arial"/>
               </a:rPr>
-              <a:t>*Branchenwerte Holzgewerbe / Tischlerhandwerk, Quelle: Deutsche Bundesbank, Unternehmensabschlussstatistik (Bundesbank, laufend )</a:t>
-            </a:r>
-          </a:p>
-          <a:p>
-            <a:pPr>
-              <a:spcBef>
-                <a:spcPts val="1000"/>
-              </a:spcBef>
-              <a:spcAft>
-                <a:spcPts val="200"/>
-              </a:spcAft>
-            </a:pPr>
-            <a:r>
-              <a:rPr sz="800" b="1">
-                <a:solidFill>
-                  <a:srgbClr val="78808C"/>
-                </a:solidFill>
-                <a:latin typeface="JetBrains Mono"/>
-              </a:rPr>
-              <a:t>AUFGABEN</a:t>
+              <a:t>▸  Die Finanzierungsstruktur von KMU unterscheidet sich strukturell von der großer Unternehmen. Diese Unterschiede zu kennen, ist die Grundlage jeder fundierten Kreditanalyse.</a:t>
             </a:r>
           </a:p>
           <a:p>
@@ -8469,13 +10974,13 @@
               </a:spcAft>
             </a:pPr>
             <a:r>
-              <a:rPr sz="1200">
+              <a:rPr sz="1300">
                 <a:solidFill>
                   <a:srgbClr val="3D5466"/>
                 </a:solidFill>
                 <a:latin typeface="Arial"/>
               </a:rPr>
-              <a:t>Aufgabe 1 – Klassifizierung (LZ-1):</a:t>
+              <a:t>▸  Eigenkapitalquoten:</a:t>
             </a:r>
           </a:p>
           <a:p>
@@ -8488,13 +10993,13 @@
               </a:spcAft>
             </a:pPr>
             <a:r>
-              <a:rPr sz="1200">
+              <a:rPr sz="1300">
                 <a:solidFill>
                   <a:srgbClr val="3D5466"/>
                 </a:solidFill>
                 <a:latin typeface="Arial"/>
               </a:rPr>
-              <a:t>Aufgabe 2 – Typologisierung und Risikofelder (LZ-2/LZ-3):</a:t>
+              <a:t>▸  Steuerliche Optimierung: KMU-Inhaber entnehmen Gewinne für den privaten Lebensunterhalt, statt sie im Betrieb zu thesaurieren</a:t>
             </a:r>
           </a:p>
           <a:p>
@@ -8507,13 +11012,13 @@
               </a:spcAft>
             </a:pPr>
             <a:r>
-              <a:rPr sz="1200">
+              <a:rPr sz="1300">
                 <a:solidFill>
                   <a:srgbClr val="3D5466"/>
                 </a:solidFill>
                 <a:latin typeface="Arial"/>
               </a:rPr>
-              <a:t>Aufgabe 3 – 5-Fragen-Schema anwenden (LZ-4):</a:t>
+              <a:t>▸  Verflechtung Privat/Betrieb: Privatliegenschaften des Inhabers erscheinen nicht in der Bilanz, sind aber reale Sicherheiten</a:t>
             </a:r>
           </a:p>
           <a:p>
@@ -8526,13 +11031,127 @@
               </a:spcAft>
             </a:pPr>
             <a:r>
-              <a:rPr sz="1200">
+              <a:rPr sz="1300">
                 <a:solidFill>
                   <a:srgbClr val="3D5466"/>
                 </a:solidFill>
                 <a:latin typeface="Arial"/>
               </a:rPr>
-              <a:t>Aufgabe 4 – Kreditvorbereitung: KK-Analyse (LZ-3):</a:t>
+              <a:t>▸  Vorsichtige Bilanzpolitik: Viele KMU nutzen steuerliche Abschreibungsmöglichkeiten maximal – die Bilanz ist dadurch "schlechter" als die wirtschaftliche Realität</a:t>
+            </a:r>
+          </a:p>
+          <a:p>
+            <a:pPr>
+              <a:spcBef>
+                <a:spcPts val="400"/>
+              </a:spcBef>
+              <a:spcAft>
+                <a:spcPts val="200"/>
+              </a:spcAft>
+            </a:pPr>
+            <a:r>
+              <a:rPr sz="1300">
+                <a:solidFill>
+                  <a:srgbClr val="3D5466"/>
+                </a:solidFill>
+                <a:latin typeface="Arial"/>
+              </a:rPr>
+              <a:t>▸  Finanzierungsquellen:</a:t>
+            </a:r>
+          </a:p>
+          <a:p>
+            <a:pPr>
+              <a:spcBef>
+                <a:spcPts val="400"/>
+              </a:spcBef>
+              <a:spcAft>
+                <a:spcPts val="200"/>
+              </a:spcAft>
+            </a:pPr>
+            <a:r>
+              <a:rPr sz="1300">
+                <a:solidFill>
+                  <a:srgbClr val="3D5466"/>
+                </a:solidFill>
+                <a:latin typeface="Arial"/>
+              </a:rPr>
+              <a:t>▸  KMU finanzieren sich typischerweise durch drei Hauptquellen:</a:t>
+            </a:r>
+          </a:p>
+          <a:p>
+            <a:pPr>
+              <a:spcBef>
+                <a:spcPts val="400"/>
+              </a:spcBef>
+              <a:spcAft>
+                <a:spcPts val="200"/>
+              </a:spcAft>
+            </a:pPr>
+            <a:r>
+              <a:rPr sz="1300">
+                <a:solidFill>
+                  <a:srgbClr val="3D5466"/>
+                </a:solidFill>
+                <a:latin typeface="Arial"/>
+              </a:rPr>
+              <a:t>▸  Innenfinanzierung (Thesaurierung): Gewinne verbleiben im Unternehmen – bei inhabergeführten Betrieben stark limitiert durch private Entnahmen</a:t>
+            </a:r>
+          </a:p>
+          <a:p>
+            <a:pPr>
+              <a:spcBef>
+                <a:spcPts val="400"/>
+              </a:spcBef>
+              <a:spcAft>
+                <a:spcPts val="200"/>
+              </a:spcAft>
+            </a:pPr>
+            <a:r>
+              <a:rPr sz="1300">
+                <a:solidFill>
+                  <a:srgbClr val="3D5466"/>
+                </a:solidFill>
+                <a:latin typeface="Arial"/>
+              </a:rPr>
+              <a:t>▸  Bankkredite (Außenfinanzierung): Investitionskredite, Kontokorrentlinien, Avale – dominante Finanzierungsform</a:t>
+            </a:r>
+          </a:p>
+          <a:p>
+            <a:pPr>
+              <a:spcBef>
+                <a:spcPts val="400"/>
+              </a:spcBef>
+              <a:spcAft>
+                <a:spcPts val="200"/>
+              </a:spcAft>
+            </a:pPr>
+            <a:r>
+              <a:rPr sz="1300">
+                <a:solidFill>
+                  <a:srgbClr val="3D5466"/>
+                </a:solidFill>
+                <a:latin typeface="Arial"/>
+              </a:rPr>
+              <a:t>▸  Öffentliche Förderprogramme: KfW-Unternehmenskredit, ERP-Kapital für Gründung, Landesförderprogramme – häufig günstiger als Hausbankkonditionen, oft nicht ausgeschöpft</a:t>
+            </a:r>
+          </a:p>
+          <a:p>
+            <a:pPr>
+              <a:spcBef>
+                <a:spcPts val="400"/>
+              </a:spcBef>
+              <a:spcAft>
+                <a:spcPts val="200"/>
+              </a:spcAft>
+            </a:pPr>
+            <a:r>
+              <a:rPr sz="1300">
+                <a:solidFill>
+                  <a:srgbClr val="3D5466"/>
+                </a:solidFill>
+                <a:latin typeface="Arial"/>
+              </a:rPr>
+              <a:t>▸  Die drei meistgenutzten Förderprogramme in der süddeutschen VR-Praxis:</a:t>
             </a:r>
           </a:p>
         </p:txBody>

--- a/protected-downloads/praesentation/M06.pptx
+++ b/protected-downloads/praesentation/M06.pptx
@@ -4483,7 +4483,7 @@
                 </a:solidFill>
                 <a:latin typeface="JetBrains Mono"/>
               </a:rPr>
-              <a:t>Benedikt Zoller Coaching  ·  FKB Campus  ·  2026</a:t>
+              <a:t>FKB Campus  ·  2026</a:t>
             </a:r>
           </a:p>
         </p:txBody>
@@ -5107,7 +5107,7 @@
                 </a:solidFill>
                 <a:latin typeface="JetBrains Mono"/>
               </a:rPr>
-              <a:t>Benedikt Zoller Coaching  ·  FKB Campus  ·  M06</a:t>
+              <a:t>FKB Campus  ·  M06</a:t>
             </a:r>
           </a:p>
         </p:txBody>
@@ -5426,7 +5426,7 @@
                 </a:solidFill>
                 <a:latin typeface="JetBrains Mono"/>
               </a:rPr>
-              <a:t>Benedikt Zoller Coaching  ·  FKB Campus  ·  M06</a:t>
+              <a:t>FKB Campus  ·  M06</a:t>
             </a:r>
           </a:p>
         </p:txBody>
@@ -5974,7 +5974,7 @@
                 </a:solidFill>
                 <a:latin typeface="JetBrains Mono"/>
               </a:rPr>
-              <a:t>Benedikt Zoller Coaching  ·  FKB Campus  ·  M06</a:t>
+              <a:t>FKB Campus  ·  M06</a:t>
             </a:r>
           </a:p>
         </p:txBody>
@@ -6644,7 +6644,7 @@
                 </a:solidFill>
                 <a:latin typeface="JetBrains Mono"/>
               </a:rPr>
-              <a:t>Benedikt Zoller Coaching  ·  FKB Campus  ·  M06</a:t>
+              <a:t>FKB Campus  ·  M06</a:t>
             </a:r>
           </a:p>
         </p:txBody>
@@ -7097,7 +7097,7 @@
                 </a:solidFill>
                 <a:latin typeface="JetBrains Mono"/>
               </a:rPr>
-              <a:t>Benedikt Zoller Coaching  ·  FKB Campus  ·  M06</a:t>
+              <a:t>FKB Campus  ·  M06</a:t>
             </a:r>
           </a:p>
         </p:txBody>
@@ -7463,7 +7463,7 @@
                 </a:solidFill>
                 <a:latin typeface="JetBrains Mono"/>
               </a:rPr>
-              <a:t>Benedikt Zoller Coaching  ·  FKB Campus  ·  M06</a:t>
+              <a:t>FKB Campus  ·  M06</a:t>
             </a:r>
           </a:p>
         </p:txBody>
@@ -7857,7 +7857,7 @@
                 </a:solidFill>
                 <a:latin typeface="JetBrains Mono"/>
               </a:rPr>
-              <a:t>Benedikt Zoller Coaching  ·  FKB Campus  ·  M06</a:t>
+              <a:t>FKB Campus  ·  M06</a:t>
             </a:r>
           </a:p>
         </p:txBody>
@@ -8434,7 +8434,7 @@
                 </a:solidFill>
                 <a:latin typeface="JetBrains Mono"/>
               </a:rPr>
-              <a:t>Benedikt Zoller Coaching  ·  FKB Campus  ·  M06</a:t>
+              <a:t>FKB Campus  ·  M06</a:t>
             </a:r>
           </a:p>
         </p:txBody>
@@ -9023,7 +9023,7 @@
                 </a:solidFill>
                 <a:latin typeface="JetBrains Mono"/>
               </a:rPr>
-              <a:t>Benedikt Zoller Coaching  ·  FKB Campus  ·  M06</a:t>
+              <a:t>FKB Campus  ·  M06</a:t>
             </a:r>
           </a:p>
         </p:txBody>
@@ -9342,7 +9342,7 @@
                 </a:solidFill>
                 <a:latin typeface="JetBrains Mono"/>
               </a:rPr>
-              <a:t>Benedikt Zoller Coaching  ·  FKB Campus  ·  M06</a:t>
+              <a:t>FKB Campus  ·  M06</a:t>
             </a:r>
           </a:p>
         </p:txBody>
@@ -9935,7 +9935,7 @@
                 </a:solidFill>
                 <a:latin typeface="JetBrains Mono"/>
               </a:rPr>
-              <a:t>Benedikt Zoller Coaching  ·  FKB Campus  ·  M06</a:t>
+              <a:t>FKB Campus  ·  M06</a:t>
             </a:r>
           </a:p>
         </p:txBody>
@@ -10605,7 +10605,7 @@
                 </a:solidFill>
                 <a:latin typeface="JetBrains Mono"/>
               </a:rPr>
-              <a:t>Benedikt Zoller Coaching  ·  FKB Campus  ·  M06</a:t>
+              <a:t>FKB Campus  ·  M06</a:t>
             </a:r>
           </a:p>
         </p:txBody>
@@ -11229,7 +11229,7 @@
                 </a:solidFill>
                 <a:latin typeface="JetBrains Mono"/>
               </a:rPr>
-              <a:t>Benedikt Zoller Coaching  ·  FKB Campus  ·  M06</a:t>
+              <a:t>FKB Campus  ·  M06</a:t>
             </a:r>
           </a:p>
         </p:txBody>

--- a/protected-downloads/praesentation/M06.pptx
+++ b/protected-downloads/praesentation/M06.pptx
@@ -8264,7 +8264,7 @@
                 </a:solidFill>
                 <a:latin typeface="Consolas"/>
               </a:rPr>
-              <a:t>00:45–01:15 </a:t>
+              <a:t>00:45–01:20 </a:t>
             </a:r>
             <a:r>
               <a:rPr sz="1500" b="1">
@@ -8301,7 +8301,7 @@
                 </a:solidFill>
                 <a:latin typeface="Consolas"/>
               </a:rPr>
-              <a:t>01:15–01:30 </a:t>
+              <a:t>01:20–01:35 </a:t>
             </a:r>
             <a:r>
               <a:rPr sz="1500" b="1">
@@ -8338,7 +8338,7 @@
                 </a:solidFill>
                 <a:latin typeface="Consolas"/>
               </a:rPr>
-              <a:t>01:30–01:40 </a:t>
+              <a:t>01:35–01:45 </a:t>
             </a:r>
             <a:r>
               <a:rPr sz="1500" b="1">

--- a/protected-downloads/praesentation/M06.pptx
+++ b/protected-downloads/praesentation/M06.pptx
@@ -4405,7 +4405,7 @@
                 </a:solidFill>
                 <a:latin typeface="Arial"/>
               </a:rPr>
-              <a:t>v0.4</a:t>
+              <a:t>v1.0</a:t>
             </a:r>
           </a:p>
         </p:txBody>

--- a/protected-downloads/praesentation/M06.pptx
+++ b/protected-downloads/praesentation/M06.pptx
@@ -4080,7 +4080,7 @@
                 <a:solidFill>
                   <a:srgbClr val="C8D2E6"/>
                 </a:solidFill>
-                <a:latin typeface="JetBrains Mono"/>
+                <a:latin typeface="Consolas"/>
               </a:rPr>
               <a:t>FKB CAMPUS  ·  FIRMENKUNDENAKADEMIE  ·  M06</a:t>
             </a:r>
@@ -4115,7 +4115,7 @@
                 <a:solidFill>
                   <a:srgbClr val="FFFFFF"/>
                 </a:solidFill>
-                <a:latin typeface="Source Serif 4"/>
+                <a:latin typeface="Arial"/>
               </a:rPr>
               <a:t>KMU-Kompetenz Grundlagen</a:t>
             </a:r>
@@ -4150,7 +4150,7 @@
                 <a:solidFill>
                   <a:srgbClr val="BECDE6"/>
                 </a:solidFill>
-                <a:latin typeface="Source Serif 4"/>
+                <a:latin typeface="Arial"/>
               </a:rPr>
               <a:t>Branchenwissen für den Firmenkundenberater</a:t>
             </a:r>
@@ -4228,7 +4228,7 @@
                 <a:solidFill>
                   <a:srgbClr val="A0B4D2"/>
                 </a:solidFill>
-                <a:latin typeface="JetBrains Mono"/>
+                <a:latin typeface="Consolas"/>
               </a:rPr>
               <a:t>KOMPETENZFELD</a:t>
             </a:r>
@@ -4298,7 +4298,7 @@
                 <a:solidFill>
                   <a:srgbClr val="A0B4D2"/>
                 </a:solidFill>
-                <a:latin typeface="JetBrains Mono"/>
+                <a:latin typeface="Consolas"/>
               </a:rPr>
               <a:t>KOMPETENZSTUFE</a:t>
             </a:r>
@@ -4368,7 +4368,7 @@
                 <a:solidFill>
                   <a:srgbClr val="A0B4D2"/>
                 </a:solidFill>
-                <a:latin typeface="JetBrains Mono"/>
+                <a:latin typeface="Consolas"/>
               </a:rPr>
               <a:t>VERSION</a:t>
             </a:r>
@@ -4481,7 +4481,7 @@
                 <a:solidFill>
                   <a:srgbClr val="96A5BE"/>
                 </a:solidFill>
-                <a:latin typeface="JetBrains Mono"/>
+                <a:latin typeface="Consolas"/>
               </a:rPr>
               <a:t>FKB Campus  ·  2026</a:t>
             </a:r>
@@ -4516,7 +4516,7 @@
                 <a:solidFill>
                   <a:srgbClr val="96A5BE"/>
                 </a:solidFill>
-                <a:latin typeface="JetBrains Mono"/>
+                <a:latin typeface="Consolas"/>
               </a:rPr>
               <a:t>Trainer-Präsentation</a:t>
             </a:r>
@@ -4655,7 +4655,7 @@
                 <a:solidFill>
                   <a:srgbClr val="78808C"/>
                 </a:solidFill>
-                <a:latin typeface="JetBrains Mono"/>
+                <a:latin typeface="Consolas"/>
               </a:rPr>
               <a:t>M06  ·  INHALT</a:t>
             </a:r>
@@ -4776,7 +4776,7 @@
                 <a:solidFill>
                   <a:srgbClr val="1F2C56"/>
                 </a:solidFill>
-                <a:latin typeface="Source Serif 4"/>
+                <a:latin typeface="Arial"/>
               </a:rPr>
               <a:t>Theorie-Input 3: Einstieg in die Branchenanalyse</a:t>
             </a:r>
@@ -4792,7 +4792,7 @@
         <p:spPr>
           <a:xfrm>
             <a:off x="685800" y="1417320"/>
-            <a:ext cx="10817352" cy="5029200"/>
+            <a:ext cx="10817352" cy="4892040"/>
           </a:xfrm>
           <a:prstGeom prst="rect">
             <a:avLst/>
@@ -4818,32 +4818,13 @@
                 <a:solidFill>
                   <a:srgbClr val="78808C"/>
                 </a:solidFill>
-                <a:latin typeface="JetBrains Mono"/>
-              </a:rPr>
-              <a:t>DAS GRUNDPRINZIP: ZAHLEN BRAUCHEN KONTEXT</a:t>
-            </a:r>
-          </a:p>
-          <a:p>
-            <a:pPr>
-              <a:spcBef>
-                <a:spcPts val="1000"/>
-              </a:spcBef>
-              <a:spcAft>
-                <a:spcPts val="200"/>
-              </a:spcAft>
-            </a:pPr>
-            <a:r>
-              <a:rPr sz="800" b="1">
-                <a:solidFill>
-                  <a:srgbClr val="78808C"/>
-                </a:solidFill>
-                <a:latin typeface="JetBrains Mono"/>
+                <a:latin typeface="Consolas"/>
               </a:rPr>
               <a:t>VIER BRANCHENPROFILE FÜR DEN BERATUNGSALLTAG</a:t>
             </a:r>
           </a:p>
           <a:p>
-            <a:pPr>
+            <a:pPr marL="190500" indent="-190500">
               <a:spcBef>
                 <a:spcPts val="400"/>
               </a:spcBef>
@@ -4862,7 +4843,7 @@
             </a:r>
           </a:p>
           <a:p>
-            <a:pPr>
+            <a:pPr marL="190500" indent="-190500">
               <a:spcBef>
                 <a:spcPts val="400"/>
               </a:spcBef>
@@ -4881,7 +4862,7 @@
             </a:r>
           </a:p>
           <a:p>
-            <a:pPr>
+            <a:pPr marL="190500" indent="-190500">
               <a:spcBef>
                 <a:spcPts val="400"/>
               </a:spcBef>
@@ -4900,7 +4881,7 @@
             </a:r>
           </a:p>
           <a:p>
-            <a:pPr>
+            <a:pPr marL="190500" indent="-190500">
               <a:spcBef>
                 <a:spcPts val="400"/>
               </a:spcBef>
@@ -4919,7 +4900,7 @@
             </a:r>
           </a:p>
           <a:p>
-            <a:pPr>
+            <a:pPr marL="190500" indent="-190500">
               <a:spcBef>
                 <a:spcPts val="400"/>
               </a:spcBef>
@@ -4938,7 +4919,7 @@
             </a:r>
           </a:p>
           <a:p>
-            <a:pPr>
+            <a:pPr marL="190500" indent="-190500">
               <a:spcBef>
                 <a:spcPts val="400"/>
               </a:spcBef>
@@ -4957,7 +4938,7 @@
             </a:r>
           </a:p>
           <a:p>
-            <a:pPr>
+            <a:pPr marL="190500" indent="-190500">
               <a:spcBef>
                 <a:spcPts val="400"/>
               </a:spcBef>
@@ -4976,7 +4957,7 @@
             </a:r>
           </a:p>
           <a:p>
-            <a:pPr>
+            <a:pPr marL="190500" indent="-190500">
               <a:spcBef>
                 <a:spcPts val="400"/>
               </a:spcBef>
@@ -4995,7 +4976,7 @@
             </a:r>
           </a:p>
           <a:p>
-            <a:pPr>
+            <a:pPr marL="190500" indent="-190500">
               <a:spcBef>
                 <a:spcPts val="400"/>
               </a:spcBef>
@@ -5014,7 +4995,7 @@
             </a:r>
           </a:p>
           <a:p>
-            <a:pPr>
+            <a:pPr marL="190500" indent="-190500">
               <a:spcBef>
                 <a:spcPts val="400"/>
               </a:spcBef>
@@ -5105,7 +5086,7 @@
                 <a:solidFill>
                   <a:srgbClr val="A0B4D2"/>
                 </a:solidFill>
-                <a:latin typeface="JetBrains Mono"/>
+                <a:latin typeface="Consolas"/>
               </a:rPr>
               <a:t>FKB Campus  ·  M06</a:t>
             </a:r>
@@ -5244,7 +5225,7 @@
                 <a:solidFill>
                   <a:srgbClr val="78808C"/>
                 </a:solidFill>
-                <a:latin typeface="JetBrains Mono"/>
+                <a:latin typeface="Consolas"/>
               </a:rPr>
               <a:t>M06  ·  SCHAUBILD</a:t>
             </a:r>
@@ -5279,7 +5260,7 @@
                 <a:solidFill>
                   <a:srgbClr val="1F2C56"/>
                 </a:solidFill>
-                <a:latin typeface="Source Serif 4"/>
+                <a:latin typeface="Arial"/>
               </a:rPr>
               <a:t>Fünf-Fragen-Schema für den KMU-Beratungseinstieg</a:t>
             </a:r>
@@ -5424,7 +5405,7 @@
                 <a:solidFill>
                   <a:srgbClr val="A0B4D2"/>
                 </a:solidFill>
-                <a:latin typeface="JetBrains Mono"/>
+                <a:latin typeface="Consolas"/>
               </a:rPr>
               <a:t>FKB Campus  ·  M06</a:t>
             </a:r>
@@ -5459,7 +5440,7 @@
                 <a:solidFill>
                   <a:srgbClr val="A0B4D2"/>
                 </a:solidFill>
-                <a:latin typeface="JetBrains Mono"/>
+                <a:latin typeface="Consolas"/>
               </a:rPr>
               <a:t>Schaubild</a:t>
             </a:r>
@@ -5598,7 +5579,7 @@
                 <a:solidFill>
                   <a:srgbClr val="78808C"/>
                 </a:solidFill>
-                <a:latin typeface="JetBrains Mono"/>
+                <a:latin typeface="Consolas"/>
               </a:rPr>
               <a:t>M06  ·  INHALT</a:t>
             </a:r>
@@ -5719,7 +5700,7 @@
                 <a:solidFill>
                   <a:srgbClr val="1F2C56"/>
                 </a:solidFill>
-                <a:latin typeface="Source Serif 4"/>
+                <a:latin typeface="Arial"/>
               </a:rPr>
               <a:t>Praxiscase: Bergmann Holzmanufaktur GmbH &amp; Co. KG</a:t>
             </a:r>
@@ -5735,7 +5716,7 @@
         <p:spPr>
           <a:xfrm>
             <a:off x="685800" y="1417320"/>
-            <a:ext cx="10817352" cy="5029200"/>
+            <a:ext cx="10817352" cy="4892040"/>
           </a:xfrm>
           <a:prstGeom prst="rect">
             <a:avLst/>
@@ -5761,9 +5742,28 @@
                 <a:solidFill>
                   <a:srgbClr val="78808C"/>
                 </a:solidFill>
-                <a:latin typeface="JetBrains Mono"/>
-              </a:rPr>
-              <a:t>UNTERNEHMENSPORTRÄT</a:t>
+                <a:latin typeface="Consolas"/>
+              </a:rPr>
+              <a:t>FINANZDATEN (FIKTIV, PLAUSIBEL FÜR HOLZHANDWERK)</a:t>
+            </a:r>
+          </a:p>
+          <a:p>
+            <a:pPr marL="190500" indent="-190500">
+              <a:spcBef>
+                <a:spcPts val="400"/>
+              </a:spcBef>
+              <a:spcAft>
+                <a:spcPts val="200"/>
+              </a:spcAft>
+            </a:pPr>
+            <a:r>
+              <a:rPr sz="1300">
+                <a:solidFill>
+                  <a:srgbClr val="3D5466"/>
+                </a:solidFill>
+                <a:latin typeface="Arial"/>
+              </a:rPr>
+              <a:t>▸  *Branchenwerte Holzgewerbe / Tischlerhandwerk, Quelle: Deutsche Bundesbank, Unternehmensabschlussstatistik (Bundesbank, laufend )</a:t>
             </a:r>
           </a:p>
           <a:p>
@@ -5780,13 +5780,13 @@
                 <a:solidFill>
                   <a:srgbClr val="78808C"/>
                 </a:solidFill>
-                <a:latin typeface="JetBrains Mono"/>
-              </a:rPr>
-              <a:t>FINANZDATEN (FIKTIV, PLAUSIBEL FÜR HOLZHANDWERK)</a:t>
-            </a:r>
-          </a:p>
-          <a:p>
-            <a:pPr>
+                <a:latin typeface="Consolas"/>
+              </a:rPr>
+              <a:t>AUFGABEN</a:t>
+            </a:r>
+          </a:p>
+          <a:p>
+            <a:pPr marL="190500" indent="-190500">
               <a:spcBef>
                 <a:spcPts val="400"/>
               </a:spcBef>
@@ -5801,30 +5801,11 @@
                 </a:solidFill>
                 <a:latin typeface="Arial"/>
               </a:rPr>
-              <a:t>▸  *Branchenwerte Holzgewerbe / Tischlerhandwerk, Quelle: Deutsche Bundesbank, Unternehmensabschlussstatistik (Bundesbank, laufend )</a:t>
-            </a:r>
-          </a:p>
-          <a:p>
-            <a:pPr>
-              <a:spcBef>
-                <a:spcPts val="1000"/>
-              </a:spcBef>
-              <a:spcAft>
-                <a:spcPts val="200"/>
-              </a:spcAft>
-            </a:pPr>
-            <a:r>
-              <a:rPr sz="800" b="1">
-                <a:solidFill>
-                  <a:srgbClr val="78808C"/>
-                </a:solidFill>
-                <a:latin typeface="JetBrains Mono"/>
-              </a:rPr>
-              <a:t>AUFGABEN</a:t>
-            </a:r>
-          </a:p>
-          <a:p>
-            <a:pPr>
+              <a:t>▸  Aufgabe 1 – Klassifizierung (LZ-1):</a:t>
+            </a:r>
+          </a:p>
+          <a:p>
+            <a:pPr marL="190500" indent="-190500">
               <a:spcBef>
                 <a:spcPts val="400"/>
               </a:spcBef>
@@ -5839,11 +5820,11 @@
                 </a:solidFill>
                 <a:latin typeface="Arial"/>
               </a:rPr>
-              <a:t>▸  Aufgabe 1 – Klassifizierung (LZ-1):</a:t>
-            </a:r>
-          </a:p>
-          <a:p>
-            <a:pPr>
+              <a:t>▸  Aufgabe 2 – Typologisierung und Risikofelder (LZ-2/LZ-3):</a:t>
+            </a:r>
+          </a:p>
+          <a:p>
+            <a:pPr marL="190500" indent="-190500">
               <a:spcBef>
                 <a:spcPts val="400"/>
               </a:spcBef>
@@ -5858,11 +5839,11 @@
                 </a:solidFill>
                 <a:latin typeface="Arial"/>
               </a:rPr>
-              <a:t>▸  Aufgabe 2 – Typologisierung und Risikofelder (LZ-2/LZ-3):</a:t>
-            </a:r>
-          </a:p>
-          <a:p>
-            <a:pPr>
+              <a:t>▸  Aufgabe 3 – 5-Fragen-Schema anwenden (LZ-4):</a:t>
+            </a:r>
+          </a:p>
+          <a:p>
+            <a:pPr marL="190500" indent="-190500">
               <a:spcBef>
                 <a:spcPts val="400"/>
               </a:spcBef>
@@ -5877,25 +5858,6 @@
                 </a:solidFill>
                 <a:latin typeface="Arial"/>
               </a:rPr>
-              <a:t>▸  Aufgabe 3 – 5-Fragen-Schema anwenden (LZ-4):</a:t>
-            </a:r>
-          </a:p>
-          <a:p>
-            <a:pPr>
-              <a:spcBef>
-                <a:spcPts val="400"/>
-              </a:spcBef>
-              <a:spcAft>
-                <a:spcPts val="200"/>
-              </a:spcAft>
-            </a:pPr>
-            <a:r>
-              <a:rPr sz="1300">
-                <a:solidFill>
-                  <a:srgbClr val="3D5466"/>
-                </a:solidFill>
-                <a:latin typeface="Arial"/>
-              </a:rPr>
               <a:t>▸  Aufgabe 4 – Kreditvorbereitung: KK-Analyse (LZ-3):</a:t>
             </a:r>
           </a:p>
@@ -5972,7 +5934,7 @@
                 <a:solidFill>
                   <a:srgbClr val="A0B4D2"/>
                 </a:solidFill>
-                <a:latin typeface="JetBrains Mono"/>
+                <a:latin typeface="Consolas"/>
               </a:rPr>
               <a:t>FKB Campus  ·  M06</a:t>
             </a:r>
@@ -6111,7 +6073,7 @@
                 <a:solidFill>
                   <a:srgbClr val="78808C"/>
                 </a:solidFill>
-                <a:latin typeface="JetBrains Mono"/>
+                <a:latin typeface="Consolas"/>
               </a:rPr>
               <a:t>M06  ·  ÜBERSICHT</a:t>
             </a:r>
@@ -6146,7 +6108,7 @@
                 <a:solidFill>
                   <a:srgbClr val="1F2C56"/>
                 </a:solidFill>
-                <a:latin typeface="Source Serif 4"/>
+                <a:latin typeface="Arial"/>
               </a:rPr>
               <a:t>Praxiscase: Bergmann Holzmanufaktur GmbH &amp; Co. KG</a:t>
             </a:r>
@@ -6642,7 +6604,7 @@
                 <a:solidFill>
                   <a:srgbClr val="A0B4D2"/>
                 </a:solidFill>
-                <a:latin typeface="JetBrains Mono"/>
+                <a:latin typeface="Consolas"/>
               </a:rPr>
               <a:t>FKB Campus  ·  M06</a:t>
             </a:r>
@@ -6677,7 +6639,7 @@
                 <a:solidFill>
                   <a:srgbClr val="A0B4D2"/>
                 </a:solidFill>
-                <a:latin typeface="JetBrains Mono"/>
+                <a:latin typeface="Consolas"/>
               </a:rPr>
               <a:t>Übersicht</a:t>
             </a:r>
@@ -6816,7 +6778,7 @@
                 <a:solidFill>
                   <a:srgbClr val="78808C"/>
                 </a:solidFill>
-                <a:latin typeface="JetBrains Mono"/>
+                <a:latin typeface="Consolas"/>
               </a:rPr>
               <a:t>M06  ·  INHALT</a:t>
             </a:r>
@@ -6937,7 +6899,7 @@
                 <a:solidFill>
                   <a:srgbClr val="1F2C56"/>
                 </a:solidFill>
-                <a:latin typeface="Source Serif 4"/>
+                <a:latin typeface="Arial"/>
               </a:rPr>
               <a:t>Reflexionsfragen</a:t>
             </a:r>
@@ -6953,7 +6915,7 @@
         <p:spPr>
           <a:xfrm>
             <a:off x="685800" y="1417320"/>
-            <a:ext cx="10817352" cy="5029200"/>
+            <a:ext cx="10817352" cy="4892040"/>
           </a:xfrm>
           <a:prstGeom prst="rect">
             <a:avLst/>
@@ -6961,12 +6923,12 @@
           <a:noFill/>
         </p:spPr>
         <p:txBody>
-          <a:bodyPr wrap="square">
+          <a:bodyPr wrap="square" anchor="ctr">
             <a:spAutoFit/>
           </a:bodyPr>
           <a:lstStyle/>
           <a:p>
-            <a:pPr>
+            <a:pPr marL="190500" indent="-190500">
               <a:spcBef>
                 <a:spcPts val="400"/>
               </a:spcBef>
@@ -6985,7 +6947,7 @@
             </a:r>
           </a:p>
           <a:p>
-            <a:pPr>
+            <a:pPr marL="190500" indent="-190500">
               <a:spcBef>
                 <a:spcPts val="400"/>
               </a:spcBef>
@@ -7004,7 +6966,7 @@
             </a:r>
           </a:p>
           <a:p>
-            <a:pPr>
+            <a:pPr marL="190500" indent="-190500">
               <a:spcBef>
                 <a:spcPts val="400"/>
               </a:spcBef>
@@ -7095,7 +7057,7 @@
                 <a:solidFill>
                   <a:srgbClr val="A0B4D2"/>
                 </a:solidFill>
-                <a:latin typeface="JetBrains Mono"/>
+                <a:latin typeface="Consolas"/>
               </a:rPr>
               <a:t>FKB Campus  ·  M06</a:t>
             </a:r>
@@ -7234,7 +7196,7 @@
                 <a:solidFill>
                   <a:srgbClr val="78808C"/>
                 </a:solidFill>
-                <a:latin typeface="JetBrains Mono"/>
+                <a:latin typeface="Consolas"/>
               </a:rPr>
               <a:t>ÜBERBLICK  ·  M06</a:t>
             </a:r>
@@ -7312,7 +7274,7 @@
                 <a:solidFill>
                   <a:srgbClr val="1F2C56"/>
                 </a:solidFill>
-                <a:latin typeface="Source Serif 4"/>
+                <a:latin typeface="Arial"/>
               </a:rPr>
               <a:t>Worum geht es heute</a:t>
             </a:r>
@@ -7461,7 +7423,7 @@
                 <a:solidFill>
                   <a:srgbClr val="A0B4D2"/>
                 </a:solidFill>
-                <a:latin typeface="JetBrains Mono"/>
+                <a:latin typeface="Consolas"/>
               </a:rPr>
               <a:t>FKB Campus  ·  M06</a:t>
             </a:r>
@@ -7600,7 +7562,7 @@
                 <a:solidFill>
                   <a:srgbClr val="78808C"/>
                 </a:solidFill>
-                <a:latin typeface="JetBrains Mono"/>
+                <a:latin typeface="Consolas"/>
               </a:rPr>
               <a:t>LERNZIELE  ·  M06</a:t>
             </a:r>
@@ -7678,7 +7640,7 @@
                 <a:solidFill>
                   <a:srgbClr val="1F2C56"/>
                 </a:solidFill>
-                <a:latin typeface="Source Serif 4"/>
+                <a:latin typeface="Arial"/>
               </a:rPr>
               <a:t>Was Sie heute mitnehmen</a:t>
             </a:r>
@@ -7855,7 +7817,7 @@
                 <a:solidFill>
                   <a:srgbClr val="A0B4D2"/>
                 </a:solidFill>
-                <a:latin typeface="JetBrains Mono"/>
+                <a:latin typeface="Consolas"/>
               </a:rPr>
               <a:t>FKB Campus  ·  M06</a:t>
             </a:r>
@@ -7994,7 +7956,7 @@
                 <a:solidFill>
                   <a:srgbClr val="78808C"/>
                 </a:solidFill>
-                <a:latin typeface="JetBrains Mono"/>
+                <a:latin typeface="Consolas"/>
               </a:rPr>
               <a:t>AGENDA  ·  M06</a:t>
             </a:r>
@@ -8072,7 +8034,7 @@
                 <a:solidFill>
                   <a:srgbClr val="1F2C56"/>
                 </a:solidFill>
-                <a:latin typeface="Source Serif 4"/>
+                <a:latin typeface="Arial"/>
               </a:rPr>
               <a:t>So läuft das Modul</a:t>
             </a:r>
@@ -8432,7 +8394,7 @@
                 <a:solidFill>
                   <a:srgbClr val="A0B4D2"/>
                 </a:solidFill>
-                <a:latin typeface="JetBrains Mono"/>
+                <a:latin typeface="Consolas"/>
               </a:rPr>
               <a:t>FKB Campus  ·  M06</a:t>
             </a:r>
@@ -8571,7 +8533,7 @@
                 <a:solidFill>
                   <a:srgbClr val="78808C"/>
                 </a:solidFill>
-                <a:latin typeface="JetBrains Mono"/>
+                <a:latin typeface="Consolas"/>
               </a:rPr>
               <a:t>M06  ·  INHALT</a:t>
             </a:r>
@@ -8692,7 +8654,7 @@
                 <a:solidFill>
                   <a:srgbClr val="1F2C56"/>
                 </a:solidFill>
-                <a:latin typeface="Source Serif 4"/>
+                <a:latin typeface="Arial"/>
               </a:rPr>
               <a:t>Theorie-Input 1: Was ist ein KMU? Definitionen, Typologien und volkswirtschaftliche Bedeutung</a:t>
             </a:r>
@@ -8708,7 +8670,7 @@
         <p:spPr>
           <a:xfrm>
             <a:off x="685800" y="1417320"/>
-            <a:ext cx="10817352" cy="5029200"/>
+            <a:ext cx="10817352" cy="4892040"/>
           </a:xfrm>
           <a:prstGeom prst="rect">
             <a:avLst/>
@@ -8734,13 +8696,13 @@
                 <a:solidFill>
                   <a:srgbClr val="78808C"/>
                 </a:solidFill>
-                <a:latin typeface="JetBrains Mono"/>
+                <a:latin typeface="Consolas"/>
               </a:rPr>
               <a:t>DIE ZWEI ZENTRALEN KMU-DEFINITIONEN</a:t>
             </a:r>
           </a:p>
           <a:p>
-            <a:pPr>
+            <a:pPr marL="190500" indent="-190500">
               <a:spcBef>
                 <a:spcPts val="400"/>
               </a:spcBef>
@@ -8759,7 +8721,7 @@
             </a:r>
           </a:p>
           <a:p>
-            <a:pPr>
+            <a:pPr marL="190500" indent="-190500">
               <a:spcBef>
                 <a:spcPts val="400"/>
               </a:spcBef>
@@ -8778,7 +8740,7 @@
             </a:r>
           </a:p>
           <a:p>
-            <a:pPr>
+            <a:pPr marL="190500" indent="-190500">
               <a:spcBef>
                 <a:spcPts val="400"/>
               </a:spcBef>
@@ -8797,7 +8759,7 @@
             </a:r>
           </a:p>
           <a:p>
-            <a:pPr>
+            <a:pPr marL="190500" indent="-190500">
               <a:spcBef>
                 <a:spcPts val="400"/>
               </a:spcBef>
@@ -8816,7 +8778,7 @@
             </a:r>
           </a:p>
           <a:p>
-            <a:pPr>
+            <a:pPr marL="190500" indent="-190500">
               <a:spcBef>
                 <a:spcPts val="400"/>
               </a:spcBef>
@@ -8835,7 +8797,7 @@
             </a:r>
           </a:p>
           <a:p>
-            <a:pPr>
+            <a:pPr marL="190500" indent="-190500">
               <a:spcBef>
                 <a:spcPts val="400"/>
               </a:spcBef>
@@ -8854,7 +8816,7 @@
             </a:r>
           </a:p>
           <a:p>
-            <a:pPr>
+            <a:pPr marL="190500" indent="-190500">
               <a:spcBef>
                 <a:spcPts val="400"/>
               </a:spcBef>
@@ -8873,7 +8835,7 @@
             </a:r>
           </a:p>
           <a:p>
-            <a:pPr>
+            <a:pPr marL="190500" indent="-190500">
               <a:spcBef>
                 <a:spcPts val="400"/>
               </a:spcBef>
@@ -8892,7 +8854,7 @@
             </a:r>
           </a:p>
           <a:p>
-            <a:pPr>
+            <a:pPr marL="177800" indent="-177800">
               <a:spcBef>
                 <a:spcPts val="600"/>
               </a:spcBef>
@@ -8924,13 +8886,13 @@
                 <a:solidFill>
                   <a:srgbClr val="78808C"/>
                 </a:solidFill>
-                <a:latin typeface="JetBrains Mono"/>
+                <a:latin typeface="Consolas"/>
               </a:rPr>
               <a:t>VOLKSWIRTSCHAFTLICHE BEDEUTUNG VON KMU</a:t>
             </a:r>
           </a:p>
           <a:p>
-            <a:pPr>
+            <a:pPr marL="190500" indent="-190500">
               <a:spcBef>
                 <a:spcPts val="400"/>
               </a:spcBef>
@@ -9021,7 +8983,7 @@
                 <a:solidFill>
                   <a:srgbClr val="A0B4D2"/>
                 </a:solidFill>
-                <a:latin typeface="JetBrains Mono"/>
+                <a:latin typeface="Consolas"/>
               </a:rPr>
               <a:t>FKB Campus  ·  M06</a:t>
             </a:r>
@@ -9160,7 +9122,7 @@
                 <a:solidFill>
                   <a:srgbClr val="78808C"/>
                 </a:solidFill>
-                <a:latin typeface="JetBrains Mono"/>
+                <a:latin typeface="Consolas"/>
               </a:rPr>
               <a:t>M06  ·  SCHAUBILD</a:t>
             </a:r>
@@ -9195,7 +9157,7 @@
                 <a:solidFill>
                   <a:srgbClr val="1F2C56"/>
                 </a:solidFill>
-                <a:latin typeface="Source Serif 4"/>
+                <a:latin typeface="Arial"/>
               </a:rPr>
               <a:t>Zwei KMU-Definitionen im Vergleich</a:t>
             </a:r>
@@ -9340,7 +9302,7 @@
                 <a:solidFill>
                   <a:srgbClr val="A0B4D2"/>
                 </a:solidFill>
-                <a:latin typeface="JetBrains Mono"/>
+                <a:latin typeface="Consolas"/>
               </a:rPr>
               <a:t>FKB Campus  ·  M06</a:t>
             </a:r>
@@ -9375,7 +9337,7 @@
                 <a:solidFill>
                   <a:srgbClr val="A0B4D2"/>
                 </a:solidFill>
-                <a:latin typeface="JetBrains Mono"/>
+                <a:latin typeface="Consolas"/>
               </a:rPr>
               <a:t>Schaubild</a:t>
             </a:r>
@@ -9514,7 +9476,7 @@
                 <a:solidFill>
                   <a:srgbClr val="78808C"/>
                 </a:solidFill>
-                <a:latin typeface="JetBrains Mono"/>
+                <a:latin typeface="Consolas"/>
               </a:rPr>
               <a:t>M06  ·  ÜBERSICHT</a:t>
             </a:r>
@@ -9549,7 +9511,7 @@
                 <a:solidFill>
                   <a:srgbClr val="1F2C56"/>
                 </a:solidFill>
-                <a:latin typeface="Source Serif 4"/>
+                <a:latin typeface="Arial"/>
               </a:rPr>
               <a:t>Theorie-Input 1: Was ist ein KMU? Definitionen, Typologien und volkswirtschaftliche Bedeutung</a:t>
             </a:r>
@@ -9933,7 +9895,7 @@
                 <a:solidFill>
                   <a:srgbClr val="A0B4D2"/>
                 </a:solidFill>
-                <a:latin typeface="JetBrains Mono"/>
+                <a:latin typeface="Consolas"/>
               </a:rPr>
               <a:t>FKB Campus  ·  M06</a:t>
             </a:r>
@@ -9968,7 +9930,7 @@
                 <a:solidFill>
                   <a:srgbClr val="A0B4D2"/>
                 </a:solidFill>
-                <a:latin typeface="JetBrains Mono"/>
+                <a:latin typeface="Consolas"/>
               </a:rPr>
               <a:t>Übersicht</a:t>
             </a:r>
@@ -10107,7 +10069,7 @@
                 <a:solidFill>
                   <a:srgbClr val="78808C"/>
                 </a:solidFill>
-                <a:latin typeface="JetBrains Mono"/>
+                <a:latin typeface="Consolas"/>
               </a:rPr>
               <a:t>M06  ·  ÜBERSICHT</a:t>
             </a:r>
@@ -10142,7 +10104,7 @@
                 <a:solidFill>
                   <a:srgbClr val="1F2C56"/>
                 </a:solidFill>
-                <a:latin typeface="Source Serif 4"/>
+                <a:latin typeface="Arial"/>
               </a:rPr>
               <a:t>Theorie-Input 1: Was ist ein KMU? Definitionen, Typologien und volkswirtschaftliche Bedeutung</a:t>
             </a:r>
@@ -10603,7 +10565,7 @@
                 <a:solidFill>
                   <a:srgbClr val="A0B4D2"/>
                 </a:solidFill>
-                <a:latin typeface="JetBrains Mono"/>
+                <a:latin typeface="Consolas"/>
               </a:rPr>
               <a:t>FKB Campus  ·  M06</a:t>
             </a:r>
@@ -10638,7 +10600,7 @@
                 <a:solidFill>
                   <a:srgbClr val="A0B4D2"/>
                 </a:solidFill>
-                <a:latin typeface="JetBrains Mono"/>
+                <a:latin typeface="Consolas"/>
               </a:rPr>
               <a:t>Übersicht</a:t>
             </a:r>
@@ -10777,7 +10739,7 @@
                 <a:solidFill>
                   <a:srgbClr val="78808C"/>
                 </a:solidFill>
-                <a:latin typeface="JetBrains Mono"/>
+                <a:latin typeface="Consolas"/>
               </a:rPr>
               <a:t>M06  ·  INHALT</a:t>
             </a:r>
@@ -10898,7 +10860,7 @@
                 <a:solidFill>
                   <a:srgbClr val="1F2C56"/>
                 </a:solidFill>
-                <a:latin typeface="Source Serif 4"/>
+                <a:latin typeface="Arial"/>
               </a:rPr>
               <a:t>Theorie-Input 2: Finanzierungsmuster und typische Risikofelder</a:t>
             </a:r>
@@ -10914,7 +10876,7 @@
         <p:spPr>
           <a:xfrm>
             <a:off x="685800" y="1417320"/>
-            <a:ext cx="10817352" cy="5029200"/>
+            <a:ext cx="10817352" cy="4892040"/>
           </a:xfrm>
           <a:prstGeom prst="rect">
             <a:avLst/>
@@ -10940,13 +10902,13 @@
                 <a:solidFill>
                   <a:srgbClr val="78808C"/>
                 </a:solidFill>
-                <a:latin typeface="JetBrains Mono"/>
+                <a:latin typeface="Consolas"/>
               </a:rPr>
               <a:t>FINANZIERUNGSSTRUKTUR: KMU VS. GROSSUNTERNEHMEN</a:t>
             </a:r>
           </a:p>
           <a:p>
-            <a:pPr>
+            <a:pPr marL="190500" indent="-190500">
               <a:spcBef>
                 <a:spcPts val="400"/>
               </a:spcBef>
@@ -10965,7 +10927,7 @@
             </a:r>
           </a:p>
           <a:p>
-            <a:pPr>
+            <a:pPr marL="190500" indent="-190500">
               <a:spcBef>
                 <a:spcPts val="400"/>
               </a:spcBef>
@@ -10984,7 +10946,7 @@
             </a:r>
           </a:p>
           <a:p>
-            <a:pPr>
+            <a:pPr marL="190500" indent="-190500">
               <a:spcBef>
                 <a:spcPts val="400"/>
               </a:spcBef>
@@ -11003,7 +10965,7 @@
             </a:r>
           </a:p>
           <a:p>
-            <a:pPr>
+            <a:pPr marL="190500" indent="-190500">
               <a:spcBef>
                 <a:spcPts val="400"/>
               </a:spcBef>
@@ -11022,7 +10984,7 @@
             </a:r>
           </a:p>
           <a:p>
-            <a:pPr>
+            <a:pPr marL="190500" indent="-190500">
               <a:spcBef>
                 <a:spcPts val="400"/>
               </a:spcBef>
@@ -11041,7 +11003,7 @@
             </a:r>
           </a:p>
           <a:p>
-            <a:pPr>
+            <a:pPr marL="190500" indent="-190500">
               <a:spcBef>
                 <a:spcPts val="400"/>
               </a:spcBef>
@@ -11060,7 +11022,7 @@
             </a:r>
           </a:p>
           <a:p>
-            <a:pPr>
+            <a:pPr marL="190500" indent="-190500">
               <a:spcBef>
                 <a:spcPts val="400"/>
               </a:spcBef>
@@ -11079,7 +11041,7 @@
             </a:r>
           </a:p>
           <a:p>
-            <a:pPr>
+            <a:pPr marL="190500" indent="-190500">
               <a:spcBef>
                 <a:spcPts val="400"/>
               </a:spcBef>
@@ -11098,7 +11060,7 @@
             </a:r>
           </a:p>
           <a:p>
-            <a:pPr>
+            <a:pPr marL="190500" indent="-190500">
               <a:spcBef>
                 <a:spcPts val="400"/>
               </a:spcBef>
@@ -11117,7 +11079,7 @@
             </a:r>
           </a:p>
           <a:p>
-            <a:pPr>
+            <a:pPr marL="190500" indent="-190500">
               <a:spcBef>
                 <a:spcPts val="400"/>
               </a:spcBef>
@@ -11136,7 +11098,7 @@
             </a:r>
           </a:p>
           <a:p>
-            <a:pPr>
+            <a:pPr marL="190500" indent="-190500">
               <a:spcBef>
                 <a:spcPts val="400"/>
               </a:spcBef>
@@ -11227,7 +11189,7 @@
                 <a:solidFill>
                   <a:srgbClr val="A0B4D2"/>
                 </a:solidFill>
-                <a:latin typeface="JetBrains Mono"/>
+                <a:latin typeface="Consolas"/>
               </a:rPr>
               <a:t>FKB Campus  ·  M06</a:t>
             </a:r>

--- a/protected-downloads/praesentation/M06.pptx
+++ b/protected-downloads/praesentation/M06.pptx
@@ -19,6 +19,8 @@
     <p:sldId id="267" r:id="rId19"/>
     <p:sldId id="268" r:id="rId20"/>
     <p:sldId id="269" r:id="rId21"/>
+    <p:sldId id="270" r:id="rId22"/>
+    <p:sldId id="271" r:id="rId23"/>
   </p:sldIdLst>
   <p:sldSz cx="12188952" cy="6858000" type="screen4x3"/>
   <p:notesSz cx="6858000" cy="9144000"/>
@@ -585,7 +587,7 @@
           <a:lstStyle/>
           <a:p>
             <a:r>
-              <a:t>Siehe Trainerhandbuch (Sektion 3) für Moderationshinweise, Timing und erwartete Teilnehmerreaktionen.</a:t>
+              <a:t>Einstieg: das Hausbank-Prinzip beruht auf Vertrauen – der Berater kennt den Menschen hinter der Bilanz.</a:t>
             </a:r>
           </a:p>
         </p:txBody>
@@ -655,7 +657,7 @@
           <a:lstStyle/>
           <a:p>
             <a:r>
-              <a:t>Siehe Trainerhandbuch (Sektion 3) für Moderationshinweise, Timing und erwartete Teilnehmerreaktionen.</a:t>
+              <a:t>Fünf KMU-Grundkategorien und die volkswirtschaftliche Bedeutung als Rückgrat der Region.</a:t>
             </a:r>
           </a:p>
         </p:txBody>
@@ -725,7 +727,7 @@
           <a:lstStyle/>
           <a:p>
             <a:r>
-              <a:t>Siehe Trainerhandbuch (Sektion 3) für Moderationshinweise, Timing und erwartete Teilnehmerreaktionen.</a:t>
+              <a:t>Jedes Risikofeld ist zugleich eine Beratungsopportunität: aus der Risikoanalyse folgt der Verbundimpuls (z. B. R+V Schlüsselpersonenversicherung) – empfohlen, nicht verkauft.</a:t>
             </a:r>
           </a:p>
         </p:txBody>
@@ -795,102 +797,7 @@
           <a:lstStyle/>
           <a:p>
             <a:r>
-              <a:t>Musterlösung (Trainer-Version – nicht für Teilnehmer sichtbar)</a:t>
-            </a:r>
-          </a:p>
-          <a:p>
-            <a:r>
-              <a:t>Zu Aufgabe 1:</a:t>
-            </a:r>
-          </a:p>
-          <a:p>
-            <a:r>
-              <a:t>IfM Bonn: ✓ KMU – 8 Beschäftigte &lt; 500, 1,8 Mio. EUR &lt; 50 Mio. EUR; inhabergeführt (Sabine Bergmann = Eigentümerin und Geschäftsführerin)</a:t>
-            </a:r>
-          </a:p>
-          <a:p>
-            <a:r>
-              <a:t>EU: Kleinunternehmen – &lt; 50 Beschäftigte, &lt; 10 Mio. EUR Umsatz; damit förderberechtigt für KfW-Kleinunternehmerkredite und EU-Strukturfonds</a:t>
-            </a:r>
-          </a:p>
-          <a:p>
-            <a:r>
-              <a:t>Zu Aufgabe 2:</a:t>
-            </a:r>
-          </a:p>
-          <a:p>
-            <a:r>
-              <a:t>Branchenprofil A (Handwerk), speziell Tischlerhandwerk / Holzgewerbe (WZ 16.29)</a:t>
-            </a:r>
-          </a:p>
-          <a:p>
-            <a:r>
-              <a:t>Risikofelder: (1) Inhaberabhängigkeit – Sabine Bergmann ist die einzige Führungskraft, kein Vertretungskonzept erkennbar; (2) Klumpenrisiko – bei 1,8 Mio. EUR Umsatz und 8 Mitarbeitern ist anzunehmen, dass wenige Großkunden dominieren; (3) Working-Capital-/Liquiditätsrisiko – Kontokorrentlinie bereits zu 71 % ausgeschöpft + laufender Investitionskredit; ein weiterer Kredit erhöht den Schuldendienst und engt den Liquiditätspuffer weiter ein; (4) Fachkräfterisiko – 3 von 8 Mitarbeitern sind Azubis, Abgang eines Gesellen = sofortige massive Kapazitätseinbuße; im Holzhandwerk 2025 das drängendste operative Risiko; (Nachfolgehinweis: Zwar 2020 vollzogen, aber Vater könnte noch informal eingebunden sein – dies als Gesprächspunkt vormerken, kein eigenständiges Hauptrisikofeld)</a:t>
-            </a:r>
-          </a:p>
-          <a:p>
-            <a:r>
-              <a:t>Zu Aufgabe 4:</a:t>
-            </a:r>
-          </a:p>
-          <a:p>
-            <a:r>
-              <a:t>Frage 1: Warum ist die KK-Linie so stark ausgeschöpft – strukturell (saisonale Spitze?) oder dauerhaft?</a:t>
-            </a:r>
-          </a:p>
-          <a:p>
-            <a:r>
-              <a:t>Frage 2: Reicht die Linie in ihrer aktuellen Höhe noch, wenn der neue Kredit läuft und die Jahresrate hinzukommt?</a:t>
-            </a:r>
-          </a:p>
-          <a:p>
-            <a:r>
-              <a:t>Frage 3: Müsste vor dem Investitionskredit erst die KK-Linie erhöht oder der KK-Saldo reduziert werden?</a:t>
-            </a:r>
-          </a:p>
-          <a:p>
-            <a:r>
-              <a:t>Reihenfolge: Erst KK-Situation klären (Gespräch über aktuelle Liquiditätslage), dann Tragfähigkeitsrechnung, dann Kreditgespräch. Wer zuerst den Investitionskredit bewilligt, riskiert eine Liquiditätsfalle.</a:t>
-            </a:r>
-          </a:p>
-          <a:p>
-            <a:r>
-              <a:t>Zu Aufgabe 3:</a:t>
-            </a:r>
-          </a:p>
-          <a:p>
-            <a:r>
-              <a:t>Beispiel-Formulierungen:</a:t>
-            </a:r>
-          </a:p>
-          <a:p>
-            <a:r>
-              <a:t>1. "Frau Bergmann, Sie bauen Möbel und Innenausbauten – haben Sie eher Privat- oder Gewerbekunden, und was macht bei Ihnen das bessere Geschäft?"</a:t>
-            </a:r>
-          </a:p>
-          <a:p>
-            <a:r>
-              <a:t>2. "Ihre größten Auftraggeber – gibt es da 2–3 Kunden, auf die ein großer Teil des Umsatzes entfällt?"</a:t>
-            </a:r>
-          </a:p>
-          <a:p>
-            <a:r>
-              <a:t>3. "Was ist gerade Ihr größtes Thema für die nächsten 12 Monate – ist es die Maschine, oder gibt es da noch mehr?"</a:t>
-            </a:r>
-          </a:p>
-          <a:p>
-            <a:r>
-              <a:t>4. "Wie haben Sie bisher größere Investitionen finanziert – eher aus eigener Kraft oder mit Bankunterstützung?"</a:t>
-            </a:r>
-          </a:p>
-          <a:p>
-            <a:r>
-              <a:t>5. "Frau Bergmann, ich frage Sie etwas, das viele selten durchdenken: Was würde passieren, wenn Sie 6 Monate krankheitsbedingt ausfallen würden – wer würde den Betrieb führen?"</a:t>
-            </a:r>
-          </a:p>
-          <a:p>
-            <a:r>
-              <a:t>Erwartete Antwort auf Frage 5: "Das wäre schwierig. Ich bin für alles zuständig – Kundenakquise, Auftragsplanung, die Maschinen kenne ich alle. Mein Mann könnte vielleicht einspringen, aber der hat einen anderen Job." → Beratungsopportunität: Schlüsselpersonenversicherung (R+V), ggf. Geschäftsführer-Krankengeldabsicherung.</a:t>
+              <a:t>Das 5-Fragen-Schema als niederschwelliger Einstieg – anwendbar auch ohne tiefe Branchenkenntnis.</a:t>
             </a:r>
           </a:p>
         </p:txBody>
@@ -960,7 +867,222 @@
           <a:lstStyle/>
           <a:p>
             <a:r>
-              <a:t>Siehe Trainerhandbuch (Sektion 3) für Moderationshinweise, Timing und erwartete Teilnehmerreaktionen.</a:t>
+              <a:t>Die Zahlen sind branchentypisch unauffällig – das Risiko liegt in der Struktur (8 MA, inhabergeführt): Schlüsselperson und Nachfolge.</a:t>
+            </a:r>
+          </a:p>
+        </p:txBody>
+      </p:sp>
+      <p:sp>
+        <p:nvSpPr>
+          <p:cNvPr id="4" name="Slide Number Placeholder 3"/>
+          <p:cNvSpPr>
+            <a:spLocks noGrp="1"/>
+          </p:cNvSpPr>
+          <p:nvPr>
+            <p:ph type="sldNum" idx="5" sz="quarter"/>
+          </p:nvPr>
+        </p:nvSpPr>
+        <p:spPr/>
+      </p:sp>
+    </p:spTree>
+  </p:cSld>
+  <p:clrMapOvr>
+    <a:masterClrMapping/>
+  </p:clrMapOvr>
+</p:notes>
+</file>
+
+<file path=ppt/notesSlides/notesSlide7.xml><?xml version="1.0" encoding="utf-8"?>
+<p:notes xmlns:a="http://schemas.openxmlformats.org/drawingml/2006/main" xmlns:p="http://schemas.openxmlformats.org/presentationml/2006/main" xmlns:r="http://schemas.openxmlformats.org/officeDocument/2006/relationships">
+  <p:cSld>
+    <p:spTree>
+      <p:nvGrpSpPr>
+        <p:cNvPr id="1" name=""/>
+        <p:cNvGrpSpPr/>
+        <p:nvPr/>
+      </p:nvGrpSpPr>
+      <p:grpSpPr>
+        <a:xfrm>
+          <a:off x="0" y="0"/>
+          <a:ext cx="0" cy="0"/>
+          <a:chOff x="0" y="0"/>
+          <a:chExt cx="0" cy="0"/>
+        </a:xfrm>
+      </p:grpSpPr>
+      <p:sp>
+        <p:nvSpPr>
+          <p:cNvPr id="2" name="Slide Image Placeholder 1"/>
+          <p:cNvSpPr>
+            <a:spLocks noGrp="1"/>
+          </p:cNvSpPr>
+          <p:nvPr>
+            <p:ph type="sldImg" idx="2"/>
+          </p:nvPr>
+        </p:nvSpPr>
+        <p:spPr/>
+      </p:sp>
+      <p:sp>
+        <p:nvSpPr>
+          <p:cNvPr id="3" name="Notes Placeholder 2"/>
+          <p:cNvSpPr>
+            <a:spLocks noGrp="1"/>
+          </p:cNvSpPr>
+          <p:nvPr>
+            <p:ph type="body" idx="3" sz="quarter"/>
+          </p:nvPr>
+        </p:nvSpPr>
+        <p:spPr/>
+        <p:txBody>
+          <a:bodyPr/>
+          <a:lstStyle/>
+          <a:p>
+            <a:r>
+              <a:t>AB-1 Musterlösung (Trainer-Version)</a:t>
+            </a:r>
+          </a:p>
+          <a:p>
+            <a:r>
+              <a:t>Bergmann: solide Kennzahlen, aber klassisches Schlüsselpersonen- und Nachfolgerisiko bei 8 MA. Beratungsopportunität: Schlüsselpersonen-/BU-Absicherung (R+V) aus der Risikoanalyse heraus.</a:t>
+            </a:r>
+          </a:p>
+        </p:txBody>
+      </p:sp>
+      <p:sp>
+        <p:nvSpPr>
+          <p:cNvPr id="4" name="Slide Number Placeholder 3"/>
+          <p:cNvSpPr>
+            <a:spLocks noGrp="1"/>
+          </p:cNvSpPr>
+          <p:nvPr>
+            <p:ph type="sldNum" idx="5" sz="quarter"/>
+          </p:nvPr>
+        </p:nvSpPr>
+        <p:spPr/>
+      </p:sp>
+    </p:spTree>
+  </p:cSld>
+  <p:clrMapOvr>
+    <a:masterClrMapping/>
+  </p:clrMapOvr>
+</p:notes>
+</file>
+
+<file path=ppt/notesSlides/notesSlide8.xml><?xml version="1.0" encoding="utf-8"?>
+<p:notes xmlns:a="http://schemas.openxmlformats.org/drawingml/2006/main" xmlns:p="http://schemas.openxmlformats.org/presentationml/2006/main" xmlns:r="http://schemas.openxmlformats.org/officeDocument/2006/relationships">
+  <p:cSld>
+    <p:spTree>
+      <p:nvGrpSpPr>
+        <p:cNvPr id="1" name=""/>
+        <p:cNvGrpSpPr/>
+        <p:nvPr/>
+      </p:nvGrpSpPr>
+      <p:grpSpPr>
+        <a:xfrm>
+          <a:off x="0" y="0"/>
+          <a:ext cx="0" cy="0"/>
+          <a:chOff x="0" y="0"/>
+          <a:chExt cx="0" cy="0"/>
+        </a:xfrm>
+      </p:grpSpPr>
+      <p:sp>
+        <p:nvSpPr>
+          <p:cNvPr id="2" name="Slide Image Placeholder 1"/>
+          <p:cNvSpPr>
+            <a:spLocks noGrp="1"/>
+          </p:cNvSpPr>
+          <p:nvPr>
+            <p:ph type="sldImg" idx="2"/>
+          </p:nvPr>
+        </p:nvSpPr>
+        <p:spPr/>
+      </p:sp>
+      <p:sp>
+        <p:nvSpPr>
+          <p:cNvPr id="3" name="Notes Placeholder 2"/>
+          <p:cNvSpPr>
+            <a:spLocks noGrp="1"/>
+          </p:cNvSpPr>
+          <p:nvPr>
+            <p:ph type="body" idx="3" sz="quarter"/>
+          </p:nvPr>
+        </p:nvSpPr>
+        <p:spPr/>
+        <p:txBody>
+          <a:bodyPr/>
+          <a:lstStyle/>
+          <a:p>
+            <a:r>
+              <a:t>Überleitung zum Profilbogen (AB-2) und Transfer.</a:t>
+            </a:r>
+          </a:p>
+        </p:txBody>
+      </p:sp>
+      <p:sp>
+        <p:nvSpPr>
+          <p:cNvPr id="4" name="Slide Number Placeholder 3"/>
+          <p:cNvSpPr>
+            <a:spLocks noGrp="1"/>
+          </p:cNvSpPr>
+          <p:nvPr>
+            <p:ph type="sldNum" idx="5" sz="quarter"/>
+          </p:nvPr>
+        </p:nvSpPr>
+        <p:spPr/>
+      </p:sp>
+    </p:spTree>
+  </p:cSld>
+  <p:clrMapOvr>
+    <a:masterClrMapping/>
+  </p:clrMapOvr>
+</p:notes>
+</file>
+
+<file path=ppt/notesSlides/notesSlide9.xml><?xml version="1.0" encoding="utf-8"?>
+<p:notes xmlns:a="http://schemas.openxmlformats.org/drawingml/2006/main" xmlns:p="http://schemas.openxmlformats.org/presentationml/2006/main" xmlns:r="http://schemas.openxmlformats.org/officeDocument/2006/relationships">
+  <p:cSld>
+    <p:spTree>
+      <p:nvGrpSpPr>
+        <p:cNvPr id="1" name=""/>
+        <p:cNvGrpSpPr/>
+        <p:nvPr/>
+      </p:nvGrpSpPr>
+      <p:grpSpPr>
+        <a:xfrm>
+          <a:off x="0" y="0"/>
+          <a:ext cx="0" cy="0"/>
+          <a:chOff x="0" y="0"/>
+          <a:chExt cx="0" cy="0"/>
+        </a:xfrm>
+      </p:grpSpPr>
+      <p:sp>
+        <p:nvSpPr>
+          <p:cNvPr id="2" name="Slide Image Placeholder 1"/>
+          <p:cNvSpPr>
+            <a:spLocks noGrp="1"/>
+          </p:cNvSpPr>
+          <p:nvPr>
+            <p:ph type="sldImg" idx="2"/>
+          </p:nvPr>
+        </p:nvSpPr>
+        <p:spPr/>
+      </p:sp>
+      <p:sp>
+        <p:nvSpPr>
+          <p:cNvPr id="3" name="Notes Placeholder 2"/>
+          <p:cNvSpPr>
+            <a:spLocks noGrp="1"/>
+          </p:cNvSpPr>
+          <p:nvPr>
+            <p:ph type="body" idx="3" sz="quarter"/>
+          </p:nvPr>
+        </p:nvSpPr>
+        <p:spPr/>
+        <p:txBody>
+          <a:bodyPr/>
+          <a:lstStyle/>
+          <a:p>
+            <a:r>
+              <a:t>Selbstcheck und Profilbogen als Transferanker.</a:t>
             </a:r>
           </a:p>
         </p:txBody>
@@ -4778,7 +4900,7 @@
                 </a:solidFill>
                 <a:latin typeface="Arial"/>
               </a:rPr>
-              <a:t>Theorie-Input 3: Einstieg in die Branchenanalyse</a:t>
+              <a:t>Zahlen brauchen Kontext</a:t>
             </a:r>
           </a:p>
         </p:txBody>
@@ -4800,27 +4922,27 @@
           <a:noFill/>
         </p:spPr>
         <p:txBody>
-          <a:bodyPr wrap="square">
+          <a:bodyPr wrap="square" anchor="ctr">
             <a:spAutoFit/>
           </a:bodyPr>
           <a:lstStyle/>
           <a:p>
-            <a:pPr>
+            <a:pPr marL="177800" indent="-177800">
               <a:spcBef>
-                <a:spcPts val="1000"/>
+                <a:spcPts val="600"/>
               </a:spcBef>
               <a:spcAft>
                 <a:spcPts val="200"/>
               </a:spcAft>
             </a:pPr>
             <a:r>
-              <a:rPr sz="800" b="1">
-                <a:solidFill>
-                  <a:srgbClr val="78808C"/>
-                </a:solidFill>
-                <a:latin typeface="Consolas"/>
+              <a:rPr sz="1200" i="1">
+                <a:solidFill>
+                  <a:srgbClr val="3D5466"/>
+                </a:solidFill>
+                <a:latin typeface="Arial"/>
               </a:rPr>
-              <a:t>VIER BRANCHENPROFILE FÜR DEN BERATUNGSALLTAG</a:t>
+              <a:t>→  Eine Kennzahl ohne Branchenkontext ist eine Zahl ohne Bedeutung – erst der Vergleich macht sie zur Aussage.</a:t>
             </a:r>
           </a:p>
           <a:p>
@@ -4839,7 +4961,7 @@
                 </a:solidFill>
                 <a:latin typeface="Arial"/>
               </a:rPr>
-              <a:t>▸  Branchenprofil A – Handwerk (z.B. Schreiner, Maler, Sanitär, Bäcker)</a:t>
+              <a:t>▸  Vier Branchenprofile für den Beratungsalltag als Orientierung.</a:t>
             </a:r>
           </a:p>
           <a:p>
@@ -4858,159 +4980,7 @@
                 </a:solidFill>
                 <a:latin typeface="Arial"/>
               </a:rPr>
-              <a:t>▸  Das Handwerk ist der typischste KMU-Sektor im süddeutschen VR-Kundenbestand. Charakteristisch:</a:t>
-            </a:r>
-          </a:p>
-          <a:p>
-            <a:pPr marL="190500" indent="-190500">
-              <a:spcBef>
-                <a:spcPts val="400"/>
-              </a:spcBef>
-              <a:spcAft>
-                <a:spcPts val="200"/>
-              </a:spcAft>
-            </a:pPr>
-            <a:r>
-              <a:rPr sz="1300">
-                <a:solidFill>
-                  <a:srgbClr val="3D5466"/>
-                </a:solidFill>
-                <a:latin typeface="Arial"/>
-              </a:rPr>
-              <a:t>▸  Eigenkapitalquote: Ø 18–24 % (niedriger als Industrie, weil arbeitsintensiv und wenig Anlageintensität)</a:t>
-            </a:r>
-          </a:p>
-          <a:p>
-            <a:pPr marL="190500" indent="-190500">
-              <a:spcBef>
-                <a:spcPts val="400"/>
-              </a:spcBef>
-              <a:spcAft>
-                <a:spcPts val="200"/>
-              </a:spcAft>
-            </a:pPr>
-            <a:r>
-              <a:rPr sz="1300">
-                <a:solidFill>
-                  <a:srgbClr val="3D5466"/>
-                </a:solidFill>
-                <a:latin typeface="Arial"/>
-              </a:rPr>
-              <a:t>▸  Finanzierungsbedarf: Kontokorrentlinie für saisonale Spitzen und Materialvorfinanzierung, Investitionskredite für Fahrzeuge, Maschinen und Werkzeuge, gelegentlich Betriebsgebäude</a:t>
-            </a:r>
-          </a:p>
-          <a:p>
-            <a:pPr marL="190500" indent="-190500">
-              <a:spcBef>
-                <a:spcPts val="400"/>
-              </a:spcBef>
-              <a:spcAft>
-                <a:spcPts val="200"/>
-              </a:spcAft>
-            </a:pPr>
-            <a:r>
-              <a:rPr sz="1300">
-                <a:solidFill>
-                  <a:srgbClr val="3D5466"/>
-                </a:solidFill>
-                <a:latin typeface="Arial"/>
-              </a:rPr>
-              <a:t>▸  Typische Risiken: Fachkräftemangel, Materialkostenvolatilität (Holz, Stahl, Kupfer), Auftragsschwankungen durch Baukonjunktur</a:t>
-            </a:r>
-          </a:p>
-          <a:p>
-            <a:pPr marL="190500" indent="-190500">
-              <a:spcBef>
-                <a:spcPts val="400"/>
-              </a:spcBef>
-              <a:spcAft>
-                <a:spcPts val="200"/>
-              </a:spcAft>
-            </a:pPr>
-            <a:r>
-              <a:rPr sz="1300">
-                <a:solidFill>
-                  <a:srgbClr val="3D5466"/>
-                </a:solidFill>
-                <a:latin typeface="Arial"/>
-              </a:rPr>
-              <a:t>▸  Was frage ich als Berater: "Wie gut sind Sie mit Aufträgen ausgelastet – haben Sie eine Warteliste?" / "Haben Sie genug qualifiziertes Personal, um Ihre Aufträge abzuarbeiten?"</a:t>
-            </a:r>
-          </a:p>
-          <a:p>
-            <a:pPr marL="190500" indent="-190500">
-              <a:spcBef>
-                <a:spcPts val="400"/>
-              </a:spcBef>
-              <a:spcAft>
-                <a:spcPts val="200"/>
-              </a:spcAft>
-            </a:pPr>
-            <a:r>
-              <a:rPr sz="1300">
-                <a:solidFill>
-                  <a:srgbClr val="3D5466"/>
-                </a:solidFill>
-                <a:latin typeface="Arial"/>
-              </a:rPr>
-              <a:t>▸  Branchenprofil B – Produzierendes Gewerbe / Maschinenbau</a:t>
-            </a:r>
-          </a:p>
-          <a:p>
-            <a:pPr marL="190500" indent="-190500">
-              <a:spcBef>
-                <a:spcPts val="400"/>
-              </a:spcBef>
-              <a:spcAft>
-                <a:spcPts val="200"/>
-              </a:spcAft>
-            </a:pPr>
-            <a:r>
-              <a:rPr sz="1300">
-                <a:solidFill>
-                  <a:srgbClr val="3D5466"/>
-                </a:solidFill>
-                <a:latin typeface="Arial"/>
-              </a:rPr>
-              <a:t>▸  Eigenkapitalquote: Ø 28–35 % (höher, weil hoher Anlagevermögensanteil)</a:t>
-            </a:r>
-          </a:p>
-          <a:p>
-            <a:pPr marL="190500" indent="-190500">
-              <a:spcBef>
-                <a:spcPts val="400"/>
-              </a:spcBef>
-              <a:spcAft>
-                <a:spcPts val="200"/>
-              </a:spcAft>
-            </a:pPr>
-            <a:r>
-              <a:rPr sz="1300">
-                <a:solidFill>
-                  <a:srgbClr val="3D5466"/>
-                </a:solidFill>
-                <a:latin typeface="Arial"/>
-              </a:rPr>
-              <a:t>▸  Finanzierungsbedarf: Investitionskredite für Maschinen und Anlagen (oft langfristig, 7–15 Jahre), Exportfinanzierung, Anzahlungsfinanzierung bei Großaufträgen, Betriebsmittelkredite</a:t>
-            </a:r>
-          </a:p>
-          <a:p>
-            <a:pPr marL="190500" indent="-190500">
-              <a:spcBef>
-                <a:spcPts val="400"/>
-              </a:spcBef>
-              <a:spcAft>
-                <a:spcPts val="200"/>
-              </a:spcAft>
-            </a:pPr>
-            <a:r>
-              <a:rPr sz="1300">
-                <a:solidFill>
-                  <a:srgbClr val="3D5466"/>
-                </a:solidFill>
-                <a:latin typeface="Arial"/>
-              </a:rPr>
-              <a:t>▸  Typische Risiken: Exportabhängigkeit (Wechselkurs, geopolitische Risiken), Energiekostenentwicklung, Lieferkettenstörungen</a:t>
+              <a:t>▸  Das 5-Fragen-Schema strukturiert den Analyseeinstieg in jedes KMU-Gespräch.</a:t>
             </a:r>
           </a:p>
         </p:txBody>
@@ -5262,7 +5232,7 @@
                 </a:solidFill>
                 <a:latin typeface="Arial"/>
               </a:rPr>
-              <a:t>Fünf-Fragen-Schema für den KMU-Beratungseinstieg</a:t>
+              <a:t>Das 5-Fragen-Schema für den KMU-Beratungseinstieg</a:t>
             </a:r>
           </a:p>
         </p:txBody>
@@ -5480,7 +5450,7 @@
             <a:avLst/>
           </a:prstGeom>
           <a:solidFill>
-            <a:srgbClr val="EDEDF3"/>
+            <a:srgbClr val="1F2C56"/>
           </a:solidFill>
           <a:ln>
             <a:noFill/>
@@ -5510,57 +5480,14 @@
       </p:sp>
       <p:sp>
         <p:nvSpPr>
-          <p:cNvPr id="3" name="Rectangle 2"/>
-          <p:cNvSpPr/>
-          <p:nvPr/>
-        </p:nvSpPr>
-        <p:spPr>
-          <a:xfrm>
-            <a:off x="0" y="0"/>
-            <a:ext cx="12188952" cy="50292"/>
-          </a:xfrm>
-          <a:prstGeom prst="rect">
-            <a:avLst/>
-          </a:prstGeom>
-          <a:solidFill>
-            <a:srgbClr val="1F2C56"/>
-          </a:solidFill>
-          <a:ln>
-            <a:noFill/>
-          </a:ln>
-        </p:spPr>
-        <p:style>
-          <a:lnRef idx="1">
-            <a:schemeClr val="accent1"/>
-          </a:lnRef>
-          <a:fillRef idx="3">
-            <a:schemeClr val="accent1"/>
-          </a:fillRef>
-          <a:effectRef idx="2">
-            <a:schemeClr val="accent1"/>
-          </a:effectRef>
-          <a:fontRef idx="minor">
-            <a:schemeClr val="lt1"/>
-          </a:fontRef>
-        </p:style>
-        <p:txBody>
-          <a:bodyPr rtlCol="0" anchor="ctr"/>
-          <a:lstStyle/>
-          <a:p>
-            <a:pPr algn="ctr"/>
-          </a:p>
-        </p:txBody>
-      </p:sp>
-      <p:sp>
-        <p:nvSpPr>
-          <p:cNvPr id="4" name="TextBox 3"/>
+          <p:cNvPr id="3" name="TextBox 2"/>
           <p:cNvSpPr txBox="1"/>
           <p:nvPr/>
         </p:nvSpPr>
         <p:spPr>
           <a:xfrm>
-            <a:off x="685800" y="109728"/>
-            <a:ext cx="10817352" cy="228600"/>
+            <a:off x="685800" y="2377440"/>
+            <a:ext cx="10817352" cy="365760"/>
           </a:xfrm>
           <a:prstGeom prst="rect">
             <a:avLst/>
@@ -5575,70 +5502,27 @@
           <a:p>
             <a:pPr algn="l"/>
             <a:r>
-              <a:rPr sz="750">
-                <a:solidFill>
-                  <a:srgbClr val="78808C"/>
+              <a:rPr sz="1200">
+                <a:solidFill>
+                  <a:srgbClr val="D9C089"/>
                 </a:solidFill>
                 <a:latin typeface="Consolas"/>
               </a:rPr>
-              <a:t>M06  ·  INHALT</a:t>
-            </a:r>
-          </a:p>
-        </p:txBody>
-      </p:sp>
-      <p:sp>
-        <p:nvSpPr>
-          <p:cNvPr id="5" name="Rectangle 4"/>
+              <a:t>FALLARBEIT</a:t>
+            </a:r>
+          </a:p>
+        </p:txBody>
+      </p:sp>
+      <p:sp>
+        <p:nvSpPr>
+          <p:cNvPr id="4" name="Rectangle 3"/>
           <p:cNvSpPr/>
           <p:nvPr/>
         </p:nvSpPr>
         <p:spPr>
           <a:xfrm>
-            <a:off x="0" y="1234440"/>
-            <a:ext cx="12188952" cy="12700"/>
-          </a:xfrm>
-          <a:prstGeom prst="rect">
-            <a:avLst/>
-          </a:prstGeom>
-          <a:solidFill>
-            <a:srgbClr val="D8DFE4"/>
-          </a:solidFill>
-          <a:ln>
-            <a:noFill/>
-          </a:ln>
-        </p:spPr>
-        <p:style>
-          <a:lnRef idx="1">
-            <a:schemeClr val="accent1"/>
-          </a:lnRef>
-          <a:fillRef idx="3">
-            <a:schemeClr val="accent1"/>
-          </a:fillRef>
-          <a:effectRef idx="2">
-            <a:schemeClr val="accent1"/>
-          </a:effectRef>
-          <a:fontRef idx="minor">
-            <a:schemeClr val="lt1"/>
-          </a:fontRef>
-        </p:style>
-        <p:txBody>
-          <a:bodyPr rtlCol="0" anchor="ctr"/>
-          <a:lstStyle/>
-          <a:p>
-            <a:pPr algn="ctr"/>
-          </a:p>
-        </p:txBody>
-      </p:sp>
-      <p:sp>
-        <p:nvSpPr>
-          <p:cNvPr id="6" name="Rectangle 5"/>
-          <p:cNvSpPr/>
-          <p:nvPr/>
-        </p:nvSpPr>
-        <p:spPr>
-          <a:xfrm>
-            <a:off x="685800" y="502920"/>
-            <a:ext cx="36576" cy="658368"/>
+            <a:off x="685800" y="2788920"/>
+            <a:ext cx="548640" cy="38100"/>
           </a:xfrm>
           <a:prstGeom prst="rect">
             <a:avLst/>
@@ -5674,14 +5558,14 @@
       </p:sp>
       <p:sp>
         <p:nvSpPr>
-          <p:cNvPr id="7" name="TextBox 6"/>
+          <p:cNvPr id="5" name="TextBox 4"/>
           <p:cNvSpPr txBox="1"/>
           <p:nvPr/>
         </p:nvSpPr>
         <p:spPr>
           <a:xfrm>
-            <a:off x="813816" y="502920"/>
-            <a:ext cx="10634472" cy="685800"/>
+            <a:off x="685800" y="3017520"/>
+            <a:ext cx="10817352" cy="1463040"/>
           </a:xfrm>
           <a:prstGeom prst="rect">
             <a:avLst/>
@@ -5696,27 +5580,27 @@
           <a:p>
             <a:pPr algn="l"/>
             <a:r>
-              <a:rPr sz="2400" b="1" i="0">
-                <a:solidFill>
-                  <a:srgbClr val="1F2C56"/>
+              <a:rPr sz="4000" b="1" i="0">
+                <a:solidFill>
+                  <a:srgbClr val="FFFFFF"/>
                 </a:solidFill>
                 <a:latin typeface="Arial"/>
               </a:rPr>
-              <a:t>Praxiscase: Bergmann Holzmanufaktur GmbH &amp; Co. KG</a:t>
-            </a:r>
-          </a:p>
-        </p:txBody>
-      </p:sp>
-      <p:sp>
-        <p:nvSpPr>
-          <p:cNvPr id="8" name="TextBox 7"/>
+              <a:t>Praxiscase Bergmann Holzmanufaktur</a:t>
+            </a:r>
+          </a:p>
+        </p:txBody>
+      </p:sp>
+      <p:sp>
+        <p:nvSpPr>
+          <p:cNvPr id="6" name="TextBox 5"/>
           <p:cNvSpPr txBox="1"/>
           <p:nvPr/>
         </p:nvSpPr>
         <p:spPr>
           <a:xfrm>
-            <a:off x="685800" y="1417320"/>
-            <a:ext cx="10817352" cy="4892040"/>
+            <a:off x="685800" y="4480560"/>
+            <a:ext cx="8653881" cy="1280160"/>
           </a:xfrm>
           <a:prstGeom prst="rect">
             <a:avLst/>
@@ -5729,193 +5613,29 @@
           </a:bodyPr>
           <a:lstStyle/>
           <a:p>
-            <a:pPr>
-              <a:spcBef>
-                <a:spcPts val="1000"/>
-              </a:spcBef>
-              <a:spcAft>
-                <a:spcPts val="200"/>
-              </a:spcAft>
-            </a:pPr>
-            <a:r>
-              <a:rPr sz="800" b="1">
-                <a:solidFill>
-                  <a:srgbClr val="78808C"/>
-                </a:solidFill>
-                <a:latin typeface="Consolas"/>
-              </a:rPr>
-              <a:t>FINANZDATEN (FIKTIV, PLAUSIBEL FÜR HOLZHANDWERK)</a:t>
-            </a:r>
-          </a:p>
-          <a:p>
-            <a:pPr marL="190500" indent="-190500">
-              <a:spcBef>
-                <a:spcPts val="400"/>
-              </a:spcBef>
-              <a:spcAft>
-                <a:spcPts val="200"/>
-              </a:spcAft>
-            </a:pPr>
-            <a:r>
-              <a:rPr sz="1300">
-                <a:solidFill>
-                  <a:srgbClr val="3D5466"/>
+            <a:pPr algn="l"/>
+            <a:r>
+              <a:rPr sz="1600" b="0" i="0">
+                <a:solidFill>
+                  <a:srgbClr val="C8D2E6"/>
                 </a:solidFill>
                 <a:latin typeface="Arial"/>
               </a:rPr>
-              <a:t>▸  *Branchenwerte Holzgewerbe / Tischlerhandwerk, Quelle: Deutsche Bundesbank, Unternehmensabschlussstatistik (Bundesbank, laufend )</a:t>
-            </a:r>
-          </a:p>
-          <a:p>
-            <a:pPr>
-              <a:spcBef>
-                <a:spcPts val="1000"/>
-              </a:spcBef>
-              <a:spcAft>
-                <a:spcPts val="200"/>
-              </a:spcAft>
-            </a:pPr>
-            <a:r>
-              <a:rPr sz="800" b="1">
-                <a:solidFill>
-                  <a:srgbClr val="78808C"/>
-                </a:solidFill>
-                <a:latin typeface="Consolas"/>
-              </a:rPr>
-              <a:t>AUFGABEN</a:t>
-            </a:r>
-          </a:p>
-          <a:p>
-            <a:pPr marL="190500" indent="-190500">
-              <a:spcBef>
-                <a:spcPts val="400"/>
-              </a:spcBef>
-              <a:spcAft>
-                <a:spcPts val="200"/>
-              </a:spcAft>
-            </a:pPr>
-            <a:r>
-              <a:rPr sz="1300">
-                <a:solidFill>
-                  <a:srgbClr val="3D5466"/>
-                </a:solidFill>
-                <a:latin typeface="Arial"/>
-              </a:rPr>
-              <a:t>▸  Aufgabe 1 – Klassifizierung (LZ-1):</a:t>
-            </a:r>
-          </a:p>
-          <a:p>
-            <a:pPr marL="190500" indent="-190500">
-              <a:spcBef>
-                <a:spcPts val="400"/>
-              </a:spcBef>
-              <a:spcAft>
-                <a:spcPts val="200"/>
-              </a:spcAft>
-            </a:pPr>
-            <a:r>
-              <a:rPr sz="1300">
-                <a:solidFill>
-                  <a:srgbClr val="3D5466"/>
-                </a:solidFill>
-                <a:latin typeface="Arial"/>
-              </a:rPr>
-              <a:t>▸  Aufgabe 2 – Typologisierung und Risikofelder (LZ-2/LZ-3):</a:t>
-            </a:r>
-          </a:p>
-          <a:p>
-            <a:pPr marL="190500" indent="-190500">
-              <a:spcBef>
-                <a:spcPts val="400"/>
-              </a:spcBef>
-              <a:spcAft>
-                <a:spcPts val="200"/>
-              </a:spcAft>
-            </a:pPr>
-            <a:r>
-              <a:rPr sz="1300">
-                <a:solidFill>
-                  <a:srgbClr val="3D5466"/>
-                </a:solidFill>
-                <a:latin typeface="Arial"/>
-              </a:rPr>
-              <a:t>▸  Aufgabe 3 – 5-Fragen-Schema anwenden (LZ-4):</a:t>
-            </a:r>
-          </a:p>
-          <a:p>
-            <a:pPr marL="190500" indent="-190500">
-              <a:spcBef>
-                <a:spcPts val="400"/>
-              </a:spcBef>
-              <a:spcAft>
-                <a:spcPts val="200"/>
-              </a:spcAft>
-            </a:pPr>
-            <a:r>
-              <a:rPr sz="1300">
-                <a:solidFill>
-                  <a:srgbClr val="3D5466"/>
-                </a:solidFill>
-                <a:latin typeface="Arial"/>
-              </a:rPr>
-              <a:t>▸  Aufgabe 4 – Kreditvorbereitung: KK-Analyse (LZ-3):</a:t>
-            </a:r>
-          </a:p>
-        </p:txBody>
-      </p:sp>
-      <p:sp>
-        <p:nvSpPr>
-          <p:cNvPr id="9" name="Rectangle 8"/>
-          <p:cNvSpPr/>
-          <p:nvPr/>
-        </p:nvSpPr>
-        <p:spPr>
-          <a:xfrm>
-            <a:off x="0" y="6510528"/>
-            <a:ext cx="12188952" cy="347472"/>
-          </a:xfrm>
-          <a:prstGeom prst="rect">
-            <a:avLst/>
-          </a:prstGeom>
-          <a:solidFill>
-            <a:srgbClr val="0A1937"/>
-          </a:solidFill>
-          <a:ln>
-            <a:noFill/>
-          </a:ln>
-        </p:spPr>
-        <p:style>
-          <a:lnRef idx="1">
-            <a:schemeClr val="accent1"/>
-          </a:lnRef>
-          <a:fillRef idx="3">
-            <a:schemeClr val="accent1"/>
-          </a:fillRef>
-          <a:effectRef idx="2">
-            <a:schemeClr val="accent1"/>
-          </a:effectRef>
-          <a:fontRef idx="minor">
-            <a:schemeClr val="lt1"/>
-          </a:fontRef>
-        </p:style>
-        <p:txBody>
-          <a:bodyPr rtlCol="0" anchor="ctr"/>
-          <a:lstStyle/>
-          <a:p>
-            <a:pPr algn="ctr"/>
-          </a:p>
-        </p:txBody>
-      </p:sp>
-      <p:sp>
-        <p:nvSpPr>
-          <p:cNvPr id="10" name="TextBox 9"/>
+              <a:t>Die KMU-Perspektive auf einen echten Handwerksbetrieb anwenden.</a:t>
+            </a:r>
+          </a:p>
+        </p:txBody>
+      </p:sp>
+      <p:sp>
+        <p:nvSpPr>
+          <p:cNvPr id="7" name="TextBox 6"/>
           <p:cNvSpPr txBox="1"/>
           <p:nvPr/>
         </p:nvSpPr>
         <p:spPr>
           <a:xfrm>
-            <a:off x="685800" y="6583680"/>
-            <a:ext cx="6490411" cy="256032"/>
+            <a:off x="685800" y="6355080"/>
+            <a:ext cx="10817352" cy="274320"/>
           </a:xfrm>
           <a:prstGeom prst="rect">
             <a:avLst/>
@@ -5932,7 +5652,7 @@
             <a:r>
               <a:rPr sz="700">
                 <a:solidFill>
-                  <a:srgbClr val="A0B4D2"/>
+                  <a:srgbClr val="8CA0C3"/>
                 </a:solidFill>
                 <a:latin typeface="Consolas"/>
               </a:rPr>
@@ -6110,7 +5830,7 @@
                 </a:solidFill>
                 <a:latin typeface="Arial"/>
               </a:rPr>
-              <a:t>Praxiscase: Bergmann Holzmanufaktur GmbH &amp; Co. KG</a:t>
+              <a:t>Bergmann Holzmanufaktur: Kennzahlen im Branchenvergleich</a:t>
             </a:r>
           </a:p>
         </p:txBody>
@@ -6168,7 +5888,7 @@
         </p:nvGraphicFramePr>
         <p:xfrm>
           <a:off x="685800" y="1417320"/>
-          <a:ext cx="10817352" cy="2304288"/>
+          <a:ext cx="10817352" cy="1920240"/>
         </p:xfrm>
         <a:graphic>
           <a:graphicData uri="http://schemas.openxmlformats.org/drawingml/2006/table">
@@ -6238,7 +5958,7 @@
                           </a:solidFill>
                           <a:latin typeface="Arial"/>
                         </a:rPr>
-                        <a:t>Branchenwert*</a:t>
+                        <a:t>Branchenwert</a:t>
                       </a:r>
                     </a:p>
                   </a:txBody>
@@ -6247,6 +5967,118 @@
                       <a:srgbClr val="1F2C56"/>
                     </a:solidFill>
                   </a:tcPr>
+                </a:tc>
+              </a:tr>
+              <a:tr h="384048">
+                <a:tc>
+                  <a:txBody>
+                    <a:bodyPr/>
+                    <a:lstStyle/>
+                    <a:p>
+                      <a:r>
+                        <a:rPr sz="1050">
+                          <a:solidFill>
+                            <a:srgbClr val="3D5466"/>
+                          </a:solidFill>
+                          <a:latin typeface="Arial"/>
+                        </a:rPr>
+                        <a:t>Jahresumsatz</a:t>
+                      </a:r>
+                    </a:p>
+                  </a:txBody>
+                  <a:tcPr/>
+                </a:tc>
+                <a:tc>
+                  <a:txBody>
+                    <a:bodyPr/>
+                    <a:lstStyle/>
+                    <a:p>
+                      <a:r>
+                        <a:rPr sz="1050">
+                          <a:solidFill>
+                            <a:srgbClr val="3D5466"/>
+                          </a:solidFill>
+                          <a:latin typeface="Arial"/>
+                        </a:rPr>
+                        <a:t>1,8 Mio. EUR</a:t>
+                      </a:r>
+                    </a:p>
+                  </a:txBody>
+                  <a:tcPr/>
+                </a:tc>
+                <a:tc>
+                  <a:txBody>
+                    <a:bodyPr/>
+                    <a:lstStyle/>
+                    <a:p>
+                      <a:r>
+                        <a:rPr sz="1050">
+                          <a:solidFill>
+                            <a:srgbClr val="3D5466"/>
+                          </a:solidFill>
+                          <a:latin typeface="Arial"/>
+                        </a:rPr>
+                        <a:t>—</a:t>
+                      </a:r>
+                    </a:p>
+                  </a:txBody>
+                  <a:tcPr/>
+                </a:tc>
+              </a:tr>
+              <a:tr h="384048">
+                <a:tc>
+                  <a:txBody>
+                    <a:bodyPr/>
+                    <a:lstStyle/>
+                    <a:p>
+                      <a:r>
+                        <a:rPr sz="1050">
+                          <a:solidFill>
+                            <a:srgbClr val="3D5466"/>
+                          </a:solidFill>
+                          <a:latin typeface="Arial"/>
+                        </a:rPr>
+                        <a:t>Beschäftigte</a:t>
+                      </a:r>
+                    </a:p>
+                  </a:txBody>
+                  <a:tcPr/>
+                </a:tc>
+                <a:tc>
+                  <a:txBody>
+                    <a:bodyPr/>
+                    <a:lstStyle/>
+                    <a:p>
+                      <a:r>
+                        <a:rPr sz="1050">
+                          <a:solidFill>
+                            <a:srgbClr val="3D5466"/>
+                          </a:solidFill>
+                          <a:latin typeface="Arial"/>
+                        </a:rPr>
+                        <a:t>8</a:t>
+                      </a:r>
+                    </a:p>
+                  </a:txBody>
+                  <a:tcPr/>
+                </a:tc>
+                <a:tc>
+                  <a:txBody>
+                    <a:bodyPr/>
+                    <a:lstStyle/>
+                    <a:p>
+                      <a:r>
+                        <a:rPr sz="1050">
+                          <a:solidFill>
+                            <a:srgbClr val="3D5466"/>
+                          </a:solidFill>
+                          <a:latin typeface="Arial"/>
+                        </a:rPr>
+                        <a:t>—</a:t>
+                      </a:r>
+                    </a:p>
+                  </a:txBody>
+                  <a:tcPr/>
                 </a:tc>
               </a:tr>
               <a:tr h="384048">
@@ -6318,119 +6150,7 @@
                           </a:solidFill>
                           <a:latin typeface="Arial"/>
                         </a:rPr>
-                        <a:t>Jahresumsatz</a:t>
-                      </a:r>
-                    </a:p>
-                  </a:txBody>
-                  <a:tcPr/>
-                </a:tc>
-                <a:tc>
-                  <a:txBody>
-                    <a:bodyPr/>
-                    <a:lstStyle/>
-                    <a:p>
-                      <a:r>
-                        <a:rPr sz="1050">
-                          <a:solidFill>
-                            <a:srgbClr val="3D5466"/>
-                          </a:solidFill>
-                          <a:latin typeface="Arial"/>
-                        </a:rPr>
-                        <a:t>1,8 Mio. EUR</a:t>
-                      </a:r>
-                    </a:p>
-                  </a:txBody>
-                  <a:tcPr/>
-                </a:tc>
-                <a:tc>
-                  <a:txBody>
-                    <a:bodyPr/>
-                    <a:lstStyle/>
-                    <a:p>
-                      <a:r>
-                        <a:rPr sz="1050">
-                          <a:solidFill>
-                            <a:srgbClr val="3D5466"/>
-                          </a:solidFill>
-                          <a:latin typeface="Arial"/>
-                        </a:rPr>
-                        <a:t>–</a:t>
-                      </a:r>
-                    </a:p>
-                  </a:txBody>
-                  <a:tcPr/>
-                </a:tc>
-              </a:tr>
-              <a:tr h="384048">
-                <a:tc>
-                  <a:txBody>
-                    <a:bodyPr/>
-                    <a:lstStyle/>
-                    <a:p>
-                      <a:r>
-                        <a:rPr sz="1050">
-                          <a:solidFill>
-                            <a:srgbClr val="3D5466"/>
-                          </a:solidFill>
-                          <a:latin typeface="Arial"/>
-                        </a:rPr>
-                        <a:t>Beschäftigte</a:t>
-                      </a:r>
-                    </a:p>
-                  </a:txBody>
-                  <a:tcPr/>
-                </a:tc>
-                <a:tc>
-                  <a:txBody>
-                    <a:bodyPr/>
-                    <a:lstStyle/>
-                    <a:p>
-                      <a:r>
-                        <a:rPr sz="1050">
-                          <a:solidFill>
-                            <a:srgbClr val="3D5466"/>
-                          </a:solidFill>
-                          <a:latin typeface="Arial"/>
-                        </a:rPr>
-                        <a:t>8</a:t>
-                      </a:r>
-                    </a:p>
-                  </a:txBody>
-                  <a:tcPr/>
-                </a:tc>
-                <a:tc>
-                  <a:txBody>
-                    <a:bodyPr/>
-                    <a:lstStyle/>
-                    <a:p>
-                      <a:r>
-                        <a:rPr sz="1050">
-                          <a:solidFill>
-                            <a:srgbClr val="3D5466"/>
-                          </a:solidFill>
-                          <a:latin typeface="Arial"/>
-                        </a:rPr>
-                        <a:t>–</a:t>
-                      </a:r>
-                    </a:p>
-                  </a:txBody>
-                  <a:tcPr/>
-                </a:tc>
-              </a:tr>
-              <a:tr h="384048">
-                <a:tc>
-                  <a:txBody>
-                    <a:bodyPr/>
-                    <a:lstStyle/>
-                    <a:p>
-                      <a:r>
-                        <a:rPr sz="1050">
-                          <a:solidFill>
-                            <a:srgbClr val="3D5466"/>
-                          </a:solidFill>
-                          <a:latin typeface="Arial"/>
-                        </a:rPr>
-                        <a:t>Umsatzrendite (vor Steuern)</a:t>
+                        <a:t>Umsatzrendite</a:t>
                       </a:r>
                     </a:p>
                   </a:txBody>
@@ -6473,62 +6193,6 @@
                   <a:tcPr/>
                 </a:tc>
               </a:tr>
-              <a:tr h="384048">
-                <a:tc>
-                  <a:txBody>
-                    <a:bodyPr/>
-                    <a:lstStyle/>
-                    <a:p>
-                      <a:r>
-                        <a:rPr sz="1050">
-                          <a:solidFill>
-                            <a:srgbClr val="3D5466"/>
-                          </a:solidFill>
-                          <a:latin typeface="Arial"/>
-                        </a:rPr>
-                        <a:t>Fremdkapitalquote</a:t>
-                      </a:r>
-                    </a:p>
-                  </a:txBody>
-                  <a:tcPr/>
-                </a:tc>
-                <a:tc>
-                  <a:txBody>
-                    <a:bodyPr/>
-                    <a:lstStyle/>
-                    <a:p>
-                      <a:r>
-                        <a:rPr sz="1050">
-                          <a:solidFill>
-                            <a:srgbClr val="3D5466"/>
-                          </a:solidFill>
-                          <a:latin typeface="Arial"/>
-                        </a:rPr>
-                        <a:t>79 %</a:t>
-                      </a:r>
-                    </a:p>
-                  </a:txBody>
-                  <a:tcPr/>
-                </a:tc>
-                <a:tc>
-                  <a:txBody>
-                    <a:bodyPr/>
-                    <a:lstStyle/>
-                    <a:p>
-                      <a:r>
-                        <a:rPr sz="1050">
-                          <a:solidFill>
-                            <a:srgbClr val="3D5466"/>
-                          </a:solidFill>
-                          <a:latin typeface="Arial"/>
-                        </a:rPr>
-                        <a:t>Ø 76–82 %</a:t>
-                      </a:r>
-                    </a:p>
-                  </a:txBody>
-                  <a:tcPr/>
-                </a:tc>
-              </a:tr>
             </a:tbl>
           </a:graphicData>
         </a:graphic>
@@ -6780,7 +6444,7 @@
                 </a:solidFill>
                 <a:latin typeface="Consolas"/>
               </a:rPr>
-              <a:t>M06  ·  INHALT</a:t>
+              <a:t>M06  ·  ARBEITSBLATT</a:t>
             </a:r>
           </a:p>
         </p:txBody>
@@ -6901,7 +6565,7 @@
                 </a:solidFill>
                 <a:latin typeface="Arial"/>
               </a:rPr>
-              <a:t>Reflexionsfragen</a:t>
+              <a:t>Praxiscase Bergmann bearbeiten</a:t>
             </a:r>
           </a:p>
         </p:txBody>
@@ -6914,8 +6578,8 @@
         </p:nvSpPr>
         <p:spPr>
           <a:xfrm>
-            <a:off x="685800" y="1417320"/>
-            <a:ext cx="10817352" cy="4892040"/>
+            <a:off x="685800" y="1554480"/>
+            <a:ext cx="10817352" cy="3840480"/>
           </a:xfrm>
           <a:prstGeom prst="rect">
             <a:avLst/>
@@ -6923,7 +6587,7 @@
           <a:noFill/>
         </p:spPr>
         <p:txBody>
-          <a:bodyPr wrap="square" anchor="ctr">
+          <a:bodyPr wrap="square">
             <a:spAutoFit/>
           </a:bodyPr>
           <a:lstStyle/>
@@ -6937,13 +6601,13 @@
               </a:spcAft>
             </a:pPr>
             <a:r>
-              <a:rPr sz="1300">
+              <a:rPr sz="1400">
                 <a:solidFill>
                   <a:srgbClr val="3D5466"/>
                 </a:solidFill>
                 <a:latin typeface="Arial"/>
               </a:rPr>
-              <a:t>▸  Verstehen (Bloom 2): Warum ist die Inhaberabhängigkeit bei einem Handwerksbetrieb mit 8 Mitarbeitern ein strukturell höheres Risiko als bei einem Produktionsbetrieb mit 80 Mitarbeitern – was verändert sich mit zunehmender Betriebsgröße strukturell?</a:t>
+              <a:t>▸  Analysieren Sie die Bergmann Holzmanufaktur mit dem 5-Fragen-Schema (AB-1).</a:t>
             </a:r>
           </a:p>
           <a:p>
@@ -6956,13 +6620,13 @@
               </a:spcAft>
             </a:pPr>
             <a:r>
-              <a:rPr sz="1300">
+              <a:rPr sz="1400">
                 <a:solidFill>
                   <a:srgbClr val="3D5466"/>
                 </a:solidFill>
                 <a:latin typeface="Arial"/>
               </a:rPr>
-              <a:t>▸  Anwenden (Bloom 3): Ein Kunde sagt Ihnen: "Wir sind kein KMU, wir sind ein mittelständisches Unternehmen." Wie reagieren Sie – was ist der begriffliche Unterschied, und was sagt das über die Selbstwahrnehmung des Inhabers?</a:t>
+              <a:t>▸  Ordnen Sie die Kennzahlen in den Branchenkontext ein.</a:t>
             </a:r>
           </a:p>
           <a:p>
@@ -6975,13 +6639,908 @@
               </a:spcAft>
             </a:pPr>
             <a:r>
-              <a:rPr sz="1300">
+              <a:rPr sz="1400">
                 <a:solidFill>
                   <a:srgbClr val="3D5466"/>
                 </a:solidFill>
                 <a:latin typeface="Arial"/>
               </a:rPr>
-              <a:t>▸  Anwenden (Bloom 3): Bergmann Holzmanufaktur hat eine EK-Quote von 21 % – genau im Branchenmittel. Ein Kollege sagt: "Das ist unauffällig, kein Handlungsbedarf." Welche Informationen fehlen für eine vollständige Einschätzung? Was würden Sie als nächstes klären?</a:t>
+              <a:t>▸  Identifizieren Sie die strukturellen Risiken und den passenden Verbundimpuls.</a:t>
+            </a:r>
+          </a:p>
+        </p:txBody>
+      </p:sp>
+      <p:sp>
+        <p:nvSpPr>
+          <p:cNvPr id="9" name="Rectangle 8"/>
+          <p:cNvSpPr/>
+          <p:nvPr/>
+        </p:nvSpPr>
+        <p:spPr>
+          <a:xfrm>
+            <a:off x="685800" y="5486400"/>
+            <a:ext cx="10817352" cy="640080"/>
+          </a:xfrm>
+          <a:prstGeom prst="rect">
+            <a:avLst/>
+          </a:prstGeom>
+          <a:solidFill>
+            <a:srgbClr val="1F2C56"/>
+          </a:solidFill>
+          <a:ln>
+            <a:noFill/>
+          </a:ln>
+        </p:spPr>
+        <p:style>
+          <a:lnRef idx="1">
+            <a:schemeClr val="accent1"/>
+          </a:lnRef>
+          <a:fillRef idx="3">
+            <a:schemeClr val="accent1"/>
+          </a:fillRef>
+          <a:effectRef idx="2">
+            <a:schemeClr val="accent1"/>
+          </a:effectRef>
+          <a:fontRef idx="minor">
+            <a:schemeClr val="lt1"/>
+          </a:fontRef>
+        </p:style>
+        <p:txBody>
+          <a:bodyPr rtlCol="0" anchor="ctr"/>
+          <a:lstStyle/>
+          <a:p>
+            <a:pPr algn="ctr"/>
+          </a:p>
+        </p:txBody>
+      </p:sp>
+      <p:sp>
+        <p:nvSpPr>
+          <p:cNvPr id="10" name="TextBox 9"/>
+          <p:cNvSpPr txBox="1"/>
+          <p:nvPr/>
+        </p:nvSpPr>
+        <p:spPr>
+          <a:xfrm>
+            <a:off x="868680" y="5596128"/>
+            <a:ext cx="10451592" cy="457200"/>
+          </a:xfrm>
+          <a:prstGeom prst="rect">
+            <a:avLst/>
+          </a:prstGeom>
+          <a:noFill/>
+        </p:spPr>
+        <p:txBody>
+          <a:bodyPr wrap="square">
+            <a:spAutoFit/>
+          </a:bodyPr>
+          <a:lstStyle/>
+          <a:p>
+            <a:pPr algn="l"/>
+            <a:r>
+              <a:rPr sz="1300" b="1" i="0">
+                <a:solidFill>
+                  <a:srgbClr val="FFFFFF"/>
+                </a:solidFill>
+                <a:latin typeface="Arial"/>
+              </a:rPr>
+              <a:t>→  Bearbeitung im Teilnehmer-Workbook (Arbeitsblatt mit Ausfüllfeldern)</a:t>
+            </a:r>
+          </a:p>
+        </p:txBody>
+      </p:sp>
+      <p:sp>
+        <p:nvSpPr>
+          <p:cNvPr id="11" name="Rectangle 10"/>
+          <p:cNvSpPr/>
+          <p:nvPr/>
+        </p:nvSpPr>
+        <p:spPr>
+          <a:xfrm>
+            <a:off x="0" y="6510528"/>
+            <a:ext cx="12188952" cy="347472"/>
+          </a:xfrm>
+          <a:prstGeom prst="rect">
+            <a:avLst/>
+          </a:prstGeom>
+          <a:solidFill>
+            <a:srgbClr val="0A1937"/>
+          </a:solidFill>
+          <a:ln>
+            <a:noFill/>
+          </a:ln>
+        </p:spPr>
+        <p:style>
+          <a:lnRef idx="1">
+            <a:schemeClr val="accent1"/>
+          </a:lnRef>
+          <a:fillRef idx="3">
+            <a:schemeClr val="accent1"/>
+          </a:fillRef>
+          <a:effectRef idx="2">
+            <a:schemeClr val="accent1"/>
+          </a:effectRef>
+          <a:fontRef idx="minor">
+            <a:schemeClr val="lt1"/>
+          </a:fontRef>
+        </p:style>
+        <p:txBody>
+          <a:bodyPr rtlCol="0" anchor="ctr"/>
+          <a:lstStyle/>
+          <a:p>
+            <a:pPr algn="ctr"/>
+          </a:p>
+        </p:txBody>
+      </p:sp>
+      <p:sp>
+        <p:nvSpPr>
+          <p:cNvPr id="12" name="TextBox 11"/>
+          <p:cNvSpPr txBox="1"/>
+          <p:nvPr/>
+        </p:nvSpPr>
+        <p:spPr>
+          <a:xfrm>
+            <a:off x="685800" y="6583680"/>
+            <a:ext cx="6490411" cy="256032"/>
+          </a:xfrm>
+          <a:prstGeom prst="rect">
+            <a:avLst/>
+          </a:prstGeom>
+          <a:noFill/>
+        </p:spPr>
+        <p:txBody>
+          <a:bodyPr wrap="none">
+            <a:spAutoFit/>
+          </a:bodyPr>
+          <a:lstStyle/>
+          <a:p>
+            <a:pPr algn="l"/>
+            <a:r>
+              <a:rPr sz="700">
+                <a:solidFill>
+                  <a:srgbClr val="A0B4D2"/>
+                </a:solidFill>
+                <a:latin typeface="Consolas"/>
+              </a:rPr>
+              <a:t>FKB Campus  ·  M06</a:t>
+            </a:r>
+          </a:p>
+        </p:txBody>
+      </p:sp>
+    </p:spTree>
+  </p:cSld>
+  <p:clrMapOvr>
+    <a:masterClrMapping/>
+  </p:clrMapOvr>
+</p:sld>
+</file>
+
+<file path=ppt/slides/slide15.xml><?xml version="1.0" encoding="utf-8"?>
+<p:sld xmlns:a="http://schemas.openxmlformats.org/drawingml/2006/main" xmlns:p="http://schemas.openxmlformats.org/presentationml/2006/main" xmlns:r="http://schemas.openxmlformats.org/officeDocument/2006/relationships">
+  <p:cSld>
+    <p:spTree>
+      <p:nvGrpSpPr>
+        <p:cNvPr id="1" name=""/>
+        <p:cNvGrpSpPr/>
+        <p:nvPr/>
+      </p:nvGrpSpPr>
+      <p:grpSpPr/>
+      <p:sp>
+        <p:nvSpPr>
+          <p:cNvPr id="2" name="Rectangle 1"/>
+          <p:cNvSpPr/>
+          <p:nvPr/>
+        </p:nvSpPr>
+        <p:spPr>
+          <a:xfrm>
+            <a:off x="0" y="0"/>
+            <a:ext cx="12188952" cy="6858000"/>
+          </a:xfrm>
+          <a:prstGeom prst="rect">
+            <a:avLst/>
+          </a:prstGeom>
+          <a:solidFill>
+            <a:srgbClr val="EDEDF3"/>
+          </a:solidFill>
+          <a:ln>
+            <a:noFill/>
+          </a:ln>
+        </p:spPr>
+        <p:style>
+          <a:lnRef idx="1">
+            <a:schemeClr val="accent1"/>
+          </a:lnRef>
+          <a:fillRef idx="3">
+            <a:schemeClr val="accent1"/>
+          </a:fillRef>
+          <a:effectRef idx="2">
+            <a:schemeClr val="accent1"/>
+          </a:effectRef>
+          <a:fontRef idx="minor">
+            <a:schemeClr val="lt1"/>
+          </a:fontRef>
+        </p:style>
+        <p:txBody>
+          <a:bodyPr rtlCol="0" anchor="ctr"/>
+          <a:lstStyle/>
+          <a:p>
+            <a:pPr algn="ctr"/>
+          </a:p>
+        </p:txBody>
+      </p:sp>
+      <p:sp>
+        <p:nvSpPr>
+          <p:cNvPr id="3" name="Rectangle 2"/>
+          <p:cNvSpPr/>
+          <p:nvPr/>
+        </p:nvSpPr>
+        <p:spPr>
+          <a:xfrm>
+            <a:off x="0" y="0"/>
+            <a:ext cx="12188952" cy="50292"/>
+          </a:xfrm>
+          <a:prstGeom prst="rect">
+            <a:avLst/>
+          </a:prstGeom>
+          <a:solidFill>
+            <a:srgbClr val="1F2C56"/>
+          </a:solidFill>
+          <a:ln>
+            <a:noFill/>
+          </a:ln>
+        </p:spPr>
+        <p:style>
+          <a:lnRef idx="1">
+            <a:schemeClr val="accent1"/>
+          </a:lnRef>
+          <a:fillRef idx="3">
+            <a:schemeClr val="accent1"/>
+          </a:fillRef>
+          <a:effectRef idx="2">
+            <a:schemeClr val="accent1"/>
+          </a:effectRef>
+          <a:fontRef idx="minor">
+            <a:schemeClr val="lt1"/>
+          </a:fontRef>
+        </p:style>
+        <p:txBody>
+          <a:bodyPr rtlCol="0" anchor="ctr"/>
+          <a:lstStyle/>
+          <a:p>
+            <a:pPr algn="ctr"/>
+          </a:p>
+        </p:txBody>
+      </p:sp>
+      <p:sp>
+        <p:nvSpPr>
+          <p:cNvPr id="4" name="TextBox 3"/>
+          <p:cNvSpPr txBox="1"/>
+          <p:nvPr/>
+        </p:nvSpPr>
+        <p:spPr>
+          <a:xfrm>
+            <a:off x="685800" y="109728"/>
+            <a:ext cx="10817352" cy="228600"/>
+          </a:xfrm>
+          <a:prstGeom prst="rect">
+            <a:avLst/>
+          </a:prstGeom>
+          <a:noFill/>
+        </p:spPr>
+        <p:txBody>
+          <a:bodyPr wrap="none">
+            <a:spAutoFit/>
+          </a:bodyPr>
+          <a:lstStyle/>
+          <a:p>
+            <a:pPr algn="l"/>
+            <a:r>
+              <a:rPr sz="750">
+                <a:solidFill>
+                  <a:srgbClr val="78808C"/>
+                </a:solidFill>
+                <a:latin typeface="Consolas"/>
+              </a:rPr>
+              <a:t>M06  ·  INHALT</a:t>
+            </a:r>
+          </a:p>
+        </p:txBody>
+      </p:sp>
+      <p:sp>
+        <p:nvSpPr>
+          <p:cNvPr id="5" name="Rectangle 4"/>
+          <p:cNvSpPr/>
+          <p:nvPr/>
+        </p:nvSpPr>
+        <p:spPr>
+          <a:xfrm>
+            <a:off x="0" y="1234440"/>
+            <a:ext cx="12188952" cy="12700"/>
+          </a:xfrm>
+          <a:prstGeom prst="rect">
+            <a:avLst/>
+          </a:prstGeom>
+          <a:solidFill>
+            <a:srgbClr val="D8DFE4"/>
+          </a:solidFill>
+          <a:ln>
+            <a:noFill/>
+          </a:ln>
+        </p:spPr>
+        <p:style>
+          <a:lnRef idx="1">
+            <a:schemeClr val="accent1"/>
+          </a:lnRef>
+          <a:fillRef idx="3">
+            <a:schemeClr val="accent1"/>
+          </a:fillRef>
+          <a:effectRef idx="2">
+            <a:schemeClr val="accent1"/>
+          </a:effectRef>
+          <a:fontRef idx="minor">
+            <a:schemeClr val="lt1"/>
+          </a:fontRef>
+        </p:style>
+        <p:txBody>
+          <a:bodyPr rtlCol="0" anchor="ctr"/>
+          <a:lstStyle/>
+          <a:p>
+            <a:pPr algn="ctr"/>
+          </a:p>
+        </p:txBody>
+      </p:sp>
+      <p:sp>
+        <p:nvSpPr>
+          <p:cNvPr id="6" name="Rectangle 5"/>
+          <p:cNvSpPr/>
+          <p:nvPr/>
+        </p:nvSpPr>
+        <p:spPr>
+          <a:xfrm>
+            <a:off x="685800" y="502920"/>
+            <a:ext cx="36576" cy="658368"/>
+          </a:xfrm>
+          <a:prstGeom prst="rect">
+            <a:avLst/>
+          </a:prstGeom>
+          <a:solidFill>
+            <a:srgbClr val="D9C089"/>
+          </a:solidFill>
+          <a:ln>
+            <a:noFill/>
+          </a:ln>
+        </p:spPr>
+        <p:style>
+          <a:lnRef idx="1">
+            <a:schemeClr val="accent1"/>
+          </a:lnRef>
+          <a:fillRef idx="3">
+            <a:schemeClr val="accent1"/>
+          </a:fillRef>
+          <a:effectRef idx="2">
+            <a:schemeClr val="accent1"/>
+          </a:effectRef>
+          <a:fontRef idx="minor">
+            <a:schemeClr val="lt1"/>
+          </a:fontRef>
+        </p:style>
+        <p:txBody>
+          <a:bodyPr rtlCol="0" anchor="ctr"/>
+          <a:lstStyle/>
+          <a:p>
+            <a:pPr algn="ctr"/>
+          </a:p>
+        </p:txBody>
+      </p:sp>
+      <p:sp>
+        <p:nvSpPr>
+          <p:cNvPr id="7" name="TextBox 6"/>
+          <p:cNvSpPr txBox="1"/>
+          <p:nvPr/>
+        </p:nvSpPr>
+        <p:spPr>
+          <a:xfrm>
+            <a:off x="813816" y="502920"/>
+            <a:ext cx="10634472" cy="685800"/>
+          </a:xfrm>
+          <a:prstGeom prst="rect">
+            <a:avLst/>
+          </a:prstGeom>
+          <a:noFill/>
+        </p:spPr>
+        <p:txBody>
+          <a:bodyPr wrap="square">
+            <a:spAutoFit/>
+          </a:bodyPr>
+          <a:lstStyle/>
+          <a:p>
+            <a:pPr algn="l"/>
+            <a:r>
+              <a:rPr sz="2400" b="1" i="0">
+                <a:solidFill>
+                  <a:srgbClr val="1F2C56"/>
+                </a:solidFill>
+                <a:latin typeface="Arial"/>
+              </a:rPr>
+              <a:t>Prinzip dieses Moduls</a:t>
+            </a:r>
+          </a:p>
+        </p:txBody>
+      </p:sp>
+      <p:sp>
+        <p:nvSpPr>
+          <p:cNvPr id="8" name="TextBox 7"/>
+          <p:cNvSpPr txBox="1"/>
+          <p:nvPr/>
+        </p:nvSpPr>
+        <p:spPr>
+          <a:xfrm>
+            <a:off x="685800" y="1417320"/>
+            <a:ext cx="10817352" cy="4892040"/>
+          </a:xfrm>
+          <a:prstGeom prst="rect">
+            <a:avLst/>
+          </a:prstGeom>
+          <a:noFill/>
+        </p:spPr>
+        <p:txBody>
+          <a:bodyPr wrap="square" anchor="ctr">
+            <a:spAutoFit/>
+          </a:bodyPr>
+          <a:lstStyle/>
+          <a:p>
+            <a:pPr marL="177800" indent="-177800">
+              <a:spcBef>
+                <a:spcPts val="600"/>
+              </a:spcBef>
+              <a:spcAft>
+                <a:spcPts val="200"/>
+              </a:spcAft>
+            </a:pPr>
+            <a:r>
+              <a:rPr sz="1200" i="1">
+                <a:solidFill>
+                  <a:srgbClr val="3D5466"/>
+                </a:solidFill>
+                <a:latin typeface="Arial"/>
+              </a:rPr>
+              <a:t>→  Beim Mittelständler sind Unternehmen und Unternehmer nicht zu trennen.</a:t>
+            </a:r>
+          </a:p>
+          <a:p>
+            <a:pPr marL="190500" indent="-190500">
+              <a:spcBef>
+                <a:spcPts val="400"/>
+              </a:spcBef>
+              <a:spcAft>
+                <a:spcPts val="200"/>
+              </a:spcAft>
+            </a:pPr>
+            <a:r>
+              <a:rPr sz="1300">
+                <a:solidFill>
+                  <a:srgbClr val="3D5466"/>
+                </a:solidFill>
+                <a:latin typeface="Arial"/>
+              </a:rPr>
+              <a:t>▸  Eigentum, Leitung und Haftung liegen in einer Hand – wer den Menschen nicht versteht, versteht das Kreditrisiko nicht.</a:t>
+            </a:r>
+          </a:p>
+        </p:txBody>
+      </p:sp>
+      <p:sp>
+        <p:nvSpPr>
+          <p:cNvPr id="9" name="Rectangle 8"/>
+          <p:cNvSpPr/>
+          <p:nvPr/>
+        </p:nvSpPr>
+        <p:spPr>
+          <a:xfrm>
+            <a:off x="0" y="6510528"/>
+            <a:ext cx="12188952" cy="347472"/>
+          </a:xfrm>
+          <a:prstGeom prst="rect">
+            <a:avLst/>
+          </a:prstGeom>
+          <a:solidFill>
+            <a:srgbClr val="0A1937"/>
+          </a:solidFill>
+          <a:ln>
+            <a:noFill/>
+          </a:ln>
+        </p:spPr>
+        <p:style>
+          <a:lnRef idx="1">
+            <a:schemeClr val="accent1"/>
+          </a:lnRef>
+          <a:fillRef idx="3">
+            <a:schemeClr val="accent1"/>
+          </a:fillRef>
+          <a:effectRef idx="2">
+            <a:schemeClr val="accent1"/>
+          </a:effectRef>
+          <a:fontRef idx="minor">
+            <a:schemeClr val="lt1"/>
+          </a:fontRef>
+        </p:style>
+        <p:txBody>
+          <a:bodyPr rtlCol="0" anchor="ctr"/>
+          <a:lstStyle/>
+          <a:p>
+            <a:pPr algn="ctr"/>
+          </a:p>
+        </p:txBody>
+      </p:sp>
+      <p:sp>
+        <p:nvSpPr>
+          <p:cNvPr id="10" name="TextBox 9"/>
+          <p:cNvSpPr txBox="1"/>
+          <p:nvPr/>
+        </p:nvSpPr>
+        <p:spPr>
+          <a:xfrm>
+            <a:off x="685800" y="6583680"/>
+            <a:ext cx="6490411" cy="256032"/>
+          </a:xfrm>
+          <a:prstGeom prst="rect">
+            <a:avLst/>
+          </a:prstGeom>
+          <a:noFill/>
+        </p:spPr>
+        <p:txBody>
+          <a:bodyPr wrap="none">
+            <a:spAutoFit/>
+          </a:bodyPr>
+          <a:lstStyle/>
+          <a:p>
+            <a:pPr algn="l"/>
+            <a:r>
+              <a:rPr sz="700">
+                <a:solidFill>
+                  <a:srgbClr val="A0B4D2"/>
+                </a:solidFill>
+                <a:latin typeface="Consolas"/>
+              </a:rPr>
+              <a:t>FKB Campus  ·  M06</a:t>
+            </a:r>
+          </a:p>
+        </p:txBody>
+      </p:sp>
+    </p:spTree>
+  </p:cSld>
+  <p:clrMapOvr>
+    <a:masterClrMapping/>
+  </p:clrMapOvr>
+</p:sld>
+</file>
+
+<file path=ppt/slides/slide16.xml><?xml version="1.0" encoding="utf-8"?>
+<p:sld xmlns:a="http://schemas.openxmlformats.org/drawingml/2006/main" xmlns:p="http://schemas.openxmlformats.org/presentationml/2006/main" xmlns:r="http://schemas.openxmlformats.org/officeDocument/2006/relationships">
+  <p:cSld>
+    <p:spTree>
+      <p:nvGrpSpPr>
+        <p:cNvPr id="1" name=""/>
+        <p:cNvGrpSpPr/>
+        <p:nvPr/>
+      </p:nvGrpSpPr>
+      <p:grpSpPr/>
+      <p:sp>
+        <p:nvSpPr>
+          <p:cNvPr id="2" name="Rectangle 1"/>
+          <p:cNvSpPr/>
+          <p:nvPr/>
+        </p:nvSpPr>
+        <p:spPr>
+          <a:xfrm>
+            <a:off x="0" y="0"/>
+            <a:ext cx="12188952" cy="6858000"/>
+          </a:xfrm>
+          <a:prstGeom prst="rect">
+            <a:avLst/>
+          </a:prstGeom>
+          <a:solidFill>
+            <a:srgbClr val="EDEDF3"/>
+          </a:solidFill>
+          <a:ln>
+            <a:noFill/>
+          </a:ln>
+        </p:spPr>
+        <p:style>
+          <a:lnRef idx="1">
+            <a:schemeClr val="accent1"/>
+          </a:lnRef>
+          <a:fillRef idx="3">
+            <a:schemeClr val="accent1"/>
+          </a:fillRef>
+          <a:effectRef idx="2">
+            <a:schemeClr val="accent1"/>
+          </a:effectRef>
+          <a:fontRef idx="minor">
+            <a:schemeClr val="lt1"/>
+          </a:fontRef>
+        </p:style>
+        <p:txBody>
+          <a:bodyPr rtlCol="0" anchor="ctr"/>
+          <a:lstStyle/>
+          <a:p>
+            <a:pPr algn="ctr"/>
+          </a:p>
+        </p:txBody>
+      </p:sp>
+      <p:sp>
+        <p:nvSpPr>
+          <p:cNvPr id="3" name="Rectangle 2"/>
+          <p:cNvSpPr/>
+          <p:nvPr/>
+        </p:nvSpPr>
+        <p:spPr>
+          <a:xfrm>
+            <a:off x="0" y="0"/>
+            <a:ext cx="12188952" cy="50292"/>
+          </a:xfrm>
+          <a:prstGeom prst="rect">
+            <a:avLst/>
+          </a:prstGeom>
+          <a:solidFill>
+            <a:srgbClr val="1F2C56"/>
+          </a:solidFill>
+          <a:ln>
+            <a:noFill/>
+          </a:ln>
+        </p:spPr>
+        <p:style>
+          <a:lnRef idx="1">
+            <a:schemeClr val="accent1"/>
+          </a:lnRef>
+          <a:fillRef idx="3">
+            <a:schemeClr val="accent1"/>
+          </a:fillRef>
+          <a:effectRef idx="2">
+            <a:schemeClr val="accent1"/>
+          </a:effectRef>
+          <a:fontRef idx="minor">
+            <a:schemeClr val="lt1"/>
+          </a:fontRef>
+        </p:style>
+        <p:txBody>
+          <a:bodyPr rtlCol="0" anchor="ctr"/>
+          <a:lstStyle/>
+          <a:p>
+            <a:pPr algn="ctr"/>
+          </a:p>
+        </p:txBody>
+      </p:sp>
+      <p:sp>
+        <p:nvSpPr>
+          <p:cNvPr id="4" name="TextBox 3"/>
+          <p:cNvSpPr txBox="1"/>
+          <p:nvPr/>
+        </p:nvSpPr>
+        <p:spPr>
+          <a:xfrm>
+            <a:off x="685800" y="109728"/>
+            <a:ext cx="10817352" cy="228600"/>
+          </a:xfrm>
+          <a:prstGeom prst="rect">
+            <a:avLst/>
+          </a:prstGeom>
+          <a:noFill/>
+        </p:spPr>
+        <p:txBody>
+          <a:bodyPr wrap="none">
+            <a:spAutoFit/>
+          </a:bodyPr>
+          <a:lstStyle/>
+          <a:p>
+            <a:pPr algn="l"/>
+            <a:r>
+              <a:rPr sz="750">
+                <a:solidFill>
+                  <a:srgbClr val="78808C"/>
+                </a:solidFill>
+                <a:latin typeface="Consolas"/>
+              </a:rPr>
+              <a:t>M06  ·  INHALT</a:t>
+            </a:r>
+          </a:p>
+        </p:txBody>
+      </p:sp>
+      <p:sp>
+        <p:nvSpPr>
+          <p:cNvPr id="5" name="Rectangle 4"/>
+          <p:cNvSpPr/>
+          <p:nvPr/>
+        </p:nvSpPr>
+        <p:spPr>
+          <a:xfrm>
+            <a:off x="0" y="1234440"/>
+            <a:ext cx="12188952" cy="12700"/>
+          </a:xfrm>
+          <a:prstGeom prst="rect">
+            <a:avLst/>
+          </a:prstGeom>
+          <a:solidFill>
+            <a:srgbClr val="D8DFE4"/>
+          </a:solidFill>
+          <a:ln>
+            <a:noFill/>
+          </a:ln>
+        </p:spPr>
+        <p:style>
+          <a:lnRef idx="1">
+            <a:schemeClr val="accent1"/>
+          </a:lnRef>
+          <a:fillRef idx="3">
+            <a:schemeClr val="accent1"/>
+          </a:fillRef>
+          <a:effectRef idx="2">
+            <a:schemeClr val="accent1"/>
+          </a:effectRef>
+          <a:fontRef idx="minor">
+            <a:schemeClr val="lt1"/>
+          </a:fontRef>
+        </p:style>
+        <p:txBody>
+          <a:bodyPr rtlCol="0" anchor="ctr"/>
+          <a:lstStyle/>
+          <a:p>
+            <a:pPr algn="ctr"/>
+          </a:p>
+        </p:txBody>
+      </p:sp>
+      <p:sp>
+        <p:nvSpPr>
+          <p:cNvPr id="6" name="Rectangle 5"/>
+          <p:cNvSpPr/>
+          <p:nvPr/>
+        </p:nvSpPr>
+        <p:spPr>
+          <a:xfrm>
+            <a:off x="685800" y="502920"/>
+            <a:ext cx="36576" cy="658368"/>
+          </a:xfrm>
+          <a:prstGeom prst="rect">
+            <a:avLst/>
+          </a:prstGeom>
+          <a:solidFill>
+            <a:srgbClr val="D9C089"/>
+          </a:solidFill>
+          <a:ln>
+            <a:noFill/>
+          </a:ln>
+        </p:spPr>
+        <p:style>
+          <a:lnRef idx="1">
+            <a:schemeClr val="accent1"/>
+          </a:lnRef>
+          <a:fillRef idx="3">
+            <a:schemeClr val="accent1"/>
+          </a:fillRef>
+          <a:effectRef idx="2">
+            <a:schemeClr val="accent1"/>
+          </a:effectRef>
+          <a:fontRef idx="minor">
+            <a:schemeClr val="lt1"/>
+          </a:fontRef>
+        </p:style>
+        <p:txBody>
+          <a:bodyPr rtlCol="0" anchor="ctr"/>
+          <a:lstStyle/>
+          <a:p>
+            <a:pPr algn="ctr"/>
+          </a:p>
+        </p:txBody>
+      </p:sp>
+      <p:sp>
+        <p:nvSpPr>
+          <p:cNvPr id="7" name="TextBox 6"/>
+          <p:cNvSpPr txBox="1"/>
+          <p:nvPr/>
+        </p:nvSpPr>
+        <p:spPr>
+          <a:xfrm>
+            <a:off x="813816" y="502920"/>
+            <a:ext cx="10634472" cy="685800"/>
+          </a:xfrm>
+          <a:prstGeom prst="rect">
+            <a:avLst/>
+          </a:prstGeom>
+          <a:noFill/>
+        </p:spPr>
+        <p:txBody>
+          <a:bodyPr wrap="square">
+            <a:spAutoFit/>
+          </a:bodyPr>
+          <a:lstStyle/>
+          <a:p>
+            <a:pPr algn="l"/>
+            <a:r>
+              <a:rPr sz="2400" b="1" i="0">
+                <a:solidFill>
+                  <a:srgbClr val="1F2C56"/>
+                </a:solidFill>
+                <a:latin typeface="Arial"/>
+              </a:rPr>
+              <a:t>Reflexion und Selbstcheck</a:t>
+            </a:r>
+          </a:p>
+        </p:txBody>
+      </p:sp>
+      <p:sp>
+        <p:nvSpPr>
+          <p:cNvPr id="8" name="TextBox 7"/>
+          <p:cNvSpPr txBox="1"/>
+          <p:nvPr/>
+        </p:nvSpPr>
+        <p:spPr>
+          <a:xfrm>
+            <a:off x="685800" y="1417320"/>
+            <a:ext cx="10817352" cy="4892040"/>
+          </a:xfrm>
+          <a:prstGeom prst="rect">
+            <a:avLst/>
+          </a:prstGeom>
+          <a:noFill/>
+        </p:spPr>
+        <p:txBody>
+          <a:bodyPr wrap="square" anchor="ctr">
+            <a:spAutoFit/>
+          </a:bodyPr>
+          <a:lstStyle/>
+          <a:p>
+            <a:pPr marL="190500" indent="-190500">
+              <a:spcBef>
+                <a:spcPts val="400"/>
+              </a:spcBef>
+              <a:spcAft>
+                <a:spcPts val="200"/>
+              </a:spcAft>
+            </a:pPr>
+            <a:r>
+              <a:rPr sz="1300">
+                <a:solidFill>
+                  <a:srgbClr val="3D5466"/>
+                </a:solidFill>
+                <a:latin typeface="Arial"/>
+              </a:rPr>
+              <a:t>▸  Bei welchem Ihrer KMU-Kunden hängt das Geschäft an einer einzigen Person?</a:t>
+            </a:r>
+          </a:p>
+          <a:p>
+            <a:pPr marL="190500" indent="-190500">
+              <a:spcBef>
+                <a:spcPts val="400"/>
+              </a:spcBef>
+              <a:spcAft>
+                <a:spcPts val="200"/>
+              </a:spcAft>
+            </a:pPr>
+            <a:r>
+              <a:rPr sz="1300">
+                <a:solidFill>
+                  <a:srgbClr val="3D5466"/>
+                </a:solidFill>
+                <a:latin typeface="Arial"/>
+              </a:rPr>
+              <a:t>▸  Welches strukturelle Risiko haben Sie zuletzt in der Bilanz gesucht, statt im Gespräch?</a:t>
+            </a:r>
+          </a:p>
+          <a:p>
+            <a:pPr marL="190500" indent="-190500">
+              <a:spcBef>
+                <a:spcPts val="400"/>
+              </a:spcBef>
+              <a:spcAft>
+                <a:spcPts val="200"/>
+              </a:spcAft>
+            </a:pPr>
+            <a:r>
+              <a:rPr sz="1300">
+                <a:solidFill>
+                  <a:srgbClr val="3D5466"/>
+                </a:solidFill>
+                <a:latin typeface="Arial"/>
+              </a:rPr>
+              <a:t>▸  Wie sprechen Sie eine Schlüsselpersonen-Absicherung an, ohne zu verkaufen?</a:t>
             </a:r>
           </a:p>
         </p:txBody>
@@ -8656,7 +9215,7 @@
                 </a:solidFill>
                 <a:latin typeface="Arial"/>
               </a:rPr>
-              <a:t>Theorie-Input 1: Was ist ein KMU? Definitionen, Typologien und volkswirtschaftliche Bedeutung</a:t>
+              <a:t>Unternehmen und Unternehmer sind nicht zu trennen</a:t>
             </a:r>
           </a:p>
         </p:txBody>
@@ -8678,27 +9237,27 @@
           <a:noFill/>
         </p:spPr>
         <p:txBody>
-          <a:bodyPr wrap="square">
+          <a:bodyPr wrap="square" anchor="ctr">
             <a:spAutoFit/>
           </a:bodyPr>
           <a:lstStyle/>
           <a:p>
-            <a:pPr>
+            <a:pPr marL="177800" indent="-177800">
               <a:spcBef>
-                <a:spcPts val="1000"/>
+                <a:spcPts val="600"/>
               </a:spcBef>
               <a:spcAft>
                 <a:spcPts val="200"/>
               </a:spcAft>
             </a:pPr>
             <a:r>
-              <a:rPr sz="800" b="1">
-                <a:solidFill>
-                  <a:srgbClr val="78808C"/>
-                </a:solidFill>
-                <a:latin typeface="Consolas"/>
+              <a:rPr sz="1200" i="1">
+                <a:solidFill>
+                  <a:srgbClr val="3D5466"/>
+                </a:solidFill>
+                <a:latin typeface="Arial"/>
               </a:rPr>
-              <a:t>DIE ZWEI ZENTRALEN KMU-DEFINITIONEN</a:t>
+              <a:t>→  Beim Mittelständler sind Unternehmen und Unternehmer nicht zu trennen – wer den Menschen nicht versteht, versteht das Kreditrisiko nicht.</a:t>
             </a:r>
           </a:p>
           <a:p>
@@ -8717,7 +9276,7 @@
                 </a:solidFill>
                 <a:latin typeface="Arial"/>
               </a:rPr>
-              <a:t>▸  In der deutschen Bankpraxis begegnen Berater zwei unterschiedlichen KMU-Definitionen, die für unterschiedliche Zwecke relevant sind.</a:t>
+              <a:t>▸  Eigentum, Leitung und Haftung liegen in einer Hand.</a:t>
             </a:r>
           </a:p>
           <a:p>
@@ -8736,178 +9295,7 @@
                 </a:solidFill>
                 <a:latin typeface="Arial"/>
               </a:rPr>
-              <a:t>▸  Die IfM-Bonn-Definition</a:t>
-            </a:r>
-          </a:p>
-          <a:p>
-            <a:pPr marL="190500" indent="-190500">
-              <a:spcBef>
-                <a:spcPts val="400"/>
-              </a:spcBef>
-              <a:spcAft>
-                <a:spcPts val="200"/>
-              </a:spcAft>
-            </a:pPr>
-            <a:r>
-              <a:rPr sz="1300">
-                <a:solidFill>
-                  <a:srgbClr val="3D5466"/>
-                </a:solidFill>
-                <a:latin typeface="Arial"/>
-              </a:rPr>
-              <a:t>▸  Das Institut für Mittelstandsforschung Bonn (IfM Bonn) definiert KMU quantitativ und qualitativ (IfM Bonn, 2024 ). Die Definition unterscheidet zwei Unternehmensgrößen:</a:t>
-            </a:r>
-          </a:p>
-          <a:p>
-            <a:pPr marL="190500" indent="-190500">
-              <a:spcBef>
-                <a:spcPts val="400"/>
-              </a:spcBef>
-              <a:spcAft>
-                <a:spcPts val="200"/>
-              </a:spcAft>
-            </a:pPr>
-            <a:r>
-              <a:rPr sz="1300">
-                <a:solidFill>
-                  <a:srgbClr val="3D5466"/>
-                </a:solidFill>
-                <a:latin typeface="Arial"/>
-              </a:rPr>
-              <a:t>▸  (Es müssen Mitarbeiterzahl UND Umsatz die Schwellenwerte erfüllen; IfM Bonn, 2024 )</a:t>
-            </a:r>
-          </a:p>
-          <a:p>
-            <a:pPr marL="190500" indent="-190500">
-              <a:spcBef>
-                <a:spcPts val="400"/>
-              </a:spcBef>
-              <a:spcAft>
-                <a:spcPts val="200"/>
-              </a:spcAft>
-            </a:pPr>
-            <a:r>
-              <a:rPr sz="1300">
-                <a:solidFill>
-                  <a:srgbClr val="3D5466"/>
-                </a:solidFill>
-                <a:latin typeface="Arial"/>
-              </a:rPr>
-              <a:t>▸  Die EU-Definition</a:t>
-            </a:r>
-          </a:p>
-          <a:p>
-            <a:pPr marL="190500" indent="-190500">
-              <a:spcBef>
-                <a:spcPts val="400"/>
-              </a:spcBef>
-              <a:spcAft>
-                <a:spcPts val="200"/>
-              </a:spcAft>
-            </a:pPr>
-            <a:r>
-              <a:rPr sz="1300">
-                <a:solidFill>
-                  <a:srgbClr val="3D5466"/>
-                </a:solidFill>
-                <a:latin typeface="Arial"/>
-              </a:rPr>
-              <a:t>▸  Die Europäische Kommission (2020 ) unterscheidet drei Unternehmensgrößen, die für EU-Förderprogramme und KfW-Finanzierungsprodukte unmittelbar relevant sind:</a:t>
-            </a:r>
-          </a:p>
-          <a:p>
-            <a:pPr marL="190500" indent="-190500">
-              <a:spcBef>
-                <a:spcPts val="400"/>
-              </a:spcBef>
-              <a:spcAft>
-                <a:spcPts val="200"/>
-              </a:spcAft>
-            </a:pPr>
-            <a:r>
-              <a:rPr sz="1300">
-                <a:solidFill>
-                  <a:srgbClr val="3D5466"/>
-                </a:solidFill>
-                <a:latin typeface="Arial"/>
-              </a:rPr>
-              <a:t>▸  Es müssen Mitarbeiterzahl UND (Umsatz ODER Bilanzsumme) die jeweiligen Schwellenwerte erfüllen (Europäische Kommission, 2020 ).</a:t>
-            </a:r>
-          </a:p>
-          <a:p>
-            <a:pPr marL="190500" indent="-190500">
-              <a:spcBef>
-                <a:spcPts val="400"/>
-              </a:spcBef>
-              <a:spcAft>
-                <a:spcPts val="200"/>
-              </a:spcAft>
-            </a:pPr>
-            <a:r>
-              <a:rPr sz="1300">
-                <a:solidFill>
-                  <a:srgbClr val="3D5466"/>
-                </a:solidFill>
-                <a:latin typeface="Arial"/>
-              </a:rPr>
-              <a:t>▸  Praktische Relevanz der Unterscheidung</a:t>
-            </a:r>
-          </a:p>
-          <a:p>
-            <a:pPr marL="177800" indent="-177800">
-              <a:spcBef>
-                <a:spcPts val="600"/>
-              </a:spcBef>
-              <a:spcAft>
-                <a:spcPts val="200"/>
-              </a:spcAft>
-            </a:pPr>
-            <a:r>
-              <a:rPr sz="1200" i="1">
-                <a:solidFill>
-                  <a:srgbClr val="3D5466"/>
-                </a:solidFill>
-                <a:latin typeface="Arial"/>
-              </a:rPr>
-              <a:t>→  Praxishinweis: Unternehmensgruppen und verbundene Unternehmen</a:t>
-            </a:r>
-          </a:p>
-          <a:p>
-            <a:pPr>
-              <a:spcBef>
-                <a:spcPts val="1000"/>
-              </a:spcBef>
-              <a:spcAft>
-                <a:spcPts val="200"/>
-              </a:spcAft>
-            </a:pPr>
-            <a:r>
-              <a:rPr sz="800" b="1">
-                <a:solidFill>
-                  <a:srgbClr val="78808C"/>
-                </a:solidFill>
-                <a:latin typeface="Consolas"/>
-              </a:rPr>
-              <a:t>VOLKSWIRTSCHAFTLICHE BEDEUTUNG VON KMU</a:t>
-            </a:r>
-          </a:p>
-          <a:p>
-            <a:pPr marL="190500" indent="-190500">
-              <a:spcBef>
-                <a:spcPts val="400"/>
-              </a:spcBef>
-              <a:spcAft>
-                <a:spcPts val="200"/>
-              </a:spcAft>
-            </a:pPr>
-            <a:r>
-              <a:rPr sz="1300">
-                <a:solidFill>
-                  <a:srgbClr val="3D5466"/>
-                </a:solidFill>
-                <a:latin typeface="Arial"/>
-              </a:rPr>
-              <a:t>▸  KMU sind kein Randphänomen, sondern das Fundament der deutschen Wirtschaftsstruktur:</a:t>
+              <a:t>▸  Die Person des Inhabers ist zugleich größtes Asset und größtes Risiko.</a:t>
             </a:r>
           </a:p>
         </p:txBody>
@@ -9023,7 +9411,7 @@
             <a:avLst/>
           </a:prstGeom>
           <a:solidFill>
-            <a:srgbClr val="FFFFFF"/>
+            <a:srgbClr val="EDEDF3"/>
           </a:solidFill>
           <a:ln>
             <a:noFill/>
@@ -9124,43 +9512,51 @@
                 </a:solidFill>
                 <a:latin typeface="Consolas"/>
               </a:rPr>
-              <a:t>M06  ·  SCHAUBILD</a:t>
-            </a:r>
-          </a:p>
-        </p:txBody>
-      </p:sp>
-      <p:sp>
-        <p:nvSpPr>
-          <p:cNvPr id="5" name="TextBox 4"/>
-          <p:cNvSpPr txBox="1"/>
-          <p:nvPr/>
-        </p:nvSpPr>
-        <p:spPr>
-          <a:xfrm>
-            <a:off x="685800" y="502920"/>
-            <a:ext cx="10817352" cy="594360"/>
-          </a:xfrm>
-          <a:prstGeom prst="rect">
-            <a:avLst/>
-          </a:prstGeom>
-          <a:noFill/>
-        </p:spPr>
-        <p:txBody>
-          <a:bodyPr wrap="square">
-            <a:spAutoFit/>
-          </a:bodyPr>
-          <a:lstStyle/>
-          <a:p>
-            <a:pPr algn="l"/>
-            <a:r>
-              <a:rPr sz="2000" b="1" i="0">
-                <a:solidFill>
-                  <a:srgbClr val="1F2C56"/>
-                </a:solidFill>
-                <a:latin typeface="Arial"/>
-              </a:rPr>
-              <a:t>Zwei KMU-Definitionen im Vergleich</a:t>
-            </a:r>
+              <a:t>M06  ·  INHALT</a:t>
+            </a:r>
+          </a:p>
+        </p:txBody>
+      </p:sp>
+      <p:sp>
+        <p:nvSpPr>
+          <p:cNvPr id="5" name="Rectangle 4"/>
+          <p:cNvSpPr/>
+          <p:nvPr/>
+        </p:nvSpPr>
+        <p:spPr>
+          <a:xfrm>
+            <a:off x="0" y="1234440"/>
+            <a:ext cx="12188952" cy="12700"/>
+          </a:xfrm>
+          <a:prstGeom prst="rect">
+            <a:avLst/>
+          </a:prstGeom>
+          <a:solidFill>
+            <a:srgbClr val="D8DFE4"/>
+          </a:solidFill>
+          <a:ln>
+            <a:noFill/>
+          </a:ln>
+        </p:spPr>
+        <p:style>
+          <a:lnRef idx="1">
+            <a:schemeClr val="accent1"/>
+          </a:lnRef>
+          <a:fillRef idx="3">
+            <a:schemeClr val="accent1"/>
+          </a:fillRef>
+          <a:effectRef idx="2">
+            <a:schemeClr val="accent1"/>
+          </a:effectRef>
+          <a:fontRef idx="minor">
+            <a:schemeClr val="lt1"/>
+          </a:fontRef>
+        </p:style>
+        <p:txBody>
+          <a:bodyPr rtlCol="0" anchor="ctr"/>
+          <a:lstStyle/>
+          <a:p>
+            <a:pPr algn="ctr"/>
           </a:p>
         </p:txBody>
       </p:sp>
@@ -9172,8 +9568,8 @@
         </p:nvSpPr>
         <p:spPr>
           <a:xfrm>
-            <a:off x="685800" y="1143000"/>
-            <a:ext cx="10817352" cy="25400"/>
+            <a:off x="685800" y="502920"/>
+            <a:ext cx="36576" cy="658368"/>
           </a:xfrm>
           <a:prstGeom prst="rect">
             <a:avLst/>
@@ -9207,33 +9603,124 @@
           </a:p>
         </p:txBody>
       </p:sp>
-      <p:pic>
-        <p:nvPicPr>
-          <p:cNvPr id="7" name="Picture 6" descr="image.png"/>
-          <p:cNvPicPr>
-            <a:picLocks noChangeAspect="1"/>
-          </p:cNvPicPr>
-          <p:nvPr/>
-        </p:nvPicPr>
-        <p:blipFill>
-          <a:blip r:embed="rId2"/>
-          <a:stretch>
-            <a:fillRect/>
-          </a:stretch>
-        </p:blipFill>
-        <p:spPr>
-          <a:xfrm>
-            <a:off x="2303489" y="1325880"/>
-            <a:ext cx="7581973" cy="4937760"/>
-          </a:xfrm>
-          <a:prstGeom prst="rect">
-            <a:avLst/>
-          </a:prstGeom>
-        </p:spPr>
-      </p:pic>
-      <p:sp>
-        <p:nvSpPr>
-          <p:cNvPr id="8" name="Rectangle 7"/>
+      <p:sp>
+        <p:nvSpPr>
+          <p:cNvPr id="7" name="TextBox 6"/>
+          <p:cNvSpPr txBox="1"/>
+          <p:nvPr/>
+        </p:nvSpPr>
+        <p:spPr>
+          <a:xfrm>
+            <a:off x="813816" y="502920"/>
+            <a:ext cx="10634472" cy="685800"/>
+          </a:xfrm>
+          <a:prstGeom prst="rect">
+            <a:avLst/>
+          </a:prstGeom>
+          <a:noFill/>
+        </p:spPr>
+        <p:txBody>
+          <a:bodyPr wrap="square">
+            <a:spAutoFit/>
+          </a:bodyPr>
+          <a:lstStyle/>
+          <a:p>
+            <a:pPr algn="l"/>
+            <a:r>
+              <a:rPr sz="2400" b="1" i="0">
+                <a:solidFill>
+                  <a:srgbClr val="1F2C56"/>
+                </a:solidFill>
+                <a:latin typeface="Arial"/>
+              </a:rPr>
+              <a:t>Was ist ein KMU? Zwei Definitionen</a:t>
+            </a:r>
+          </a:p>
+        </p:txBody>
+      </p:sp>
+      <p:sp>
+        <p:nvSpPr>
+          <p:cNvPr id="8" name="TextBox 7"/>
+          <p:cNvSpPr txBox="1"/>
+          <p:nvPr/>
+        </p:nvSpPr>
+        <p:spPr>
+          <a:xfrm>
+            <a:off x="685800" y="1417320"/>
+            <a:ext cx="10817352" cy="4892040"/>
+          </a:xfrm>
+          <a:prstGeom prst="rect">
+            <a:avLst/>
+          </a:prstGeom>
+          <a:noFill/>
+        </p:spPr>
+        <p:txBody>
+          <a:bodyPr wrap="square" anchor="ctr">
+            <a:spAutoFit/>
+          </a:bodyPr>
+          <a:lstStyle/>
+          <a:p>
+            <a:pPr marL="177800" indent="-177800">
+              <a:spcBef>
+                <a:spcPts val="600"/>
+              </a:spcBef>
+              <a:spcAft>
+                <a:spcPts val="200"/>
+              </a:spcAft>
+            </a:pPr>
+            <a:r>
+              <a:rPr sz="1200" i="1">
+                <a:solidFill>
+                  <a:srgbClr val="3D5466"/>
+                </a:solidFill>
+                <a:latin typeface="Arial"/>
+              </a:rPr>
+              <a:t>→  KMU ist nicht gleich KMU – die EU-Definition und die HGB-Größenklassen fassen unterschiedlich ab.</a:t>
+            </a:r>
+          </a:p>
+          <a:p>
+            <a:pPr marL="190500" indent="-190500">
+              <a:spcBef>
+                <a:spcPts val="400"/>
+              </a:spcBef>
+              <a:spcAft>
+                <a:spcPts val="200"/>
+              </a:spcAft>
+            </a:pPr>
+            <a:r>
+              <a:rPr sz="1300">
+                <a:solidFill>
+                  <a:srgbClr val="3D5466"/>
+                </a:solidFill>
+                <a:latin typeface="Arial"/>
+              </a:rPr>
+              <a:t>▸  EU-Empfehlung: Mitarbeiter, Umsatz, Bilanzsumme.</a:t>
+            </a:r>
+          </a:p>
+          <a:p>
+            <a:pPr marL="190500" indent="-190500">
+              <a:spcBef>
+                <a:spcPts val="400"/>
+              </a:spcBef>
+              <a:spcAft>
+                <a:spcPts val="200"/>
+              </a:spcAft>
+            </a:pPr>
+            <a:r>
+              <a:rPr sz="1300">
+                <a:solidFill>
+                  <a:srgbClr val="3D5466"/>
+                </a:solidFill>
+                <a:latin typeface="Arial"/>
+              </a:rPr>
+              <a:t>▸  HGB § 267: Größenklassen mit Rechtsfolgen für Offenlegung und Prüfung.</a:t>
+            </a:r>
+          </a:p>
+        </p:txBody>
+      </p:sp>
+      <p:sp>
+        <p:nvSpPr>
+          <p:cNvPr id="9" name="Rectangle 8"/>
           <p:cNvSpPr/>
           <p:nvPr/>
         </p:nvSpPr>
@@ -9276,7 +9763,7 @@
       </p:sp>
       <p:sp>
         <p:nvSpPr>
-          <p:cNvPr id="9" name="TextBox 8"/>
+          <p:cNvPr id="10" name="TextBox 9"/>
           <p:cNvSpPr txBox="1"/>
           <p:nvPr/>
         </p:nvSpPr>
@@ -9305,41 +9792,6 @@
                 <a:latin typeface="Consolas"/>
               </a:rPr>
               <a:t>FKB Campus  ·  M06</a:t>
-            </a:r>
-          </a:p>
-        </p:txBody>
-      </p:sp>
-      <p:sp>
-        <p:nvSpPr>
-          <p:cNvPr id="10" name="TextBox 9"/>
-          <p:cNvSpPr txBox="1"/>
-          <p:nvPr/>
-        </p:nvSpPr>
-        <p:spPr>
-          <a:xfrm>
-            <a:off x="7176211" y="6583680"/>
-            <a:ext cx="4326940" cy="256032"/>
-          </a:xfrm>
-          <a:prstGeom prst="rect">
-            <a:avLst/>
-          </a:prstGeom>
-          <a:noFill/>
-        </p:spPr>
-        <p:txBody>
-          <a:bodyPr wrap="none">
-            <a:spAutoFit/>
-          </a:bodyPr>
-          <a:lstStyle/>
-          <a:p>
-            <a:pPr algn="r"/>
-            <a:r>
-              <a:rPr sz="700">
-                <a:solidFill>
-                  <a:srgbClr val="A0B4D2"/>
-                </a:solidFill>
-                <a:latin typeface="Consolas"/>
-              </a:rPr>
-              <a:t>Schaubild</a:t>
             </a:r>
           </a:p>
         </p:txBody>
@@ -9478,7 +9930,7 @@
                 </a:solidFill>
                 <a:latin typeface="Consolas"/>
               </a:rPr>
-              <a:t>M06  ·  ÜBERSICHT</a:t>
+              <a:t>M06  ·  SCHAUBILD</a:t>
             </a:r>
           </a:p>
         </p:txBody>
@@ -9513,7 +9965,7 @@
                 </a:solidFill>
                 <a:latin typeface="Arial"/>
               </a:rPr>
-              <a:t>Theorie-Input 1: Was ist ein KMU? Definitionen, Typologien und volkswirtschaftliche Bedeutung</a:t>
+              <a:t>Zwei KMU-Definitionen im Vergleich</a:t>
             </a:r>
           </a:p>
         </p:txBody>
@@ -9561,269 +10013,30 @@
           </a:p>
         </p:txBody>
       </p:sp>
-      <p:graphicFrame>
-        <p:nvGraphicFramePr>
-          <p:cNvPr id="7" name="Table 6"/>
-          <p:cNvGraphicFramePr>
-            <a:graphicFrameLocks noGrp="1"/>
-          </p:cNvGraphicFramePr>
-          <p:nvPr/>
-        </p:nvGraphicFramePr>
-        <p:xfrm>
-          <a:off x="685800" y="1417320"/>
-          <a:ext cx="10817352" cy="1536192"/>
-        </p:xfrm>
-        <a:graphic>
-          <a:graphicData uri="http://schemas.openxmlformats.org/drawingml/2006/table">
-            <a:tbl>
-              <a:tblPr firstRow="1" bandRow="1">
-                <a:tableStyleId>{5C22544A-7EE6-4342-B048-85BDC9FD1C3A}</a:tableStyleId>
-              </a:tblPr>
-              <a:tblGrid>
-                <a:gridCol w="3605784"/>
-                <a:gridCol w="3605784"/>
-                <a:gridCol w="3605784"/>
-              </a:tblGrid>
-              <a:tr h="384048">
-                <a:tc>
-                  <a:txBody>
-                    <a:bodyPr/>
-                    <a:lstStyle/>
-                    <a:p>
-                      <a:r>
-                        <a:rPr sz="1100" b="1">
-                          <a:solidFill>
-                            <a:srgbClr val="FFFFFF"/>
-                          </a:solidFill>
-                          <a:latin typeface="Arial"/>
-                        </a:rPr>
-                        <a:t>Kategorie</a:t>
-                      </a:r>
-                    </a:p>
-                  </a:txBody>
-                  <a:tcPr>
-                    <a:solidFill>
-                      <a:srgbClr val="1F2C56"/>
-                    </a:solidFill>
-                  </a:tcPr>
-                </a:tc>
-                <a:tc>
-                  <a:txBody>
-                    <a:bodyPr/>
-                    <a:lstStyle/>
-                    <a:p>
-                      <a:r>
-                        <a:rPr sz="1100" b="1">
-                          <a:solidFill>
-                            <a:srgbClr val="FFFFFF"/>
-                          </a:solidFill>
-                          <a:latin typeface="Arial"/>
-                        </a:rPr>
-                        <a:t>Beschäftigte</a:t>
-                      </a:r>
-                    </a:p>
-                  </a:txBody>
-                  <a:tcPr>
-                    <a:solidFill>
-                      <a:srgbClr val="1F2C56"/>
-                    </a:solidFill>
-                  </a:tcPr>
-                </a:tc>
-                <a:tc>
-                  <a:txBody>
-                    <a:bodyPr/>
-                    <a:lstStyle/>
-                    <a:p>
-                      <a:r>
-                        <a:rPr sz="1100" b="1">
-                          <a:solidFill>
-                            <a:srgbClr val="FFFFFF"/>
-                          </a:solidFill>
-                          <a:latin typeface="Arial"/>
-                        </a:rPr>
-                        <a:t>Jahresumsatz</a:t>
-                      </a:r>
-                    </a:p>
-                  </a:txBody>
-                  <a:tcPr>
-                    <a:solidFill>
-                      <a:srgbClr val="1F2C56"/>
-                    </a:solidFill>
-                  </a:tcPr>
-                </a:tc>
-              </a:tr>
-              <a:tr h="384048">
-                <a:tc>
-                  <a:txBody>
-                    <a:bodyPr/>
-                    <a:lstStyle/>
-                    <a:p>
-                      <a:r>
-                        <a:rPr sz="1050">
-                          <a:solidFill>
-                            <a:srgbClr val="3D5466"/>
-                          </a:solidFill>
-                          <a:latin typeface="Arial"/>
-                        </a:rPr>
-                        <a:t>Kleine Unternehmen</a:t>
-                      </a:r>
-                    </a:p>
-                  </a:txBody>
-                  <a:tcPr/>
-                </a:tc>
-                <a:tc>
-                  <a:txBody>
-                    <a:bodyPr/>
-                    <a:lstStyle/>
-                    <a:p>
-                      <a:r>
-                        <a:rPr sz="1050">
-                          <a:solidFill>
-                            <a:srgbClr val="3D5466"/>
-                          </a:solidFill>
-                          <a:latin typeface="Arial"/>
-                        </a:rPr>
-                        <a:t>&lt; 10</a:t>
-                      </a:r>
-                    </a:p>
-                  </a:txBody>
-                  <a:tcPr/>
-                </a:tc>
-                <a:tc>
-                  <a:txBody>
-                    <a:bodyPr/>
-                    <a:lstStyle/>
-                    <a:p>
-                      <a:r>
-                        <a:rPr sz="1050">
-                          <a:solidFill>
-                            <a:srgbClr val="3D5466"/>
-                          </a:solidFill>
-                          <a:latin typeface="Arial"/>
-                        </a:rPr>
-                        <a:t>&lt; 2 Mio. EUR</a:t>
-                      </a:r>
-                    </a:p>
-                  </a:txBody>
-                  <a:tcPr/>
-                </a:tc>
-              </a:tr>
-              <a:tr h="384048">
-                <a:tc>
-                  <a:txBody>
-                    <a:bodyPr/>
-                    <a:lstStyle/>
-                    <a:p>
-                      <a:r>
-                        <a:rPr sz="1050">
-                          <a:solidFill>
-                            <a:srgbClr val="3D5466"/>
-                          </a:solidFill>
-                          <a:latin typeface="Arial"/>
-                        </a:rPr>
-                        <a:t>Mittlere Unternehmen</a:t>
-                      </a:r>
-                    </a:p>
-                  </a:txBody>
-                  <a:tcPr/>
-                </a:tc>
-                <a:tc>
-                  <a:txBody>
-                    <a:bodyPr/>
-                    <a:lstStyle/>
-                    <a:p>
-                      <a:r>
-                        <a:rPr sz="1050">
-                          <a:solidFill>
-                            <a:srgbClr val="3D5466"/>
-                          </a:solidFill>
-                          <a:latin typeface="Arial"/>
-                        </a:rPr>
-                        <a:t>10–499</a:t>
-                      </a:r>
-                    </a:p>
-                  </a:txBody>
-                  <a:tcPr/>
-                </a:tc>
-                <a:tc>
-                  <a:txBody>
-                    <a:bodyPr/>
-                    <a:lstStyle/>
-                    <a:p>
-                      <a:r>
-                        <a:rPr sz="1050">
-                          <a:solidFill>
-                            <a:srgbClr val="3D5466"/>
-                          </a:solidFill>
-                          <a:latin typeface="Arial"/>
-                        </a:rPr>
-                        <a:t>2–49,9 Mio. EUR</a:t>
-                      </a:r>
-                    </a:p>
-                  </a:txBody>
-                  <a:tcPr/>
-                </a:tc>
-              </a:tr>
-              <a:tr h="384048">
-                <a:tc>
-                  <a:txBody>
-                    <a:bodyPr/>
-                    <a:lstStyle/>
-                    <a:p>
-                      <a:r>
-                        <a:rPr sz="1050">
-                          <a:solidFill>
-                            <a:srgbClr val="3D5466"/>
-                          </a:solidFill>
-                          <a:latin typeface="Arial"/>
-                        </a:rPr>
-                        <a:t>KMU gesamt</a:t>
-                      </a:r>
-                    </a:p>
-                  </a:txBody>
-                  <a:tcPr/>
-                </a:tc>
-                <a:tc>
-                  <a:txBody>
-                    <a:bodyPr/>
-                    <a:lstStyle/>
-                    <a:p>
-                      <a:r>
-                        <a:rPr sz="1050">
-                          <a:solidFill>
-                            <a:srgbClr val="3D5466"/>
-                          </a:solidFill>
-                          <a:latin typeface="Arial"/>
-                        </a:rPr>
-                        <a:t>&lt; 500</a:t>
-                      </a:r>
-                    </a:p>
-                  </a:txBody>
-                  <a:tcPr/>
-                </a:tc>
-                <a:tc>
-                  <a:txBody>
-                    <a:bodyPr/>
-                    <a:lstStyle/>
-                    <a:p>
-                      <a:r>
-                        <a:rPr sz="1050">
-                          <a:solidFill>
-                            <a:srgbClr val="3D5466"/>
-                          </a:solidFill>
-                          <a:latin typeface="Arial"/>
-                        </a:rPr>
-                        <a:t>&lt; 50 Mio. EUR</a:t>
-                      </a:r>
-                    </a:p>
-                  </a:txBody>
-                  <a:tcPr/>
-                </a:tc>
-              </a:tr>
-            </a:tbl>
-          </a:graphicData>
-        </a:graphic>
-      </p:graphicFrame>
+      <p:pic>
+        <p:nvPicPr>
+          <p:cNvPr id="7" name="Picture 6" descr="image.png"/>
+          <p:cNvPicPr>
+            <a:picLocks noChangeAspect="1"/>
+          </p:cNvPicPr>
+          <p:nvPr/>
+        </p:nvPicPr>
+        <p:blipFill>
+          <a:blip r:embed="rId2"/>
+          <a:stretch>
+            <a:fillRect/>
+          </a:stretch>
+        </p:blipFill>
+        <p:spPr>
+          <a:xfrm>
+            <a:off x="2303489" y="1325880"/>
+            <a:ext cx="7581973" cy="4937760"/>
+          </a:xfrm>
+          <a:prstGeom prst="rect">
+            <a:avLst/>
+          </a:prstGeom>
+        </p:spPr>
+      </p:pic>
       <p:sp>
         <p:nvSpPr>
           <p:cNvPr id="8" name="Rectangle 7"/>
@@ -9932,7 +10145,7 @@
                 </a:solidFill>
                 <a:latin typeface="Consolas"/>
               </a:rPr>
-              <a:t>Übersicht</a:t>
+              <a:t>Schaubild</a:t>
             </a:r>
           </a:p>
         </p:txBody>
@@ -9970,7 +10183,7 @@
             <a:avLst/>
           </a:prstGeom>
           <a:solidFill>
-            <a:srgbClr val="FFFFFF"/>
+            <a:srgbClr val="EDEDF3"/>
           </a:solidFill>
           <a:ln>
             <a:noFill/>
@@ -10071,43 +10284,51 @@
                 </a:solidFill>
                 <a:latin typeface="Consolas"/>
               </a:rPr>
-              <a:t>M06  ·  ÜBERSICHT</a:t>
-            </a:r>
-          </a:p>
-        </p:txBody>
-      </p:sp>
-      <p:sp>
-        <p:nvSpPr>
-          <p:cNvPr id="5" name="TextBox 4"/>
-          <p:cNvSpPr txBox="1"/>
-          <p:nvPr/>
-        </p:nvSpPr>
-        <p:spPr>
-          <a:xfrm>
-            <a:off x="685800" y="502920"/>
-            <a:ext cx="10817352" cy="594360"/>
-          </a:xfrm>
-          <a:prstGeom prst="rect">
-            <a:avLst/>
-          </a:prstGeom>
-          <a:noFill/>
-        </p:spPr>
-        <p:txBody>
-          <a:bodyPr wrap="square">
-            <a:spAutoFit/>
-          </a:bodyPr>
-          <a:lstStyle/>
-          <a:p>
-            <a:pPr algn="l"/>
-            <a:r>
-              <a:rPr sz="2000" b="1" i="0">
-                <a:solidFill>
-                  <a:srgbClr val="1F2C56"/>
-                </a:solidFill>
-                <a:latin typeface="Arial"/>
-              </a:rPr>
-              <a:t>Theorie-Input 1: Was ist ein KMU? Definitionen, Typologien und volkswirtschaftliche Bedeutung</a:t>
-            </a:r>
+              <a:t>M06  ·  INHALT</a:t>
+            </a:r>
+          </a:p>
+        </p:txBody>
+      </p:sp>
+      <p:sp>
+        <p:nvSpPr>
+          <p:cNvPr id="5" name="Rectangle 4"/>
+          <p:cNvSpPr/>
+          <p:nvPr/>
+        </p:nvSpPr>
+        <p:spPr>
+          <a:xfrm>
+            <a:off x="0" y="1234440"/>
+            <a:ext cx="12188952" cy="12700"/>
+          </a:xfrm>
+          <a:prstGeom prst="rect">
+            <a:avLst/>
+          </a:prstGeom>
+          <a:solidFill>
+            <a:srgbClr val="D8DFE4"/>
+          </a:solidFill>
+          <a:ln>
+            <a:noFill/>
+          </a:ln>
+        </p:spPr>
+        <p:style>
+          <a:lnRef idx="1">
+            <a:schemeClr val="accent1"/>
+          </a:lnRef>
+          <a:fillRef idx="3">
+            <a:schemeClr val="accent1"/>
+          </a:fillRef>
+          <a:effectRef idx="2">
+            <a:schemeClr val="accent1"/>
+          </a:effectRef>
+          <a:fontRef idx="minor">
+            <a:schemeClr val="lt1"/>
+          </a:fontRef>
+        </p:style>
+        <p:txBody>
+          <a:bodyPr rtlCol="0" anchor="ctr"/>
+          <a:lstStyle/>
+          <a:p>
+            <a:pPr algn="ctr"/>
           </a:p>
         </p:txBody>
       </p:sp>
@@ -10119,8 +10340,8 @@
         </p:nvSpPr>
         <p:spPr>
           <a:xfrm>
-            <a:off x="685800" y="1143000"/>
-            <a:ext cx="10817352" cy="25400"/>
+            <a:off x="685800" y="502920"/>
+            <a:ext cx="36576" cy="658368"/>
           </a:xfrm>
           <a:prstGeom prst="rect">
             <a:avLst/>
@@ -10154,349 +10375,143 @@
           </a:p>
         </p:txBody>
       </p:sp>
-      <p:graphicFrame>
-        <p:nvGraphicFramePr>
-          <p:cNvPr id="7" name="Table 6"/>
-          <p:cNvGraphicFramePr>
-            <a:graphicFrameLocks noGrp="1"/>
-          </p:cNvGraphicFramePr>
-          <p:nvPr/>
-        </p:nvGraphicFramePr>
-        <p:xfrm>
-          <a:off x="685800" y="1417320"/>
-          <a:ext cx="10817352" cy="1536192"/>
-        </p:xfrm>
-        <a:graphic>
-          <a:graphicData uri="http://schemas.openxmlformats.org/drawingml/2006/table">
-            <a:tbl>
-              <a:tblPr firstRow="1" bandRow="1">
-                <a:tableStyleId>{5C22544A-7EE6-4342-B048-85BDC9FD1C3A}</a:tableStyleId>
-              </a:tblPr>
-              <a:tblGrid>
-                <a:gridCol w="2704338"/>
-                <a:gridCol w="2704338"/>
-                <a:gridCol w="2704338"/>
-                <a:gridCol w="2704338"/>
-              </a:tblGrid>
-              <a:tr h="384048">
-                <a:tc>
-                  <a:txBody>
-                    <a:bodyPr/>
-                    <a:lstStyle/>
-                    <a:p>
-                      <a:r>
-                        <a:rPr sz="1100" b="1">
-                          <a:solidFill>
-                            <a:srgbClr val="FFFFFF"/>
-                          </a:solidFill>
-                          <a:latin typeface="Arial"/>
-                        </a:rPr>
-                        <a:t>Kategorie</a:t>
-                      </a:r>
-                    </a:p>
-                  </a:txBody>
-                  <a:tcPr>
-                    <a:solidFill>
-                      <a:srgbClr val="1F2C56"/>
-                    </a:solidFill>
-                  </a:tcPr>
-                </a:tc>
-                <a:tc>
-                  <a:txBody>
-                    <a:bodyPr/>
-                    <a:lstStyle/>
-                    <a:p>
-                      <a:r>
-                        <a:rPr sz="1100" b="1">
-                          <a:solidFill>
-                            <a:srgbClr val="FFFFFF"/>
-                          </a:solidFill>
-                          <a:latin typeface="Arial"/>
-                        </a:rPr>
-                        <a:t>Beschäftigte</a:t>
-                      </a:r>
-                    </a:p>
-                  </a:txBody>
-                  <a:tcPr>
-                    <a:solidFill>
-                      <a:srgbClr val="1F2C56"/>
-                    </a:solidFill>
-                  </a:tcPr>
-                </a:tc>
-                <a:tc>
-                  <a:txBody>
-                    <a:bodyPr/>
-                    <a:lstStyle/>
-                    <a:p>
-                      <a:r>
-                        <a:rPr sz="1100" b="1">
-                          <a:solidFill>
-                            <a:srgbClr val="FFFFFF"/>
-                          </a:solidFill>
-                          <a:latin typeface="Arial"/>
-                        </a:rPr>
-                        <a:t>Jahresumsatz</a:t>
-                      </a:r>
-                    </a:p>
-                  </a:txBody>
-                  <a:tcPr>
-                    <a:solidFill>
-                      <a:srgbClr val="1F2C56"/>
-                    </a:solidFill>
-                  </a:tcPr>
-                </a:tc>
-                <a:tc>
-                  <a:txBody>
-                    <a:bodyPr/>
-                    <a:lstStyle/>
-                    <a:p>
-                      <a:r>
-                        <a:rPr sz="1100" b="1">
-                          <a:solidFill>
-                            <a:srgbClr val="FFFFFF"/>
-                          </a:solidFill>
-                          <a:latin typeface="Arial"/>
-                        </a:rPr>
-                        <a:t>Bilanzsumme</a:t>
-                      </a:r>
-                    </a:p>
-                  </a:txBody>
-                  <a:tcPr>
-                    <a:solidFill>
-                      <a:srgbClr val="1F2C56"/>
-                    </a:solidFill>
-                  </a:tcPr>
-                </a:tc>
-              </a:tr>
-              <a:tr h="384048">
-                <a:tc>
-                  <a:txBody>
-                    <a:bodyPr/>
-                    <a:lstStyle/>
-                    <a:p>
-                      <a:r>
-                        <a:rPr sz="1050">
-                          <a:solidFill>
-                            <a:srgbClr val="3D5466"/>
-                          </a:solidFill>
-                          <a:latin typeface="Arial"/>
-                        </a:rPr>
-                        <a:t>Kleinstunternehmen</a:t>
-                      </a:r>
-                    </a:p>
-                  </a:txBody>
-                  <a:tcPr/>
-                </a:tc>
-                <a:tc>
-                  <a:txBody>
-                    <a:bodyPr/>
-                    <a:lstStyle/>
-                    <a:p>
-                      <a:r>
-                        <a:rPr sz="1050">
-                          <a:solidFill>
-                            <a:srgbClr val="3D5466"/>
-                          </a:solidFill>
-                          <a:latin typeface="Arial"/>
-                        </a:rPr>
-                        <a:t>&lt; 10</a:t>
-                      </a:r>
-                    </a:p>
-                  </a:txBody>
-                  <a:tcPr/>
-                </a:tc>
-                <a:tc>
-                  <a:txBody>
-                    <a:bodyPr/>
-                    <a:lstStyle/>
-                    <a:p>
-                      <a:r>
-                        <a:rPr sz="1050">
-                          <a:solidFill>
-                            <a:srgbClr val="3D5466"/>
-                          </a:solidFill>
-                          <a:latin typeface="Arial"/>
-                        </a:rPr>
-                        <a:t>≤ 2 Mio. EUR</a:t>
-                      </a:r>
-                    </a:p>
-                  </a:txBody>
-                  <a:tcPr/>
-                </a:tc>
-                <a:tc>
-                  <a:txBody>
-                    <a:bodyPr/>
-                    <a:lstStyle/>
-                    <a:p>
-                      <a:r>
-                        <a:rPr sz="1050">
-                          <a:solidFill>
-                            <a:srgbClr val="3D5466"/>
-                          </a:solidFill>
-                          <a:latin typeface="Arial"/>
-                        </a:rPr>
-                        <a:t>≤ 2 Mio. EUR</a:t>
-                      </a:r>
-                    </a:p>
-                  </a:txBody>
-                  <a:tcPr/>
-                </a:tc>
-              </a:tr>
-              <a:tr h="384048">
-                <a:tc>
-                  <a:txBody>
-                    <a:bodyPr/>
-                    <a:lstStyle/>
-                    <a:p>
-                      <a:r>
-                        <a:rPr sz="1050">
-                          <a:solidFill>
-                            <a:srgbClr val="3D5466"/>
-                          </a:solidFill>
-                          <a:latin typeface="Arial"/>
-                        </a:rPr>
-                        <a:t>Kleinunternehmen</a:t>
-                      </a:r>
-                    </a:p>
-                  </a:txBody>
-                  <a:tcPr/>
-                </a:tc>
-                <a:tc>
-                  <a:txBody>
-                    <a:bodyPr/>
-                    <a:lstStyle/>
-                    <a:p>
-                      <a:r>
-                        <a:rPr sz="1050">
-                          <a:solidFill>
-                            <a:srgbClr val="3D5466"/>
-                          </a:solidFill>
-                          <a:latin typeface="Arial"/>
-                        </a:rPr>
-                        <a:t>&lt; 50</a:t>
-                      </a:r>
-                    </a:p>
-                  </a:txBody>
-                  <a:tcPr/>
-                </a:tc>
-                <a:tc>
-                  <a:txBody>
-                    <a:bodyPr/>
-                    <a:lstStyle/>
-                    <a:p>
-                      <a:r>
-                        <a:rPr sz="1050">
-                          <a:solidFill>
-                            <a:srgbClr val="3D5466"/>
-                          </a:solidFill>
-                          <a:latin typeface="Arial"/>
-                        </a:rPr>
-                        <a:t>≤ 10 Mio. EUR</a:t>
-                      </a:r>
-                    </a:p>
-                  </a:txBody>
-                  <a:tcPr/>
-                </a:tc>
-                <a:tc>
-                  <a:txBody>
-                    <a:bodyPr/>
-                    <a:lstStyle/>
-                    <a:p>
-                      <a:r>
-                        <a:rPr sz="1050">
-                          <a:solidFill>
-                            <a:srgbClr val="3D5466"/>
-                          </a:solidFill>
-                          <a:latin typeface="Arial"/>
-                        </a:rPr>
-                        <a:t>≤ 10 Mio. EUR</a:t>
-                      </a:r>
-                    </a:p>
-                  </a:txBody>
-                  <a:tcPr/>
-                </a:tc>
-              </a:tr>
-              <a:tr h="384048">
-                <a:tc>
-                  <a:txBody>
-                    <a:bodyPr/>
-                    <a:lstStyle/>
-                    <a:p>
-                      <a:r>
-                        <a:rPr sz="1050">
-                          <a:solidFill>
-                            <a:srgbClr val="3D5466"/>
-                          </a:solidFill>
-                          <a:latin typeface="Arial"/>
-                        </a:rPr>
-                        <a:t>Mittleres Unternehmen</a:t>
-                      </a:r>
-                    </a:p>
-                  </a:txBody>
-                  <a:tcPr/>
-                </a:tc>
-                <a:tc>
-                  <a:txBody>
-                    <a:bodyPr/>
-                    <a:lstStyle/>
-                    <a:p>
-                      <a:r>
-                        <a:rPr sz="1050">
-                          <a:solidFill>
-                            <a:srgbClr val="3D5466"/>
-                          </a:solidFill>
-                          <a:latin typeface="Arial"/>
-                        </a:rPr>
-                        <a:t>&lt; 250</a:t>
-                      </a:r>
-                    </a:p>
-                  </a:txBody>
-                  <a:tcPr/>
-                </a:tc>
-                <a:tc>
-                  <a:txBody>
-                    <a:bodyPr/>
-                    <a:lstStyle/>
-                    <a:p>
-                      <a:r>
-                        <a:rPr sz="1050">
-                          <a:solidFill>
-                            <a:srgbClr val="3D5466"/>
-                          </a:solidFill>
-                          <a:latin typeface="Arial"/>
-                        </a:rPr>
-                        <a:t>≤ 50 Mio. EUR</a:t>
-                      </a:r>
-                    </a:p>
-                  </a:txBody>
-                  <a:tcPr/>
-                </a:tc>
-                <a:tc>
-                  <a:txBody>
-                    <a:bodyPr/>
-                    <a:lstStyle/>
-                    <a:p>
-                      <a:r>
-                        <a:rPr sz="1050">
-                          <a:solidFill>
-                            <a:srgbClr val="3D5466"/>
-                          </a:solidFill>
-                          <a:latin typeface="Arial"/>
-                        </a:rPr>
-                        <a:t>≤ 43 Mio. EUR</a:t>
-                      </a:r>
-                    </a:p>
-                  </a:txBody>
-                  <a:tcPr/>
-                </a:tc>
-              </a:tr>
-            </a:tbl>
-          </a:graphicData>
-        </a:graphic>
-      </p:graphicFrame>
-      <p:sp>
-        <p:nvSpPr>
-          <p:cNvPr id="8" name="Rectangle 7"/>
+      <p:sp>
+        <p:nvSpPr>
+          <p:cNvPr id="7" name="TextBox 6"/>
+          <p:cNvSpPr txBox="1"/>
+          <p:nvPr/>
+        </p:nvSpPr>
+        <p:spPr>
+          <a:xfrm>
+            <a:off x="813816" y="502920"/>
+            <a:ext cx="10634472" cy="685800"/>
+          </a:xfrm>
+          <a:prstGeom prst="rect">
+            <a:avLst/>
+          </a:prstGeom>
+          <a:noFill/>
+        </p:spPr>
+        <p:txBody>
+          <a:bodyPr wrap="square">
+            <a:spAutoFit/>
+          </a:bodyPr>
+          <a:lstStyle/>
+          <a:p>
+            <a:pPr algn="l"/>
+            <a:r>
+              <a:rPr sz="2400" b="1" i="0">
+                <a:solidFill>
+                  <a:srgbClr val="1F2C56"/>
+                </a:solidFill>
+                <a:latin typeface="Arial"/>
+              </a:rPr>
+              <a:t>Vier zentrale Risikofelder inhabergeführter KMU</a:t>
+            </a:r>
+          </a:p>
+        </p:txBody>
+      </p:sp>
+      <p:sp>
+        <p:nvSpPr>
+          <p:cNvPr id="8" name="TextBox 7"/>
+          <p:cNvSpPr txBox="1"/>
+          <p:nvPr/>
+        </p:nvSpPr>
+        <p:spPr>
+          <a:xfrm>
+            <a:off x="685800" y="1417320"/>
+            <a:ext cx="10817352" cy="4892040"/>
+          </a:xfrm>
+          <a:prstGeom prst="rect">
+            <a:avLst/>
+          </a:prstGeom>
+          <a:noFill/>
+        </p:spPr>
+        <p:txBody>
+          <a:bodyPr wrap="square" anchor="ctr">
+            <a:spAutoFit/>
+          </a:bodyPr>
+          <a:lstStyle/>
+          <a:p>
+            <a:pPr marL="177800" indent="-177800">
+              <a:spcBef>
+                <a:spcPts val="600"/>
+              </a:spcBef>
+              <a:spcAft>
+                <a:spcPts val="200"/>
+              </a:spcAft>
+            </a:pPr>
+            <a:r>
+              <a:rPr sz="1200" i="1">
+                <a:solidFill>
+                  <a:srgbClr val="3D5466"/>
+                </a:solidFill>
+                <a:latin typeface="Arial"/>
+              </a:rPr>
+              <a:t>→  Die typischen KMU-Risiken stehen selten in der Bilanz – sie liegen in der Person und der Struktur.</a:t>
+            </a:r>
+          </a:p>
+          <a:p>
+            <a:pPr marL="190500" indent="-190500">
+              <a:spcBef>
+                <a:spcPts val="400"/>
+              </a:spcBef>
+              <a:spcAft>
+                <a:spcPts val="200"/>
+              </a:spcAft>
+            </a:pPr>
+            <a:r>
+              <a:rPr sz="1300">
+                <a:solidFill>
+                  <a:srgbClr val="3D5466"/>
+                </a:solidFill>
+                <a:latin typeface="Arial"/>
+              </a:rPr>
+              <a:t>▸  Inhaberabhängigkeit / Schlüsselpersonenrisiko: die Person als Single Point of Failure.</a:t>
+            </a:r>
+          </a:p>
+          <a:p>
+            <a:pPr marL="190500" indent="-190500">
+              <a:spcBef>
+                <a:spcPts val="400"/>
+              </a:spcBef>
+              <a:spcAft>
+                <a:spcPts val="200"/>
+              </a:spcAft>
+            </a:pPr>
+            <a:r>
+              <a:rPr sz="1300">
+                <a:solidFill>
+                  <a:srgbClr val="3D5466"/>
+                </a:solidFill>
+                <a:latin typeface="Arial"/>
+              </a:rPr>
+              <a:t>▸  Klumpenrisiko: Abhängigkeit von wenigen Kunden oder Lieferanten.</a:t>
+            </a:r>
+          </a:p>
+          <a:p>
+            <a:pPr marL="190500" indent="-190500">
+              <a:spcBef>
+                <a:spcPts val="400"/>
+              </a:spcBef>
+              <a:spcAft>
+                <a:spcPts val="200"/>
+              </a:spcAft>
+            </a:pPr>
+            <a:r>
+              <a:rPr sz="1300">
+                <a:solidFill>
+                  <a:srgbClr val="3D5466"/>
+                </a:solidFill>
+                <a:latin typeface="Arial"/>
+              </a:rPr>
+              <a:t>▸  Nachfolgerisiko und dünne Eigenkapitaldecke runden das Bild.</a:t>
+            </a:r>
+          </a:p>
+        </p:txBody>
+      </p:sp>
+      <p:sp>
+        <p:nvSpPr>
+          <p:cNvPr id="9" name="Rectangle 8"/>
           <p:cNvSpPr/>
           <p:nvPr/>
         </p:nvSpPr>
@@ -10539,7 +10554,7 @@
       </p:sp>
       <p:sp>
         <p:nvSpPr>
-          <p:cNvPr id="9" name="TextBox 8"/>
+          <p:cNvPr id="10" name="TextBox 9"/>
           <p:cNvSpPr txBox="1"/>
           <p:nvPr/>
         </p:nvSpPr>
@@ -10568,41 +10583,6 @@
                 <a:latin typeface="Consolas"/>
               </a:rPr>
               <a:t>FKB Campus  ·  M06</a:t>
-            </a:r>
-          </a:p>
-        </p:txBody>
-      </p:sp>
-      <p:sp>
-        <p:nvSpPr>
-          <p:cNvPr id="10" name="TextBox 9"/>
-          <p:cNvSpPr txBox="1"/>
-          <p:nvPr/>
-        </p:nvSpPr>
-        <p:spPr>
-          <a:xfrm>
-            <a:off x="7176211" y="6583680"/>
-            <a:ext cx="4326940" cy="256032"/>
-          </a:xfrm>
-          <a:prstGeom prst="rect">
-            <a:avLst/>
-          </a:prstGeom>
-          <a:noFill/>
-        </p:spPr>
-        <p:txBody>
-          <a:bodyPr wrap="none">
-            <a:spAutoFit/>
-          </a:bodyPr>
-          <a:lstStyle/>
-          <a:p>
-            <a:pPr algn="r"/>
-            <a:r>
-              <a:rPr sz="700">
-                <a:solidFill>
-                  <a:srgbClr val="A0B4D2"/>
-                </a:solidFill>
-                <a:latin typeface="Consolas"/>
-              </a:rPr>
-              <a:t>Übersicht</a:t>
             </a:r>
           </a:p>
         </p:txBody>
@@ -10640,7 +10620,7 @@
             <a:avLst/>
           </a:prstGeom>
           <a:solidFill>
-            <a:srgbClr val="EDEDF3"/>
+            <a:srgbClr val="1F2C56"/>
           </a:solidFill>
           <a:ln>
             <a:noFill/>
@@ -10670,57 +10650,14 @@
       </p:sp>
       <p:sp>
         <p:nvSpPr>
-          <p:cNvPr id="3" name="Rectangle 2"/>
-          <p:cNvSpPr/>
-          <p:nvPr/>
-        </p:nvSpPr>
-        <p:spPr>
-          <a:xfrm>
-            <a:off x="0" y="0"/>
-            <a:ext cx="12188952" cy="50292"/>
-          </a:xfrm>
-          <a:prstGeom prst="rect">
-            <a:avLst/>
-          </a:prstGeom>
-          <a:solidFill>
-            <a:srgbClr val="1F2C56"/>
-          </a:solidFill>
-          <a:ln>
-            <a:noFill/>
-          </a:ln>
-        </p:spPr>
-        <p:style>
-          <a:lnRef idx="1">
-            <a:schemeClr val="accent1"/>
-          </a:lnRef>
-          <a:fillRef idx="3">
-            <a:schemeClr val="accent1"/>
-          </a:fillRef>
-          <a:effectRef idx="2">
-            <a:schemeClr val="accent1"/>
-          </a:effectRef>
-          <a:fontRef idx="minor">
-            <a:schemeClr val="lt1"/>
-          </a:fontRef>
-        </p:style>
-        <p:txBody>
-          <a:bodyPr rtlCol="0" anchor="ctr"/>
-          <a:lstStyle/>
-          <a:p>
-            <a:pPr algn="ctr"/>
-          </a:p>
-        </p:txBody>
-      </p:sp>
-      <p:sp>
-        <p:nvSpPr>
-          <p:cNvPr id="4" name="TextBox 3"/>
+          <p:cNvPr id="3" name="TextBox 2"/>
           <p:cNvSpPr txBox="1"/>
           <p:nvPr/>
         </p:nvSpPr>
         <p:spPr>
           <a:xfrm>
-            <a:off x="685800" y="109728"/>
-            <a:ext cx="10817352" cy="228600"/>
+            <a:off x="685800" y="2377440"/>
+            <a:ext cx="10817352" cy="365760"/>
           </a:xfrm>
           <a:prstGeom prst="rect">
             <a:avLst/>
@@ -10735,70 +10672,27 @@
           <a:p>
             <a:pPr algn="l"/>
             <a:r>
-              <a:rPr sz="750">
-                <a:solidFill>
-                  <a:srgbClr val="78808C"/>
+              <a:rPr sz="1200">
+                <a:solidFill>
+                  <a:srgbClr val="D9C089"/>
                 </a:solidFill>
                 <a:latin typeface="Consolas"/>
               </a:rPr>
-              <a:t>M06  ·  INHALT</a:t>
-            </a:r>
-          </a:p>
-        </p:txBody>
-      </p:sp>
-      <p:sp>
-        <p:nvSpPr>
-          <p:cNvPr id="5" name="Rectangle 4"/>
+              <a:t>WERKZEUG</a:t>
+            </a:r>
+          </a:p>
+        </p:txBody>
+      </p:sp>
+      <p:sp>
+        <p:nvSpPr>
+          <p:cNvPr id="4" name="Rectangle 3"/>
           <p:cNvSpPr/>
           <p:nvPr/>
         </p:nvSpPr>
         <p:spPr>
           <a:xfrm>
-            <a:off x="0" y="1234440"/>
-            <a:ext cx="12188952" cy="12700"/>
-          </a:xfrm>
-          <a:prstGeom prst="rect">
-            <a:avLst/>
-          </a:prstGeom>
-          <a:solidFill>
-            <a:srgbClr val="D8DFE4"/>
-          </a:solidFill>
-          <a:ln>
-            <a:noFill/>
-          </a:ln>
-        </p:spPr>
-        <p:style>
-          <a:lnRef idx="1">
-            <a:schemeClr val="accent1"/>
-          </a:lnRef>
-          <a:fillRef idx="3">
-            <a:schemeClr val="accent1"/>
-          </a:fillRef>
-          <a:effectRef idx="2">
-            <a:schemeClr val="accent1"/>
-          </a:effectRef>
-          <a:fontRef idx="minor">
-            <a:schemeClr val="lt1"/>
-          </a:fontRef>
-        </p:style>
-        <p:txBody>
-          <a:bodyPr rtlCol="0" anchor="ctr"/>
-          <a:lstStyle/>
-          <a:p>
-            <a:pPr algn="ctr"/>
-          </a:p>
-        </p:txBody>
-      </p:sp>
-      <p:sp>
-        <p:nvSpPr>
-          <p:cNvPr id="6" name="Rectangle 5"/>
-          <p:cNvSpPr/>
-          <p:nvPr/>
-        </p:nvSpPr>
-        <p:spPr>
-          <a:xfrm>
-            <a:off x="685800" y="502920"/>
-            <a:ext cx="36576" cy="658368"/>
+            <a:off x="685800" y="2788920"/>
+            <a:ext cx="548640" cy="38100"/>
           </a:xfrm>
           <a:prstGeom prst="rect">
             <a:avLst/>
@@ -10834,14 +10728,14 @@
       </p:sp>
       <p:sp>
         <p:nvSpPr>
-          <p:cNvPr id="7" name="TextBox 6"/>
+          <p:cNvPr id="5" name="TextBox 4"/>
           <p:cNvSpPr txBox="1"/>
           <p:nvPr/>
         </p:nvSpPr>
         <p:spPr>
           <a:xfrm>
-            <a:off x="813816" y="502920"/>
-            <a:ext cx="10634472" cy="685800"/>
+            <a:off x="685800" y="3017520"/>
+            <a:ext cx="10817352" cy="1463040"/>
           </a:xfrm>
           <a:prstGeom prst="rect">
             <a:avLst/>
@@ -10856,27 +10750,27 @@
           <a:p>
             <a:pPr algn="l"/>
             <a:r>
-              <a:rPr sz="2400" b="1" i="0">
-                <a:solidFill>
-                  <a:srgbClr val="1F2C56"/>
+              <a:rPr sz="4000" b="1" i="0">
+                <a:solidFill>
+                  <a:srgbClr val="FFFFFF"/>
                 </a:solidFill>
                 <a:latin typeface="Arial"/>
               </a:rPr>
-              <a:t>Theorie-Input 2: Finanzierungsmuster und typische Risikofelder</a:t>
-            </a:r>
-          </a:p>
-        </p:txBody>
-      </p:sp>
-      <p:sp>
-        <p:nvSpPr>
-          <p:cNvPr id="8" name="TextBox 7"/>
+              <a:t>Einstieg in die Branchenanalyse</a:t>
+            </a:r>
+          </a:p>
+        </p:txBody>
+      </p:sp>
+      <p:sp>
+        <p:nvSpPr>
+          <p:cNvPr id="6" name="TextBox 5"/>
           <p:cNvSpPr txBox="1"/>
           <p:nvPr/>
         </p:nvSpPr>
         <p:spPr>
           <a:xfrm>
-            <a:off x="685800" y="1417320"/>
-            <a:ext cx="10817352" cy="4892040"/>
+            <a:off x="685800" y="4480560"/>
+            <a:ext cx="8653881" cy="1280160"/>
           </a:xfrm>
           <a:prstGeom prst="rect">
             <a:avLst/>
@@ -10889,288 +10783,29 @@
           </a:bodyPr>
           <a:lstStyle/>
           <a:p>
-            <a:pPr>
-              <a:spcBef>
-                <a:spcPts val="1000"/>
-              </a:spcBef>
-              <a:spcAft>
-                <a:spcPts val="200"/>
-              </a:spcAft>
-            </a:pPr>
-            <a:r>
-              <a:rPr sz="800" b="1">
-                <a:solidFill>
-                  <a:srgbClr val="78808C"/>
-                </a:solidFill>
-                <a:latin typeface="Consolas"/>
-              </a:rPr>
-              <a:t>FINANZIERUNGSSTRUKTUR: KMU VS. GROSSUNTERNEHMEN</a:t>
-            </a:r>
-          </a:p>
-          <a:p>
-            <a:pPr marL="190500" indent="-190500">
-              <a:spcBef>
-                <a:spcPts val="400"/>
-              </a:spcBef>
-              <a:spcAft>
-                <a:spcPts val="200"/>
-              </a:spcAft>
-            </a:pPr>
-            <a:r>
-              <a:rPr sz="1300">
-                <a:solidFill>
-                  <a:srgbClr val="3D5466"/>
+            <a:pPr algn="l"/>
+            <a:r>
+              <a:rPr sz="1600" b="0" i="0">
+                <a:solidFill>
+                  <a:srgbClr val="C8D2E6"/>
                 </a:solidFill>
                 <a:latin typeface="Arial"/>
               </a:rPr>
-              <a:t>▸  Die Finanzierungsstruktur von KMU unterscheidet sich strukturell von der großer Unternehmen. Diese Unterschiede zu kennen, ist die Grundlage jeder fundierten Kreditanalyse.</a:t>
-            </a:r>
-          </a:p>
-          <a:p>
-            <a:pPr marL="190500" indent="-190500">
-              <a:spcBef>
-                <a:spcPts val="400"/>
-              </a:spcBef>
-              <a:spcAft>
-                <a:spcPts val="200"/>
-              </a:spcAft>
-            </a:pPr>
-            <a:r>
-              <a:rPr sz="1300">
-                <a:solidFill>
-                  <a:srgbClr val="3D5466"/>
-                </a:solidFill>
-                <a:latin typeface="Arial"/>
-              </a:rPr>
-              <a:t>▸  Eigenkapitalquoten:</a:t>
-            </a:r>
-          </a:p>
-          <a:p>
-            <a:pPr marL="190500" indent="-190500">
-              <a:spcBef>
-                <a:spcPts val="400"/>
-              </a:spcBef>
-              <a:spcAft>
-                <a:spcPts val="200"/>
-              </a:spcAft>
-            </a:pPr>
-            <a:r>
-              <a:rPr sz="1300">
-                <a:solidFill>
-                  <a:srgbClr val="3D5466"/>
-                </a:solidFill>
-                <a:latin typeface="Arial"/>
-              </a:rPr>
-              <a:t>▸  Steuerliche Optimierung: KMU-Inhaber entnehmen Gewinne für den privaten Lebensunterhalt, statt sie im Betrieb zu thesaurieren</a:t>
-            </a:r>
-          </a:p>
-          <a:p>
-            <a:pPr marL="190500" indent="-190500">
-              <a:spcBef>
-                <a:spcPts val="400"/>
-              </a:spcBef>
-              <a:spcAft>
-                <a:spcPts val="200"/>
-              </a:spcAft>
-            </a:pPr>
-            <a:r>
-              <a:rPr sz="1300">
-                <a:solidFill>
-                  <a:srgbClr val="3D5466"/>
-                </a:solidFill>
-                <a:latin typeface="Arial"/>
-              </a:rPr>
-              <a:t>▸  Verflechtung Privat/Betrieb: Privatliegenschaften des Inhabers erscheinen nicht in der Bilanz, sind aber reale Sicherheiten</a:t>
-            </a:r>
-          </a:p>
-          <a:p>
-            <a:pPr marL="190500" indent="-190500">
-              <a:spcBef>
-                <a:spcPts val="400"/>
-              </a:spcBef>
-              <a:spcAft>
-                <a:spcPts val="200"/>
-              </a:spcAft>
-            </a:pPr>
-            <a:r>
-              <a:rPr sz="1300">
-                <a:solidFill>
-                  <a:srgbClr val="3D5466"/>
-                </a:solidFill>
-                <a:latin typeface="Arial"/>
-              </a:rPr>
-              <a:t>▸  Vorsichtige Bilanzpolitik: Viele KMU nutzen steuerliche Abschreibungsmöglichkeiten maximal – die Bilanz ist dadurch "schlechter" als die wirtschaftliche Realität</a:t>
-            </a:r>
-          </a:p>
-          <a:p>
-            <a:pPr marL="190500" indent="-190500">
-              <a:spcBef>
-                <a:spcPts val="400"/>
-              </a:spcBef>
-              <a:spcAft>
-                <a:spcPts val="200"/>
-              </a:spcAft>
-            </a:pPr>
-            <a:r>
-              <a:rPr sz="1300">
-                <a:solidFill>
-                  <a:srgbClr val="3D5466"/>
-                </a:solidFill>
-                <a:latin typeface="Arial"/>
-              </a:rPr>
-              <a:t>▸  Finanzierungsquellen:</a:t>
-            </a:r>
-          </a:p>
-          <a:p>
-            <a:pPr marL="190500" indent="-190500">
-              <a:spcBef>
-                <a:spcPts val="400"/>
-              </a:spcBef>
-              <a:spcAft>
-                <a:spcPts val="200"/>
-              </a:spcAft>
-            </a:pPr>
-            <a:r>
-              <a:rPr sz="1300">
-                <a:solidFill>
-                  <a:srgbClr val="3D5466"/>
-                </a:solidFill>
-                <a:latin typeface="Arial"/>
-              </a:rPr>
-              <a:t>▸  KMU finanzieren sich typischerweise durch drei Hauptquellen:</a:t>
-            </a:r>
-          </a:p>
-          <a:p>
-            <a:pPr marL="190500" indent="-190500">
-              <a:spcBef>
-                <a:spcPts val="400"/>
-              </a:spcBef>
-              <a:spcAft>
-                <a:spcPts val="200"/>
-              </a:spcAft>
-            </a:pPr>
-            <a:r>
-              <a:rPr sz="1300">
-                <a:solidFill>
-                  <a:srgbClr val="3D5466"/>
-                </a:solidFill>
-                <a:latin typeface="Arial"/>
-              </a:rPr>
-              <a:t>▸  Innenfinanzierung (Thesaurierung): Gewinne verbleiben im Unternehmen – bei inhabergeführten Betrieben stark limitiert durch private Entnahmen</a:t>
-            </a:r>
-          </a:p>
-          <a:p>
-            <a:pPr marL="190500" indent="-190500">
-              <a:spcBef>
-                <a:spcPts val="400"/>
-              </a:spcBef>
-              <a:spcAft>
-                <a:spcPts val="200"/>
-              </a:spcAft>
-            </a:pPr>
-            <a:r>
-              <a:rPr sz="1300">
-                <a:solidFill>
-                  <a:srgbClr val="3D5466"/>
-                </a:solidFill>
-                <a:latin typeface="Arial"/>
-              </a:rPr>
-              <a:t>▸  Bankkredite (Außenfinanzierung): Investitionskredite, Kontokorrentlinien, Avale – dominante Finanzierungsform</a:t>
-            </a:r>
-          </a:p>
-          <a:p>
-            <a:pPr marL="190500" indent="-190500">
-              <a:spcBef>
-                <a:spcPts val="400"/>
-              </a:spcBef>
-              <a:spcAft>
-                <a:spcPts val="200"/>
-              </a:spcAft>
-            </a:pPr>
-            <a:r>
-              <a:rPr sz="1300">
-                <a:solidFill>
-                  <a:srgbClr val="3D5466"/>
-                </a:solidFill>
-                <a:latin typeface="Arial"/>
-              </a:rPr>
-              <a:t>▸  Öffentliche Förderprogramme: KfW-Unternehmenskredit, ERP-Kapital für Gründung, Landesförderprogramme – häufig günstiger als Hausbankkonditionen, oft nicht ausgeschöpft</a:t>
-            </a:r>
-          </a:p>
-          <a:p>
-            <a:pPr marL="190500" indent="-190500">
-              <a:spcBef>
-                <a:spcPts val="400"/>
-              </a:spcBef>
-              <a:spcAft>
-                <a:spcPts val="200"/>
-              </a:spcAft>
-            </a:pPr>
-            <a:r>
-              <a:rPr sz="1300">
-                <a:solidFill>
-                  <a:srgbClr val="3D5466"/>
-                </a:solidFill>
-                <a:latin typeface="Arial"/>
-              </a:rPr>
-              <a:t>▸  Die drei meistgenutzten Förderprogramme in der süddeutschen VR-Praxis:</a:t>
-            </a:r>
-          </a:p>
-        </p:txBody>
-      </p:sp>
-      <p:sp>
-        <p:nvSpPr>
-          <p:cNvPr id="9" name="Rectangle 8"/>
-          <p:cNvSpPr/>
-          <p:nvPr/>
-        </p:nvSpPr>
-        <p:spPr>
-          <a:xfrm>
-            <a:off x="0" y="6510528"/>
-            <a:ext cx="12188952" cy="347472"/>
-          </a:xfrm>
-          <a:prstGeom prst="rect">
-            <a:avLst/>
-          </a:prstGeom>
-          <a:solidFill>
-            <a:srgbClr val="0A1937"/>
-          </a:solidFill>
-          <a:ln>
-            <a:noFill/>
-          </a:ln>
-        </p:spPr>
-        <p:style>
-          <a:lnRef idx="1">
-            <a:schemeClr val="accent1"/>
-          </a:lnRef>
-          <a:fillRef idx="3">
-            <a:schemeClr val="accent1"/>
-          </a:fillRef>
-          <a:effectRef idx="2">
-            <a:schemeClr val="accent1"/>
-          </a:effectRef>
-          <a:fontRef idx="minor">
-            <a:schemeClr val="lt1"/>
-          </a:fontRef>
-        </p:style>
-        <p:txBody>
-          <a:bodyPr rtlCol="0" anchor="ctr"/>
-          <a:lstStyle/>
-          <a:p>
-            <a:pPr algn="ctr"/>
-          </a:p>
-        </p:txBody>
-      </p:sp>
-      <p:sp>
-        <p:nvSpPr>
-          <p:cNvPr id="10" name="TextBox 9"/>
+              <a:t>Zahlen in den Branchenkontext stellen – mit dem 5-Fragen-Schema.</a:t>
+            </a:r>
+          </a:p>
+        </p:txBody>
+      </p:sp>
+      <p:sp>
+        <p:nvSpPr>
+          <p:cNvPr id="7" name="TextBox 6"/>
           <p:cNvSpPr txBox="1"/>
           <p:nvPr/>
         </p:nvSpPr>
         <p:spPr>
           <a:xfrm>
-            <a:off x="685800" y="6583680"/>
-            <a:ext cx="6490411" cy="256032"/>
+            <a:off x="685800" y="6355080"/>
+            <a:ext cx="10817352" cy="274320"/>
           </a:xfrm>
           <a:prstGeom prst="rect">
             <a:avLst/>
@@ -11187,7 +10822,7 @@
             <a:r>
               <a:rPr sz="700">
                 <a:solidFill>
-                  <a:srgbClr val="A0B4D2"/>
+                  <a:srgbClr val="8CA0C3"/>
                 </a:solidFill>
                 <a:latin typeface="Consolas"/>
               </a:rPr>
